--- a/vi/files/slides/Session_5_VN.pptx
+++ b/vi/files/slides/Session_5_VN.pptx
@@ -11899,7 +11899,7 @@
                 <a:latin typeface="Segoe UI"/>
                 <a:cs typeface="Segoe UI"/>
               </a:rPr>
-              <a:t>5.2 [Cấp độ 2] Làm quen bộ dữ liệu FLUID-ICU  |  25 phút</a:t>
+              <a:t>5.2 Làm quen bộ dữ liệu FLUID-ICU  |  25 phút</a:t>
             </a:r>
           </a:p>
         </p:txBody>
@@ -21504,7 +21504,7 @@
                 <a:latin typeface="Segoe UI"/>
                 <a:cs typeface="Segoe UI"/>
               </a:rPr>
-              <a:t>5.4 [Cấp độ 2] Mô tả bộ dữ liệu khóa học  |  25 phút</a:t>
+              <a:t>5.4 Mô tả bộ dữ liệu khóa học  |  25 phút</a:t>
             </a:r>
           </a:p>
         </p:txBody>

--- a/vi/files/slides/Session_5_VN.pptx
+++ b/vi/files/slides/Session_5_VN.pptx
@@ -737,7 +737,7 @@
           <a:p>
             <a:r>
               <a:rPr lang="en-US" sz="1400" b="0" dirty="0"/>
-              <a:t>Chào mừng đến Cuối tuần 3. Buổi 1-4 đã đặt câu hỏi, tìm bằng chứng và chọn thiết kế. Cuối tuần này chúng ta ĐO LƯỜNG và PHÂN TÍCH: hôm nay (Buổi 5) là dữ liệu, ngày mai (Buổi 6) là phân tích.</a:t>
+              <a:t>Chào mừng đến Tuần 5. Buổi 1-4 đã đặt câu hỏi, tìm bằng chứng và chọn thiết kế. Trong hai thứ Bảy này chúng ta ĐO LƯỜNG và PHÂN TÍCH: hôm nay (Buổi 5) là dữ liệu, thứ Bảy tuần sau (Buổi 6) là phân tích.</a:t>
             </a:r>
           </a:p>
           <a:p>
@@ -749,7 +749,7 @@
           <a:p>
             <a:r>
               <a:rPr lang="en-US" sz="1400" b="0" dirty="0"/>
-              <a:t>Mới trong cuối tuần này: bộ dữ liệu khóa học FLUID-ICU, một đoàn hệ thực tế (mô phỏng) gồm khoảng 600 người lớn bị nhiễm khuẩn huyết. Anh chị sẽ thấy dữ liệu được làm sạch và mô tả trực tiếp bằng R, và mỗi nhóm nhận một câu hỏi nghiên cứu cùng một gói kết quả, sẽ trở thành bản thảo bài báo ở Cuối tuần 4.</a:t>
+              <a:t>Mới trong Tuần 5-6: bộ dữ liệu khóa học FLUID-ICU, một đoàn hệ thực tế (mô phỏng) gồm khoảng 600 người lớn bị nhiễm khuẩn huyết. Anh chị sẽ thấy dữ liệu được làm sạch và mô tả trực tiếp bằng R, và mỗi nhóm nhận một câu hỏi nghiên cứu cùng một gói kết quả, sẽ trở thành bản thảo bài báo ở Tuần 7-8.</a:t>
             </a:r>
           </a:p>
           <a:p>
@@ -1130,7 +1130,7 @@
           <a:p>
             <a:r>
               <a:rPr lang="en-US" sz="1400" b="0" dirty="0"/>
-              <a:t>Ngày mai (Buổi 6, phần 6.4) chúng ta sẽ gọi tên các cơ chế (MCAR, MAR, MNAR) và xem ý tưởng đa phép gán. Nhưng cách xử lý thống kê luôn kém hơn phòng ngừa.</a:t>
+              <a:t>Thứ Bảy tuần sau (Buổi 6, phần 6.4) chúng ta sẽ gọi tên các cơ chế (MCAR, MAR, MNAR) và xem ý tưởng đa phép gán. Nhưng cách xử lý thống kê luôn kém hơn phòng ngừa.</a:t>
             </a:r>
           </a:p>
           <a:p>
@@ -2141,7 +2141,7 @@
           <a:p>
             <a:r>
               <a:rPr lang="en-US" sz="1400" b="0" dirty="0"/>
-              <a:t>Phần còn lại sau làm sạch là dữ liệu thiếu THẬT: lactat 93 trên 620 (15.0%), mọi biến khác 1% hoặc ít hơn. Các ô trống này là chủ đề của phần 6.4 ngày mai.</a:t>
+              <a:t>Phần còn lại sau làm sạch là dữ liệu thiếu THẬT: lactat 93 trên 620 (15.0%), mọi biến khác 1% hoặc ít hơn. Các ô trống này là chủ đề của phần 6.4 thứ Bảy tuần sau.</a:t>
             </a:r>
           </a:p>
           <a:p>
@@ -2276,7 +2276,7 @@
           <a:p>
             <a:r>
               <a:rPr lang="en-US" sz="1400" b="0" dirty="0"/>
-              <a:t>Phân công câu hỏi ngay bây giờ (hoặc xác nhận phân công đã làm trước cuối tuần).</a:t>
+              <a:t>Phân công câu hỏi ngay bây giờ (hoặc xác nhận phân công đã làm trước buổi học).</a:t>
             </a:r>
           </a:p>
         </p:txBody>
@@ -4676,7 +4676,7 @@
           <a:p>
             <a:r>
               <a:rPr lang="en-US" sz="1400" b="0" dirty="0"/>
-              <a:t>Ngày mai (Buổi 6) các nhóm bổ sung cỡ mẫu, kế hoạch phân tích và kế hoạch xử lý dữ liệu thiếu.</a:t>
+              <a:t>Thứ Bảy tuần sau (Buổi 6) các nhóm bổ sung cỡ mẫu, kế hoạch phân tích và kế hoạch xử lý dữ liệu thiếu.</a:t>
             </a:r>
           </a:p>
         </p:txBody>
@@ -5003,7 +5003,7 @@
           <a:p>
             <a:r>
               <a:rPr lang="en-US" sz="1400" b="0" dirty="0"/>
-              <a:t>Ngày mai (Buổi 6): từ mẫu đến câu trả lời: khoảng tin cậy, giá trị p, kiểm định, hồi quy, sống còn và dữ liệu thiếu, tất cả chạy trực tiếp trên FLUID-ICU.</a:t>
+              <a:t>Thứ Bảy tuần sau (Buổi 6): từ mẫu đến câu trả lời: khoảng tin cậy, giá trị p, kiểm định, hồi quy, sống còn và dữ liệu thiếu, tất cả chạy trực tiếp trên FLUID-ICU.</a:t>
             </a:r>
           </a:p>
         </p:txBody>
@@ -5102,7 +5102,7 @@
           <a:p>
             <a:r>
               <a:rPr lang="en-US" sz="1400" b="0" dirty="0"/>
-              <a:t>Cảm ơn cả lớp: hôm nay có nhiều từ mới; ngày mai xây dựng trực tiếp trên đó.</a:t>
+              <a:t>Cảm ơn cả lớp: hôm nay có nhiều từ mới; thứ Bảy tuần sau xây dựng trực tiếp trên đó.</a:t>
             </a:r>
           </a:p>
         </p:txBody>
@@ -9256,7 +9256,7 @@
                 <a:latin typeface="Segoe UI"/>
                 <a:cs typeface="Segoe UI"/>
               </a:rPr>
-              <a:t>Cuối tuần 3 · Thứ Bảy</a:t>
+              <a:t>Tuần 5 · Thứ Bảy</a:t>
             </a:r>
           </a:p>
           <a:p>
@@ -15499,7 +15499,7 @@
                 <a:latin typeface="Segoe UI"/>
                 <a:cs typeface="Segoe UI"/>
               </a:rPr>
-              <a:t>Mỗi nhóm trả lời một câu hỏi và viết thành bản thảo ở Cuối tuần 4.</a:t>
+              <a:t>Mỗi nhóm trả lời một câu hỏi và viết thành bản thảo ở Tuần 7-8.</a:t>
             </a:r>
           </a:p>
         </p:txBody>
@@ -27563,7 +27563,7 @@
                 <a:latin typeface="Segoe UI"/>
                 <a:cs typeface="Segoe UI"/>
               </a:rPr>
-              <a:t>Ngày mai: Buổi 6</a:t>
+              <a:t>Thứ Bảy tuần sau: Buổi 6</a:t>
             </a:r>
           </a:p>
           <a:p>

--- a/vi/files/slides/Session_5_VN.pptx
+++ b/vi/files/slides/Session_5_VN.pptx
@@ -1106,7 +1106,7 @@
           <a:p>
             <a:r>
               <a:rPr lang="en-US" sz="1400" b="0" dirty="0"/>
-              <a:t>Ý chính: dữ liệu bị thiếu không chỉ làm giảm số bệnh nhân; nó có thể cho câu trả lời SAI.</a:t>
+              <a:t>Ý chính: dữ liệu bị thiếu làm giảm số bệnh nhân, và còn có thể cho câu trả lời SAI.</a:t>
             </a:r>
           </a:p>
           <a:p>
@@ -1457,7 +1457,7 @@
           <a:p>
             <a:r>
               <a:rPr lang="en-US" sz="1400" b="0" dirty="0"/>
-              <a:t>Thông điệp chính: từ giờ anh chị không chỉ đọc nghiên cứu của người khác: nhóm sẽ phân tích và viết bài từ một nghiên cứu thực tế. FLUID-ICU là dữ liệu MÔ PHỎNG: do máy tính tạo ra, không có bệnh nhân, bệnh viện hay quốc gia thật. Nhưng nó vận hành như dữ liệu ICU thật, kể cả các vấn đề của nó.</a:t>
+              <a:t>Thông điệp chính: từ giờ, ngoài việc đọc nghiên cứu của người khác, nhóm sẽ phân tích và viết bài từ một nghiên cứu thực tế. FLUID-ICU là dữ liệu MÔ PHỎNG: do máy tính tạo ra, không có bệnh nhân, bệnh viện hay quốc gia thật. Nhưng nó vận hành như dữ liệu ICU thật, kể cả các vấn đề của nó.</a:t>
             </a:r>
           </a:p>
           <a:p>
@@ -1901,7 +1901,7 @@
           <a:p>
             <a:r>
               <a:rPr lang="en-US" sz="1400" b="0" dirty="0"/>
-              <a:t>Cho thấy: dữ liệu thô đọc dưới dạng văn bản; 623 dòng -&gt; 620 sau khi loại 3 bản trùng; bảng các cách viết giới tính trước và sau; ba định dạng ngày; trung vị lactat theo ICU (ICU C cao gấp khoảng 9 lần) và phép đổi đơn vị; giá trị vô lý đặt là thiếu; bước kiểm tra cuối cùng cho thấy tệp đã làm sạch giống hệt tệp tham chiếu.</a:t>
+              <a:t>Cho thấy: dữ liệu thô đọc dưới dạng văn bản; 623 dòng giảm còn 620 sau khi loại 3 bản trùng; bảng các cách viết giới tính trước và sau; ba định dạng ngày; trung vị lactat theo ICU (ICU C cao gấp khoảng 9 lần) và phép đổi đơn vị; giá trị vô lý đặt là thiếu; bước kiểm tra cuối cùng cho thấy tệp đã làm sạch giống hệt tệp tham chiếu.</a:t>
             </a:r>
           </a:p>
           <a:p>
@@ -3239,7 +3239,7 @@
           <a:p>
             <a:r>
               <a:rPr lang="en-US" sz="1400" b="0" dirty="0"/>
-              <a:t>Thông điệp chính: phần lớn vấn đề trong nghiên cứu lâm sàng không nằm ở khâu phân tích mà nằm ở dữ liệu. Nhà thống kê không thể sửa một ô bị bỏ trống, một đơn vị bị thiếu hay một giá trị không thể có sau sáu tháng.</a:t>
+              <a:t>Thông điệp chính: phần lớn vấn đề trong nghiên cứu lâm sàng nằm ở dữ liệu hơn là ở khâu phân tích. Nhà thống kê không thể sửa một ô bị bỏ trống, một đơn vị bị thiếu hay một giá trị không thể có sau sáu tháng.</a:t>
             </a:r>
           </a:p>
           <a:p>
@@ -3338,7 +3338,7 @@
           <a:p>
             <a:r>
               <a:rPr lang="en-US" sz="1400" b="0" dirty="0"/>
-              <a:t>Ý chính: bốn loại biểu đồ bao phủ phần lớn nhu cầu mô tả dữ liệu. (Đường cong sống còn - Kaplan-Meier - được giới thiệu ở Buổi 6, khi phân tích kết cục thời gian đến sự kiện.)</a:t>
+              <a:t>Ý chính: bốn loại biểu đồ bao phủ phần lớn nhu cầu mô tả dữ liệu. Đường cong sống còn (Kaplan-Meier) được giới thiệu ở Buổi 6, khi phân tích kết cục thời gian đến sự kiện.</a:t>
             </a:r>
           </a:p>
           <a:p>
@@ -3923,7 +3923,7 @@
           <a:p>
             <a:r>
               <a:rPr lang="en-US" sz="1400" b="0" dirty="0"/>
-              <a:t>Cho thấy: hình dạng của tuổi (gần đối xứng -&gt; trung bình, SD) so với lactat và thời gian nằm ICU (lệch phải -&gt; trung vị, IQR); Bảng 1 theo nhóm cân bằng dịch với các cột chung, âm (n = 245) và dương (n = 373) và số thiếu mỗi biến; biểu đồ tần suất cân bằng dịch, biểu đồ hộp SOFA theo nhóm, biểu đồ cột nguồn nhiễm khuẩn đã sắp xếp.</a:t>
+              <a:t>Cho thấy: hình dạng của tuổi (gần đối xứng, nên dùng trung bình và SD) so với lactat và thời gian nằm ICU (lệch phải, nên dùng trung vị và IQR); Bảng 1 theo nhóm cân bằng dịch với các cột chung, âm (n = 245) và dương (n = 373) và số thiếu mỗi biến; biểu đồ tần suất cân bằng dịch, biểu đồ hộp SOFA theo nhóm, biểu đồ cột nguồn nhiễm khuẩn đã sắp xếp.</a:t>
             </a:r>
           </a:p>
           <a:p>
@@ -4442,7 +4442,7 @@
           <a:p>
             <a:r>
               <a:rPr lang="en-US" sz="1400" b="0" dirty="0"/>
-              <a:t>Thời gian đến sự kiện (góc trên trái) là loại đặc biệt: kết hợp BAO LÂU (thời gian đến tử vong) và CÓ XẢY RA KHÔNG (tử vong hay bị kiểm duyệt - censored - tại ngày 28). Chỉ cần nhắc qua; chúng ta gặp lại nó với mô hình Cox ở phần 6.3.</a:t>
+              <a:t>Thời gian đến sự kiện (góc trên trái) là loại đặc biệt: kết hợp BAO LÂU (thời gian đến tử vong) và CÓ XẢY RA KHÔNG (tử vong hay bị kiểm duyệt (censored) tại ngày 28). Chỉ cần nhắc qua; chúng ta gặp lại nó với mô hình Cox ở phần 6.3.</a:t>
             </a:r>
           </a:p>
           <a:p>
@@ -5498,7 +5498,7 @@
           <a:p>
             <a:r>
               <a:rPr lang="en-US" sz="1400" b="0" dirty="0"/>
-              <a:t>Slide bản quyền - để trên màn hình khi học viên ra về.</a:t>
+              <a:t>Slide bản quyền. Để trên màn hình khi học viên ra về.</a:t>
             </a:r>
           </a:p>
         </p:txBody>
@@ -15033,7 +15033,7 @@
                 <a:latin typeface="Segoe UI"/>
                 <a:cs typeface="Segoe UI"/>
               </a:rPr>
-              <a:t>Giá trị vô lý -&gt;</a:t>
+              <a:t>Giá trị vô lý →</a:t>
             </a:r>
           </a:p>
           <a:p>
@@ -19143,7 +19143,7 @@
                 <a:latin typeface="Segoe UI"/>
                 <a:cs typeface="Segoe UI"/>
               </a:rPr>
-              <a:t>Hầu hết số đo lâm sàng tập trung quanh một giá trị điển hình hoặc có đuôi dài - hãy kiểm tra.</a:t>
+              <a:t>Hầu hết số đo lâm sàng tập trung quanh một giá trị điển hình hoặc có đuôi dài. Hãy kiểm tra.</a:t>
             </a:r>
           </a:p>
         </p:txBody>
@@ -27898,7 +27898,7 @@
                 <a:latin typeface="Segoe UI"/>
                 <a:cs typeface="Segoe UI"/>
               </a:rPr>
-              <a:t>Trang bổ sung — Buổi 5</a:t>
+              <a:t>Trang bổ sung: Buổi 5</a:t>
             </a:r>
           </a:p>
         </p:txBody>

--- a/vi/files/slides/Session_5_VN.pptx
+++ b/vi/files/slides/Session_5_VN.pptx
@@ -9185,8 +9185,8 @@
                 <a:solidFill>
                   <a:srgbClr val="0D7377"/>
                 </a:solidFill>
-                <a:latin typeface="Segoe UI"/>
-                <a:cs typeface="Segoe UI"/>
+                <a:latin typeface="Arial"/>
+                <a:cs typeface="Arial"/>
               </a:rPr>
               <a:t>Buổi 5 · Dữ liệu: thu thập tốt, mô tả trung thực</a:t>
             </a:r>
@@ -9253,8 +9253,8 @@
                 <a:solidFill>
                   <a:srgbClr val="0070C0"/>
                 </a:solidFill>
-                <a:latin typeface="Segoe UI"/>
-                <a:cs typeface="Segoe UI"/>
+                <a:latin typeface="Arial"/>
+                <a:cs typeface="Arial"/>
               </a:rPr>
               <a:t>Tuần 5 · Thứ Bảy</a:t>
             </a:r>
@@ -9278,8 +9278,8 @@
                 <a:solidFill>
                   <a:srgbClr val="000000"/>
                 </a:solidFill>
-                <a:latin typeface="Segoe UI"/>
-                <a:cs typeface="Segoe UI"/>
+                <a:latin typeface="Arial"/>
+                <a:cs typeface="Arial"/>
               </a:rPr>
               <a:t>Câu hỏi ôn tập Buổi 3-4 (10 phút)</a:t>
             </a:r>
@@ -9297,8 +9297,8 @@
                 <a:solidFill>
                   <a:srgbClr val="000000"/>
                 </a:solidFill>
-                <a:latin typeface="Segoe UI"/>
-                <a:cs typeface="Segoe UI"/>
+                <a:latin typeface="Arial"/>
+                <a:cs typeface="Arial"/>
               </a:rPr>
               <a:t>5.1 Dữ liệu tốt từ khâu thiết kế: biến số, CRF, từ điển dữ liệu, kiểm tra, quản lý dữ liệu</a:t>
             </a:r>
@@ -9316,8 +9316,8 @@
                 <a:solidFill>
                   <a:srgbClr val="000000"/>
                 </a:solidFill>
-                <a:latin typeface="Segoe UI"/>
-                <a:cs typeface="Segoe UI"/>
+                <a:latin typeface="Arial"/>
+                <a:cs typeface="Arial"/>
               </a:rPr>
               <a:t>5.2 Làm quen bộ dữ liệu khóa học FLUID-ICU (trình diễn làm sạch bằng R)</a:t>
             </a:r>
@@ -9335,8 +9335,8 @@
                 <a:solidFill>
                   <a:srgbClr val="000000"/>
                 </a:solidFill>
-                <a:latin typeface="Segoe UI"/>
-                <a:cs typeface="Segoe UI"/>
+                <a:latin typeface="Arial"/>
+                <a:cs typeface="Arial"/>
               </a:rPr>
               <a:t>5.3 Mô tả và trình bày dữ liệu: tóm tắt, biểu đồ, bảng</a:t>
             </a:r>
@@ -9354,8 +9354,8 @@
                 <a:solidFill>
                   <a:srgbClr val="000000"/>
                 </a:solidFill>
-                <a:latin typeface="Segoe UI"/>
-                <a:cs typeface="Segoe UI"/>
+                <a:latin typeface="Arial"/>
+                <a:cs typeface="Arial"/>
               </a:rPr>
               <a:t>5.4 Mô tả bộ dữ liệu khóa học: Bảng 1 và biểu đồ</a:t>
             </a:r>
@@ -9373,8 +9373,8 @@
                 <a:solidFill>
                   <a:srgbClr val="000000"/>
                 </a:solidFill>
-                <a:latin typeface="Segoe UI"/>
-                <a:cs typeface="Segoe UI"/>
+                <a:latin typeface="Arial"/>
+                <a:cs typeface="Arial"/>
               </a:rPr>
               <a:t>Xây dựng đề cương 5: biến số, CRF thu gọn, từ điển dữ liệu, quản lý dữ liệu</a:t>
             </a:r>
@@ -9411,7 +9411,7 @@
                     <a:lumMod val="50000"/>
                   </a:schemeClr>
                 </a:solidFill>
-                <a:latin typeface="Verdana"/>
+                <a:latin typeface="Arial"/>
               </a:rPr>
               <a:t>Neudata | #ClearDataClearImpact</a:t>
             </a:r>
@@ -9541,8 +9541,8 @@
                 <a:solidFill>
                   <a:srgbClr val="0D7377"/>
                 </a:solidFill>
-                <a:latin typeface="Segoe UI"/>
-                <a:cs typeface="Segoe UI"/>
+                <a:latin typeface="Arial"/>
+                <a:cs typeface="Arial"/>
               </a:rPr>
               <a:t>Kiểm tra dữ liệu: để quy tắc bắt lỗi</a:t>
             </a:r>
@@ -9638,8 +9638,8 @@
                 <a:solidFill>
                   <a:srgbClr val="FFFFFF"/>
                 </a:solidFill>
-                <a:latin typeface="Segoe UI"/>
-                <a:cs typeface="Segoe UI"/>
+                <a:latin typeface="Arial"/>
+                <a:cs typeface="Arial"/>
               </a:rPr>
               <a:t>THÔNG ĐIỆP CHÍNH   </a:t>
             </a:r>
@@ -9648,8 +9648,8 @@
                 <a:solidFill>
                   <a:srgbClr val="FFFFFF"/>
                 </a:solidFill>
-                <a:latin typeface="Segoe UI"/>
-                <a:cs typeface="Segoe UI"/>
+                <a:latin typeface="Arial"/>
+                <a:cs typeface="Arial"/>
               </a:rPr>
               <a:t>Kiểm tra dữ liệu khi bệnh nhân còn ở khoa, không phải một năm sau.</a:t>
             </a:r>
@@ -9686,7 +9686,7 @@
                     <a:lumMod val="50000"/>
                   </a:schemeClr>
                 </a:solidFill>
-                <a:latin typeface="Verdana"/>
+                <a:latin typeface="Arial"/>
               </a:rPr>
               <a:t>Neudata | #ClearDataClearImpact</a:t>
             </a:r>
@@ -9816,8 +9816,8 @@
                 <a:solidFill>
                   <a:srgbClr val="0D7377"/>
                 </a:solidFill>
-                <a:latin typeface="Segoe UI"/>
-                <a:cs typeface="Segoe UI"/>
+                <a:latin typeface="Arial"/>
+                <a:cs typeface="Arial"/>
               </a:rPr>
               <a:t>Quản lý dữ liệu thực tế: từ giường bệnh đến cơ sở dữ liệu</a:t>
             </a:r>
@@ -9913,8 +9913,8 @@
                 <a:solidFill>
                   <a:srgbClr val="FFFFFF"/>
                 </a:solidFill>
-                <a:latin typeface="Segoe UI"/>
-                <a:cs typeface="Segoe UI"/>
+                <a:latin typeface="Arial"/>
+                <a:cs typeface="Arial"/>
               </a:rPr>
               <a:t>THÔNG ĐIỆP CHÍNH   </a:t>
             </a:r>
@@ -9923,8 +9923,8 @@
                 <a:solidFill>
                   <a:srgbClr val="FFFFFF"/>
                 </a:solidFill>
-                <a:latin typeface="Segoe UI"/>
-                <a:cs typeface="Segoe UI"/>
+                <a:latin typeface="Arial"/>
+                <a:cs typeface="Arial"/>
               </a:rPr>
               <a:t>Kiểm tra khi nhập, nhập hai lần nếu dùng giấy, và ghi lại mọi thay đổi.</a:t>
             </a:r>
@@ -9961,7 +9961,7 @@
                     <a:lumMod val="50000"/>
                   </a:schemeClr>
                 </a:solidFill>
-                <a:latin typeface="Verdana"/>
+                <a:latin typeface="Arial"/>
               </a:rPr>
               <a:t>Neudata | #ClearDataClearImpact</a:t>
             </a:r>
@@ -10091,8 +10091,8 @@
                 <a:solidFill>
                   <a:srgbClr val="0D7377"/>
                 </a:solidFill>
-                <a:latin typeface="Segoe UI"/>
-                <a:cs typeface="Segoe UI"/>
+                <a:latin typeface="Arial"/>
+                <a:cs typeface="Arial"/>
               </a:rPr>
               <a:t>Dữ liệu bị thiếu: vì sao quan trọng</a:t>
             </a:r>
@@ -10188,8 +10188,8 @@
                 <a:solidFill>
                   <a:srgbClr val="FFFFFF"/>
                 </a:solidFill>
-                <a:latin typeface="Segoe UI"/>
-                <a:cs typeface="Segoe UI"/>
+                <a:latin typeface="Arial"/>
+                <a:cs typeface="Arial"/>
               </a:rPr>
               <a:t>THÔNG ĐIỆP CHÍNH   </a:t>
             </a:r>
@@ -10198,8 +10198,8 @@
                 <a:solidFill>
                   <a:srgbClr val="FFFFFF"/>
                 </a:solidFill>
-                <a:latin typeface="Segoe UI"/>
-                <a:cs typeface="Segoe UI"/>
+                <a:latin typeface="Arial"/>
+                <a:cs typeface="Arial"/>
               </a:rPr>
               <a:t>Dữ liệu thiếu hiếm khi ngẫu nhiên: bệnh nhân nặng nhất bị thiếu trước tiên.</a:t>
             </a:r>
@@ -10236,7 +10236,7 @@
                     <a:lumMod val="50000"/>
                   </a:schemeClr>
                 </a:solidFill>
-                <a:latin typeface="Verdana"/>
+                <a:latin typeface="Arial"/>
               </a:rPr>
               <a:t>Neudata | #ClearDataClearImpact</a:t>
             </a:r>
@@ -10366,8 +10366,8 @@
                 <a:solidFill>
                   <a:srgbClr val="0D7377"/>
                 </a:solidFill>
-                <a:latin typeface="Segoe UI"/>
-                <a:cs typeface="Segoe UI"/>
+                <a:latin typeface="Arial"/>
+                <a:cs typeface="Arial"/>
               </a:rPr>
               <a:t>Dữ liệu bị thiếu: cách phòng ngừa</a:t>
             </a:r>
@@ -10433,8 +10433,8 @@
                 <a:solidFill>
                   <a:srgbClr val="595959"/>
                 </a:solidFill>
-                <a:latin typeface="Segoe UI"/>
-                <a:cs typeface="Segoe UI"/>
+                <a:latin typeface="Arial"/>
+                <a:cs typeface="Arial"/>
               </a:rPr>
               <a:t>Phòng ngừa là cách chữa duy nhất đáng tin cậy.</a:t>
             </a:r>
@@ -10478,8 +10478,8 @@
                 <a:solidFill>
                   <a:srgbClr val="FFFFFF"/>
                 </a:solidFill>
-                <a:latin typeface="Segoe UI"/>
-                <a:cs typeface="Segoe UI"/>
+                <a:latin typeface="Arial"/>
+                <a:cs typeface="Arial"/>
               </a:rPr>
               <a:t>Ít mục</a:t>
             </a:r>
@@ -10527,8 +10527,8 @@
                 <a:solidFill>
                   <a:srgbClr val="000000"/>
                 </a:solidFill>
-                <a:latin typeface="Segoe UI"/>
-                <a:cs typeface="Segoe UI"/>
+                <a:latin typeface="Arial"/>
+                <a:cs typeface="Arial"/>
               </a:rPr>
               <a:t>Chỉ thu thập cái cần</a:t>
             </a:r>
@@ -10548,8 +10548,8 @@
                 <a:solidFill>
                   <a:srgbClr val="000000"/>
                 </a:solidFill>
-                <a:latin typeface="Segoe UI"/>
-                <a:cs typeface="Segoe UI"/>
+                <a:latin typeface="Arial"/>
+                <a:cs typeface="Arial"/>
               </a:rPr>
               <a:t>Phiếu ngắn sẽ được điền đủ</a:t>
             </a:r>
@@ -10593,8 +10593,8 @@
                 <a:solidFill>
                   <a:srgbClr val="FFFFFF"/>
                 </a:solidFill>
-                <a:latin typeface="Segoe UI"/>
-                <a:cs typeface="Segoe UI"/>
+                <a:latin typeface="Arial"/>
+                <a:cs typeface="Arial"/>
               </a:rPr>
               <a:t>Phiếu rõ</a:t>
             </a:r>
@@ -10642,8 +10642,8 @@
                 <a:solidFill>
                   <a:srgbClr val="000000"/>
                 </a:solidFill>
-                <a:latin typeface="Segoe UI"/>
-                <a:cs typeface="Segoe UI"/>
+                <a:latin typeface="Arial"/>
+                <a:cs typeface="Arial"/>
               </a:rPr>
               <a:t>Đánh dấu trường bắt buộc</a:t>
             </a:r>
@@ -10663,8 +10663,8 @@
                 <a:solidFill>
                   <a:srgbClr val="000000"/>
                 </a:solidFill>
-                <a:latin typeface="Segoe UI"/>
-                <a:cs typeface="Segoe UI"/>
+                <a:latin typeface="Arial"/>
+                <a:cs typeface="Arial"/>
               </a:rPr>
               <a:t>Có 'không làm', 'không rõ'</a:t>
             </a:r>
@@ -10708,8 +10708,8 @@
                 <a:solidFill>
                   <a:srgbClr val="FFFFFF"/>
                 </a:solidFill>
-                <a:latin typeface="Segoe UI"/>
-                <a:cs typeface="Segoe UI"/>
+                <a:latin typeface="Arial"/>
+                <a:cs typeface="Arial"/>
               </a:rPr>
               <a:t>Tập huấn</a:t>
             </a:r>
@@ -10757,8 +10757,8 @@
                 <a:solidFill>
                   <a:srgbClr val="000000"/>
                 </a:solidFill>
-                <a:latin typeface="Segoe UI"/>
-                <a:cs typeface="Segoe UI"/>
+                <a:latin typeface="Arial"/>
+                <a:cs typeface="Arial"/>
               </a:rPr>
               <a:t>Tập huấn mọi người thu thập</a:t>
             </a:r>
@@ -10778,8 +10778,8 @@
                 <a:solidFill>
                   <a:srgbClr val="000000"/>
                 </a:solidFill>
-                <a:latin typeface="Segoe UI"/>
-                <a:cs typeface="Segoe UI"/>
+                <a:latin typeface="Arial"/>
+                <a:cs typeface="Arial"/>
               </a:rPr>
               <a:t>Cùng quy tắc, cùng định nghĩa</a:t>
             </a:r>
@@ -10823,8 +10823,8 @@
                 <a:solidFill>
                   <a:srgbClr val="FFFFFF"/>
                 </a:solidFill>
-                <a:latin typeface="Segoe UI"/>
-                <a:cs typeface="Segoe UI"/>
+                <a:latin typeface="Arial"/>
+                <a:cs typeface="Arial"/>
               </a:rPr>
               <a:t>Kiểm tra tuần</a:t>
             </a:r>
@@ -10872,8 +10872,8 @@
                 <a:solidFill>
                   <a:srgbClr val="000000"/>
                 </a:solidFill>
-                <a:latin typeface="Segoe UI"/>
-                <a:cs typeface="Segoe UI"/>
+                <a:latin typeface="Arial"/>
+                <a:cs typeface="Arial"/>
               </a:rPr>
               <a:t>Báo cáo mức đầy đủ</a:t>
             </a:r>
@@ -10893,8 +10893,8 @@
                 <a:solidFill>
                   <a:srgbClr val="000000"/>
                 </a:solidFill>
-                <a:latin typeface="Segoe UI"/>
-                <a:cs typeface="Segoe UI"/>
+                <a:latin typeface="Arial"/>
+                <a:cs typeface="Arial"/>
               </a:rPr>
               <a:t>Ai và cái gì bị thiếu?</a:t>
             </a:r>
@@ -10938,8 +10938,8 @@
                 <a:solidFill>
                   <a:srgbClr val="FFFFFF"/>
                 </a:solidFill>
-                <a:latin typeface="Segoe UI"/>
-                <a:cs typeface="Segoe UI"/>
+                <a:latin typeface="Arial"/>
+                <a:cs typeface="Arial"/>
               </a:rPr>
               <a:t>Bổ sung sớm</a:t>
             </a:r>
@@ -10987,8 +10987,8 @@
                 <a:solidFill>
                   <a:srgbClr val="000000"/>
                 </a:solidFill>
-                <a:latin typeface="Segoe UI"/>
-                <a:cs typeface="Segoe UI"/>
+                <a:latin typeface="Arial"/>
+                <a:cs typeface="Arial"/>
               </a:rPr>
               <a:t>Sửa khi hồ sơ còn ở khoa</a:t>
             </a:r>
@@ -11008,8 +11008,8 @@
                 <a:solidFill>
                   <a:srgbClr val="000000"/>
                 </a:solidFill>
-                <a:latin typeface="Segoe UI"/>
-                <a:cs typeface="Segoe UI"/>
+                <a:latin typeface="Arial"/>
+                <a:cs typeface="Arial"/>
               </a:rPr>
               <a:t>Kế hoạch theo dõi ca chuyển viện</a:t>
             </a:r>
@@ -11053,8 +11053,8 @@
                 <a:solidFill>
                   <a:srgbClr val="FFFFFF"/>
                 </a:solidFill>
-                <a:latin typeface="Segoe UI"/>
-                <a:cs typeface="Segoe UI"/>
+                <a:latin typeface="Arial"/>
+                <a:cs typeface="Arial"/>
               </a:rPr>
               <a:t>THÔNG ĐIỆP CHÍNH   </a:t>
             </a:r>
@@ -11063,8 +11063,8 @@
                 <a:solidFill>
                   <a:srgbClr val="FFFFFF"/>
                 </a:solidFill>
-                <a:latin typeface="Segoe UI"/>
-                <a:cs typeface="Segoe UI"/>
+                <a:latin typeface="Arial"/>
+                <a:cs typeface="Arial"/>
               </a:rPr>
               <a:t>Phân công ai điền, ai kiểm tra, ai bổ sung từng phiếu trước khi bắt đầu.</a:t>
             </a:r>
@@ -11101,7 +11101,7 @@
                     <a:lumMod val="50000"/>
                   </a:schemeClr>
                 </a:solidFill>
-                <a:latin typeface="Verdana"/>
+                <a:latin typeface="Arial"/>
               </a:rPr>
               <a:t>Neudata | #ClearDataClearImpact</a:t>
             </a:r>
@@ -11231,8 +11231,8 @@
                 <a:solidFill>
                   <a:srgbClr val="0D7377"/>
                 </a:solidFill>
-                <a:latin typeface="Segoe UI"/>
-                <a:cs typeface="Segoe UI"/>
+                <a:latin typeface="Arial"/>
+                <a:cs typeface="Arial"/>
               </a:rPr>
               <a:t>Bài tập theo cặp: phân loại biến, sửa CRF</a:t>
             </a:r>
@@ -11302,8 +11302,8 @@
                 <a:solidFill>
                   <a:srgbClr val="FFFFFF"/>
                 </a:solidFill>
-                <a:latin typeface="Segoe UI"/>
-                <a:cs typeface="Segoe UI"/>
+                <a:latin typeface="Arial"/>
+                <a:cs typeface="Arial"/>
               </a:rPr>
               <a:t>LÀM VIỆC NHÓM   |   7 phút</a:t>
             </a:r>
@@ -11340,25 +11340,19 @@
               <a:spcBef>
                 <a:spcPts val="450"/>
               </a:spcBef>
-              <a:buNone/>
-            </a:pPr>
-            <a:r>
-              <a:rPr lang="en-US" sz="1650" b="1" dirty="0">
-                <a:solidFill>
-                  <a:srgbClr val="0D7377"/>
-                </a:solidFill>
-                <a:latin typeface="Segoe UI"/>
-                <a:cs typeface="Segoe UI"/>
-              </a:rPr>
-              <a:t>1.  </a:t>
-            </a:r>
+              <a:buClr>
+                <a:srgbClr val="0D7377"/>
+              </a:buClr>
+              <a:buFont typeface="Arial"/>
+              <a:buChar char="•"/>
+            </a:pPr>
             <a:r>
               <a:rPr lang="en-US" sz="1650" dirty="0">
                 <a:solidFill>
                   <a:srgbClr val="000000"/>
                 </a:solidFill>
-                <a:latin typeface="Segoe UI"/>
-                <a:cs typeface="Segoe UI"/>
+                <a:latin typeface="Arial"/>
+                <a:cs typeface="Arial"/>
               </a:rPr>
               <a:t>Làm việc với người bên cạnh, phiếu bài tập 'Buổi 5, bài 1 và 2'</a:t>
             </a:r>
@@ -11371,25 +11365,19 @@
               <a:spcBef>
                 <a:spcPts val="450"/>
               </a:spcBef>
-              <a:buNone/>
-            </a:pPr>
-            <a:r>
-              <a:rPr lang="en-US" sz="1650" b="1" dirty="0">
-                <a:solidFill>
-                  <a:srgbClr val="0D7377"/>
-                </a:solidFill>
-                <a:latin typeface="Segoe UI"/>
-                <a:cs typeface="Segoe UI"/>
-              </a:rPr>
-              <a:t>2.  </a:t>
-            </a:r>
+              <a:buClr>
+                <a:srgbClr val="0D7377"/>
+              </a:buClr>
+              <a:buFont typeface="Arial"/>
+              <a:buChar char="•"/>
+            </a:pPr>
             <a:r>
               <a:rPr lang="en-US" sz="1650" dirty="0">
                 <a:solidFill>
                   <a:srgbClr val="000000"/>
                 </a:solidFill>
-                <a:latin typeface="Segoe UI"/>
-                <a:cs typeface="Segoe UI"/>
+                <a:latin typeface="Arial"/>
+                <a:cs typeface="Arial"/>
               </a:rPr>
               <a:t>Bài 1: phân loại 10 biến số ICU (liên tục, đếm, nhị phân, danh định, thứ bậc, thời gian đến sự kiện)</a:t>
             </a:r>
@@ -11402,25 +11390,19 @@
               <a:spcBef>
                 <a:spcPts val="450"/>
               </a:spcBef>
-              <a:buNone/>
-            </a:pPr>
-            <a:r>
-              <a:rPr lang="en-US" sz="1650" b="1" dirty="0">
-                <a:solidFill>
-                  <a:srgbClr val="0D7377"/>
-                </a:solidFill>
-                <a:latin typeface="Segoe UI"/>
-                <a:cs typeface="Segoe UI"/>
-              </a:rPr>
-              <a:t>3.  </a:t>
-            </a:r>
+              <a:buClr>
+                <a:srgbClr val="0D7377"/>
+              </a:buClr>
+              <a:buFont typeface="Arial"/>
+              <a:buChar char="•"/>
+            </a:pPr>
             <a:r>
               <a:rPr lang="en-US" sz="1650" dirty="0">
                 <a:solidFill>
                   <a:srgbClr val="000000"/>
                 </a:solidFill>
-                <a:latin typeface="Segoe UI"/>
-                <a:cs typeface="Segoe UI"/>
+                <a:latin typeface="Arial"/>
+                <a:cs typeface="Arial"/>
               </a:rPr>
               <a:t>Bài 2: viết lại 4 mục CRF chưa tốt để mỗi mục chỉ có một cách hiểu</a:t>
             </a:r>
@@ -11433,25 +11415,19 @@
               <a:spcBef>
                 <a:spcPts val="450"/>
               </a:spcBef>
-              <a:buNone/>
-            </a:pPr>
-            <a:r>
-              <a:rPr lang="en-US" sz="1650" b="1" dirty="0">
-                <a:solidFill>
-                  <a:srgbClr val="0D7377"/>
-                </a:solidFill>
-                <a:latin typeface="Segoe UI"/>
-                <a:cs typeface="Segoe UI"/>
-              </a:rPr>
-              <a:t>4.  </a:t>
-            </a:r>
+              <a:buClr>
+                <a:srgbClr val="0D7377"/>
+              </a:buClr>
+              <a:buFont typeface="Arial"/>
+              <a:buChar char="•"/>
+            </a:pPr>
             <a:r>
               <a:rPr lang="en-US" sz="1650" dirty="0">
                 <a:solidFill>
                   <a:srgbClr val="000000"/>
                 </a:solidFill>
-                <a:latin typeface="Segoe UI"/>
-                <a:cs typeface="Segoe UI"/>
+                <a:latin typeface="Arial"/>
+                <a:cs typeface="Arial"/>
               </a:rPr>
               <a:t>Sẵn sàng đọc to một mục đã viết lại</a:t>
             </a:r>
@@ -11495,8 +11471,8 @@
                 <a:solidFill>
                   <a:srgbClr val="0D7377"/>
                 </a:solidFill>
-                <a:latin typeface="Segoe UI"/>
-                <a:cs typeface="Segoe UI"/>
+                <a:latin typeface="Arial"/>
+                <a:cs typeface="Arial"/>
               </a:rPr>
               <a:t>Tự kiểm tra</a:t>
             </a:r>
@@ -11517,8 +11493,8 @@
                 <a:solidFill>
                   <a:srgbClr val="000000"/>
                 </a:solidFill>
-                <a:latin typeface="Segoe UI"/>
-                <a:cs typeface="Segoe UI"/>
+                <a:latin typeface="Arial"/>
+                <a:cs typeface="Arial"/>
               </a:rPr>
               <a:t>Có đơn vị trong câu hỏi?</a:t>
             </a:r>
@@ -11539,8 +11515,8 @@
                 <a:solidFill>
                   <a:srgbClr val="000000"/>
                 </a:solidFill>
-                <a:latin typeface="Segoe UI"/>
-                <a:cs typeface="Segoe UI"/>
+                <a:latin typeface="Arial"/>
+                <a:cs typeface="Arial"/>
               </a:rPr>
               <a:t>Có mốc thời gian?</a:t>
             </a:r>
@@ -11561,8 +11537,8 @@
                 <a:solidFill>
                   <a:srgbClr val="000000"/>
                 </a:solidFill>
-                <a:latin typeface="Segoe UI"/>
-                <a:cs typeface="Segoe UI"/>
+                <a:latin typeface="Arial"/>
+                <a:cs typeface="Arial"/>
               </a:rPr>
               <a:t>Chỉ một đáp án?</a:t>
             </a:r>
@@ -11583,8 +11559,8 @@
                 <a:solidFill>
                   <a:srgbClr val="000000"/>
                 </a:solidFill>
-                <a:latin typeface="Segoe UI"/>
-                <a:cs typeface="Segoe UI"/>
+                <a:latin typeface="Arial"/>
+                <a:cs typeface="Arial"/>
               </a:rPr>
               <a:t>Có lựa chọn 'không rõ'?</a:t>
             </a:r>
@@ -11630,8 +11606,8 @@
                 <a:solidFill>
                   <a:srgbClr val="0D7377"/>
                 </a:solidFill>
-                <a:latin typeface="Segoe UI"/>
-                <a:cs typeface="Segoe UI"/>
+                <a:latin typeface="Arial"/>
+                <a:cs typeface="Arial"/>
               </a:rPr>
               <a:t>SẢN PHẨM   </a:t>
             </a:r>
@@ -11640,8 +11616,8 @@
                 <a:solidFill>
                   <a:srgbClr val="000000"/>
                 </a:solidFill>
-                <a:latin typeface="Segoe UI"/>
-                <a:cs typeface="Segoe UI"/>
+                <a:latin typeface="Arial"/>
+                <a:cs typeface="Arial"/>
               </a:rPr>
               <a:t>10 biến số đã phân loại và 4 mục CRF đã viết lại</a:t>
             </a:r>
@@ -11678,7 +11654,7 @@
                     <a:lumMod val="50000"/>
                   </a:schemeClr>
                 </a:solidFill>
-                <a:latin typeface="Verdana"/>
+                <a:latin typeface="Arial"/>
               </a:rPr>
               <a:t>Neudata | #ClearDataClearImpact</a:t>
             </a:r>
@@ -11808,8 +11784,8 @@
                 <a:solidFill>
                   <a:srgbClr val="0D7377"/>
                 </a:solidFill>
-                <a:latin typeface="Segoe UI"/>
-                <a:cs typeface="Segoe UI"/>
+                <a:latin typeface="Arial"/>
+                <a:cs typeface="Arial"/>
               </a:rPr>
               <a:t>5.2 Làm quen bộ dữ liệu khóa học</a:t>
             </a:r>
@@ -11878,8 +11854,8 @@
                 <a:solidFill>
                   <a:srgbClr val="0D7377"/>
                 </a:solidFill>
-                <a:latin typeface="Segoe UI"/>
-                <a:cs typeface="Segoe UI"/>
+                <a:latin typeface="Arial"/>
+                <a:cs typeface="Arial"/>
               </a:rPr>
               <a:t>Một bộ dữ liệu thực tế, năm câu hỏi nghiên cứu, năm bản thảo.</a:t>
             </a:r>
@@ -11896,8 +11872,8 @@
                 <a:solidFill>
                   <a:srgbClr val="595959"/>
                 </a:solidFill>
-                <a:latin typeface="Segoe UI"/>
-                <a:cs typeface="Segoe UI"/>
+                <a:latin typeface="Arial"/>
+                <a:cs typeface="Arial"/>
               </a:rPr>
               <a:t>5.2 Làm quen bộ dữ liệu FLUID-ICU  |  25 phút</a:t>
             </a:r>
@@ -11934,7 +11910,7 @@
                     <a:lumMod val="50000"/>
                   </a:schemeClr>
                 </a:solidFill>
-                <a:latin typeface="Verdana"/>
+                <a:latin typeface="Arial"/>
               </a:rPr>
               <a:t>Neudata | #ClearDataClearImpact</a:t>
             </a:r>
@@ -12064,8 +12040,8 @@
                 <a:solidFill>
                   <a:srgbClr val="0D7377"/>
                 </a:solidFill>
-                <a:latin typeface="Segoe UI"/>
-                <a:cs typeface="Segoe UI"/>
+                <a:latin typeface="Arial"/>
+                <a:cs typeface="Arial"/>
               </a:rPr>
               <a:t>FLUID-ICU tóm tắt (đoàn hệ mô phỏng)</a:t>
             </a:r>
@@ -12131,8 +12107,8 @@
                 <a:solidFill>
                   <a:srgbClr val="595959"/>
                 </a:solidFill>
-                <a:latin typeface="Segoe UI"/>
-                <a:cs typeface="Segoe UI"/>
+                <a:latin typeface="Arial"/>
+                <a:cs typeface="Arial"/>
               </a:rPr>
               <a:t>Đoàn hệ tiến cứu đa trung tâm: 4 ICU, từ 01/2023 đến 12/2024.</a:t>
             </a:r>
@@ -12174,8 +12150,8 @@
                 <a:solidFill>
                   <a:srgbClr val="FFFFFF"/>
                 </a:solidFill>
-                <a:latin typeface="Segoe UI"/>
-                <a:cs typeface="Segoe UI"/>
+                <a:latin typeface="Arial"/>
+                <a:cs typeface="Arial"/>
               </a:rPr>
               <a:t>Đối tượng</a:t>
             </a:r>
@@ -12223,8 +12199,8 @@
                 <a:solidFill>
                   <a:srgbClr val="000000"/>
                 </a:solidFill>
-                <a:latin typeface="Segoe UI"/>
-                <a:cs typeface="Segoe UI"/>
+                <a:latin typeface="Arial"/>
+                <a:cs typeface="Arial"/>
               </a:rPr>
               <a:t>620 người lớn nhiễm khuẩn huyết</a:t>
             </a:r>
@@ -12244,8 +12220,8 @@
                 <a:solidFill>
                   <a:srgbClr val="000000"/>
                 </a:solidFill>
-                <a:latin typeface="Segoe UI"/>
-                <a:cs typeface="Segoe UI"/>
+                <a:latin typeface="Arial"/>
+                <a:cs typeface="Arial"/>
               </a:rPr>
               <a:t>ICU A 191, B 164,</a:t>
             </a:r>
@@ -12265,8 +12241,8 @@
                 <a:solidFill>
                   <a:srgbClr val="000000"/>
                 </a:solidFill>
-                <a:latin typeface="Segoe UI"/>
-                <a:cs typeface="Segoe UI"/>
+                <a:latin typeface="Arial"/>
+                <a:cs typeface="Arial"/>
               </a:rPr>
               <a:t>C 147, D 118</a:t>
             </a:r>
@@ -12308,8 +12284,8 @@
                 <a:solidFill>
                   <a:srgbClr val="FFFFFF"/>
                 </a:solidFill>
-                <a:latin typeface="Segoe UI"/>
-                <a:cs typeface="Segoe UI"/>
+                <a:latin typeface="Arial"/>
+                <a:cs typeface="Arial"/>
               </a:rPr>
               <a:t>Phơi nhiễm</a:t>
             </a:r>
@@ -12357,8 +12333,8 @@
                 <a:solidFill>
                   <a:srgbClr val="000000"/>
                 </a:solidFill>
-                <a:latin typeface="Segoe UI"/>
-                <a:cs typeface="Segoe UI"/>
+                <a:latin typeface="Arial"/>
+                <a:cs typeface="Arial"/>
               </a:rPr>
               <a:t>Cân bằng dịch tích lũy</a:t>
             </a:r>
@@ -12378,8 +12354,8 @@
                 <a:solidFill>
                   <a:srgbClr val="000000"/>
                 </a:solidFill>
-                <a:latin typeface="Segoe UI"/>
-                <a:cs typeface="Segoe UI"/>
+                <a:latin typeface="Arial"/>
+                <a:cs typeface="Arial"/>
               </a:rPr>
               <a:t>đến ngày 3 (ml/kg)</a:t>
             </a:r>
@@ -12399,8 +12375,8 @@
                 <a:solidFill>
                   <a:srgbClr val="000000"/>
                 </a:solidFill>
-                <a:latin typeface="Segoe UI"/>
-                <a:cs typeface="Segoe UI"/>
+                <a:latin typeface="Arial"/>
+                <a:cs typeface="Arial"/>
               </a:rPr>
               <a:t>Dương: 373/618 (60.4%)</a:t>
             </a:r>
@@ -12442,8 +12418,8 @@
                 <a:solidFill>
                   <a:srgbClr val="FFFFFF"/>
                 </a:solidFill>
-                <a:latin typeface="Segoe UI"/>
-                <a:cs typeface="Segoe UI"/>
+                <a:latin typeface="Arial"/>
+                <a:cs typeface="Arial"/>
               </a:rPr>
               <a:t>Kết cục chính</a:t>
             </a:r>
@@ -12491,8 +12467,8 @@
                 <a:solidFill>
                   <a:srgbClr val="000000"/>
                 </a:solidFill>
-                <a:latin typeface="Segoe UI"/>
-                <a:cs typeface="Segoe UI"/>
+                <a:latin typeface="Arial"/>
+                <a:cs typeface="Arial"/>
               </a:rPr>
               <a:t>Tử vong đến ngày 28</a:t>
             </a:r>
@@ -12512,8 +12488,8 @@
                 <a:solidFill>
                   <a:srgbClr val="000000"/>
                 </a:solidFill>
-                <a:latin typeface="Segoe UI"/>
-                <a:cs typeface="Segoe UI"/>
+                <a:latin typeface="Arial"/>
+                <a:cs typeface="Arial"/>
               </a:rPr>
               <a:t>179/620 (28.9%)</a:t>
             </a:r>
@@ -12533,8 +12509,8 @@
                 <a:solidFill>
                   <a:srgbClr val="000000"/>
                 </a:solidFill>
-                <a:latin typeface="Segoe UI"/>
-                <a:cs typeface="Segoe UI"/>
+                <a:latin typeface="Arial"/>
+                <a:cs typeface="Arial"/>
               </a:rPr>
               <a:t>+ thời gian đến tử vong</a:t>
             </a:r>
@@ -12576,8 +12552,8 @@
                 <a:solidFill>
                   <a:srgbClr val="FFFFFF"/>
                 </a:solidFill>
-                <a:latin typeface="Segoe UI"/>
-                <a:cs typeface="Segoe UI"/>
+                <a:latin typeface="Arial"/>
+                <a:cs typeface="Arial"/>
               </a:rPr>
               <a:t>Thu thập thêm</a:t>
             </a:r>
@@ -12625,8 +12601,8 @@
                 <a:solidFill>
                   <a:srgbClr val="000000"/>
                 </a:solidFill>
-                <a:latin typeface="Segoe UI"/>
-                <a:cs typeface="Segoe UI"/>
+                <a:latin typeface="Arial"/>
+                <a:cs typeface="Arial"/>
               </a:rPr>
               <a:t>SOFA, APACHE II, lactat</a:t>
             </a:r>
@@ -12646,8 +12622,8 @@
                 <a:solidFill>
                   <a:srgbClr val="000000"/>
                 </a:solidFill>
-                <a:latin typeface="Segoe UI"/>
-                <a:cs typeface="Segoe UI"/>
+                <a:latin typeface="Arial"/>
+                <a:cs typeface="Arial"/>
               </a:rPr>
               <a:t>AKI, số ngày không thở máy</a:t>
             </a:r>
@@ -12667,8 +12643,8 @@
                 <a:solidFill>
                   <a:srgbClr val="000000"/>
                 </a:solidFill>
-                <a:latin typeface="Segoe UI"/>
-                <a:cs typeface="Segoe UI"/>
+                <a:latin typeface="Arial"/>
+                <a:cs typeface="Arial"/>
               </a:rPr>
               <a:t>Thời gian nằm ICU</a:t>
             </a:r>
@@ -12712,8 +12688,8 @@
                 <a:solidFill>
                   <a:srgbClr val="FFFFFF"/>
                 </a:solidFill>
-                <a:latin typeface="Segoe UI"/>
-                <a:cs typeface="Segoe UI"/>
+                <a:latin typeface="Arial"/>
+                <a:cs typeface="Arial"/>
               </a:rPr>
               <a:t>THÔNG ĐIỆP CHÍNH   </a:t>
             </a:r>
@@ -12722,8 +12698,8 @@
                 <a:solidFill>
                   <a:srgbClr val="FFFFFF"/>
                 </a:solidFill>
-                <a:latin typeface="Segoe UI"/>
-                <a:cs typeface="Segoe UI"/>
+                <a:latin typeface="Arial"/>
+                <a:cs typeface="Arial"/>
               </a:rPr>
               <a:t>Câu hỏi: cân bằng dịch dương đến ngày 3 có liên quan với tử vong 28 ngày không?</a:t>
             </a:r>
@@ -12760,7 +12736,7 @@
                     <a:lumMod val="50000"/>
                   </a:schemeClr>
                 </a:solidFill>
-                <a:latin typeface="Verdana"/>
+                <a:latin typeface="Arial"/>
               </a:rPr>
               <a:t>Neudata | #ClearDataClearImpact</a:t>
             </a:r>
@@ -12890,8 +12866,8 @@
                 <a:solidFill>
                   <a:srgbClr val="0D7377"/>
                 </a:solidFill>
-                <a:latin typeface="Segoe UI"/>
-                <a:cs typeface="Segoe UI"/>
+                <a:latin typeface="Arial"/>
+                <a:cs typeface="Arial"/>
               </a:rPr>
               <a:t>Từ 623 dòng đến 527 ca đầy đủ</a:t>
             </a:r>
@@ -12987,8 +12963,8 @@
                 <a:solidFill>
                   <a:srgbClr val="FFFFFF"/>
                 </a:solidFill>
-                <a:latin typeface="Segoe UI"/>
-                <a:cs typeface="Segoe UI"/>
+                <a:latin typeface="Arial"/>
+                <a:cs typeface="Arial"/>
               </a:rPr>
               <a:t>THÔNG ĐIỆP CHÍNH   </a:t>
             </a:r>
@@ -12997,8 +12973,8 @@
                 <a:solidFill>
                   <a:srgbClr val="FFFFFF"/>
                 </a:solidFill>
-                <a:latin typeface="Segoe UI"/>
-                <a:cs typeface="Segoe UI"/>
+                <a:latin typeface="Arial"/>
+                <a:cs typeface="Arial"/>
               </a:rPr>
               <a:t>Mọi bài báo đều báo cáo dòng chảy này: ai được đưa vào ở mỗi bước, và vì sao không.</a:t>
             </a:r>
@@ -13035,7 +13011,7 @@
                     <a:lumMod val="50000"/>
                   </a:schemeClr>
                 </a:solidFill>
-                <a:latin typeface="Verdana"/>
+                <a:latin typeface="Arial"/>
               </a:rPr>
               <a:t>Neudata | #ClearDataClearImpact</a:t>
             </a:r>
@@ -13165,8 +13141,8 @@
                 <a:solidFill>
                   <a:srgbClr val="0D7377"/>
                 </a:solidFill>
-                <a:latin typeface="Segoe UI"/>
-                <a:cs typeface="Segoe UI"/>
+                <a:latin typeface="Arial"/>
+                <a:cs typeface="Arial"/>
               </a:rPr>
               <a:t>Dữ liệu thô và sạch: bốn ICU thực sự đã gửi gì</a:t>
             </a:r>
@@ -13262,8 +13238,8 @@
                 <a:solidFill>
                   <a:srgbClr val="FFFFFF"/>
                 </a:solidFill>
-                <a:latin typeface="Segoe UI"/>
-                <a:cs typeface="Segoe UI"/>
+                <a:latin typeface="Arial"/>
+                <a:cs typeface="Arial"/>
               </a:rPr>
               <a:t>THÔNG ĐIỆP CHÍNH   </a:t>
             </a:r>
@@ -13272,8 +13248,8 @@
                 <a:solidFill>
                   <a:srgbClr val="FFFFFF"/>
                 </a:solidFill>
-                <a:latin typeface="Segoe UI"/>
-                <a:cs typeface="Segoe UI"/>
+                <a:latin typeface="Arial"/>
+                <a:cs typeface="Arial"/>
               </a:rPr>
               <a:t>Dữ liệu thật luôn lộn xộn: làm sạch bằng script, không bao giờ bằng tay.</a:t>
             </a:r>
@@ -13310,7 +13286,7 @@
                     <a:lumMod val="50000"/>
                   </a:schemeClr>
                 </a:solidFill>
-                <a:latin typeface="Verdana"/>
+                <a:latin typeface="Arial"/>
               </a:rPr>
               <a:t>Neudata | #ClearDataClearImpact</a:t>
             </a:r>
@@ -13440,8 +13416,8 @@
                 <a:solidFill>
                   <a:srgbClr val="0D7377"/>
                 </a:solidFill>
-                <a:latin typeface="Segoe UI"/>
-                <a:cs typeface="Segoe UI"/>
+                <a:latin typeface="Arial"/>
+                <a:cs typeface="Arial"/>
               </a:rPr>
               <a:t>Trình diễn: làm sạch FLUID-ICU bằng R</a:t>
             </a:r>
@@ -13511,8 +13487,8 @@
                 <a:solidFill>
                   <a:srgbClr val="FFFFFF"/>
                 </a:solidFill>
-                <a:latin typeface="Segoe UI"/>
-                <a:cs typeface="Segoe UI"/>
+                <a:latin typeface="Arial"/>
+                <a:cs typeface="Arial"/>
               </a:rPr>
               <a:t>TRÌNH DIỄN TRỰC TIẾP   |   8 phút</a:t>
             </a:r>
@@ -13549,25 +13525,19 @@
               <a:spcBef>
                 <a:spcPts val="450"/>
               </a:spcBef>
-              <a:buNone/>
-            </a:pPr>
-            <a:r>
-              <a:rPr lang="en-US" sz="1650" b="1" dirty="0">
-                <a:solidFill>
-                  <a:srgbClr val="B5651D"/>
-                </a:solidFill>
-                <a:latin typeface="Segoe UI"/>
-                <a:cs typeface="Segoe UI"/>
-              </a:rPr>
-              <a:t>1.  </a:t>
-            </a:r>
+              <a:buClr>
+                <a:srgbClr val="B5651D"/>
+              </a:buClr>
+              <a:buFont typeface="Arial"/>
+              <a:buChar char="•"/>
+            </a:pPr>
             <a:r>
               <a:rPr lang="en-US" sz="1650" dirty="0">
                 <a:solidFill>
                   <a:srgbClr val="000000"/>
                 </a:solidFill>
-                <a:latin typeface="Segoe UI"/>
-                <a:cs typeface="Segoe UI"/>
+                <a:latin typeface="Arial"/>
+                <a:cs typeface="Arial"/>
               </a:rPr>
               <a:t>Mở FLUID-ICU.Rproj và script 01_clean.R</a:t>
             </a:r>
@@ -13580,25 +13550,19 @@
               <a:spcBef>
                 <a:spcPts val="450"/>
               </a:spcBef>
-              <a:buNone/>
-            </a:pPr>
-            <a:r>
-              <a:rPr lang="en-US" sz="1650" b="1" dirty="0">
-                <a:solidFill>
-                  <a:srgbClr val="B5651D"/>
-                </a:solidFill>
-                <a:latin typeface="Segoe UI"/>
-                <a:cs typeface="Segoe UI"/>
-              </a:rPr>
-              <a:t>2.  </a:t>
-            </a:r>
+              <a:buClr>
+                <a:srgbClr val="B5651D"/>
+              </a:buClr>
+              <a:buFont typeface="Arial"/>
+              <a:buChar char="•"/>
+            </a:pPr>
             <a:r>
               <a:rPr lang="en-US" sz="1650" dirty="0">
                 <a:solidFill>
                   <a:srgbClr val="000000"/>
                 </a:solidFill>
-                <a:latin typeface="Segoe UI"/>
-                <a:cs typeface="Segoe UI"/>
+                <a:latin typeface="Arial"/>
+                <a:cs typeface="Arial"/>
               </a:rPr>
               <a:t>Đọc tệp thô dưới dạng văn bản và xem qua</a:t>
             </a:r>
@@ -13611,25 +13575,19 @@
               <a:spcBef>
                 <a:spcPts val="450"/>
               </a:spcBef>
-              <a:buNone/>
-            </a:pPr>
-            <a:r>
-              <a:rPr lang="en-US" sz="1650" b="1" dirty="0">
-                <a:solidFill>
-                  <a:srgbClr val="B5651D"/>
-                </a:solidFill>
-                <a:latin typeface="Segoe UI"/>
-                <a:cs typeface="Segoe UI"/>
-              </a:rPr>
-              <a:t>3.  </a:t>
-            </a:r>
+              <a:buClr>
+                <a:srgbClr val="B5651D"/>
+              </a:buClr>
+              <a:buFont typeface="Arial"/>
+              <a:buChar char="•"/>
+            </a:pPr>
             <a:r>
               <a:rPr lang="en-US" sz="1650" dirty="0">
                 <a:solidFill>
                   <a:srgbClr val="000000"/>
                 </a:solidFill>
-                <a:latin typeface="Segoe UI"/>
-                <a:cs typeface="Segoe UI"/>
+                <a:latin typeface="Arial"/>
+                <a:cs typeface="Arial"/>
               </a:rPr>
               <a:t>Chạy từng khối cho mỗi vấn đề: tên biến, bản trùng, ICU, ngày, mã</a:t>
             </a:r>
@@ -13642,25 +13600,19 @@
               <a:spcBef>
                 <a:spcPts val="450"/>
               </a:spcBef>
-              <a:buNone/>
-            </a:pPr>
-            <a:r>
-              <a:rPr lang="en-US" sz="1650" b="1" dirty="0">
-                <a:solidFill>
-                  <a:srgbClr val="B5651D"/>
-                </a:solidFill>
-                <a:latin typeface="Segoe UI"/>
-                <a:cs typeface="Segoe UI"/>
-              </a:rPr>
-              <a:t>4.  </a:t>
-            </a:r>
+              <a:buClr>
+                <a:srgbClr val="B5651D"/>
+              </a:buClr>
+              <a:buFont typeface="Arial"/>
+              <a:buChar char="•"/>
+            </a:pPr>
             <a:r>
               <a:rPr lang="en-US" sz="1650" dirty="0">
                 <a:solidFill>
                   <a:srgbClr val="000000"/>
                 </a:solidFill>
-                <a:latin typeface="Segoe UI"/>
-                <a:cs typeface="Segoe UI"/>
+                <a:latin typeface="Arial"/>
+                <a:cs typeface="Arial"/>
               </a:rPr>
               <a:t>Tìm lỗi đơn vị lactat bằng tóm tắt theo ICU</a:t>
             </a:r>
@@ -13673,25 +13625,19 @@
               <a:spcBef>
                 <a:spcPts val="450"/>
               </a:spcBef>
-              <a:buNone/>
-            </a:pPr>
-            <a:r>
-              <a:rPr lang="en-US" sz="1650" b="1" dirty="0">
-                <a:solidFill>
-                  <a:srgbClr val="B5651D"/>
-                </a:solidFill>
-                <a:latin typeface="Segoe UI"/>
-                <a:cs typeface="Segoe UI"/>
-              </a:rPr>
-              <a:t>5.  </a:t>
-            </a:r>
+              <a:buClr>
+                <a:srgbClr val="B5651D"/>
+              </a:buClr>
+              <a:buFont typeface="Arial"/>
+              <a:buChar char="•"/>
+            </a:pPr>
             <a:r>
               <a:rPr lang="en-US" sz="1650" dirty="0">
                 <a:solidFill>
                   <a:srgbClr val="000000"/>
                 </a:solidFill>
-                <a:latin typeface="Segoe UI"/>
-                <a:cs typeface="Segoe UI"/>
+                <a:latin typeface="Arial"/>
+                <a:cs typeface="Arial"/>
               </a:rPr>
               <a:t>Khối cuối: tệp đã làm sạch giống hệt tệp tham chiếu</a:t>
             </a:r>
@@ -13735,8 +13681,8 @@
                 <a:solidFill>
                   <a:srgbClr val="B5651D"/>
                 </a:solidFill>
-                <a:latin typeface="Segoe UI"/>
-                <a:cs typeface="Segoe UI"/>
+                <a:latin typeface="Arial"/>
+                <a:cs typeface="Arial"/>
               </a:rPr>
               <a:t>Chú ý</a:t>
             </a:r>
@@ -13757,8 +13703,8 @@
                 <a:solidFill>
                   <a:srgbClr val="000000"/>
                 </a:solidFill>
-                <a:latin typeface="Segoe UI"/>
-                <a:cs typeface="Segoe UI"/>
+                <a:latin typeface="Arial"/>
+                <a:cs typeface="Arial"/>
               </a:rPr>
               <a:t>Một vấn đề, một khối</a:t>
             </a:r>
@@ -13779,8 +13725,8 @@
                 <a:solidFill>
                   <a:srgbClr val="000000"/>
                 </a:solidFill>
-                <a:latin typeface="Segoe UI"/>
-                <a:cs typeface="Segoe UI"/>
+                <a:latin typeface="Arial"/>
+                <a:cs typeface="Arial"/>
               </a:rPr>
               <a:t>Tệp thô không bao giờ bị sửa</a:t>
             </a:r>
@@ -13801,8 +13747,8 @@
                 <a:solidFill>
                   <a:srgbClr val="000000"/>
                 </a:solidFill>
-                <a:latin typeface="Segoe UI"/>
-                <a:cs typeface="Segoe UI"/>
+                <a:latin typeface="Arial"/>
+                <a:cs typeface="Arial"/>
               </a:rPr>
               <a:t>Mỗi bước được ghi nhật ký</a:t>
             </a:r>
@@ -13823,8 +13769,8 @@
                 <a:solidFill>
                   <a:srgbClr val="000000"/>
                 </a:solidFill>
-                <a:latin typeface="Segoe UI"/>
-                <a:cs typeface="Segoe UI"/>
+                <a:latin typeface="Arial"/>
+                <a:cs typeface="Arial"/>
               </a:rPr>
               <a:t>Chạy lại = cùng kết quả</a:t>
             </a:r>
@@ -13870,8 +13816,8 @@
                 <a:solidFill>
                   <a:srgbClr val="B5651D"/>
                 </a:solidFill>
-                <a:latin typeface="Segoe UI"/>
-                <a:cs typeface="Segoe UI"/>
+                <a:latin typeface="Arial"/>
+                <a:cs typeface="Arial"/>
               </a:rPr>
               <a:t>SẢN PHẨM   </a:t>
             </a:r>
@@ -13880,8 +13826,8 @@
                 <a:solidFill>
                   <a:srgbClr val="000000"/>
                 </a:solidFill>
-                <a:latin typeface="Segoe UI"/>
-                <a:cs typeface="Segoe UI"/>
+                <a:latin typeface="Arial"/>
+                <a:cs typeface="Arial"/>
               </a:rPr>
               <a:t>Mọi người thấy dữ liệu thô thành dữ liệu sạch, có thể tái lập</a:t>
             </a:r>
@@ -13918,7 +13864,7 @@
                     <a:lumMod val="50000"/>
                   </a:schemeClr>
                 </a:solidFill>
-                <a:latin typeface="Verdana"/>
+                <a:latin typeface="Arial"/>
               </a:rPr>
               <a:t>Neudata | #ClearDataClearImpact</a:t>
             </a:r>
@@ -14048,8 +13994,8 @@
                 <a:solidFill>
                   <a:srgbClr val="0D7377"/>
                 </a:solidFill>
-                <a:latin typeface="Segoe UI"/>
-                <a:cs typeface="Segoe UI"/>
+                <a:latin typeface="Arial"/>
+                <a:cs typeface="Arial"/>
               </a:rPr>
               <a:t>Ôn tập: Buổi 3-4 trong ba câu hỏi</a:t>
             </a:r>
@@ -14119,8 +14065,8 @@
                 <a:solidFill>
                   <a:srgbClr val="FFFFFF"/>
                 </a:solidFill>
-                <a:latin typeface="Segoe UI"/>
-                <a:cs typeface="Segoe UI"/>
+                <a:latin typeface="Arial"/>
+                <a:cs typeface="Arial"/>
               </a:rPr>
               <a:t>CÂU HỎI NHANH   |   10 phút</a:t>
             </a:r>
@@ -14157,25 +14103,19 @@
               <a:spcBef>
                 <a:spcPts val="450"/>
               </a:spcBef>
-              <a:buNone/>
-            </a:pPr>
-            <a:r>
-              <a:rPr lang="en-US" sz="1650" b="1" dirty="0">
-                <a:solidFill>
-                  <a:srgbClr val="6C3483"/>
-                </a:solidFill>
-                <a:latin typeface="Segoe UI"/>
-                <a:cs typeface="Segoe UI"/>
-              </a:rPr>
-              <a:t>1.  </a:t>
-            </a:r>
+              <a:buClr>
+                <a:srgbClr val="6C3483"/>
+              </a:buClr>
+              <a:buFont typeface="Arial"/>
+              <a:buChar char="•"/>
+            </a:pPr>
             <a:r>
               <a:rPr lang="en-US" sz="1650" dirty="0">
                 <a:solidFill>
                   <a:srgbClr val="000000"/>
                 </a:solidFill>
-                <a:latin typeface="Segoe UI"/>
-                <a:cs typeface="Segoe UI"/>
+                <a:latin typeface="Arial"/>
+                <a:cs typeface="Arial"/>
               </a:rPr>
               <a:t>C1. Người hút thuốc được theo dõi 10 năm để xem ai bị đột quỵ. Đây là thiết kế gì?</a:t>
             </a:r>
@@ -14188,25 +14128,19 @@
               <a:spcBef>
                 <a:spcPts val="450"/>
               </a:spcBef>
-              <a:buNone/>
-            </a:pPr>
-            <a:r>
-              <a:rPr lang="en-US" sz="1650" b="1" dirty="0">
-                <a:solidFill>
-                  <a:srgbClr val="6C3483"/>
-                </a:solidFill>
-                <a:latin typeface="Segoe UI"/>
-                <a:cs typeface="Segoe UI"/>
-              </a:rPr>
-              <a:t>2.  </a:t>
-            </a:r>
+              <a:buClr>
+                <a:srgbClr val="6C3483"/>
+              </a:buClr>
+              <a:buFont typeface="Arial"/>
+              <a:buChar char="•"/>
+            </a:pPr>
             <a:r>
               <a:rPr lang="en-US" sz="1650" dirty="0">
                 <a:solidFill>
                   <a:srgbClr val="000000"/>
                 </a:solidFill>
-                <a:latin typeface="Segoe UI"/>
-                <a:cs typeface="Segoe UI"/>
+                <a:latin typeface="Arial"/>
+                <a:cs typeface="Arial"/>
               </a:rPr>
               <a:t>C2. Trong một nghiên cứu đoàn hệ, bệnh nhân nhiễm khuẩn nặng hơn được truyền nhiều dịch hơn VÀ tử vong nhiều hơn. Hiện tượng này gọi là gì?</a:t>
             </a:r>
@@ -14219,25 +14153,19 @@
               <a:spcBef>
                 <a:spcPts val="450"/>
               </a:spcBef>
-              <a:buNone/>
-            </a:pPr>
-            <a:r>
-              <a:rPr lang="en-US" sz="1650" b="1" dirty="0">
-                <a:solidFill>
-                  <a:srgbClr val="6C3483"/>
-                </a:solidFill>
-                <a:latin typeface="Segoe UI"/>
-                <a:cs typeface="Segoe UI"/>
-              </a:rPr>
-              <a:t>3.  </a:t>
-            </a:r>
+              <a:buClr>
+                <a:srgbClr val="6C3483"/>
+              </a:buClr>
+              <a:buFont typeface="Arial"/>
+              <a:buChar char="•"/>
+            </a:pPr>
             <a:r>
               <a:rPr lang="en-US" sz="1650" dirty="0">
                 <a:solidFill>
                   <a:srgbClr val="000000"/>
                 </a:solidFill>
-                <a:latin typeface="Segoe UI"/>
-                <a:cs typeface="Segoe UI"/>
+                <a:latin typeface="Arial"/>
+                <a:cs typeface="Arial"/>
               </a:rPr>
               <a:t>C3. Tử vong 30% với chăm sóc thường quy và 20% với chiến lược mới. RR và NNT là bao nhiêu?</a:t>
             </a:r>
@@ -14250,25 +14178,19 @@
               <a:spcBef>
                 <a:spcPts val="450"/>
               </a:spcBef>
-              <a:buNone/>
-            </a:pPr>
-            <a:r>
-              <a:rPr lang="en-US" sz="1650" b="1" dirty="0">
-                <a:solidFill>
-                  <a:srgbClr val="6C3483"/>
-                </a:solidFill>
-                <a:latin typeface="Segoe UI"/>
-                <a:cs typeface="Segoe UI"/>
-              </a:rPr>
-              <a:t>4.  </a:t>
-            </a:r>
+              <a:buClr>
+                <a:srgbClr val="6C3483"/>
+              </a:buClr>
+              <a:buFont typeface="Arial"/>
+              <a:buChar char="•"/>
+            </a:pPr>
             <a:r>
               <a:rPr lang="en-US" sz="1650" dirty="0">
                 <a:solidFill>
                   <a:srgbClr val="000000"/>
                 </a:solidFill>
-                <a:latin typeface="Segoe UI"/>
-                <a:cs typeface="Segoe UI"/>
+                <a:latin typeface="Arial"/>
+                <a:cs typeface="Arial"/>
               </a:rPr>
               <a:t>Trả lời một mình (2 phút), rồi so sánh với người bên cạnh (2 phút)</a:t>
             </a:r>
@@ -14312,8 +14234,8 @@
                 <a:solidFill>
                   <a:srgbClr val="6C3483"/>
                 </a:solidFill>
-                <a:latin typeface="Segoe UI"/>
-                <a:cs typeface="Segoe UI"/>
+                <a:latin typeface="Arial"/>
+                <a:cs typeface="Arial"/>
               </a:rPr>
               <a:t>Đáp án (công bố sau)</a:t>
             </a:r>
@@ -14334,8 +14256,8 @@
                 <a:solidFill>
                   <a:srgbClr val="000000"/>
                 </a:solidFill>
-                <a:latin typeface="Segoe UI"/>
-                <a:cs typeface="Segoe UI"/>
+                <a:latin typeface="Arial"/>
+                <a:cs typeface="Arial"/>
               </a:rPr>
               <a:t>C1: đoàn hệ tiến cứu</a:t>
             </a:r>
@@ -14356,8 +14278,8 @@
                 <a:solidFill>
                   <a:srgbClr val="000000"/>
                 </a:solidFill>
-                <a:latin typeface="Segoe UI"/>
-                <a:cs typeface="Segoe UI"/>
+                <a:latin typeface="Arial"/>
+                <a:cs typeface="Arial"/>
               </a:rPr>
               <a:t>C2: nhiễu do chỉ định</a:t>
             </a:r>
@@ -14378,8 +14300,8 @@
                 <a:solidFill>
                   <a:srgbClr val="000000"/>
                 </a:solidFill>
-                <a:latin typeface="Segoe UI"/>
-                <a:cs typeface="Segoe UI"/>
+                <a:latin typeface="Arial"/>
+                <a:cs typeface="Arial"/>
               </a:rPr>
               <a:t>C3: RR = 20/30 = 0.67; RD = 10%; NNT = 1/0.10 = 10</a:t>
             </a:r>
@@ -14425,8 +14347,8 @@
                 <a:solidFill>
                   <a:srgbClr val="6C3483"/>
                 </a:solidFill>
-                <a:latin typeface="Segoe UI"/>
-                <a:cs typeface="Segoe UI"/>
+                <a:latin typeface="Arial"/>
+                <a:cs typeface="Arial"/>
               </a:rPr>
               <a:t>SẢN PHẨM   </a:t>
             </a:r>
@@ -14435,8 +14357,8 @@
                 <a:solidFill>
                   <a:srgbClr val="000000"/>
                 </a:solidFill>
-                <a:latin typeface="Segoe UI"/>
-                <a:cs typeface="Segoe UI"/>
+                <a:latin typeface="Arial"/>
+                <a:cs typeface="Arial"/>
               </a:rPr>
               <a:t>Mọi người nắm lại thiết kế, yếu tố gây nhiễu và các số đo từ bảng 2x2</a:t>
             </a:r>
@@ -14473,7 +14395,7 @@
                     <a:lumMod val="50000"/>
                   </a:schemeClr>
                 </a:solidFill>
-                <a:latin typeface="Verdana"/>
+                <a:latin typeface="Arial"/>
               </a:rPr>
               <a:t>Neudata | #ClearDataClearImpact</a:t>
             </a:r>
@@ -14603,8 +14525,8 @@
                 <a:solidFill>
                   <a:srgbClr val="0D7377"/>
                 </a:solidFill>
-                <a:latin typeface="Segoe UI"/>
-                <a:cs typeface="Segoe UI"/>
+                <a:latin typeface="Arial"/>
+                <a:cs typeface="Arial"/>
               </a:rPr>
               <a:t>Nhật ký làm sạch: dấu vết kiểm toán của dữ liệu</a:t>
             </a:r>
@@ -14670,8 +14592,8 @@
                 <a:solidFill>
                   <a:srgbClr val="595959"/>
                 </a:solidFill>
-                <a:latin typeface="Segoe UI"/>
-                <a:cs typeface="Segoe UI"/>
+                <a:latin typeface="Arial"/>
+                <a:cs typeface="Arial"/>
               </a:rPr>
               <a:t>Course/Data/cleaning_log.md: mỗi thay đổi trên dữ liệu thô là một dòng.</a:t>
             </a:r>
@@ -14713,8 +14635,8 @@
                 <a:solidFill>
                   <a:srgbClr val="FFFFFF"/>
                 </a:solidFill>
-                <a:latin typeface="Segoe UI"/>
-                <a:cs typeface="Segoe UI"/>
+                <a:latin typeface="Arial"/>
+                <a:cs typeface="Arial"/>
               </a:rPr>
               <a:t>Nguyên tắc</a:t>
             </a:r>
@@ -14762,8 +14684,8 @@
                 <a:solidFill>
                   <a:srgbClr val="000000"/>
                 </a:solidFill>
-                <a:latin typeface="Segoe UI"/>
-                <a:cs typeface="Segoe UI"/>
+                <a:latin typeface="Arial"/>
+                <a:cs typeface="Arial"/>
               </a:rPr>
               <a:t>Không sửa tệp thô</a:t>
             </a:r>
@@ -14783,8 +14705,8 @@
                 <a:solidFill>
                   <a:srgbClr val="000000"/>
                 </a:solidFill>
-                <a:latin typeface="Segoe UI"/>
-                <a:cs typeface="Segoe UI"/>
+                <a:latin typeface="Arial"/>
+                <a:cs typeface="Arial"/>
               </a:rPr>
               <a:t>Thay đổi bằng script</a:t>
             </a:r>
@@ -14804,8 +14726,8 @@
                 <a:solidFill>
                   <a:srgbClr val="000000"/>
                 </a:solidFill>
-                <a:latin typeface="Segoe UI"/>
-                <a:cs typeface="Segoe UI"/>
+                <a:latin typeface="Arial"/>
+                <a:cs typeface="Arial"/>
               </a:rPr>
               <a:t>và được ghi lại</a:t>
             </a:r>
@@ -14847,8 +14769,8 @@
                 <a:solidFill>
                   <a:srgbClr val="FFFFFF"/>
                 </a:solidFill>
-                <a:latin typeface="Segoe UI"/>
-                <a:cs typeface="Segoe UI"/>
+                <a:latin typeface="Arial"/>
+                <a:cs typeface="Arial"/>
               </a:rPr>
               <a:t>Mỗi dòng ghi</a:t>
             </a:r>
@@ -14896,8 +14818,8 @@
                 <a:solidFill>
                   <a:srgbClr val="000000"/>
                 </a:solidFill>
-                <a:latin typeface="Segoe UI"/>
-                <a:cs typeface="Segoe UI"/>
+                <a:latin typeface="Arial"/>
+                <a:cs typeface="Arial"/>
               </a:rPr>
               <a:t>Vấn đề phát hiện</a:t>
             </a:r>
@@ -14917,8 +14839,8 @@
                 <a:solidFill>
                   <a:srgbClr val="000000"/>
                 </a:solidFill>
-                <a:latin typeface="Segoe UI"/>
-                <a:cs typeface="Segoe UI"/>
+                <a:latin typeface="Arial"/>
+                <a:cs typeface="Arial"/>
               </a:rPr>
               <a:t>Bao nhiêu</a:t>
             </a:r>
@@ -14938,8 +14860,8 @@
                 <a:solidFill>
                   <a:srgbClr val="000000"/>
                 </a:solidFill>
-                <a:latin typeface="Segoe UI"/>
-                <a:cs typeface="Segoe UI"/>
+                <a:latin typeface="Arial"/>
+                <a:cs typeface="Arial"/>
               </a:rPr>
               <a:t>Đã làm gì và vì sao</a:t>
             </a:r>
@@ -14981,8 +14903,8 @@
                 <a:solidFill>
                   <a:srgbClr val="FFFFFF"/>
                 </a:solidFill>
-                <a:latin typeface="Segoe UI"/>
-                <a:cs typeface="Segoe UI"/>
+                <a:latin typeface="Arial"/>
+                <a:cs typeface="Arial"/>
               </a:rPr>
               <a:t>Câu hỏi gửi cơ sở</a:t>
             </a:r>
@@ -15030,8 +14952,8 @@
                 <a:solidFill>
                   <a:srgbClr val="000000"/>
                 </a:solidFill>
-                <a:latin typeface="Segoe UI"/>
-                <a:cs typeface="Segoe UI"/>
+                <a:latin typeface="Arial"/>
+                <a:cs typeface="Arial"/>
               </a:rPr>
               <a:t>Giá trị vô lý →</a:t>
             </a:r>
@@ -15051,8 +14973,8 @@
                 <a:solidFill>
                   <a:srgbClr val="000000"/>
                 </a:solidFill>
-                <a:latin typeface="Segoe UI"/>
-                <a:cs typeface="Segoe UI"/>
+                <a:latin typeface="Arial"/>
+                <a:cs typeface="Arial"/>
               </a:rPr>
               <a:t>thiếu + hỏi lại cơ sở</a:t>
             </a:r>
@@ -15072,8 +14994,8 @@
                 <a:solidFill>
                   <a:srgbClr val="000000"/>
                 </a:solidFill>
-                <a:latin typeface="Segoe UI"/>
-                <a:cs typeface="Segoe UI"/>
+                <a:latin typeface="Arial"/>
+                <a:cs typeface="Arial"/>
               </a:rPr>
               <a:t>Bệnh nhân được giữ lại</a:t>
             </a:r>
@@ -15115,8 +15037,8 @@
                 <a:solidFill>
                   <a:srgbClr val="FFFFFF"/>
                 </a:solidFill>
-                <a:latin typeface="Segoe UI"/>
-                <a:cs typeface="Segoe UI"/>
+                <a:latin typeface="Arial"/>
+                <a:cs typeface="Arial"/>
               </a:rPr>
               <a:t>Còn lại</a:t>
             </a:r>
@@ -15164,8 +15086,8 @@
                 <a:solidFill>
                   <a:srgbClr val="000000"/>
                 </a:solidFill>
-                <a:latin typeface="Segoe UI"/>
-                <a:cs typeface="Segoe UI"/>
+                <a:latin typeface="Arial"/>
+                <a:cs typeface="Arial"/>
               </a:rPr>
               <a:t>Giá trị thiếu thật</a:t>
             </a:r>
@@ -15185,8 +15107,8 @@
                 <a:solidFill>
                   <a:srgbClr val="000000"/>
                 </a:solidFill>
-                <a:latin typeface="Segoe UI"/>
-                <a:cs typeface="Segoe UI"/>
+                <a:latin typeface="Arial"/>
+                <a:cs typeface="Arial"/>
               </a:rPr>
               <a:t>Lactat: 93/620 (15.0%)</a:t>
             </a:r>
@@ -15206,8 +15128,8 @@
                 <a:solidFill>
                   <a:srgbClr val="000000"/>
                 </a:solidFill>
-                <a:latin typeface="Segoe UI"/>
-                <a:cs typeface="Segoe UI"/>
+                <a:latin typeface="Arial"/>
+                <a:cs typeface="Arial"/>
               </a:rPr>
               <a:t>Biến khác 1% hoặc ít hơn</a:t>
             </a:r>
@@ -15251,8 +15173,8 @@
                 <a:solidFill>
                   <a:srgbClr val="FFFFFF"/>
                 </a:solidFill>
-                <a:latin typeface="Segoe UI"/>
-                <a:cs typeface="Segoe UI"/>
+                <a:latin typeface="Arial"/>
+                <a:cs typeface="Arial"/>
               </a:rPr>
               <a:t>THÔNG ĐIỆP CHÍNH   </a:t>
             </a:r>
@@ -15261,8 +15183,8 @@
                 <a:solidFill>
                   <a:srgbClr val="FFFFFF"/>
                 </a:solidFill>
-                <a:latin typeface="Segoe UI"/>
-                <a:cs typeface="Segoe UI"/>
+                <a:latin typeface="Arial"/>
+                <a:cs typeface="Arial"/>
               </a:rPr>
               <a:t>Người phản biện phải truy ngược được mọi con số về dữ liệu thô.</a:t>
             </a:r>
@@ -15299,7 +15221,7 @@
                     <a:lumMod val="50000"/>
                   </a:schemeClr>
                 </a:solidFill>
-                <a:latin typeface="Verdana"/>
+                <a:latin typeface="Arial"/>
               </a:rPr>
               <a:t>Neudata | #ClearDataClearImpact</a:t>
             </a:r>
@@ -15429,8 +15351,8 @@
                 <a:solidFill>
                   <a:srgbClr val="0D7377"/>
                 </a:solidFill>
-                <a:latin typeface="Segoe UI"/>
-                <a:cs typeface="Segoe UI"/>
+                <a:latin typeface="Arial"/>
+                <a:cs typeface="Arial"/>
               </a:rPr>
               <a:t>Năm nhóm, năm câu hỏi, một bộ dữ liệu</a:t>
             </a:r>
@@ -15496,8 +15418,8 @@
                 <a:solidFill>
                   <a:srgbClr val="595959"/>
                 </a:solidFill>
-                <a:latin typeface="Segoe UI"/>
-                <a:cs typeface="Segoe UI"/>
+                <a:latin typeface="Arial"/>
+                <a:cs typeface="Arial"/>
               </a:rPr>
               <a:t>Mỗi nhóm trả lời một câu hỏi và viết thành bản thảo ở Tuần 7-8.</a:t>
             </a:r>
@@ -15539,8 +15461,8 @@
                 <a:solidFill>
                   <a:srgbClr val="FFFFFF"/>
                 </a:solidFill>
-                <a:latin typeface="Segoe UI"/>
-                <a:cs typeface="Segoe UI"/>
+                <a:latin typeface="Arial"/>
+                <a:cs typeface="Arial"/>
               </a:rPr>
               <a:t>Q1 Tử vong</a:t>
             </a:r>
@@ -15588,8 +15510,8 @@
                 <a:solidFill>
                   <a:srgbClr val="000000"/>
                 </a:solidFill>
-                <a:latin typeface="Segoe UI"/>
-                <a:cs typeface="Segoe UI"/>
+                <a:latin typeface="Arial"/>
+                <a:cs typeface="Arial"/>
               </a:rPr>
               <a:t>Cân bằng dương và</a:t>
             </a:r>
@@ -15609,8 +15531,8 @@
                 <a:solidFill>
                   <a:srgbClr val="000000"/>
                 </a:solidFill>
-                <a:latin typeface="Segoe UI"/>
-                <a:cs typeface="Segoe UI"/>
+                <a:latin typeface="Arial"/>
+                <a:cs typeface="Arial"/>
               </a:rPr>
               <a:t>tử vong 28 ngày</a:t>
             </a:r>
@@ -15630,8 +15552,8 @@
                 <a:solidFill>
                   <a:srgbClr val="000000"/>
                 </a:solidFill>
-                <a:latin typeface="Segoe UI"/>
-                <a:cs typeface="Segoe UI"/>
+                <a:latin typeface="Arial"/>
+                <a:cs typeface="Arial"/>
               </a:rPr>
               <a:t>Logistic + KM/Cox</a:t>
             </a:r>
@@ -15673,8 +15595,8 @@
                 <a:solidFill>
                   <a:srgbClr val="FFFFFF"/>
                 </a:solidFill>
-                <a:latin typeface="Segoe UI"/>
-                <a:cs typeface="Segoe UI"/>
+                <a:latin typeface="Arial"/>
+                <a:cs typeface="Arial"/>
               </a:rPr>
               <a:t>Q2 AKI</a:t>
             </a:r>
@@ -15722,8 +15644,8 @@
                 <a:solidFill>
                   <a:srgbClr val="000000"/>
                 </a:solidFill>
-                <a:latin typeface="Segoe UI"/>
-                <a:cs typeface="Segoe UI"/>
+                <a:latin typeface="Arial"/>
+                <a:cs typeface="Arial"/>
               </a:rPr>
               <a:t>Cân bằng dịch và</a:t>
             </a:r>
@@ -15743,8 +15665,8 @@
                 <a:solidFill>
                   <a:srgbClr val="000000"/>
                 </a:solidFill>
-                <a:latin typeface="Segoe UI"/>
-                <a:cs typeface="Segoe UI"/>
+                <a:latin typeface="Arial"/>
+                <a:cs typeface="Arial"/>
               </a:rPr>
               <a:t>tổn thương thận cấp</a:t>
             </a:r>
@@ -15764,8 +15686,8 @@
                 <a:solidFill>
                   <a:srgbClr val="000000"/>
                 </a:solidFill>
-                <a:latin typeface="Segoe UI"/>
-                <a:cs typeface="Segoe UI"/>
+                <a:latin typeface="Arial"/>
+                <a:cs typeface="Arial"/>
               </a:rPr>
               <a:t>Logistic</a:t>
             </a:r>
@@ -15807,8 +15729,8 @@
                 <a:solidFill>
                   <a:srgbClr val="FFFFFF"/>
                 </a:solidFill>
-                <a:latin typeface="Segoe UI"/>
-                <a:cs typeface="Segoe UI"/>
+                <a:latin typeface="Arial"/>
+                <a:cs typeface="Arial"/>
               </a:rPr>
               <a:t>Q3 Thở máy</a:t>
             </a:r>
@@ -15856,8 +15778,8 @@
                 <a:solidFill>
                   <a:srgbClr val="000000"/>
                 </a:solidFill>
-                <a:latin typeface="Segoe UI"/>
-                <a:cs typeface="Segoe UI"/>
+                <a:latin typeface="Arial"/>
+                <a:cs typeface="Arial"/>
               </a:rPr>
               <a:t>Cân bằng dịch và</a:t>
             </a:r>
@@ -15877,8 +15799,8 @@
                 <a:solidFill>
                   <a:srgbClr val="000000"/>
                 </a:solidFill>
-                <a:latin typeface="Segoe UI"/>
-                <a:cs typeface="Segoe UI"/>
+                <a:latin typeface="Arial"/>
+                <a:cs typeface="Arial"/>
               </a:rPr>
               <a:t>số ngày không thở máy</a:t>
             </a:r>
@@ -15898,8 +15820,8 @@
                 <a:solidFill>
                   <a:srgbClr val="000000"/>
                 </a:solidFill>
-                <a:latin typeface="Segoe UI"/>
-                <a:cs typeface="Segoe UI"/>
+                <a:latin typeface="Arial"/>
+                <a:cs typeface="Arial"/>
               </a:rPr>
               <a:t>Phi tham số / tuyến tính</a:t>
             </a:r>
@@ -15941,8 +15863,8 @@
                 <a:solidFill>
                   <a:srgbClr val="FFFFFF"/>
                 </a:solidFill>
-                <a:latin typeface="Segoe UI"/>
-                <a:cs typeface="Segoe UI"/>
+                <a:latin typeface="Arial"/>
+                <a:cs typeface="Arial"/>
               </a:rPr>
               <a:t>Q4 Lactat</a:t>
             </a:r>
@@ -15990,8 +15912,8 @@
                 <a:solidFill>
                   <a:srgbClr val="000000"/>
                 </a:solidFill>
-                <a:latin typeface="Segoe UI"/>
-                <a:cs typeface="Segoe UI"/>
+                <a:latin typeface="Arial"/>
+                <a:cs typeface="Arial"/>
               </a:rPr>
               <a:t>Lactat và tử vong;</a:t>
             </a:r>
@@ -16011,8 +15933,8 @@
                 <a:solidFill>
                   <a:srgbClr val="000000"/>
                 </a:solidFill>
-                <a:latin typeface="Segoe UI"/>
-                <a:cs typeface="Segoe UI"/>
+                <a:latin typeface="Arial"/>
+                <a:cs typeface="Arial"/>
               </a:rPr>
               <a:t>lactat bị thiếu</a:t>
             </a:r>
@@ -16032,8 +15954,8 @@
                 <a:solidFill>
                   <a:srgbClr val="000000"/>
                 </a:solidFill>
-                <a:latin typeface="Segoe UI"/>
-                <a:cs typeface="Segoe UI"/>
+                <a:latin typeface="Arial"/>
+                <a:cs typeface="Arial"/>
               </a:rPr>
               <a:t>CC so với đa phép gán</a:t>
             </a:r>
@@ -16075,8 +15997,8 @@
                 <a:solidFill>
                   <a:srgbClr val="FFFFFF"/>
                 </a:solidFill>
-                <a:latin typeface="Segoe UI"/>
-                <a:cs typeface="Segoe UI"/>
+                <a:latin typeface="Arial"/>
+                <a:cs typeface="Arial"/>
               </a:rPr>
               <a:t>Q5 Nằm ICU</a:t>
             </a:r>
@@ -16124,8 +16046,8 @@
                 <a:solidFill>
                   <a:srgbClr val="000000"/>
                 </a:solidFill>
-                <a:latin typeface="Segoe UI"/>
-                <a:cs typeface="Segoe UI"/>
+                <a:latin typeface="Arial"/>
+                <a:cs typeface="Arial"/>
               </a:rPr>
               <a:t>Cân bằng và thời gian</a:t>
             </a:r>
@@ -16145,8 +16067,8 @@
                 <a:solidFill>
                   <a:srgbClr val="000000"/>
                 </a:solidFill>
-                <a:latin typeface="Segoe UI"/>
-                <a:cs typeface="Segoe UI"/>
+                <a:latin typeface="Arial"/>
+                <a:cs typeface="Arial"/>
               </a:rPr>
               <a:t>nằm ICU ở người sống</a:t>
             </a:r>
@@ -16166,8 +16088,8 @@
                 <a:solidFill>
                   <a:srgbClr val="000000"/>
                 </a:solidFill>
-                <a:latin typeface="Segoe UI"/>
-                <a:cs typeface="Segoe UI"/>
+                <a:latin typeface="Arial"/>
+                <a:cs typeface="Arial"/>
               </a:rPr>
               <a:t>Kết cục lệch</a:t>
             </a:r>
@@ -16211,8 +16133,8 @@
                 <a:solidFill>
                   <a:srgbClr val="FFFFFF"/>
                 </a:solidFill>
-                <a:latin typeface="Segoe UI"/>
-                <a:cs typeface="Segoe UI"/>
+                <a:latin typeface="Arial"/>
+                <a:cs typeface="Arial"/>
               </a:rPr>
               <a:t>THÔNG ĐIỆP CHÍNH   </a:t>
             </a:r>
@@ -16221,8 +16143,8 @@
                 <a:solidFill>
                   <a:srgbClr val="FFFFFF"/>
                 </a:solidFill>
-                <a:latin typeface="Segoe UI"/>
-                <a:cs typeface="Segoe UI"/>
+                <a:latin typeface="Arial"/>
+                <a:cs typeface="Arial"/>
               </a:rPr>
               <a:t>Câu hỏi của nhóm là bản thảo của nhóm: hãy làm chủ nó từ hôm nay.</a:t>
             </a:r>
@@ -16259,7 +16181,7 @@
                     <a:lumMod val="50000"/>
                   </a:schemeClr>
                 </a:solidFill>
-                <a:latin typeface="Verdana"/>
+                <a:latin typeface="Arial"/>
               </a:rPr>
               <a:t>Neudata | #ClearDataClearImpact</a:t>
             </a:r>
@@ -16389,8 +16311,8 @@
                 <a:solidFill>
                   <a:srgbClr val="0D7377"/>
                 </a:solidFill>
-                <a:latin typeface="Segoe UI"/>
-                <a:cs typeface="Segoe UI"/>
+                <a:latin typeface="Arial"/>
+                <a:cs typeface="Arial"/>
               </a:rPr>
               <a:t>Câu hỏi của nhóm</a:t>
             </a:r>
@@ -16460,8 +16382,8 @@
                 <a:solidFill>
                   <a:srgbClr val="FFFFFF"/>
                 </a:solidFill>
-                <a:latin typeface="Segoe UI"/>
-                <a:cs typeface="Segoe UI"/>
+                <a:latin typeface="Arial"/>
+                <a:cs typeface="Arial"/>
               </a:rPr>
               <a:t>LÀM VIỆC NHÓM   |   4 phút</a:t>
             </a:r>
@@ -16498,25 +16420,19 @@
               <a:spcBef>
                 <a:spcPts val="450"/>
               </a:spcBef>
-              <a:buNone/>
-            </a:pPr>
-            <a:r>
-              <a:rPr lang="en-US" sz="1650" b="1" dirty="0">
-                <a:solidFill>
-                  <a:srgbClr val="0D7377"/>
-                </a:solidFill>
-                <a:latin typeface="Segoe UI"/>
-                <a:cs typeface="Segoe UI"/>
-              </a:rPr>
-              <a:t>1.  </a:t>
-            </a:r>
+              <a:buClr>
+                <a:srgbClr val="0D7377"/>
+              </a:buClr>
+              <a:buFont typeface="Arial"/>
+              <a:buChar char="•"/>
+            </a:pPr>
             <a:r>
               <a:rPr lang="en-US" sz="1650" dirty="0">
                 <a:solidFill>
                   <a:srgbClr val="000000"/>
                 </a:solidFill>
-                <a:latin typeface="Segoe UI"/>
-                <a:cs typeface="Segoe UI"/>
+                <a:latin typeface="Arial"/>
+                <a:cs typeface="Arial"/>
               </a:rPr>
               <a:t>Đọc câu hỏi của nhóm trong gói kết quả (trang 1)</a:t>
             </a:r>
@@ -16529,25 +16445,19 @@
               <a:spcBef>
                 <a:spcPts val="450"/>
               </a:spcBef>
-              <a:buNone/>
-            </a:pPr>
-            <a:r>
-              <a:rPr lang="en-US" sz="1650" b="1" dirty="0">
-                <a:solidFill>
-                  <a:srgbClr val="0D7377"/>
-                </a:solidFill>
-                <a:latin typeface="Segoe UI"/>
-                <a:cs typeface="Segoe UI"/>
-              </a:rPr>
-              <a:t>2.  </a:t>
-            </a:r>
+              <a:buClr>
+                <a:srgbClr val="0D7377"/>
+              </a:buClr>
+              <a:buFont typeface="Arial"/>
+              <a:buChar char="•"/>
+            </a:pPr>
             <a:r>
               <a:rPr lang="en-US" sz="1650" dirty="0">
                 <a:solidFill>
                   <a:srgbClr val="000000"/>
                 </a:solidFill>
-                <a:latin typeface="Segoe UI"/>
-                <a:cs typeface="Segoe UI"/>
+                <a:latin typeface="Arial"/>
+                <a:cs typeface="Arial"/>
               </a:rPr>
               <a:t>Nêu kết cục và loại của nó; phơi nhiễm và loại của nó</a:t>
             </a:r>
@@ -16560,25 +16470,19 @@
               <a:spcBef>
                 <a:spcPts val="450"/>
               </a:spcBef>
-              <a:buNone/>
-            </a:pPr>
-            <a:r>
-              <a:rPr lang="en-US" sz="1650" b="1" dirty="0">
-                <a:solidFill>
-                  <a:srgbClr val="0D7377"/>
-                </a:solidFill>
-                <a:latin typeface="Segoe UI"/>
-                <a:cs typeface="Segoe UI"/>
-              </a:rPr>
-              <a:t>3.  </a:t>
-            </a:r>
+              <a:buClr>
+                <a:srgbClr val="0D7377"/>
+              </a:buClr>
+              <a:buFont typeface="Arial"/>
+              <a:buChar char="•"/>
+            </a:pPr>
             <a:r>
               <a:rPr lang="en-US" sz="1650" dirty="0">
                 <a:solidFill>
                   <a:srgbClr val="000000"/>
                 </a:solidFill>
-                <a:latin typeface="Segoe UI"/>
-                <a:cs typeface="Segoe UI"/>
+                <a:latin typeface="Arial"/>
+                <a:cs typeface="Arial"/>
               </a:rPr>
               <a:t>Tìm cả hai trong từ điển dữ liệu FLUID-ICU</a:t>
             </a:r>
@@ -16591,25 +16495,19 @@
               <a:spcBef>
                 <a:spcPts val="450"/>
               </a:spcBef>
-              <a:buNone/>
-            </a:pPr>
-            <a:r>
-              <a:rPr lang="en-US" sz="1650" b="1" dirty="0">
-                <a:solidFill>
-                  <a:srgbClr val="0D7377"/>
-                </a:solidFill>
-                <a:latin typeface="Segoe UI"/>
-                <a:cs typeface="Segoe UI"/>
-              </a:rPr>
-              <a:t>4.  </a:t>
-            </a:r>
+              <a:buClr>
+                <a:srgbClr val="0D7377"/>
+              </a:buClr>
+              <a:buFont typeface="Arial"/>
+              <a:buChar char="•"/>
+            </a:pPr>
             <a:r>
               <a:rPr lang="en-US" sz="1650" dirty="0">
                 <a:solidFill>
                   <a:srgbClr val="000000"/>
                 </a:solidFill>
-                <a:latin typeface="Segoe UI"/>
-                <a:cs typeface="Segoe UI"/>
+                <a:latin typeface="Arial"/>
+                <a:cs typeface="Arial"/>
               </a:rPr>
               <a:t>Viết câu hỏi thành một câu (PECO)</a:t>
             </a:r>
@@ -16653,8 +16551,8 @@
                 <a:solidFill>
                   <a:srgbClr val="0D7377"/>
                 </a:solidFill>
-                <a:latin typeface="Segoe UI"/>
-                <a:cs typeface="Segoe UI"/>
+                <a:latin typeface="Arial"/>
+                <a:cs typeface="Arial"/>
               </a:rPr>
               <a:t>Ví dụ (Q1)</a:t>
             </a:r>
@@ -16675,8 +16573,8 @@
                 <a:solidFill>
                   <a:srgbClr val="000000"/>
                 </a:solidFill>
-                <a:latin typeface="Segoe UI"/>
-                <a:cs typeface="Segoe UI"/>
+                <a:latin typeface="Arial"/>
+                <a:cs typeface="Arial"/>
               </a:rPr>
               <a:t>P: người lớn nhiễm khuẩn huyết ở ICU</a:t>
             </a:r>
@@ -16697,8 +16595,8 @@
                 <a:solidFill>
                   <a:srgbClr val="000000"/>
                 </a:solidFill>
-                <a:latin typeface="Segoe UI"/>
-                <a:cs typeface="Segoe UI"/>
+                <a:latin typeface="Arial"/>
+                <a:cs typeface="Arial"/>
               </a:rPr>
               <a:t>E: cân bằng dương đến ngày 3</a:t>
             </a:r>
@@ -16719,8 +16617,8 @@
                 <a:solidFill>
                   <a:srgbClr val="000000"/>
                 </a:solidFill>
-                <a:latin typeface="Segoe UI"/>
-                <a:cs typeface="Segoe UI"/>
+                <a:latin typeface="Arial"/>
+                <a:cs typeface="Arial"/>
               </a:rPr>
               <a:t>C: cân bằng âm</a:t>
             </a:r>
@@ -16741,8 +16639,8 @@
                 <a:solidFill>
                   <a:srgbClr val="000000"/>
                 </a:solidFill>
-                <a:latin typeface="Segoe UI"/>
-                <a:cs typeface="Segoe UI"/>
+                <a:latin typeface="Arial"/>
+                <a:cs typeface="Arial"/>
               </a:rPr>
               <a:t>O: tử vong đến ngày 28 (nhị phân)</a:t>
             </a:r>
@@ -16788,8 +16686,8 @@
                 <a:solidFill>
                   <a:srgbClr val="0D7377"/>
                 </a:solidFill>
-                <a:latin typeface="Segoe UI"/>
-                <a:cs typeface="Segoe UI"/>
+                <a:latin typeface="Arial"/>
+                <a:cs typeface="Arial"/>
               </a:rPr>
               <a:t>SẢN PHẨM   </a:t>
             </a:r>
@@ -16798,8 +16696,8 @@
                 <a:solidFill>
                   <a:srgbClr val="000000"/>
                 </a:solidFill>
-                <a:latin typeface="Segoe UI"/>
-                <a:cs typeface="Segoe UI"/>
+                <a:latin typeface="Arial"/>
+                <a:cs typeface="Arial"/>
               </a:rPr>
               <a:t>Một câu hỏi kèm loại kết cục và phơi nhiễm (bài 7)</a:t>
             </a:r>
@@ -16836,7 +16734,7 @@
                     <a:lumMod val="50000"/>
                   </a:schemeClr>
                 </a:solidFill>
-                <a:latin typeface="Verdana"/>
+                <a:latin typeface="Arial"/>
               </a:rPr>
               <a:t>Neudata | #ClearDataClearImpact</a:t>
             </a:r>
@@ -16966,8 +16864,8 @@
                 <a:solidFill>
                   <a:srgbClr val="0D7377"/>
                 </a:solidFill>
-                <a:latin typeface="Segoe UI"/>
-                <a:cs typeface="Segoe UI"/>
+                <a:latin typeface="Arial"/>
+                <a:cs typeface="Arial"/>
               </a:rPr>
               <a:t>Giải lao</a:t>
             </a:r>
@@ -17037,8 +16935,8 @@
                 <a:solidFill>
                   <a:srgbClr val="FFFFFF"/>
                 </a:solidFill>
-                <a:latin typeface="Segoe UI"/>
-                <a:cs typeface="Segoe UI"/>
+                <a:latin typeface="Arial"/>
+                <a:cs typeface="Arial"/>
               </a:rPr>
               <a:t>GIẢI LAO   |   15 phút</a:t>
             </a:r>
@@ -17075,25 +16973,19 @@
               <a:spcBef>
                 <a:spcPts val="450"/>
               </a:spcBef>
-              <a:buNone/>
-            </a:pPr>
-            <a:r>
-              <a:rPr lang="en-US" sz="1650" b="1" dirty="0">
-                <a:solidFill>
-                  <a:srgbClr val="8A99A3"/>
-                </a:solidFill>
-                <a:latin typeface="Segoe UI"/>
-                <a:cs typeface="Segoe UI"/>
-              </a:rPr>
-              <a:t>1.  </a:t>
-            </a:r>
+              <a:buClr>
+                <a:srgbClr val="8A99A3"/>
+              </a:buClr>
+              <a:buFont typeface="Arial"/>
+              <a:buChar char="•"/>
+            </a:pPr>
             <a:r>
               <a:rPr lang="en-US" sz="1650" dirty="0">
                 <a:solidFill>
                   <a:srgbClr val="000000"/>
                 </a:solidFill>
-                <a:latin typeface="Segoe UI"/>
-                <a:cs typeface="Segoe UI"/>
+                <a:latin typeface="Arial"/>
+                <a:cs typeface="Arial"/>
               </a:rPr>
               <a:t>Vận động, cà phê, hít thở không khí</a:t>
             </a:r>
@@ -17106,25 +16998,19 @@
               <a:spcBef>
                 <a:spcPts val="450"/>
               </a:spcBef>
-              <a:buNone/>
-            </a:pPr>
-            <a:r>
-              <a:rPr lang="en-US" sz="1650" b="1" dirty="0">
-                <a:solidFill>
-                  <a:srgbClr val="8A99A3"/>
-                </a:solidFill>
-                <a:latin typeface="Segoe UI"/>
-                <a:cs typeface="Segoe UI"/>
-              </a:rPr>
-              <a:t>2.  </a:t>
-            </a:r>
+              <a:buClr>
+                <a:srgbClr val="8A99A3"/>
+              </a:buClr>
+              <a:buFont typeface="Arial"/>
+              <a:buChar char="•"/>
+            </a:pPr>
             <a:r>
               <a:rPr lang="en-US" sz="1650" dirty="0">
                 <a:solidFill>
                   <a:srgbClr val="000000"/>
                 </a:solidFill>
-                <a:latin typeface="Segoe UI"/>
-                <a:cs typeface="Segoe UI"/>
+                <a:latin typeface="Arial"/>
+                <a:cs typeface="Arial"/>
               </a:rPr>
               <a:t>Các nhóm: xem qua câu hỏi và gói kết quả của nhóm</a:t>
             </a:r>
@@ -17137,25 +17023,19 @@
               <a:spcBef>
                 <a:spcPts val="450"/>
               </a:spcBef>
-              <a:buNone/>
-            </a:pPr>
-            <a:r>
-              <a:rPr lang="en-US" sz="1650" b="1" dirty="0">
-                <a:solidFill>
-                  <a:srgbClr val="8A99A3"/>
-                </a:solidFill>
-                <a:latin typeface="Segoe UI"/>
-                <a:cs typeface="Segoe UI"/>
-              </a:rPr>
-              <a:t>3.  </a:t>
-            </a:r>
+              <a:buClr>
+                <a:srgbClr val="8A99A3"/>
+              </a:buClr>
+              <a:buFont typeface="Arial"/>
+              <a:buChar char="•"/>
+            </a:pPr>
             <a:r>
               <a:rPr lang="en-US" sz="1650" dirty="0">
                 <a:solidFill>
                   <a:srgbClr val="000000"/>
                 </a:solidFill>
-                <a:latin typeface="Segoe UI"/>
-                <a:cs typeface="Segoe UI"/>
+                <a:latin typeface="Arial"/>
+                <a:cs typeface="Arial"/>
               </a:rPr>
               <a:t>Chúng ta bắt đầu lại với 5.3: mô tả và trình bày dữ liệu</a:t>
             </a:r>
@@ -17199,8 +17079,8 @@
                 <a:solidFill>
                   <a:srgbClr val="8A99A3"/>
                 </a:solidFill>
-                <a:latin typeface="Segoe UI"/>
-                <a:cs typeface="Segoe UI"/>
+                <a:latin typeface="Arial"/>
+                <a:cs typeface="Arial"/>
               </a:rPr>
               <a:t>Sau giải lao</a:t>
             </a:r>
@@ -17221,8 +17101,8 @@
                 <a:solidFill>
                   <a:srgbClr val="000000"/>
                 </a:solidFill>
-                <a:latin typeface="Segoe UI"/>
-                <a:cs typeface="Segoe UI"/>
+                <a:latin typeface="Arial"/>
+                <a:cs typeface="Arial"/>
               </a:rPr>
               <a:t>Trung bình hay trung vị?</a:t>
             </a:r>
@@ -17243,8 +17123,8 @@
                 <a:solidFill>
                   <a:srgbClr val="000000"/>
                 </a:solidFill>
-                <a:latin typeface="Segoe UI"/>
-                <a:cs typeface="Segoe UI"/>
+                <a:latin typeface="Arial"/>
+                <a:cs typeface="Arial"/>
               </a:rPr>
               <a:t>SD hay IQR?</a:t>
             </a:r>
@@ -17265,8 +17145,8 @@
                 <a:solidFill>
                   <a:srgbClr val="000000"/>
                 </a:solidFill>
-                <a:latin typeface="Segoe UI"/>
-                <a:cs typeface="Segoe UI"/>
+                <a:latin typeface="Arial"/>
+                <a:cs typeface="Arial"/>
               </a:rPr>
               <a:t>Biểu đồ nào?</a:t>
             </a:r>
@@ -17287,8 +17167,8 @@
                 <a:solidFill>
                   <a:srgbClr val="000000"/>
                 </a:solidFill>
-                <a:latin typeface="Segoe UI"/>
-                <a:cs typeface="Segoe UI"/>
+                <a:latin typeface="Arial"/>
+                <a:cs typeface="Arial"/>
               </a:rPr>
               <a:t>Biểu đồ tốt và chưa tốt</a:t>
             </a:r>
@@ -17309,8 +17189,8 @@
                 <a:solidFill>
                   <a:srgbClr val="000000"/>
                 </a:solidFill>
-                <a:latin typeface="Segoe UI"/>
-                <a:cs typeface="Segoe UI"/>
+                <a:latin typeface="Arial"/>
+                <a:cs typeface="Arial"/>
               </a:rPr>
               <a:t>Bảng 1</a:t>
             </a:r>
@@ -17347,7 +17227,7 @@
                     <a:lumMod val="50000"/>
                   </a:schemeClr>
                 </a:solidFill>
-                <a:latin typeface="Verdana"/>
+                <a:latin typeface="Arial"/>
               </a:rPr>
               <a:t>Neudata | #ClearDataClearImpact</a:t>
             </a:r>
@@ -17477,8 +17357,8 @@
                 <a:solidFill>
                   <a:srgbClr val="0D7377"/>
                 </a:solidFill>
-                <a:latin typeface="Segoe UI"/>
-                <a:cs typeface="Segoe UI"/>
+                <a:latin typeface="Arial"/>
+                <a:cs typeface="Arial"/>
               </a:rPr>
               <a:t>5.3 Mô tả và trình bày dữ liệu</a:t>
             </a:r>
@@ -17547,8 +17427,8 @@
                 <a:solidFill>
                   <a:srgbClr val="0D7377"/>
                 </a:solidFill>
-                <a:latin typeface="Segoe UI"/>
-                <a:cs typeface="Segoe UI"/>
+                <a:latin typeface="Arial"/>
+                <a:cs typeface="Arial"/>
               </a:rPr>
               <a:t>Trước khi so sánh các nhóm, hãy mô tả chúng.</a:t>
             </a:r>
@@ -17565,8 +17445,8 @@
                 <a:solidFill>
                   <a:srgbClr val="595959"/>
                 </a:solidFill>
-                <a:latin typeface="Segoe UI"/>
-                <a:cs typeface="Segoe UI"/>
+                <a:latin typeface="Arial"/>
+                <a:cs typeface="Arial"/>
               </a:rPr>
               <a:t>5.3 Mô tả và trình bày dữ liệu  |  35 phút</a:t>
             </a:r>
@@ -17603,7 +17483,7 @@
                     <a:lumMod val="50000"/>
                   </a:schemeClr>
                 </a:solidFill>
-                <a:latin typeface="Verdana"/>
+                <a:latin typeface="Arial"/>
               </a:rPr>
               <a:t>Neudata | #ClearDataClearImpact</a:t>
             </a:r>
@@ -17733,8 +17613,8 @@
                 <a:solidFill>
                   <a:srgbClr val="0D7377"/>
                 </a:solidFill>
-                <a:latin typeface="Segoe UI"/>
-                <a:cs typeface="Segoe UI"/>
+                <a:latin typeface="Arial"/>
+                <a:cs typeface="Arial"/>
               </a:rPr>
               <a:t>Ví dụ minh họa: tính trung bình và trung vị bằng tay</a:t>
             </a:r>
@@ -17800,8 +17680,8 @@
                 <a:solidFill>
                   <a:srgbClr val="595959"/>
                 </a:solidFill>
-                <a:latin typeface="Segoe UI"/>
-                <a:cs typeface="Segoe UI"/>
+                <a:latin typeface="Arial"/>
+                <a:cs typeface="Arial"/>
               </a:rPr>
               <a:t>Thời gian nằm ICU của 7 bệnh nhân (ngày): 1, 2, 2, 3, 4, 6, 24</a:t>
             </a:r>
@@ -17845,8 +17725,8 @@
                 <a:solidFill>
                   <a:srgbClr val="FFFFFF"/>
                 </a:solidFill>
-                <a:latin typeface="Segoe UI"/>
-                <a:cs typeface="Segoe UI"/>
+                <a:latin typeface="Arial"/>
+                <a:cs typeface="Arial"/>
               </a:rPr>
               <a:t>Xếp hàng</a:t>
             </a:r>
@@ -17894,8 +17774,8 @@
                 <a:solidFill>
                   <a:srgbClr val="000000"/>
                 </a:solidFill>
-                <a:latin typeface="Segoe UI"/>
-                <a:cs typeface="Segoe UI"/>
+                <a:latin typeface="Arial"/>
+                <a:cs typeface="Arial"/>
               </a:rPr>
               <a:t>Sắp xếp từ ngắn</a:t>
             </a:r>
@@ -17915,8 +17795,8 @@
                 <a:solidFill>
                   <a:srgbClr val="000000"/>
                 </a:solidFill>
-                <a:latin typeface="Segoe UI"/>
-                <a:cs typeface="Segoe UI"/>
+                <a:latin typeface="Arial"/>
+                <a:cs typeface="Arial"/>
               </a:rPr>
               <a:t>đến dài</a:t>
             </a:r>
@@ -17960,8 +17840,8 @@
                 <a:solidFill>
                   <a:srgbClr val="FFFFFF"/>
                 </a:solidFill>
-                <a:latin typeface="Segoe UI"/>
-                <a:cs typeface="Segoe UI"/>
+                <a:latin typeface="Arial"/>
+                <a:cs typeface="Arial"/>
               </a:rPr>
               <a:t>Trung vị</a:t>
             </a:r>
@@ -18009,8 +17889,8 @@
                 <a:solidFill>
                   <a:srgbClr val="000000"/>
                 </a:solidFill>
-                <a:latin typeface="Segoe UI"/>
-                <a:cs typeface="Segoe UI"/>
+                <a:latin typeface="Arial"/>
+                <a:cs typeface="Arial"/>
               </a:rPr>
               <a:t>Người thứ 4 trong 7:</a:t>
             </a:r>
@@ -18030,8 +17910,8 @@
                 <a:solidFill>
                   <a:srgbClr val="000000"/>
                 </a:solidFill>
-                <a:latin typeface="Segoe UI"/>
-                <a:cs typeface="Segoe UI"/>
+                <a:latin typeface="Arial"/>
+                <a:cs typeface="Arial"/>
               </a:rPr>
               <a:t>3 ngày</a:t>
             </a:r>
@@ -18075,8 +17955,8 @@
                 <a:solidFill>
                   <a:srgbClr val="FFFFFF"/>
                 </a:solidFill>
-                <a:latin typeface="Segoe UI"/>
-                <a:cs typeface="Segoe UI"/>
+                <a:latin typeface="Arial"/>
+                <a:cs typeface="Arial"/>
               </a:rPr>
               <a:t>Trung bình</a:t>
             </a:r>
@@ -18124,8 +18004,8 @@
                 <a:solidFill>
                   <a:srgbClr val="000000"/>
                 </a:solidFill>
-                <a:latin typeface="Segoe UI"/>
-                <a:cs typeface="Segoe UI"/>
+                <a:latin typeface="Arial"/>
+                <a:cs typeface="Arial"/>
               </a:rPr>
               <a:t>42 ngày / 7 bệnh nhân</a:t>
             </a:r>
@@ -18145,8 +18025,8 @@
                 <a:solidFill>
                   <a:srgbClr val="000000"/>
                 </a:solidFill>
-                <a:latin typeface="Segoe UI"/>
-                <a:cs typeface="Segoe UI"/>
+                <a:latin typeface="Arial"/>
+                <a:cs typeface="Arial"/>
               </a:rPr>
               <a:t>= 6 ngày</a:t>
             </a:r>
@@ -18190,8 +18070,8 @@
                 <a:solidFill>
                   <a:srgbClr val="FFFFFF"/>
                 </a:solidFill>
-                <a:latin typeface="Segoe UI"/>
-                <a:cs typeface="Segoe UI"/>
+                <a:latin typeface="Arial"/>
+                <a:cs typeface="Arial"/>
               </a:rPr>
               <a:t>So sánh</a:t>
             </a:r>
@@ -18239,8 +18119,8 @@
                 <a:solidFill>
                   <a:srgbClr val="000000"/>
                 </a:solidFill>
-                <a:latin typeface="Segoe UI"/>
-                <a:cs typeface="Segoe UI"/>
+                <a:latin typeface="Arial"/>
+                <a:cs typeface="Arial"/>
               </a:rPr>
               <a:t>Một ca 24 ngày</a:t>
             </a:r>
@@ -18260,8 +18140,8 @@
                 <a:solidFill>
                   <a:srgbClr val="000000"/>
                 </a:solidFill>
-                <a:latin typeface="Segoe UI"/>
-                <a:cs typeface="Segoe UI"/>
+                <a:latin typeface="Arial"/>
+                <a:cs typeface="Arial"/>
               </a:rPr>
               <a:t>làm trung bình gấp đôi</a:t>
             </a:r>
@@ -18305,8 +18185,8 @@
                 <a:solidFill>
                   <a:srgbClr val="FFFFFF"/>
                 </a:solidFill>
-                <a:latin typeface="Segoe UI"/>
-                <a:cs typeface="Segoe UI"/>
+                <a:latin typeface="Arial"/>
+                <a:cs typeface="Arial"/>
               </a:rPr>
               <a:t>THÔNG ĐIỆP CHÍNH   </a:t>
             </a:r>
@@ -18315,8 +18195,8 @@
                 <a:solidFill>
                   <a:srgbClr val="FFFFFF"/>
                 </a:solidFill>
-                <a:latin typeface="Segoe UI"/>
-                <a:cs typeface="Segoe UI"/>
+                <a:latin typeface="Arial"/>
+                <a:cs typeface="Arial"/>
               </a:rPr>
               <a:t>Một ca nằm rất lâu làm trung bình thay đổi nhiều, trung vị thì không.</a:t>
             </a:r>
@@ -18353,7 +18233,7 @@
                     <a:lumMod val="50000"/>
                   </a:schemeClr>
                 </a:solidFill>
-                <a:latin typeface="Verdana"/>
+                <a:latin typeface="Arial"/>
               </a:rPr>
               <a:t>Neudata | #ClearDataClearImpact</a:t>
             </a:r>
@@ -18483,8 +18363,8 @@
                 <a:solidFill>
                   <a:srgbClr val="0D7377"/>
                 </a:solidFill>
-                <a:latin typeface="Segoe UI"/>
-                <a:cs typeface="Segoe UI"/>
+                <a:latin typeface="Arial"/>
+                <a:cs typeface="Arial"/>
               </a:rPr>
               <a:t>Trung bình hay trung vị? Hãy nhìn hình dạng trước</a:t>
             </a:r>
@@ -18580,8 +18460,8 @@
                 <a:solidFill>
                   <a:srgbClr val="FFFFFF"/>
                 </a:solidFill>
-                <a:latin typeface="Segoe UI"/>
-                <a:cs typeface="Segoe UI"/>
+                <a:latin typeface="Arial"/>
+                <a:cs typeface="Arial"/>
               </a:rPr>
               <a:t>THÔNG ĐIỆP CHÍNH   </a:t>
             </a:r>
@@ -18590,8 +18470,8 @@
                 <a:solidFill>
                   <a:srgbClr val="FFFFFF"/>
                 </a:solidFill>
-                <a:latin typeface="Segoe UI"/>
-                <a:cs typeface="Segoe UI"/>
+                <a:latin typeface="Arial"/>
+                <a:cs typeface="Arial"/>
               </a:rPr>
               <a:t>Với dữ liệu lệch như thời gian nằm viện, trung vị mô tả bệnh nhân điển hình.</a:t>
             </a:r>
@@ -18628,7 +18508,7 @@
                     <a:lumMod val="50000"/>
                   </a:schemeClr>
                 </a:solidFill>
-                <a:latin typeface="Verdana"/>
+                <a:latin typeface="Arial"/>
               </a:rPr>
               <a:t>Neudata | #ClearDataClearImpact</a:t>
             </a:r>
@@ -18758,8 +18638,8 @@
                 <a:solidFill>
                   <a:srgbClr val="0D7377"/>
                 </a:solidFill>
-                <a:latin typeface="Segoe UI"/>
-                <a:cs typeface="Segoe UI"/>
+                <a:latin typeface="Arial"/>
+                <a:cs typeface="Arial"/>
               </a:rPr>
               <a:t>Độ phân tán: SD cho dữ liệu đối xứng, IQR cho dữ liệu lệch</a:t>
             </a:r>
@@ -18855,8 +18735,8 @@
                 <a:solidFill>
                   <a:srgbClr val="FFFFFF"/>
                 </a:solidFill>
-                <a:latin typeface="Segoe UI"/>
-                <a:cs typeface="Segoe UI"/>
+                <a:latin typeface="Arial"/>
+                <a:cs typeface="Arial"/>
               </a:rPr>
               <a:t>THÔNG ĐIỆP CHÍNH   </a:t>
             </a:r>
@@ -18865,8 +18745,8 @@
                 <a:solidFill>
                   <a:srgbClr val="FFFFFF"/>
                 </a:solidFill>
-                <a:latin typeface="Segoe UI"/>
-                <a:cs typeface="Segoe UI"/>
+                <a:latin typeface="Arial"/>
+                <a:cs typeface="Arial"/>
               </a:rPr>
               <a:t>Báo cáo trung bình (SD) hoặc trung vị (IQR): không trộn lẫn hai cặp.</a:t>
             </a:r>
@@ -18903,7 +18783,7 @@
                     <a:lumMod val="50000"/>
                   </a:schemeClr>
                 </a:solidFill>
-                <a:latin typeface="Verdana"/>
+                <a:latin typeface="Arial"/>
               </a:rPr>
               <a:t>Neudata | #ClearDataClearImpact</a:t>
             </a:r>
@@ -19033,8 +18913,8 @@
                 <a:solidFill>
                   <a:srgbClr val="0D7377"/>
                 </a:solidFill>
-                <a:latin typeface="Segoe UI"/>
-                <a:cs typeface="Segoe UI"/>
+                <a:latin typeface="Arial"/>
+                <a:cs typeface="Arial"/>
               </a:rPr>
               <a:t>Vì sao là hai hình dạng này? Chúng bao phủ phần lớn dữ liệu lâm sàng</a:t>
             </a:r>
@@ -19130,8 +19010,8 @@
                 <a:solidFill>
                   <a:srgbClr val="FFFFFF"/>
                 </a:solidFill>
-                <a:latin typeface="Segoe UI"/>
-                <a:cs typeface="Segoe UI"/>
+                <a:latin typeface="Arial"/>
+                <a:cs typeface="Arial"/>
               </a:rPr>
               <a:t>THÔNG ĐIỆP CHÍNH   </a:t>
             </a:r>
@@ -19140,8 +19020,8 @@
                 <a:solidFill>
                   <a:srgbClr val="FFFFFF"/>
                 </a:solidFill>
-                <a:latin typeface="Segoe UI"/>
-                <a:cs typeface="Segoe UI"/>
+                <a:latin typeface="Arial"/>
+                <a:cs typeface="Arial"/>
               </a:rPr>
               <a:t>Hầu hết số đo lâm sàng tập trung quanh một giá trị điển hình hoặc có đuôi dài. Hãy kiểm tra.</a:t>
             </a:r>
@@ -19178,7 +19058,7 @@
                     <a:lumMod val="50000"/>
                   </a:schemeClr>
                 </a:solidFill>
-                <a:latin typeface="Verdana"/>
+                <a:latin typeface="Arial"/>
               </a:rPr>
               <a:t>Neudata | #ClearDataClearImpact</a:t>
             </a:r>
@@ -19308,8 +19188,8 @@
                 <a:solidFill>
                   <a:srgbClr val="0D7377"/>
                 </a:solidFill>
-                <a:latin typeface="Segoe UI"/>
-                <a:cs typeface="Segoe UI"/>
+                <a:latin typeface="Arial"/>
+                <a:cs typeface="Arial"/>
               </a:rPr>
               <a:t>Kiểm tra nhanh: tóm tắt bằng gì?</a:t>
             </a:r>
@@ -19379,8 +19259,8 @@
                 <a:solidFill>
                   <a:srgbClr val="FFFFFF"/>
                 </a:solidFill>
-                <a:latin typeface="Segoe UI"/>
-                <a:cs typeface="Segoe UI"/>
+                <a:latin typeface="Arial"/>
+                <a:cs typeface="Arial"/>
               </a:rPr>
               <a:t>CÂU HỎI NHANH   |   3 phút</a:t>
             </a:r>
@@ -19417,25 +19297,19 @@
               <a:spcBef>
                 <a:spcPts val="450"/>
               </a:spcBef>
-              <a:buNone/>
-            </a:pPr>
-            <a:r>
-              <a:rPr lang="en-US" sz="1650" b="1" dirty="0">
-                <a:solidFill>
-                  <a:srgbClr val="6C3483"/>
-                </a:solidFill>
-                <a:latin typeface="Segoe UI"/>
-                <a:cs typeface="Segoe UI"/>
-              </a:rPr>
-              <a:t>1.  </a:t>
-            </a:r>
+              <a:buClr>
+                <a:srgbClr val="6C3483"/>
+              </a:buClr>
+              <a:buFont typeface="Arial"/>
+              <a:buChar char="•"/>
+            </a:pPr>
             <a:r>
               <a:rPr lang="en-US" sz="1650" dirty="0">
                 <a:solidFill>
                   <a:srgbClr val="000000"/>
                 </a:solidFill>
-                <a:latin typeface="Segoe UI"/>
-                <a:cs typeface="Segoe UI"/>
+                <a:latin typeface="Arial"/>
+                <a:cs typeface="Arial"/>
               </a:rPr>
               <a:t>Thời gian nằm ICU của 200 bệnh nhân: trung bình (SD) hay trung vị (IQR)?</a:t>
             </a:r>
@@ -19448,25 +19322,19 @@
               <a:spcBef>
                 <a:spcPts val="450"/>
               </a:spcBef>
-              <a:buNone/>
-            </a:pPr>
-            <a:r>
-              <a:rPr lang="en-US" sz="1650" b="1" dirty="0">
-                <a:solidFill>
-                  <a:srgbClr val="6C3483"/>
-                </a:solidFill>
-                <a:latin typeface="Segoe UI"/>
-                <a:cs typeface="Segoe UI"/>
-              </a:rPr>
-              <a:t>2.  </a:t>
-            </a:r>
+              <a:buClr>
+                <a:srgbClr val="6C3483"/>
+              </a:buClr>
+              <a:buFont typeface="Arial"/>
+              <a:buChar char="•"/>
+            </a:pPr>
             <a:r>
               <a:rPr lang="en-US" sz="1650" dirty="0">
                 <a:solidFill>
                   <a:srgbClr val="000000"/>
                 </a:solidFill>
-                <a:latin typeface="Segoe UI"/>
-                <a:cs typeface="Segoe UI"/>
+                <a:latin typeface="Arial"/>
+                <a:cs typeface="Arial"/>
               </a:rPr>
               <a:t>Tuổi của 200 bệnh nhân ICU người lớn, hình chuông: trung bình (SD) hay trung vị (IQR)?</a:t>
             </a:r>
@@ -19479,25 +19347,19 @@
               <a:spcBef>
                 <a:spcPts val="450"/>
               </a:spcBef>
-              <a:buNone/>
-            </a:pPr>
-            <a:r>
-              <a:rPr lang="en-US" sz="1650" b="1" dirty="0">
-                <a:solidFill>
-                  <a:srgbClr val="6C3483"/>
-                </a:solidFill>
-                <a:latin typeface="Segoe UI"/>
-                <a:cs typeface="Segoe UI"/>
-              </a:rPr>
-              <a:t>3.  </a:t>
-            </a:r>
+              <a:buClr>
+                <a:srgbClr val="6C3483"/>
+              </a:buClr>
+              <a:buFont typeface="Arial"/>
+              <a:buChar char="•"/>
+            </a:pPr>
             <a:r>
               <a:rPr lang="en-US" sz="1650" dirty="0">
                 <a:solidFill>
                   <a:srgbClr val="000000"/>
                 </a:solidFill>
-                <a:latin typeface="Segoe UI"/>
-                <a:cs typeface="Segoe UI"/>
+                <a:latin typeface="Arial"/>
+                <a:cs typeface="Arial"/>
               </a:rPr>
               <a:t>Thở máy lúc nhập viện (có/không): tóm tắt bằng gì?</a:t>
             </a:r>
@@ -19510,25 +19372,19 @@
               <a:spcBef>
                 <a:spcPts val="450"/>
               </a:spcBef>
-              <a:buNone/>
-            </a:pPr>
-            <a:r>
-              <a:rPr lang="en-US" sz="1650" b="1" dirty="0">
-                <a:solidFill>
-                  <a:srgbClr val="6C3483"/>
-                </a:solidFill>
-                <a:latin typeface="Segoe UI"/>
-                <a:cs typeface="Segoe UI"/>
-              </a:rPr>
-              <a:t>4.  </a:t>
-            </a:r>
+              <a:buClr>
+                <a:srgbClr val="6C3483"/>
+              </a:buClr>
+              <a:buFont typeface="Arial"/>
+              <a:buChar char="•"/>
+            </a:pPr>
             <a:r>
               <a:rPr lang="en-US" sz="1650" dirty="0">
                 <a:solidFill>
                   <a:srgbClr val="000000"/>
                 </a:solidFill>
-                <a:latin typeface="Segoe UI"/>
-                <a:cs typeface="Segoe UI"/>
+                <a:latin typeface="Arial"/>
+                <a:cs typeface="Arial"/>
               </a:rPr>
               <a:t>Loét tì đè giai đoạn 1 đến 4: tóm tắt bằng gì, biểu đồ nào?</a:t>
             </a:r>
@@ -19572,8 +19428,8 @@
                 <a:solidFill>
                   <a:srgbClr val="6C3483"/>
                 </a:solidFill>
-                <a:latin typeface="Segoe UI"/>
-                <a:cs typeface="Segoe UI"/>
+                <a:latin typeface="Arial"/>
+                <a:cs typeface="Arial"/>
               </a:rPr>
               <a:t>Đáp án</a:t>
             </a:r>
@@ -19594,8 +19450,8 @@
                 <a:solidFill>
                   <a:srgbClr val="000000"/>
                 </a:solidFill>
-                <a:latin typeface="Segoe UI"/>
-                <a:cs typeface="Segoe UI"/>
+                <a:latin typeface="Arial"/>
+                <a:cs typeface="Arial"/>
               </a:rPr>
               <a:t>Thời gian nằm ICU: trung vị (IQR)</a:t>
             </a:r>
@@ -19616,8 +19472,8 @@
                 <a:solidFill>
                   <a:srgbClr val="000000"/>
                 </a:solidFill>
-                <a:latin typeface="Segoe UI"/>
-                <a:cs typeface="Segoe UI"/>
+                <a:latin typeface="Arial"/>
+                <a:cs typeface="Arial"/>
               </a:rPr>
               <a:t>Tuổi: trung bình (SD)</a:t>
             </a:r>
@@ -19638,8 +19494,8 @@
                 <a:solidFill>
                   <a:srgbClr val="000000"/>
                 </a:solidFill>
-                <a:latin typeface="Segoe UI"/>
-                <a:cs typeface="Segoe UI"/>
+                <a:latin typeface="Arial"/>
+                <a:cs typeface="Arial"/>
               </a:rPr>
               <a:t>Thở máy: n (%)</a:t>
             </a:r>
@@ -19660,8 +19516,8 @@
                 <a:solidFill>
                   <a:srgbClr val="000000"/>
                 </a:solidFill>
-                <a:latin typeface="Segoe UI"/>
-                <a:cs typeface="Segoe UI"/>
+                <a:latin typeface="Arial"/>
+                <a:cs typeface="Arial"/>
               </a:rPr>
               <a:t>Giai đoạn: n (%) mỗi giai đoạn, biểu đồ cột</a:t>
             </a:r>
@@ -19707,8 +19563,8 @@
                 <a:solidFill>
                   <a:srgbClr val="6C3483"/>
                 </a:solidFill>
-                <a:latin typeface="Segoe UI"/>
-                <a:cs typeface="Segoe UI"/>
+                <a:latin typeface="Arial"/>
+                <a:cs typeface="Arial"/>
               </a:rPr>
               <a:t>SẢN PHẨM   </a:t>
             </a:r>
@@ -19717,8 +19573,8 @@
                 <a:solidFill>
                   <a:srgbClr val="000000"/>
                 </a:solidFill>
-                <a:latin typeface="Segoe UI"/>
-                <a:cs typeface="Segoe UI"/>
+                <a:latin typeface="Arial"/>
+                <a:cs typeface="Arial"/>
               </a:rPr>
               <a:t>Mọi học viên chọn đúng cách tóm tắt cho từng loại biến số</a:t>
             </a:r>
@@ -19755,7 +19611,7 @@
                     <a:lumMod val="50000"/>
                   </a:schemeClr>
                 </a:solidFill>
-                <a:latin typeface="Verdana"/>
+                <a:latin typeface="Arial"/>
               </a:rPr>
               <a:t>Neudata | #ClearDataClearImpact</a:t>
             </a:r>
@@ -19885,8 +19741,8 @@
                 <a:solidFill>
                   <a:srgbClr val="0D7377"/>
                 </a:solidFill>
-                <a:latin typeface="Segoe UI"/>
-                <a:cs typeface="Segoe UI"/>
+                <a:latin typeface="Arial"/>
+                <a:cs typeface="Arial"/>
               </a:rPr>
               <a:t>5.1 Dữ liệu tốt từ khâu thiết kế</a:t>
             </a:r>
@@ -19955,8 +19811,8 @@
                 <a:solidFill>
                   <a:srgbClr val="0D7377"/>
                 </a:solidFill>
-                <a:latin typeface="Segoe UI"/>
-                <a:cs typeface="Segoe UI"/>
+                <a:latin typeface="Arial"/>
+                <a:cs typeface="Arial"/>
               </a:rPr>
               <a:t>Thống kê giỏi đến đâu cũng không cứu được dữ liệu xấu.</a:t>
             </a:r>
@@ -19973,8 +19829,8 @@
                 <a:solidFill>
                   <a:srgbClr val="595959"/>
                 </a:solidFill>
-                <a:latin typeface="Segoe UI"/>
-                <a:cs typeface="Segoe UI"/>
+                <a:latin typeface="Arial"/>
+                <a:cs typeface="Arial"/>
               </a:rPr>
               <a:t>5.1 Dữ liệu tốt từ khâu thiết kế  |  35 phút</a:t>
             </a:r>
@@ -20011,7 +19867,7 @@
                     <a:lumMod val="50000"/>
                   </a:schemeClr>
                 </a:solidFill>
-                <a:latin typeface="Verdana"/>
+                <a:latin typeface="Arial"/>
               </a:rPr>
               <a:t>Neudata | #ClearDataClearImpact</a:t>
             </a:r>
@@ -20141,8 +19997,8 @@
                 <a:solidFill>
                   <a:srgbClr val="0D7377"/>
                 </a:solidFill>
-                <a:latin typeface="Segoe UI"/>
-                <a:cs typeface="Segoe UI"/>
+                <a:latin typeface="Arial"/>
+                <a:cs typeface="Arial"/>
               </a:rPr>
               <a:t>Biểu đồ nào cho loại dữ liệu nào?</a:t>
             </a:r>
@@ -20238,8 +20094,8 @@
                 <a:solidFill>
                   <a:srgbClr val="FFFFFF"/>
                 </a:solidFill>
-                <a:latin typeface="Segoe UI"/>
-                <a:cs typeface="Segoe UI"/>
+                <a:latin typeface="Arial"/>
+                <a:cs typeface="Arial"/>
               </a:rPr>
               <a:t>THÔNG ĐIỆP CHÍNH   </a:t>
             </a:r>
@@ -20248,8 +20104,8 @@
                 <a:solidFill>
                   <a:srgbClr val="FFFFFF"/>
                 </a:solidFill>
-                <a:latin typeface="Segoe UI"/>
-                <a:cs typeface="Segoe UI"/>
+                <a:latin typeface="Arial"/>
+                <a:cs typeface="Arial"/>
               </a:rPr>
               <a:t>Chọn biểu đồ theo loại biến số, không theo menu của phần mềm.</a:t>
             </a:r>
@@ -20286,7 +20142,7 @@
                     <a:lumMod val="50000"/>
                   </a:schemeClr>
                 </a:solidFill>
-                <a:latin typeface="Verdana"/>
+                <a:latin typeface="Arial"/>
               </a:rPr>
               <a:t>Neudata | #ClearDataClearImpact</a:t>
             </a:r>
@@ -20416,8 +20272,8 @@
                 <a:solidFill>
                   <a:srgbClr val="0D7377"/>
                 </a:solidFill>
-                <a:latin typeface="Segoe UI"/>
-                <a:cs typeface="Segoe UI"/>
+                <a:latin typeface="Arial"/>
+                <a:cs typeface="Arial"/>
               </a:rPr>
               <a:t>Hãy cho thấy dữ liệu: biểu đồ 'thuốc nổ' và chấm + hộp</a:t>
             </a:r>
@@ -20483,8 +20339,8 @@
                 <a:solidFill>
                   <a:srgbClr val="595959"/>
                 </a:solidFill>
-                <a:latin typeface="Segoe UI"/>
-                <a:cs typeface="Segoe UI"/>
+                <a:latin typeface="Arial"/>
+                <a:cs typeface="Arial"/>
               </a:rPr>
               <a:t>Cùng 48 bệnh nhân, hai bức hình.</a:t>
             </a:r>
@@ -20546,8 +20402,8 @@
                 <a:solidFill>
                   <a:srgbClr val="595959"/>
                 </a:solidFill>
-                <a:latin typeface="Segoe UI"/>
-                <a:cs typeface="Segoe UI"/>
+                <a:latin typeface="Arial"/>
+                <a:cs typeface="Arial"/>
               </a:rPr>
               <a:t>Biểu đồ 'thuốc nổ': trung bình và thanh sai số che giấu mọi thứ</a:t>
             </a:r>
@@ -20609,8 +20465,8 @@
                 <a:solidFill>
                   <a:srgbClr val="595959"/>
                 </a:solidFill>
-                <a:latin typeface="Segoe UI"/>
-                <a:cs typeface="Segoe UI"/>
+                <a:latin typeface="Arial"/>
+                <a:cs typeface="Arial"/>
               </a:rPr>
               <a:t>Thấy từng bệnh nhân: hình dạng, độ phân tán và giá trị ngoại lai</a:t>
             </a:r>
@@ -20647,7 +20503,7 @@
                     <a:lumMod val="50000"/>
                   </a:schemeClr>
                 </a:solidFill>
-                <a:latin typeface="Verdana"/>
+                <a:latin typeface="Arial"/>
               </a:rPr>
               <a:t>Neudata | #ClearDataClearImpact</a:t>
             </a:r>
@@ -20777,8 +20633,8 @@
                 <a:solidFill>
                   <a:srgbClr val="0D7377"/>
                 </a:solidFill>
-                <a:latin typeface="Segoe UI"/>
-                <a:cs typeface="Segoe UI"/>
+                <a:latin typeface="Arial"/>
+                <a:cs typeface="Arial"/>
               </a:rPr>
               <a:t>'Bảng 1' cho ta biết điều gì</a:t>
             </a:r>
@@ -20874,8 +20730,8 @@
                 <a:solidFill>
                   <a:srgbClr val="FFFFFF"/>
                 </a:solidFill>
-                <a:latin typeface="Segoe UI"/>
-                <a:cs typeface="Segoe UI"/>
+                <a:latin typeface="Arial"/>
+                <a:cs typeface="Arial"/>
               </a:rPr>
               <a:t>THÔNG ĐIỆP CHÍNH   </a:t>
             </a:r>
@@ -20884,8 +20740,8 @@
                 <a:solidFill>
                   <a:srgbClr val="FFFFFF"/>
                 </a:solidFill>
-                <a:latin typeface="Segoe UI"/>
-                <a:cs typeface="Segoe UI"/>
+                <a:latin typeface="Arial"/>
+                <a:cs typeface="Arial"/>
               </a:rPr>
               <a:t>Bảng 1 trả lời: bệnh nhân là ai, và các nhóm có giống nhau không?</a:t>
             </a:r>
@@ -20922,7 +20778,7 @@
                     <a:lumMod val="50000"/>
                   </a:schemeClr>
                 </a:solidFill>
-                <a:latin typeface="Verdana"/>
+                <a:latin typeface="Arial"/>
               </a:rPr>
               <a:t>Neudata | #ClearDataClearImpact</a:t>
             </a:r>
@@ -21052,8 +20908,8 @@
                 <a:solidFill>
                   <a:srgbClr val="0D7377"/>
                 </a:solidFill>
-                <a:latin typeface="Segoe UI"/>
-                <a:cs typeface="Segoe UI"/>
+                <a:latin typeface="Arial"/>
+                <a:cs typeface="Arial"/>
               </a:rPr>
               <a:t>Bảng đạt chuẩn công bố: chưa tốt và tốt</a:t>
             </a:r>
@@ -21119,8 +20975,8 @@
                 <a:solidFill>
                   <a:srgbClr val="595959"/>
                 </a:solidFill>
-                <a:latin typeface="Segoe UI"/>
-                <a:cs typeface="Segoe UI"/>
+                <a:latin typeface="Arial"/>
+                <a:cs typeface="Arial"/>
               </a:rPr>
               <a:t>Quy tắc: đơn vị và cách tóm tắt trong nhãn dòng, n mỗi cột, số thập phân nhất quán, chú thích.</a:t>
             </a:r>
@@ -21182,8 +21038,8 @@
                 <a:solidFill>
                   <a:srgbClr val="595959"/>
                 </a:solidFill>
-                <a:latin typeface="Segoe UI"/>
-                <a:cs typeface="Segoe UI"/>
+                <a:latin typeface="Arial"/>
+                <a:cs typeface="Arial"/>
               </a:rPr>
               <a:t>Kẻ ô, không có n, không đơn vị, 4 chữ số thập phân</a:t>
             </a:r>
@@ -21245,8 +21101,8 @@
                 <a:solidFill>
                   <a:srgbClr val="595959"/>
                 </a:solidFill>
-                <a:latin typeface="Segoe UI"/>
-                <a:cs typeface="Segoe UI"/>
+                <a:latin typeface="Arial"/>
+                <a:cs typeface="Arial"/>
               </a:rPr>
               <a:t>Gọn, tự giải thích, sẵn sàng gửi tạp chí</a:t>
             </a:r>
@@ -21283,7 +21139,7 @@
                     <a:lumMod val="50000"/>
                   </a:schemeClr>
                 </a:solidFill>
-                <a:latin typeface="Verdana"/>
+                <a:latin typeface="Arial"/>
               </a:rPr>
               <a:t>Neudata | #ClearDataClearImpact</a:t>
             </a:r>
@@ -21413,8 +21269,8 @@
                 <a:solidFill>
                   <a:srgbClr val="0D7377"/>
                 </a:solidFill>
-                <a:latin typeface="Segoe UI"/>
-                <a:cs typeface="Segoe UI"/>
+                <a:latin typeface="Arial"/>
+                <a:cs typeface="Arial"/>
               </a:rPr>
               <a:t>5.4 Mô tả bộ dữ liệu khóa học</a:t>
             </a:r>
@@ -21483,8 +21339,8 @@
                 <a:solidFill>
                   <a:srgbClr val="0D7377"/>
                 </a:solidFill>
-                <a:latin typeface="Segoe UI"/>
-                <a:cs typeface="Segoe UI"/>
+                <a:latin typeface="Arial"/>
+                <a:cs typeface="Arial"/>
               </a:rPr>
               <a:t>Trước khi so sánh các nhóm, hãy mô tả chúng: giờ với con số thật.</a:t>
             </a:r>
@@ -21501,8 +21357,8 @@
                 <a:solidFill>
                   <a:srgbClr val="595959"/>
                 </a:solidFill>
-                <a:latin typeface="Segoe UI"/>
-                <a:cs typeface="Segoe UI"/>
+                <a:latin typeface="Arial"/>
+                <a:cs typeface="Arial"/>
               </a:rPr>
               <a:t>5.4 Mô tả bộ dữ liệu khóa học  |  25 phút</a:t>
             </a:r>
@@ -21539,7 +21395,7 @@
                     <a:lumMod val="50000"/>
                   </a:schemeClr>
                 </a:solidFill>
-                <a:latin typeface="Verdana"/>
+                <a:latin typeface="Arial"/>
               </a:rPr>
               <a:t>Neudata | #ClearDataClearImpact</a:t>
             </a:r>
@@ -21669,8 +21525,8 @@
                 <a:solidFill>
                   <a:srgbClr val="0D7377"/>
                 </a:solidFill>
-                <a:latin typeface="Segoe UI"/>
-                <a:cs typeface="Segoe UI"/>
+                <a:latin typeface="Arial"/>
+                <a:cs typeface="Arial"/>
               </a:rPr>
               <a:t>Trình diễn: Bảng 1 và biểu đồ bằng R</a:t>
             </a:r>
@@ -21740,8 +21596,8 @@
                 <a:solidFill>
                   <a:srgbClr val="FFFFFF"/>
                 </a:solidFill>
-                <a:latin typeface="Segoe UI"/>
-                <a:cs typeface="Segoe UI"/>
+                <a:latin typeface="Arial"/>
+                <a:cs typeface="Arial"/>
               </a:rPr>
               <a:t>TRÌNH DIỄN TRỰC TIẾP   |   6 phút</a:t>
             </a:r>
@@ -21778,25 +21634,19 @@
               <a:spcBef>
                 <a:spcPts val="450"/>
               </a:spcBef>
-              <a:buNone/>
-            </a:pPr>
-            <a:r>
-              <a:rPr lang="en-US" sz="1650" b="1" dirty="0">
-                <a:solidFill>
-                  <a:srgbClr val="B5651D"/>
-                </a:solidFill>
-                <a:latin typeface="Segoe UI"/>
-                <a:cs typeface="Segoe UI"/>
-              </a:rPr>
-              <a:t>1.  </a:t>
-            </a:r>
+              <a:buClr>
+                <a:srgbClr val="B5651D"/>
+              </a:buClr>
+              <a:buFont typeface="Arial"/>
+              <a:buChar char="•"/>
+            </a:pPr>
             <a:r>
               <a:rPr lang="en-US" sz="1650" dirty="0">
                 <a:solidFill>
                   <a:srgbClr val="000000"/>
                 </a:solidFill>
-                <a:latin typeface="Segoe UI"/>
-                <a:cs typeface="Segoe UI"/>
+                <a:latin typeface="Arial"/>
+                <a:cs typeface="Arial"/>
               </a:rPr>
               <a:t>Mở 02_describe.R và nạp dữ liệu sạch</a:t>
             </a:r>
@@ -21809,25 +21659,19 @@
               <a:spcBef>
                 <a:spcPts val="450"/>
               </a:spcBef>
-              <a:buNone/>
-            </a:pPr>
-            <a:r>
-              <a:rPr lang="en-US" sz="1650" b="1" dirty="0">
-                <a:solidFill>
-                  <a:srgbClr val="B5651D"/>
-                </a:solidFill>
-                <a:latin typeface="Segoe UI"/>
-                <a:cs typeface="Segoe UI"/>
-              </a:rPr>
-              <a:t>2.  </a:t>
-            </a:r>
+              <a:buClr>
+                <a:srgbClr val="B5651D"/>
+              </a:buClr>
+              <a:buFont typeface="Arial"/>
+              <a:buChar char="•"/>
+            </a:pPr>
             <a:r>
               <a:rPr lang="en-US" sz="1650" dirty="0">
                 <a:solidFill>
                   <a:srgbClr val="000000"/>
                 </a:solidFill>
-                <a:latin typeface="Segoe UI"/>
-                <a:cs typeface="Segoe UI"/>
+                <a:latin typeface="Arial"/>
+                <a:cs typeface="Arial"/>
               </a:rPr>
               <a:t>Xem hình dạng trước: biểu đồ tần suất tuổi, lactat, thời gian nằm ICU</a:t>
             </a:r>
@@ -21840,25 +21684,19 @@
               <a:spcBef>
                 <a:spcPts val="450"/>
               </a:spcBef>
-              <a:buNone/>
-            </a:pPr>
-            <a:r>
-              <a:rPr lang="en-US" sz="1650" b="1" dirty="0">
-                <a:solidFill>
-                  <a:srgbClr val="B5651D"/>
-                </a:solidFill>
-                <a:latin typeface="Segoe UI"/>
-                <a:cs typeface="Segoe UI"/>
-              </a:rPr>
-              <a:t>3.  </a:t>
-            </a:r>
+              <a:buClr>
+                <a:srgbClr val="B5651D"/>
+              </a:buClr>
+              <a:buFont typeface="Arial"/>
+              <a:buChar char="•"/>
+            </a:pPr>
             <a:r>
               <a:rPr lang="en-US" sz="1650" dirty="0">
                 <a:solidFill>
                   <a:srgbClr val="000000"/>
                 </a:solidFill>
-                <a:latin typeface="Segoe UI"/>
-                <a:cs typeface="Segoe UI"/>
+                <a:latin typeface="Arial"/>
+                <a:cs typeface="Arial"/>
               </a:rPr>
               <a:t>Lập Bảng 1 theo nhóm cân bằng dịch (không có giá trị p)</a:t>
             </a:r>
@@ -21871,25 +21709,19 @@
               <a:spcBef>
                 <a:spcPts val="450"/>
               </a:spcBef>
-              <a:buNone/>
-            </a:pPr>
-            <a:r>
-              <a:rPr lang="en-US" sz="1650" b="1" dirty="0">
-                <a:solidFill>
-                  <a:srgbClr val="B5651D"/>
-                </a:solidFill>
-                <a:latin typeface="Segoe UI"/>
-                <a:cs typeface="Segoe UI"/>
-              </a:rPr>
-              <a:t>4.  </a:t>
-            </a:r>
+              <a:buClr>
+                <a:srgbClr val="B5651D"/>
+              </a:buClr>
+              <a:buFont typeface="Arial"/>
+              <a:buChar char="•"/>
+            </a:pPr>
             <a:r>
               <a:rPr lang="en-US" sz="1650" dirty="0">
                 <a:solidFill>
                   <a:srgbClr val="000000"/>
                 </a:solidFill>
-                <a:latin typeface="Segoe UI"/>
-                <a:cs typeface="Segoe UI"/>
+                <a:latin typeface="Arial"/>
+                <a:cs typeface="Arial"/>
               </a:rPr>
               <a:t>Vẽ biểu đồ: tần suất, hộp, cột</a:t>
             </a:r>
@@ -21902,25 +21734,19 @@
               <a:spcBef>
                 <a:spcPts val="450"/>
               </a:spcBef>
-              <a:buNone/>
-            </a:pPr>
-            <a:r>
-              <a:rPr lang="en-US" sz="1650" b="1" dirty="0">
-                <a:solidFill>
-                  <a:srgbClr val="B5651D"/>
-                </a:solidFill>
-                <a:latin typeface="Segoe UI"/>
-                <a:cs typeface="Segoe UI"/>
-              </a:rPr>
-              <a:t>5.  </a:t>
-            </a:r>
+              <a:buClr>
+                <a:srgbClr val="B5651D"/>
+              </a:buClr>
+              <a:buFont typeface="Arial"/>
+              <a:buChar char="•"/>
+            </a:pPr>
             <a:r>
               <a:rPr lang="en-US" sz="1650" dirty="0">
                 <a:solidFill>
                   <a:srgbClr val="000000"/>
                 </a:solidFill>
-                <a:latin typeface="Segoe UI"/>
-                <a:cs typeface="Segoe UI"/>
+                <a:latin typeface="Arial"/>
+                <a:cs typeface="Arial"/>
               </a:rPr>
               <a:t>Lưu bảng và biểu đồ cho các gói kết quả</a:t>
             </a:r>
@@ -21964,8 +21790,8 @@
                 <a:solidFill>
                   <a:srgbClr val="B5651D"/>
                 </a:solidFill>
-                <a:latin typeface="Segoe UI"/>
-                <a:cs typeface="Segoe UI"/>
+                <a:latin typeface="Arial"/>
+                <a:cs typeface="Arial"/>
               </a:rPr>
               <a:t>Cùng quy tắc như 5.3</a:t>
             </a:r>
@@ -21986,8 +21812,8 @@
                 <a:solidFill>
                   <a:srgbClr val="000000"/>
                 </a:solidFill>
-                <a:latin typeface="Segoe UI"/>
-                <a:cs typeface="Segoe UI"/>
+                <a:latin typeface="Arial"/>
+                <a:cs typeface="Arial"/>
               </a:rPr>
               <a:t>Hình dạng quyết định tóm tắt</a:t>
             </a:r>
@@ -22008,8 +21834,8 @@
                 <a:solidFill>
                   <a:srgbClr val="000000"/>
                 </a:solidFill>
-                <a:latin typeface="Segoe UI"/>
-                <a:cs typeface="Segoe UI"/>
+                <a:latin typeface="Arial"/>
+                <a:cs typeface="Arial"/>
               </a:rPr>
               <a:t>n mỗi cột</a:t>
             </a:r>
@@ -22030,8 +21856,8 @@
                 <a:solidFill>
                   <a:srgbClr val="000000"/>
                 </a:solidFill>
-                <a:latin typeface="Segoe UI"/>
-                <a:cs typeface="Segoe UI"/>
+                <a:latin typeface="Arial"/>
+                <a:cs typeface="Arial"/>
               </a:rPr>
               <a:t>Đơn vị trong nhãn dòng</a:t>
             </a:r>
@@ -22052,8 +21878,8 @@
                 <a:solidFill>
                   <a:srgbClr val="000000"/>
                 </a:solidFill>
-                <a:latin typeface="Segoe UI"/>
-                <a:cs typeface="Segoe UI"/>
+                <a:latin typeface="Arial"/>
+                <a:cs typeface="Arial"/>
               </a:rPr>
               <a:t>Báo cáo số thiếu</a:t>
             </a:r>
@@ -22099,8 +21925,8 @@
                 <a:solidFill>
                   <a:srgbClr val="B5651D"/>
                 </a:solidFill>
-                <a:latin typeface="Segoe UI"/>
-                <a:cs typeface="Segoe UI"/>
+                <a:latin typeface="Arial"/>
+                <a:cs typeface="Arial"/>
               </a:rPr>
               <a:t>SẢN PHẨM   </a:t>
             </a:r>
@@ -22109,8 +21935,8 @@
                 <a:solidFill>
                   <a:srgbClr val="000000"/>
                 </a:solidFill>
-                <a:latin typeface="Segoe UI"/>
-                <a:cs typeface="Segoe UI"/>
+                <a:latin typeface="Arial"/>
+                <a:cs typeface="Arial"/>
               </a:rPr>
               <a:t>Mọi người thấy Bảng 1 được tạo từ dữ liệu, có thể tái lập</a:t>
             </a:r>
@@ -22147,7 +21973,7 @@
                     <a:lumMod val="50000"/>
                   </a:schemeClr>
                 </a:solidFill>
-                <a:latin typeface="Verdana"/>
+                <a:latin typeface="Arial"/>
               </a:rPr>
               <a:t>Neudata | #ClearDataClearImpact</a:t>
             </a:r>
@@ -22277,8 +22103,8 @@
                 <a:solidFill>
                   <a:srgbClr val="0D7377"/>
                 </a:solidFill>
-                <a:latin typeface="Segoe UI"/>
-                <a:cs typeface="Segoe UI"/>
+                <a:latin typeface="Arial"/>
+                <a:cs typeface="Arial"/>
               </a:rPr>
               <a:t>Bảng 1 FLUID-ICU: các nhóm có giống nhau lúc đầu?</a:t>
             </a:r>
@@ -22374,8 +22200,8 @@
                 <a:solidFill>
                   <a:srgbClr val="FFFFFF"/>
                 </a:solidFill>
-                <a:latin typeface="Segoe UI"/>
-                <a:cs typeface="Segoe UI"/>
+                <a:latin typeface="Arial"/>
+                <a:cs typeface="Arial"/>
               </a:rPr>
               <a:t>THÔNG ĐIỆP CHÍNH   </a:t>
             </a:r>
@@ -22384,8 +22210,8 @@
                 <a:solidFill>
                   <a:srgbClr val="FFFFFF"/>
                 </a:solidFill>
-                <a:latin typeface="Segoe UI"/>
-                <a:cs typeface="Segoe UI"/>
+                <a:latin typeface="Arial"/>
+                <a:cs typeface="Arial"/>
               </a:rPr>
               <a:t>Nhóm cân bằng dương nặng hơn ngay từ đầu: lời cảnh báo cho Buổi 6.</a:t>
             </a:r>
@@ -22422,7 +22248,7 @@
                     <a:lumMod val="50000"/>
                   </a:schemeClr>
                 </a:solidFill>
-                <a:latin typeface="Verdana"/>
+                <a:latin typeface="Arial"/>
               </a:rPr>
               <a:t>Neudata | #ClearDataClearImpact</a:t>
             </a:r>
@@ -22552,8 +22378,8 @@
                 <a:solidFill>
                   <a:srgbClr val="0D7377"/>
                 </a:solidFill>
-                <a:latin typeface="Segoe UI"/>
-                <a:cs typeface="Segoe UI"/>
+                <a:latin typeface="Arial"/>
+                <a:cs typeface="Arial"/>
               </a:rPr>
               <a:t>Phơi nhiễm: cân bằng dịch tích lũy ngày 3</a:t>
             </a:r>
@@ -22649,8 +22475,8 @@
                 <a:solidFill>
                   <a:srgbClr val="FFFFFF"/>
                 </a:solidFill>
-                <a:latin typeface="Segoe UI"/>
-                <a:cs typeface="Segoe UI"/>
+                <a:latin typeface="Arial"/>
+                <a:cs typeface="Arial"/>
               </a:rPr>
               <a:t>THÔNG ĐIỆP CHÍNH   </a:t>
             </a:r>
@@ -22659,8 +22485,8 @@
                 <a:solidFill>
                   <a:srgbClr val="FFFFFF"/>
                 </a:solidFill>
-                <a:latin typeface="Segoe UI"/>
-                <a:cs typeface="Segoe UI"/>
+                <a:latin typeface="Arial"/>
+                <a:cs typeface="Arial"/>
               </a:rPr>
               <a:t>Một phơi nhiễm liên tục, được cắt tại 0 ml/kg thành cân bằng âm và dương.</a:t>
             </a:r>
@@ -22697,7 +22523,7 @@
                     <a:lumMod val="50000"/>
                   </a:schemeClr>
                 </a:solidFill>
-                <a:latin typeface="Verdana"/>
+                <a:latin typeface="Arial"/>
               </a:rPr>
               <a:t>Neudata | #ClearDataClearImpact</a:t>
             </a:r>
@@ -22827,8 +22653,8 @@
                 <a:solidFill>
                   <a:srgbClr val="0D7377"/>
                 </a:solidFill>
-                <a:latin typeface="Segoe UI"/>
-                <a:cs typeface="Segoe UI"/>
+                <a:latin typeface="Arial"/>
+                <a:cs typeface="Arial"/>
               </a:rPr>
               <a:t>Mức độ nặng theo nhóm: cho thấy từng bệnh nhân</a:t>
             </a:r>
@@ -22894,8 +22720,8 @@
                 <a:solidFill>
                   <a:srgbClr val="0D7377"/>
                 </a:solidFill>
-                <a:latin typeface="Segoe UI"/>
-                <a:cs typeface="Segoe UI"/>
+                <a:latin typeface="Arial"/>
+                <a:cs typeface="Arial"/>
               </a:rPr>
               <a:t>Cách đọc</a:t>
             </a:r>
@@ -22913,8 +22739,8 @@
                 <a:solidFill>
                   <a:srgbClr val="000000"/>
                 </a:solidFill>
-                <a:latin typeface="Segoe UI"/>
-                <a:cs typeface="Segoe UI"/>
+                <a:latin typeface="Arial"/>
+                <a:cs typeface="Arial"/>
               </a:rPr>
               <a:t>Mỗi chấm là một bệnh nhân</a:t>
             </a:r>
@@ -22932,8 +22758,8 @@
                 <a:solidFill>
                   <a:srgbClr val="000000"/>
                 </a:solidFill>
-                <a:latin typeface="Segoe UI"/>
-                <a:cs typeface="Segoe UI"/>
+                <a:latin typeface="Arial"/>
+                <a:cs typeface="Arial"/>
               </a:rPr>
               <a:t>Hộp = 50% ở giữa</a:t>
             </a:r>
@@ -22951,8 +22777,8 @@
                 <a:solidFill>
                   <a:srgbClr val="000000"/>
                 </a:solidFill>
-                <a:latin typeface="Segoe UI"/>
-                <a:cs typeface="Segoe UI"/>
+                <a:latin typeface="Arial"/>
+                <a:cs typeface="Arial"/>
               </a:rPr>
               <a:t>Trung vị 6 so với 8</a:t>
             </a:r>
@@ -22970,8 +22796,8 @@
                 <a:solidFill>
                   <a:srgbClr val="000000"/>
                 </a:solidFill>
-                <a:latin typeface="Segoe UI"/>
-                <a:cs typeface="Segoe UI"/>
+                <a:latin typeface="Arial"/>
+                <a:cs typeface="Arial"/>
               </a:rPr>
               <a:t>Ca nặng hơn được truyền nhiều hơn</a:t>
             </a:r>
@@ -23039,8 +22865,8 @@
                 <a:solidFill>
                   <a:srgbClr val="FFFFFF"/>
                 </a:solidFill>
-                <a:latin typeface="Segoe UI"/>
-                <a:cs typeface="Segoe UI"/>
+                <a:latin typeface="Arial"/>
+                <a:cs typeface="Arial"/>
               </a:rPr>
               <a:t>THÔNG ĐIỆP CHÍNH   </a:t>
             </a:r>
@@ -23049,8 +22875,8 @@
                 <a:solidFill>
                   <a:srgbClr val="FFFFFF"/>
                 </a:solidFill>
-                <a:latin typeface="Segoe UI"/>
-                <a:cs typeface="Segoe UI"/>
+                <a:latin typeface="Arial"/>
+                <a:cs typeface="Arial"/>
               </a:rPr>
               <a:t>Chấm kèm hộp cho thấy chồng lấp và dịch chuyển: nhiễu nhìn thấy được.</a:t>
             </a:r>
@@ -23087,7 +22913,7 @@
                     <a:lumMod val="50000"/>
                   </a:schemeClr>
                 </a:solidFill>
-                <a:latin typeface="Verdana"/>
+                <a:latin typeface="Arial"/>
               </a:rPr>
               <a:t>Neudata | #ClearDataClearImpact</a:t>
             </a:r>
@@ -23217,8 +23043,8 @@
                 <a:solidFill>
                   <a:srgbClr val="0D7377"/>
                 </a:solidFill>
-                <a:latin typeface="Segoe UI"/>
-                <a:cs typeface="Segoe UI"/>
+                <a:latin typeface="Arial"/>
+                <a:cs typeface="Arial"/>
               </a:rPr>
               <a:t>Kết cục lệch: thời gian nằm ICU ở người sống (Q5)</a:t>
             </a:r>
@@ -23314,8 +23140,8 @@
                 <a:solidFill>
                   <a:srgbClr val="FFFFFF"/>
                 </a:solidFill>
-                <a:latin typeface="Segoe UI"/>
-                <a:cs typeface="Segoe UI"/>
+                <a:latin typeface="Arial"/>
+                <a:cs typeface="Arial"/>
               </a:rPr>
               <a:t>THÔNG ĐIỆP CHÍNH   </a:t>
             </a:r>
@@ -23324,8 +23150,8 @@
                 <a:solidFill>
                   <a:srgbClr val="FFFFFF"/>
                 </a:solidFill>
-                <a:latin typeface="Segoe UI"/>
-                <a:cs typeface="Segoe UI"/>
+                <a:latin typeface="Arial"/>
+                <a:cs typeface="Arial"/>
               </a:rPr>
               <a:t>Trung bình 7.5 so với trung vị 6.2 ngày: báo cáo trung vị và IQR.</a:t>
             </a:r>
@@ -23362,7 +23188,7 @@
                     <a:lumMod val="50000"/>
                   </a:schemeClr>
                 </a:solidFill>
-                <a:latin typeface="Verdana"/>
+                <a:latin typeface="Arial"/>
               </a:rPr>
               <a:t>Neudata | #ClearDataClearImpact</a:t>
             </a:r>
@@ -23492,8 +23318,8 @@
                 <a:solidFill>
                   <a:srgbClr val="0D7377"/>
                 </a:solidFill>
-                <a:latin typeface="Segoe UI"/>
-                <a:cs typeface="Segoe UI"/>
+                <a:latin typeface="Arial"/>
+                <a:cs typeface="Arial"/>
               </a:rPr>
               <a:t>Biến số này thuộc loại nào?</a:t>
             </a:r>
@@ -23589,8 +23415,8 @@
                 <a:solidFill>
                   <a:srgbClr val="FFFFFF"/>
                 </a:solidFill>
-                <a:latin typeface="Segoe UI"/>
-                <a:cs typeface="Segoe UI"/>
+                <a:latin typeface="Arial"/>
+                <a:cs typeface="Arial"/>
               </a:rPr>
               <a:t>THÔNG ĐIỆP CHÍNH   </a:t>
             </a:r>
@@ -23599,8 +23425,8 @@
                 <a:solidFill>
                   <a:srgbClr val="FFFFFF"/>
                 </a:solidFill>
-                <a:latin typeface="Segoe UI"/>
-                <a:cs typeface="Segoe UI"/>
+                <a:latin typeface="Arial"/>
+                <a:cs typeface="Arial"/>
               </a:rPr>
               <a:t>Loại biến số quyết định ô trong CRF, cách tóm tắt và kiểm định.</a:t>
             </a:r>
@@ -23637,7 +23463,7 @@
                     <a:lumMod val="50000"/>
                   </a:schemeClr>
                 </a:solidFill>
-                <a:latin typeface="Verdana"/>
+                <a:latin typeface="Arial"/>
               </a:rPr>
               <a:t>Neudata | #ClearDataClearImpact</a:t>
             </a:r>
@@ -23767,8 +23593,8 @@
                 <a:solidFill>
                   <a:srgbClr val="0D7377"/>
                 </a:solidFill>
-                <a:latin typeface="Segoe UI"/>
-                <a:cs typeface="Segoe UI"/>
+                <a:latin typeface="Arial"/>
+                <a:cs typeface="Arial"/>
               </a:rPr>
               <a:t>Đọc Bảng 1 của nhóm (phiếu bài tập)</a:t>
             </a:r>
@@ -23838,8 +23664,8 @@
                 <a:solidFill>
                   <a:srgbClr val="FFFFFF"/>
                 </a:solidFill>
-                <a:latin typeface="Segoe UI"/>
-                <a:cs typeface="Segoe UI"/>
+                <a:latin typeface="Arial"/>
+                <a:cs typeface="Arial"/>
               </a:rPr>
               <a:t>LÀM VIỆC NHÓM   |   10 phút</a:t>
             </a:r>
@@ -23876,25 +23702,19 @@
               <a:spcBef>
                 <a:spcPts val="450"/>
               </a:spcBef>
-              <a:buNone/>
-            </a:pPr>
-            <a:r>
-              <a:rPr lang="en-US" sz="1650" b="1" dirty="0">
-                <a:solidFill>
-                  <a:srgbClr val="0D7377"/>
-                </a:solidFill>
-                <a:latin typeface="Segoe UI"/>
-                <a:cs typeface="Segoe UI"/>
-              </a:rPr>
-              <a:t>1.  </a:t>
-            </a:r>
+              <a:buClr>
+                <a:srgbClr val="0D7377"/>
+              </a:buClr>
+              <a:buFont typeface="Arial"/>
+              <a:buChar char="•"/>
+            </a:pPr>
             <a:r>
               <a:rPr lang="en-US" sz="1650" dirty="0">
                 <a:solidFill>
                   <a:srgbClr val="000000"/>
                 </a:solidFill>
-                <a:latin typeface="Segoe UI"/>
-                <a:cs typeface="Segoe UI"/>
+                <a:latin typeface="Arial"/>
+                <a:cs typeface="Arial"/>
               </a:rPr>
               <a:t>Mở gói kết quả: Bảng 1 và các biểu đồ</a:t>
             </a:r>
@@ -23907,25 +23727,19 @@
               <a:spcBef>
                 <a:spcPts val="450"/>
               </a:spcBef>
-              <a:buNone/>
-            </a:pPr>
-            <a:r>
-              <a:rPr lang="en-US" sz="1650" b="1" dirty="0">
-                <a:solidFill>
-                  <a:srgbClr val="0D7377"/>
-                </a:solidFill>
-                <a:latin typeface="Segoe UI"/>
-                <a:cs typeface="Segoe UI"/>
-              </a:rPr>
-              <a:t>2.  </a:t>
-            </a:r>
+              <a:buClr>
+                <a:srgbClr val="0D7377"/>
+              </a:buClr>
+              <a:buFont typeface="Arial"/>
+              <a:buChar char="•"/>
+            </a:pPr>
             <a:r>
               <a:rPr lang="en-US" sz="1650" dirty="0">
                 <a:solidFill>
                   <a:srgbClr val="000000"/>
                 </a:solidFill>
-                <a:latin typeface="Segoe UI"/>
-                <a:cs typeface="Segoe UI"/>
+                <a:latin typeface="Arial"/>
+                <a:cs typeface="Arial"/>
               </a:rPr>
               <a:t>Với ba biến: dùng cách tóm tắt nào, vì sao?</a:t>
             </a:r>
@@ -23938,25 +23752,19 @@
               <a:spcBef>
                 <a:spcPts val="450"/>
               </a:spcBef>
-              <a:buNone/>
-            </a:pPr>
-            <a:r>
-              <a:rPr lang="en-US" sz="1650" b="1" dirty="0">
-                <a:solidFill>
-                  <a:srgbClr val="0D7377"/>
-                </a:solidFill>
-                <a:latin typeface="Segoe UI"/>
-                <a:cs typeface="Segoe UI"/>
-              </a:rPr>
-              <a:t>3.  </a:t>
-            </a:r>
+              <a:buClr>
+                <a:srgbClr val="0D7377"/>
+              </a:buClr>
+              <a:buFont typeface="Arial"/>
+              <a:buChar char="•"/>
+            </a:pPr>
             <a:r>
               <a:rPr lang="en-US" sz="1650" dirty="0">
                 <a:solidFill>
                   <a:srgbClr val="000000"/>
                 </a:solidFill>
-                <a:latin typeface="Segoe UI"/>
-                <a:cs typeface="Segoe UI"/>
+                <a:latin typeface="Arial"/>
+                <a:cs typeface="Arial"/>
               </a:rPr>
               <a:t>Các nhóm có giống nhau lúc đầu? Nêu khác biệt lớn nhất</a:t>
             </a:r>
@@ -23969,25 +23777,19 @@
               <a:spcBef>
                 <a:spcPts val="450"/>
               </a:spcBef>
-              <a:buNone/>
-            </a:pPr>
-            <a:r>
-              <a:rPr lang="en-US" sz="1650" b="1" dirty="0">
-                <a:solidFill>
-                  <a:srgbClr val="0D7377"/>
-                </a:solidFill>
-                <a:latin typeface="Segoe UI"/>
-                <a:cs typeface="Segoe UI"/>
-              </a:rPr>
-              <a:t>4.  </a:t>
-            </a:r>
+              <a:buClr>
+                <a:srgbClr val="0D7377"/>
+              </a:buClr>
+              <a:buFont typeface="Arial"/>
+              <a:buChar char="•"/>
+            </a:pPr>
             <a:r>
               <a:rPr lang="en-US" sz="1650" dirty="0">
                 <a:solidFill>
                   <a:srgbClr val="000000"/>
                 </a:solidFill>
-                <a:latin typeface="Segoe UI"/>
-                <a:cs typeface="Segoe UI"/>
+                <a:latin typeface="Arial"/>
+                <a:cs typeface="Arial"/>
               </a:rPr>
               <a:t>Viết hai câu mô tả bệnh nhân, như trong phần Kết quả</a:t>
             </a:r>
@@ -24000,25 +23802,19 @@
               <a:spcBef>
                 <a:spcPts val="450"/>
               </a:spcBef>
-              <a:buNone/>
-            </a:pPr>
-            <a:r>
-              <a:rPr lang="en-US" sz="1650" b="1" dirty="0">
-                <a:solidFill>
-                  <a:srgbClr val="0D7377"/>
-                </a:solidFill>
-                <a:latin typeface="Segoe UI"/>
-                <a:cs typeface="Segoe UI"/>
-              </a:rPr>
-              <a:t>5.  </a:t>
-            </a:r>
+              <a:buClr>
+                <a:srgbClr val="0D7377"/>
+              </a:buClr>
+              <a:buFont typeface="Arial"/>
+              <a:buChar char="•"/>
+            </a:pPr>
             <a:r>
               <a:rPr lang="en-US" sz="1650" dirty="0">
                 <a:solidFill>
                   <a:srgbClr val="000000"/>
                 </a:solidFill>
-                <a:latin typeface="Segoe UI"/>
-                <a:cs typeface="Segoe UI"/>
+                <a:latin typeface="Arial"/>
+                <a:cs typeface="Arial"/>
               </a:rPr>
               <a:t>Một nhóm đọc to các câu của mình</a:t>
             </a:r>
@@ -24062,8 +23858,8 @@
                 <a:solidFill>
                   <a:srgbClr val="0D7377"/>
                 </a:solidFill>
-                <a:latin typeface="Segoe UI"/>
-                <a:cs typeface="Segoe UI"/>
+                <a:latin typeface="Arial"/>
+                <a:cs typeface="Arial"/>
               </a:rPr>
               <a:t>Kiểm tra</a:t>
             </a:r>
@@ -24084,8 +23880,8 @@
                 <a:solidFill>
                   <a:srgbClr val="000000"/>
                 </a:solidFill>
-                <a:latin typeface="Segoe UI"/>
-                <a:cs typeface="Segoe UI"/>
+                <a:latin typeface="Arial"/>
+                <a:cs typeface="Arial"/>
               </a:rPr>
               <a:t>n mỗi cột?</a:t>
             </a:r>
@@ -24106,8 +23902,8 @@
                 <a:solidFill>
                   <a:srgbClr val="000000"/>
                 </a:solidFill>
-                <a:latin typeface="Segoe UI"/>
-                <a:cs typeface="Segoe UI"/>
+                <a:latin typeface="Arial"/>
+                <a:cs typeface="Arial"/>
               </a:rPr>
               <a:t>Đơn vị trong nhãn?</a:t>
             </a:r>
@@ -24128,8 +23924,8 @@
                 <a:solidFill>
                   <a:srgbClr val="000000"/>
                 </a:solidFill>
-                <a:latin typeface="Segoe UI"/>
-                <a:cs typeface="Segoe UI"/>
+                <a:latin typeface="Arial"/>
+                <a:cs typeface="Arial"/>
               </a:rPr>
               <a:t>Trung vị cho biến lệch?</a:t>
             </a:r>
@@ -24150,8 +23946,8 @@
                 <a:solidFill>
                   <a:srgbClr val="000000"/>
                 </a:solidFill>
-                <a:latin typeface="Segoe UI"/>
-                <a:cs typeface="Segoe UI"/>
+                <a:latin typeface="Arial"/>
+                <a:cs typeface="Arial"/>
               </a:rPr>
               <a:t>Có báo cáo số thiếu?</a:t>
             </a:r>
@@ -24197,8 +23993,8 @@
                 <a:solidFill>
                   <a:srgbClr val="0D7377"/>
                 </a:solidFill>
-                <a:latin typeface="Segoe UI"/>
-                <a:cs typeface="Segoe UI"/>
+                <a:latin typeface="Arial"/>
+                <a:cs typeface="Arial"/>
               </a:rPr>
               <a:t>SẢN PHẨM   </a:t>
             </a:r>
@@ -24207,8 +24003,8 @@
                 <a:solidFill>
                   <a:srgbClr val="000000"/>
                 </a:solidFill>
-                <a:latin typeface="Segoe UI"/>
-                <a:cs typeface="Segoe UI"/>
+                <a:latin typeface="Arial"/>
+                <a:cs typeface="Arial"/>
               </a:rPr>
               <a:t>Hai câu Kết quả mô tả bệnh nhân của nhóm (bài 6)</a:t>
             </a:r>
@@ -24245,7 +24041,7 @@
                     <a:lumMod val="50000"/>
                   </a:schemeClr>
                 </a:solidFill>
-                <a:latin typeface="Verdana"/>
+                <a:latin typeface="Arial"/>
               </a:rPr>
               <a:t>Neudata | #ClearDataClearImpact</a:t>
             </a:r>
@@ -24375,8 +24171,8 @@
                 <a:solidFill>
                   <a:srgbClr val="0D7377"/>
                 </a:solidFill>
-                <a:latin typeface="Segoe UI"/>
-                <a:cs typeface="Segoe UI"/>
+                <a:latin typeface="Arial"/>
+                <a:cs typeface="Arial"/>
               </a:rPr>
               <a:t>Xây dựng đề cương 5: một phần tốt gồm những gì</a:t>
             </a:r>
@@ -24442,8 +24238,8 @@
                 <a:solidFill>
                   <a:srgbClr val="595959"/>
                 </a:solidFill>
-                <a:latin typeface="Segoe UI"/>
-                <a:cs typeface="Segoe UI"/>
+                <a:latin typeface="Arial"/>
+                <a:cs typeface="Arial"/>
               </a:rPr>
               <a:t>Ví dụ từ ví dụ xuyên suốt (thử nghiệm hạn chế dịch).</a:t>
             </a:r>
@@ -24485,8 +24281,8 @@
                 <a:solidFill>
                   <a:srgbClr val="FFFFFF"/>
                 </a:solidFill>
-                <a:latin typeface="Segoe UI"/>
-                <a:cs typeface="Segoe UI"/>
+                <a:latin typeface="Arial"/>
+                <a:cs typeface="Arial"/>
               </a:rPr>
               <a:t>Bảng biến số</a:t>
             </a:r>
@@ -24534,8 +24330,8 @@
                 <a:solidFill>
                   <a:srgbClr val="000000"/>
                 </a:solidFill>
-                <a:latin typeface="Segoe UI"/>
-                <a:cs typeface="Segoe UI"/>
+                <a:latin typeface="Arial"/>
+                <a:cs typeface="Arial"/>
               </a:rPr>
               <a:t>Kết cục: tử vong 28 ngày (nhị phân)</a:t>
             </a:r>
@@ -24555,8 +24351,8 @@
                 <a:solidFill>
                   <a:srgbClr val="000000"/>
                 </a:solidFill>
-                <a:latin typeface="Segoe UI"/>
-                <a:cs typeface="Segoe UI"/>
+                <a:latin typeface="Arial"/>
+                <a:cs typeface="Arial"/>
               </a:rPr>
               <a:t>Phơi nhiễm: hạn chế so với thường quy</a:t>
             </a:r>
@@ -24576,8 +24372,8 @@
                 <a:solidFill>
                   <a:srgbClr val="000000"/>
                 </a:solidFill>
-                <a:latin typeface="Segoe UI"/>
-                <a:cs typeface="Segoe UI"/>
+                <a:latin typeface="Arial"/>
+                <a:cs typeface="Arial"/>
               </a:rPr>
               <a:t>Gây nhiễu: tuổi, SOFA, lactat</a:t>
             </a:r>
@@ -24619,8 +24415,8 @@
                 <a:solidFill>
                   <a:srgbClr val="FFFFFF"/>
                 </a:solidFill>
-                <a:latin typeface="Segoe UI"/>
-                <a:cs typeface="Segoe UI"/>
+                <a:latin typeface="Arial"/>
+                <a:cs typeface="Arial"/>
               </a:rPr>
               <a:t>CRF thu gọn</a:t>
             </a:r>
@@ -24668,8 +24464,8 @@
                 <a:solidFill>
                   <a:srgbClr val="000000"/>
                 </a:solidFill>
-                <a:latin typeface="Segoe UI"/>
-                <a:cs typeface="Segoe UI"/>
+                <a:latin typeface="Arial"/>
+                <a:cs typeface="Arial"/>
               </a:rPr>
               <a:t>6-10 mục</a:t>
             </a:r>
@@ -24689,8 +24485,8 @@
                 <a:solidFill>
                   <a:srgbClr val="000000"/>
                 </a:solidFill>
-                <a:latin typeface="Segoe UI"/>
-                <a:cs typeface="Segoe UI"/>
+                <a:latin typeface="Arial"/>
+                <a:cs typeface="Arial"/>
               </a:rPr>
               <a:t>đơn vị và thời điểm</a:t>
             </a:r>
@@ -24710,8 +24506,8 @@
                 <a:solidFill>
                   <a:srgbClr val="000000"/>
                 </a:solidFill>
-                <a:latin typeface="Segoe UI"/>
-                <a:cs typeface="Segoe UI"/>
+                <a:latin typeface="Arial"/>
+                <a:cs typeface="Arial"/>
               </a:rPr>
               <a:t>lựa chọn 'không rõ'</a:t>
             </a:r>
@@ -24753,8 +24549,8 @@
                 <a:solidFill>
                   <a:srgbClr val="FFFFFF"/>
                 </a:solidFill>
-                <a:latin typeface="Segoe UI"/>
-                <a:cs typeface="Segoe UI"/>
+                <a:latin typeface="Arial"/>
+                <a:cs typeface="Arial"/>
               </a:rPr>
               <a:t>Từ điển dữ liệu</a:t>
             </a:r>
@@ -24802,8 +24598,8 @@
                 <a:solidFill>
                   <a:srgbClr val="000000"/>
                 </a:solidFill>
-                <a:latin typeface="Segoe UI"/>
-                <a:cs typeface="Segoe UI"/>
+                <a:latin typeface="Arial"/>
+                <a:cs typeface="Arial"/>
               </a:rPr>
               <a:t>3-5 dòng: tên, nhãn,</a:t>
             </a:r>
@@ -24823,8 +24619,8 @@
                 <a:solidFill>
                   <a:srgbClr val="000000"/>
                 </a:solidFill>
-                <a:latin typeface="Segoe UI"/>
-                <a:cs typeface="Segoe UI"/>
+                <a:latin typeface="Arial"/>
+                <a:cs typeface="Arial"/>
               </a:rPr>
               <a:t>loại, đơn vị/mã,</a:t>
             </a:r>
@@ -24844,8 +24640,8 @@
                 <a:solidFill>
                   <a:srgbClr val="000000"/>
                 </a:solidFill>
-                <a:latin typeface="Segoe UI"/>
-                <a:cs typeface="Segoe UI"/>
+                <a:latin typeface="Arial"/>
+                <a:cs typeface="Arial"/>
               </a:rPr>
               <a:t>giá trị cho phép</a:t>
             </a:r>
@@ -24887,8 +24683,8 @@
                 <a:solidFill>
                   <a:srgbClr val="FFFFFF"/>
                 </a:solidFill>
-                <a:latin typeface="Segoe UI"/>
-                <a:cs typeface="Segoe UI"/>
+                <a:latin typeface="Arial"/>
+                <a:cs typeface="Arial"/>
               </a:rPr>
               <a:t>Quản lý dữ liệu</a:t>
             </a:r>
@@ -24936,8 +24732,8 @@
                 <a:solidFill>
                   <a:srgbClr val="000000"/>
                 </a:solidFill>
-                <a:latin typeface="Segoe UI"/>
-                <a:cs typeface="Segoe UI"/>
+                <a:latin typeface="Arial"/>
+                <a:cs typeface="Arial"/>
               </a:rPr>
               <a:t>EDC hoặc nhập hai lần</a:t>
             </a:r>
@@ -24957,8 +24753,8 @@
                 <a:solidFill>
                   <a:srgbClr val="000000"/>
                 </a:solidFill>
-                <a:latin typeface="Segoe UI"/>
-                <a:cs typeface="Segoe UI"/>
+                <a:latin typeface="Arial"/>
+                <a:cs typeface="Arial"/>
               </a:rPr>
               <a:t>mã số, nhật ký thay đổi</a:t>
             </a:r>
@@ -24978,8 +24774,8 @@
                 <a:solidFill>
                   <a:srgbClr val="000000"/>
                 </a:solidFill>
-                <a:latin typeface="Segoe UI"/>
-                <a:cs typeface="Segoe UI"/>
+                <a:latin typeface="Arial"/>
+                <a:cs typeface="Arial"/>
               </a:rPr>
               <a:t>sao lưu, tuyên bố chia sẻ</a:t>
             </a:r>
@@ -25023,8 +24819,8 @@
                 <a:solidFill>
                   <a:srgbClr val="FFFFFF"/>
                 </a:solidFill>
-                <a:latin typeface="Segoe UI"/>
-                <a:cs typeface="Segoe UI"/>
+                <a:latin typeface="Arial"/>
+                <a:cs typeface="Arial"/>
               </a:rPr>
               <a:t>THÔNG ĐIỆP CHÍNH   </a:t>
             </a:r>
@@ -25033,8 +24829,8 @@
                 <a:solidFill>
                   <a:srgbClr val="FFFFFF"/>
                 </a:solidFill>
-                <a:latin typeface="Segoe UI"/>
-                <a:cs typeface="Segoe UI"/>
+                <a:latin typeface="Arial"/>
+                <a:cs typeface="Arial"/>
               </a:rPr>
               <a:t>Hôm nay: sẽ thu thập gì và giữ an toàn dữ liệu thế nào.</a:t>
             </a:r>
@@ -25071,7 +24867,7 @@
                     <a:lumMod val="50000"/>
                   </a:schemeClr>
                 </a:solidFill>
-                <a:latin typeface="Verdana"/>
+                <a:latin typeface="Arial"/>
               </a:rPr>
               <a:t>Neudata | #ClearDataClearImpact</a:t>
             </a:r>
@@ -25201,8 +24997,8 @@
                 <a:solidFill>
                   <a:srgbClr val="0D7377"/>
                 </a:solidFill>
-                <a:latin typeface="Segoe UI"/>
-                <a:cs typeface="Segoe UI"/>
+                <a:latin typeface="Arial"/>
+                <a:cs typeface="Arial"/>
               </a:rPr>
               <a:t>Xây dựng đề cương 5: biến số, CRF và quản lý dữ liệu</a:t>
             </a:r>
@@ -25272,8 +25068,8 @@
                 <a:solidFill>
                   <a:srgbClr val="FFFFFF"/>
                 </a:solidFill>
-                <a:latin typeface="Segoe UI"/>
-                <a:cs typeface="Segoe UI"/>
+                <a:latin typeface="Arial"/>
+                <a:cs typeface="Arial"/>
               </a:rPr>
               <a:t>XÂY DỰNG ĐỀ CƯƠNG   |   30 phút</a:t>
             </a:r>
@@ -25310,25 +25106,19 @@
               <a:spcBef>
                 <a:spcPts val="450"/>
               </a:spcBef>
-              <a:buNone/>
-            </a:pPr>
-            <a:r>
-              <a:rPr lang="en-US" sz="1650" b="1" dirty="0">
-                <a:solidFill>
-                  <a:srgbClr val="055F56"/>
-                </a:solidFill>
-                <a:latin typeface="Segoe UI"/>
-                <a:cs typeface="Segoe UI"/>
-              </a:rPr>
-              <a:t>1.  </a:t>
-            </a:r>
+              <a:buClr>
+                <a:srgbClr val="055F56"/>
+              </a:buClr>
+              <a:buFont typeface="Arial"/>
+              <a:buChar char="•"/>
+            </a:pPr>
             <a:r>
               <a:rPr lang="en-US" sz="1650" dirty="0">
                 <a:solidFill>
                   <a:srgbClr val="000000"/>
                 </a:solidFill>
-                <a:latin typeface="Segoe UI"/>
-                <a:cs typeface="Segoe UI"/>
+                <a:latin typeface="Arial"/>
+                <a:cs typeface="Arial"/>
               </a:rPr>
               <a:t>Bảng biến số: kết cục, phơi nhiễm, 3-5 yếu tố gây nhiễu, mỗi biến kèm loại (8 phút)</a:t>
             </a:r>
@@ -25341,25 +25131,19 @@
               <a:spcBef>
                 <a:spcPts val="450"/>
               </a:spcBef>
-              <a:buNone/>
-            </a:pPr>
-            <a:r>
-              <a:rPr lang="en-US" sz="1650" b="1" dirty="0">
-                <a:solidFill>
-                  <a:srgbClr val="055F56"/>
-                </a:solidFill>
-                <a:latin typeface="Segoe UI"/>
-                <a:cs typeface="Segoe UI"/>
-              </a:rPr>
-              <a:t>2.  </a:t>
-            </a:r>
+              <a:buClr>
+                <a:srgbClr val="055F56"/>
+              </a:buClr>
+              <a:buFont typeface="Arial"/>
+              <a:buChar char="•"/>
+            </a:pPr>
             <a:r>
               <a:rPr lang="en-US" sz="1650" dirty="0">
                 <a:solidFill>
                   <a:srgbClr val="000000"/>
                 </a:solidFill>
-                <a:latin typeface="Segoe UI"/>
-                <a:cs typeface="Segoe UI"/>
+                <a:latin typeface="Arial"/>
+                <a:cs typeface="Arial"/>
               </a:rPr>
               <a:t>CRF thu gọn: 6-10 mục có đơn vị, thời điểm và lựa chọn 'không rõ' (10 phút)</a:t>
             </a:r>
@@ -25372,25 +25156,19 @@
               <a:spcBef>
                 <a:spcPts val="450"/>
               </a:spcBef>
-              <a:buNone/>
-            </a:pPr>
-            <a:r>
-              <a:rPr lang="en-US" sz="1650" b="1" dirty="0">
-                <a:solidFill>
-                  <a:srgbClr val="055F56"/>
-                </a:solidFill>
-                <a:latin typeface="Segoe UI"/>
-                <a:cs typeface="Segoe UI"/>
-              </a:rPr>
-              <a:t>3.  </a:t>
-            </a:r>
+              <a:buClr>
+                <a:srgbClr val="055F56"/>
+              </a:buClr>
+              <a:buFont typeface="Arial"/>
+              <a:buChar char="•"/>
+            </a:pPr>
             <a:r>
               <a:rPr lang="en-US" sz="1650" dirty="0">
                 <a:solidFill>
                   <a:srgbClr val="000000"/>
                 </a:solidFill>
-                <a:latin typeface="Segoe UI"/>
-                <a:cs typeface="Segoe UI"/>
+                <a:latin typeface="Arial"/>
+                <a:cs typeface="Arial"/>
               </a:rPr>
               <a:t>Từ điển dữ liệu: 3-5 dòng + một quy tắc kiểm tra (6 phút)</a:t>
             </a:r>
@@ -25403,25 +25181,19 @@
               <a:spcBef>
                 <a:spcPts val="450"/>
               </a:spcBef>
-              <a:buNone/>
-            </a:pPr>
-            <a:r>
-              <a:rPr lang="en-US" sz="1650" b="1" dirty="0">
-                <a:solidFill>
-                  <a:srgbClr val="055F56"/>
-                </a:solidFill>
-                <a:latin typeface="Segoe UI"/>
-                <a:cs typeface="Segoe UI"/>
-              </a:rPr>
-              <a:t>4.  </a:t>
-            </a:r>
+              <a:buClr>
+                <a:srgbClr val="055F56"/>
+              </a:buClr>
+              <a:buFont typeface="Arial"/>
+              <a:buChar char="•"/>
+            </a:pPr>
             <a:r>
               <a:rPr lang="en-US" sz="1650" dirty="0">
                 <a:solidFill>
                   <a:srgbClr val="000000"/>
                 </a:solidFill>
-                <a:latin typeface="Segoe UI"/>
-                <a:cs typeface="Segoe UI"/>
+                <a:latin typeface="Arial"/>
+                <a:cs typeface="Arial"/>
               </a:rPr>
               <a:t>Kế hoạch quản lý dữ liệu: EDC hoặc nhập hai lần, mã số, sao lưu, chia sẻ (6 phút)</a:t>
             </a:r>
@@ -25465,8 +25237,8 @@
                 <a:solidFill>
                   <a:srgbClr val="055F56"/>
                 </a:solidFill>
-                <a:latin typeface="Segoe UI"/>
-                <a:cs typeface="Segoe UI"/>
+                <a:latin typeface="Arial"/>
+                <a:cs typeface="Arial"/>
               </a:rPr>
               <a:t>Dùng các công cụ này</a:t>
             </a:r>
@@ -25487,8 +25259,8 @@
                 <a:solidFill>
                   <a:srgbClr val="000000"/>
                 </a:solidFill>
-                <a:latin typeface="Segoe UI"/>
-                <a:cs typeface="Segoe UI"/>
+                <a:latin typeface="Arial"/>
+                <a:cs typeface="Arial"/>
               </a:rPr>
               <a:t>Sơ đồ loại biến số</a:t>
             </a:r>
@@ -25509,8 +25281,8 @@
                 <a:solidFill>
                   <a:srgbClr val="000000"/>
                 </a:solidFill>
-                <a:latin typeface="Segoe UI"/>
-                <a:cs typeface="Segoe UI"/>
+                <a:latin typeface="Arial"/>
+                <a:cs typeface="Arial"/>
               </a:rPr>
               <a:t>Mục CRF tốt và chưa tốt</a:t>
             </a:r>
@@ -25531,8 +25303,8 @@
                 <a:solidFill>
                   <a:srgbClr val="000000"/>
                 </a:solidFill>
-                <a:latin typeface="Segoe UI"/>
-                <a:cs typeface="Segoe UI"/>
+                <a:latin typeface="Arial"/>
+                <a:cs typeface="Arial"/>
               </a:rPr>
               <a:t>Từ điển dữ liệu FLUID-ICU</a:t>
             </a:r>
@@ -25553,8 +25325,8 @@
                 <a:solidFill>
                   <a:srgbClr val="000000"/>
                 </a:solidFill>
-                <a:latin typeface="Segoe UI"/>
-                <a:cs typeface="Segoe UI"/>
+                <a:latin typeface="Arial"/>
+                <a:cs typeface="Arial"/>
               </a:rPr>
               <a:t>Phiếu bài tập: bài 8</a:t>
             </a:r>
@@ -25600,8 +25372,8 @@
                 <a:solidFill>
                   <a:srgbClr val="055F56"/>
                 </a:solidFill>
-                <a:latin typeface="Segoe UI"/>
-                <a:cs typeface="Segoe UI"/>
+                <a:latin typeface="Arial"/>
+                <a:cs typeface="Arial"/>
               </a:rPr>
               <a:t>SẢN PHẨM   </a:t>
             </a:r>
@@ -25610,8 +25382,8 @@
                 <a:solidFill>
                   <a:srgbClr val="000000"/>
                 </a:solidFill>
-                <a:latin typeface="Segoe UI"/>
-                <a:cs typeface="Segoe UI"/>
+                <a:latin typeface="Arial"/>
+                <a:cs typeface="Arial"/>
               </a:rPr>
               <a:t>Phần 3 đề cương (nửa đầu) được viết vào mẫu của nhóm</a:t>
             </a:r>
@@ -25648,7 +25420,7 @@
                     <a:lumMod val="50000"/>
                   </a:schemeClr>
                 </a:solidFill>
-                <a:latin typeface="Verdana"/>
+                <a:latin typeface="Arial"/>
               </a:rPr>
               <a:t>Neudata | #ClearDataClearImpact</a:t>
             </a:r>
@@ -25778,8 +25550,8 @@
                 <a:solidFill>
                   <a:srgbClr val="0D7377"/>
                 </a:solidFill>
-                <a:latin typeface="Segoe UI"/>
-                <a:cs typeface="Segoe UI"/>
+                <a:latin typeface="Arial"/>
+                <a:cs typeface="Arial"/>
               </a:rPr>
               <a:t>Từ khóa của ngày</a:t>
             </a:r>
@@ -25845,8 +25617,8 @@
                 <a:solidFill>
                   <a:srgbClr val="595959"/>
                 </a:solidFill>
-                <a:latin typeface="Segoe UI"/>
-                <a:cs typeface="Segoe UI"/>
+                <a:latin typeface="Arial"/>
+                <a:cs typeface="Arial"/>
               </a:rPr>
               <a:t>Mười hai thuật ngữ anh chị giờ có thể giải thích cho đồng nghiệp.</a:t>
             </a:r>
@@ -25888,8 +25660,8 @@
                 <a:solidFill>
                   <a:srgbClr val="FFFFFF"/>
                 </a:solidFill>
-                <a:latin typeface="Segoe UI"/>
-                <a:cs typeface="Segoe UI"/>
+                <a:latin typeface="Arial"/>
+                <a:cs typeface="Arial"/>
               </a:rPr>
               <a:t>Thu thập</a:t>
             </a:r>
@@ -25937,8 +25709,8 @@
                 <a:solidFill>
                   <a:srgbClr val="000000"/>
                 </a:solidFill>
-                <a:latin typeface="Segoe UI"/>
-                <a:cs typeface="Segoe UI"/>
+                <a:latin typeface="Arial"/>
+                <a:cs typeface="Arial"/>
               </a:rPr>
               <a:t>Loại biến số</a:t>
             </a:r>
@@ -25958,8 +25730,8 @@
                 <a:solidFill>
                   <a:srgbClr val="000000"/>
                 </a:solidFill>
-                <a:latin typeface="Segoe UI"/>
-                <a:cs typeface="Segoe UI"/>
+                <a:latin typeface="Arial"/>
+                <a:cs typeface="Arial"/>
               </a:rPr>
               <a:t>CRF</a:t>
             </a:r>
@@ -25979,8 +25751,8 @@
                 <a:solidFill>
                   <a:srgbClr val="000000"/>
                 </a:solidFill>
-                <a:latin typeface="Segoe UI"/>
-                <a:cs typeface="Segoe UI"/>
+                <a:latin typeface="Arial"/>
+                <a:cs typeface="Arial"/>
               </a:rPr>
               <a:t>Từ điển dữ liệu</a:t>
             </a:r>
@@ -26022,8 +25794,8 @@
                 <a:solidFill>
                   <a:srgbClr val="FFFFFF"/>
                 </a:solidFill>
-                <a:latin typeface="Segoe UI"/>
-                <a:cs typeface="Segoe UI"/>
+                <a:latin typeface="Arial"/>
+                <a:cs typeface="Arial"/>
               </a:rPr>
               <a:t>Bảo vệ</a:t>
             </a:r>
@@ -26071,8 +25843,8 @@
                 <a:solidFill>
                   <a:srgbClr val="000000"/>
                 </a:solidFill>
-                <a:latin typeface="Segoe UI"/>
-                <a:cs typeface="Segoe UI"/>
+                <a:latin typeface="Arial"/>
+                <a:cs typeface="Arial"/>
               </a:rPr>
               <a:t>Quy tắc kiểm tra</a:t>
             </a:r>
@@ -26092,8 +25864,8 @@
                 <a:solidFill>
                   <a:srgbClr val="000000"/>
                 </a:solidFill>
-                <a:latin typeface="Segoe UI"/>
-                <a:cs typeface="Segoe UI"/>
+                <a:latin typeface="Arial"/>
+                <a:cs typeface="Arial"/>
               </a:rPr>
               <a:t>Nhật ký thay đổi</a:t>
             </a:r>
@@ -26113,8 +25885,8 @@
                 <a:solidFill>
                   <a:srgbClr val="000000"/>
                 </a:solidFill>
-                <a:latin typeface="Segoe UI"/>
-                <a:cs typeface="Segoe UI"/>
+                <a:latin typeface="Arial"/>
+                <a:cs typeface="Arial"/>
               </a:rPr>
               <a:t>Nhật ký làm sạch</a:t>
             </a:r>
@@ -26156,8 +25928,8 @@
                 <a:solidFill>
                   <a:srgbClr val="FFFFFF"/>
                 </a:solidFill>
-                <a:latin typeface="Segoe UI"/>
-                <a:cs typeface="Segoe UI"/>
+                <a:latin typeface="Arial"/>
+                <a:cs typeface="Arial"/>
               </a:rPr>
               <a:t>Mô tả</a:t>
             </a:r>
@@ -26205,8 +25977,8 @@
                 <a:solidFill>
                   <a:srgbClr val="000000"/>
                 </a:solidFill>
-                <a:latin typeface="Segoe UI"/>
-                <a:cs typeface="Segoe UI"/>
+                <a:latin typeface="Arial"/>
+                <a:cs typeface="Arial"/>
               </a:rPr>
               <a:t>Trung vị (IQR)</a:t>
             </a:r>
@@ -26226,8 +25998,8 @@
                 <a:solidFill>
                   <a:srgbClr val="000000"/>
                 </a:solidFill>
-                <a:latin typeface="Segoe UI"/>
-                <a:cs typeface="Segoe UI"/>
+                <a:latin typeface="Arial"/>
+                <a:cs typeface="Arial"/>
               </a:rPr>
               <a:t>Trung bình (SD)</a:t>
             </a:r>
@@ -26247,8 +26019,8 @@
                 <a:solidFill>
                   <a:srgbClr val="000000"/>
                 </a:solidFill>
-                <a:latin typeface="Segoe UI"/>
-                <a:cs typeface="Segoe UI"/>
+                <a:latin typeface="Arial"/>
+                <a:cs typeface="Arial"/>
               </a:rPr>
               <a:t>Lệch</a:t>
             </a:r>
@@ -26290,8 +26062,8 @@
                 <a:solidFill>
                   <a:srgbClr val="FFFFFF"/>
                 </a:solidFill>
-                <a:latin typeface="Segoe UI"/>
-                <a:cs typeface="Segoe UI"/>
+                <a:latin typeface="Arial"/>
+                <a:cs typeface="Arial"/>
               </a:rPr>
               <a:t>Trình bày</a:t>
             </a:r>
@@ -26339,8 +26111,8 @@
                 <a:solidFill>
                   <a:srgbClr val="000000"/>
                 </a:solidFill>
-                <a:latin typeface="Segoe UI"/>
-                <a:cs typeface="Segoe UI"/>
+                <a:latin typeface="Arial"/>
+                <a:cs typeface="Arial"/>
               </a:rPr>
               <a:t>Bảng 1</a:t>
             </a:r>
@@ -26360,8 +26132,8 @@
                 <a:solidFill>
                   <a:srgbClr val="000000"/>
                 </a:solidFill>
-                <a:latin typeface="Segoe UI"/>
-                <a:cs typeface="Segoe UI"/>
+                <a:latin typeface="Arial"/>
+                <a:cs typeface="Arial"/>
               </a:rPr>
               <a:t>Chấm + hộp</a:t>
             </a:r>
@@ -26381,8 +26153,8 @@
                 <a:solidFill>
                   <a:srgbClr val="000000"/>
                 </a:solidFill>
-                <a:latin typeface="Segoe UI"/>
-                <a:cs typeface="Segoe UI"/>
+                <a:latin typeface="Arial"/>
+                <a:cs typeface="Arial"/>
               </a:rPr>
               <a:t>n (%)</a:t>
             </a:r>
@@ -26426,8 +26198,8 @@
                 <a:solidFill>
                   <a:srgbClr val="FFFFFF"/>
                 </a:solidFill>
-                <a:latin typeface="Segoe UI"/>
-                <a:cs typeface="Segoe UI"/>
+                <a:latin typeface="Arial"/>
+                <a:cs typeface="Arial"/>
               </a:rPr>
               <a:t>THÔNG ĐIỆP CHÍNH   </a:t>
             </a:r>
@@ -26436,8 +26208,8 @@
                 <a:solidFill>
                   <a:srgbClr val="FFFFFF"/>
                 </a:solidFill>
-                <a:latin typeface="Segoe UI"/>
-                <a:cs typeface="Segoe UI"/>
+                <a:latin typeface="Arial"/>
+                <a:cs typeface="Arial"/>
               </a:rPr>
               <a:t>Nếu từ nào chưa rõ, hãy hỏi ngay hoặc tra trong bảng thuật ngữ.</a:t>
             </a:r>
@@ -26474,7 +26246,7 @@
                     <a:lumMod val="50000"/>
                   </a:schemeClr>
                 </a:solidFill>
-                <a:latin typeface="Verdana"/>
+                <a:latin typeface="Arial"/>
               </a:rPr>
               <a:t>Neudata | #ClearDataClearImpact</a:t>
             </a:r>
@@ -26604,8 +26376,8 @@
                 <a:solidFill>
                   <a:srgbClr val="0D7377"/>
                 </a:solidFill>
-                <a:latin typeface="Segoe UI"/>
-                <a:cs typeface="Segoe UI"/>
+                <a:latin typeface="Arial"/>
+                <a:cs typeface="Arial"/>
               </a:rPr>
               <a:t>Tóm tắt Buổi 5</a:t>
             </a:r>
@@ -26671,8 +26443,8 @@
                 <a:solidFill>
                   <a:srgbClr val="595959"/>
                 </a:solidFill>
-                <a:latin typeface="Segoe UI"/>
-                <a:cs typeface="Segoe UI"/>
+                <a:latin typeface="Arial"/>
+                <a:cs typeface="Arial"/>
               </a:rPr>
               <a:t>Ba thông điệp mang về.</a:t>
             </a:r>
@@ -26714,10 +26486,10 @@
                 <a:solidFill>
                   <a:srgbClr val="FFFFFF"/>
                 </a:solidFill>
-                <a:latin typeface="Segoe UI"/>
-                <a:cs typeface="Segoe UI"/>
-              </a:rPr>
-              <a:t>1. Thiết kế dữ liệu</a:t>
+                <a:latin typeface="Arial"/>
+                <a:cs typeface="Arial"/>
+              </a:rPr>
+              <a:t>Thiết kế dữ liệu</a:t>
             </a:r>
           </a:p>
         </p:txBody>
@@ -26763,8 +26535,8 @@
                 <a:solidFill>
                   <a:srgbClr val="000000"/>
                 </a:solidFill>
-                <a:latin typeface="Segoe UI"/>
-                <a:cs typeface="Segoe UI"/>
+                <a:latin typeface="Arial"/>
+                <a:cs typeface="Arial"/>
               </a:rPr>
               <a:t>Mục CRF rõ ràng</a:t>
             </a:r>
@@ -26784,8 +26556,8 @@
                 <a:solidFill>
                   <a:srgbClr val="000000"/>
                 </a:solidFill>
-                <a:latin typeface="Segoe UI"/>
-                <a:cs typeface="Segoe UI"/>
+                <a:latin typeface="Arial"/>
+                <a:cs typeface="Arial"/>
               </a:rPr>
               <a:t>Từ điển dữ liệu trước</a:t>
             </a:r>
@@ -26805,8 +26577,8 @@
                 <a:solidFill>
                   <a:srgbClr val="000000"/>
                 </a:solidFill>
-                <a:latin typeface="Segoe UI"/>
-                <a:cs typeface="Segoe UI"/>
+                <a:latin typeface="Arial"/>
+                <a:cs typeface="Arial"/>
               </a:rPr>
               <a:t>Kiểm tra khi nhập</a:t>
             </a:r>
@@ -26848,10 +26620,10 @@
                 <a:solidFill>
                   <a:srgbClr val="FFFFFF"/>
                 </a:solidFill>
-                <a:latin typeface="Segoe UI"/>
-                <a:cs typeface="Segoe UI"/>
-              </a:rPr>
-              <a:t>2. Giữ dữ liệu sạch</a:t>
+                <a:latin typeface="Arial"/>
+                <a:cs typeface="Arial"/>
+              </a:rPr>
+              <a:t>Giữ dữ liệu sạch</a:t>
             </a:r>
           </a:p>
         </p:txBody>
@@ -26897,8 +26669,8 @@
                 <a:solidFill>
                   <a:srgbClr val="000000"/>
                 </a:solidFill>
-                <a:latin typeface="Segoe UI"/>
-                <a:cs typeface="Segoe UI"/>
+                <a:latin typeface="Arial"/>
+                <a:cs typeface="Arial"/>
               </a:rPr>
               <a:t>Không sửa dữ liệu gốc</a:t>
             </a:r>
@@ -26918,8 +26690,8 @@
                 <a:solidFill>
                   <a:srgbClr val="000000"/>
                 </a:solidFill>
-                <a:latin typeface="Segoe UI"/>
-                <a:cs typeface="Segoe UI"/>
+                <a:latin typeface="Arial"/>
+                <a:cs typeface="Arial"/>
               </a:rPr>
               <a:t>Ghi lại mọi chỉnh sửa</a:t>
             </a:r>
@@ -26939,8 +26711,8 @@
                 <a:solidFill>
                   <a:srgbClr val="000000"/>
                 </a:solidFill>
-                <a:latin typeface="Segoe UI"/>
-                <a:cs typeface="Segoe UI"/>
+                <a:latin typeface="Arial"/>
+                <a:cs typeface="Arial"/>
               </a:rPr>
               <a:t>Sao lưu, mã số</a:t>
             </a:r>
@@ -26982,10 +26754,10 @@
                 <a:solidFill>
                   <a:srgbClr val="FFFFFF"/>
                 </a:solidFill>
-                <a:latin typeface="Segoe UI"/>
-                <a:cs typeface="Segoe UI"/>
-              </a:rPr>
-              <a:t>3. Mô tả trung thực</a:t>
+                <a:latin typeface="Arial"/>
+                <a:cs typeface="Arial"/>
+              </a:rPr>
+              <a:t>Mô tả trung thực</a:t>
             </a:r>
           </a:p>
         </p:txBody>
@@ -27031,8 +26803,8 @@
                 <a:solidFill>
                   <a:srgbClr val="000000"/>
                 </a:solidFill>
-                <a:latin typeface="Segoe UI"/>
-                <a:cs typeface="Segoe UI"/>
+                <a:latin typeface="Arial"/>
+                <a:cs typeface="Arial"/>
               </a:rPr>
               <a:t>Hình dạng quyết định tóm tắt</a:t>
             </a:r>
@@ -27052,8 +26824,8 @@
                 <a:solidFill>
                   <a:srgbClr val="000000"/>
                 </a:solidFill>
-                <a:latin typeface="Segoe UI"/>
-                <a:cs typeface="Segoe UI"/>
+                <a:latin typeface="Arial"/>
+                <a:cs typeface="Arial"/>
               </a:rPr>
               <a:t>Cho thấy từng bệnh nhân</a:t>
             </a:r>
@@ -27073,8 +26845,8 @@
                 <a:solidFill>
                   <a:srgbClr val="000000"/>
                 </a:solidFill>
-                <a:latin typeface="Segoe UI"/>
-                <a:cs typeface="Segoe UI"/>
+                <a:latin typeface="Arial"/>
+                <a:cs typeface="Arial"/>
               </a:rPr>
               <a:t>Bảng 1 tự đứng được</a:t>
             </a:r>
@@ -27118,8 +26890,8 @@
                 <a:solidFill>
                   <a:srgbClr val="FFFFFF"/>
                 </a:solidFill>
-                <a:latin typeface="Segoe UI"/>
-                <a:cs typeface="Segoe UI"/>
+                <a:latin typeface="Arial"/>
+                <a:cs typeface="Arial"/>
               </a:rPr>
               <a:t>THÔNG ĐIỆP CHÍNH   </a:t>
             </a:r>
@@ -27128,8 +26900,8 @@
                 <a:solidFill>
                   <a:srgbClr val="FFFFFF"/>
                 </a:solidFill>
-                <a:latin typeface="Segoe UI"/>
-                <a:cs typeface="Segoe UI"/>
+                <a:latin typeface="Arial"/>
+                <a:cs typeface="Arial"/>
               </a:rPr>
               <a:t>Phân tích tốt bắt đầu từ dữ liệu tốt, được mô tả trung thực.</a:t>
             </a:r>
@@ -27166,7 +26938,7 @@
                     <a:lumMod val="50000"/>
                   </a:schemeClr>
                 </a:solidFill>
-                <a:latin typeface="Verdana"/>
+                <a:latin typeface="Arial"/>
               </a:rPr>
               <a:t>Neudata | #ClearDataClearImpact</a:t>
             </a:r>
@@ -27296,8 +27068,8 @@
                 <a:solidFill>
                   <a:srgbClr val="0D7377"/>
                 </a:solidFill>
-                <a:latin typeface="Segoe UI"/>
-                <a:cs typeface="Segoe UI"/>
+                <a:latin typeface="Arial"/>
+                <a:cs typeface="Arial"/>
               </a:rPr>
               <a:t>Tổng kết và bài tập về nhà</a:t>
             </a:r>
@@ -27367,8 +27139,8 @@
                 <a:solidFill>
                   <a:srgbClr val="FFFFFF"/>
                 </a:solidFill>
-                <a:latin typeface="Segoe UI"/>
-                <a:cs typeface="Segoe UI"/>
+                <a:latin typeface="Arial"/>
+                <a:cs typeface="Arial"/>
               </a:rPr>
               <a:t>THẢO LUẬN   |   5 phút</a:t>
             </a:r>
@@ -27405,25 +27177,19 @@
               <a:spcBef>
                 <a:spcPts val="450"/>
               </a:spcBef>
-              <a:buNone/>
-            </a:pPr>
-            <a:r>
-              <a:rPr lang="en-US" sz="1650" b="1" dirty="0">
-                <a:solidFill>
-                  <a:srgbClr val="1F5C7A"/>
-                </a:solidFill>
-                <a:latin typeface="Segoe UI"/>
-                <a:cs typeface="Segoe UI"/>
-              </a:rPr>
-              <a:t>1.  </a:t>
-            </a:r>
+              <a:buClr>
+                <a:srgbClr val="1F5C7A"/>
+              </a:buClr>
+              <a:buFont typeface="Arial"/>
+              <a:buChar char="•"/>
+            </a:pPr>
             <a:r>
               <a:rPr lang="en-US" sz="1650" dirty="0">
                 <a:solidFill>
                   <a:srgbClr val="000000"/>
                 </a:solidFill>
-                <a:latin typeface="Segoe UI"/>
-                <a:cs typeface="Segoe UI"/>
+                <a:latin typeface="Arial"/>
+                <a:cs typeface="Arial"/>
               </a:rPr>
               <a:t>Từ khóa và tóm tắt (hai trang trước)</a:t>
             </a:r>
@@ -27436,25 +27202,19 @@
               <a:spcBef>
                 <a:spcPts val="450"/>
               </a:spcBef>
-              <a:buNone/>
-            </a:pPr>
-            <a:r>
-              <a:rPr lang="en-US" sz="1650" b="1" dirty="0">
-                <a:solidFill>
-                  <a:srgbClr val="1F5C7A"/>
-                </a:solidFill>
-                <a:latin typeface="Segoe UI"/>
-                <a:cs typeface="Segoe UI"/>
-              </a:rPr>
-              <a:t>2.  </a:t>
-            </a:r>
+              <a:buClr>
+                <a:srgbClr val="1F5C7A"/>
+              </a:buClr>
+              <a:buFont typeface="Arial"/>
+              <a:buChar char="•"/>
+            </a:pPr>
             <a:r>
               <a:rPr lang="en-US" sz="1650" dirty="0">
                 <a:solidFill>
                   <a:srgbClr val="000000"/>
                 </a:solidFill>
-                <a:latin typeface="Segoe UI"/>
-                <a:cs typeface="Segoe UI"/>
+                <a:latin typeface="Arial"/>
+                <a:cs typeface="Arial"/>
               </a:rPr>
               <a:t>Câu hỏi cuối buổi: một lỗi chất lượng dữ liệu tìm thấy trong FLUID-ICU, và cách sửa</a:t>
             </a:r>
@@ -27467,25 +27227,19 @@
               <a:spcBef>
                 <a:spcPts val="450"/>
               </a:spcBef>
-              <a:buNone/>
-            </a:pPr>
-            <a:r>
-              <a:rPr lang="en-US" sz="1650" b="1" dirty="0">
-                <a:solidFill>
-                  <a:srgbClr val="1F5C7A"/>
-                </a:solidFill>
-                <a:latin typeface="Segoe UI"/>
-                <a:cs typeface="Segoe UI"/>
-              </a:rPr>
-              <a:t>3.  </a:t>
-            </a:r>
+              <a:buClr>
+                <a:srgbClr val="1F5C7A"/>
+              </a:buClr>
+              <a:buFont typeface="Arial"/>
+              <a:buChar char="•"/>
+            </a:pPr>
             <a:r>
               <a:rPr lang="en-US" sz="1650" dirty="0">
                 <a:solidFill>
                   <a:srgbClr val="000000"/>
                 </a:solidFill>
-                <a:latin typeface="Segoe UI"/>
-                <a:cs typeface="Segoe UI"/>
+                <a:latin typeface="Arial"/>
+                <a:cs typeface="Arial"/>
               </a:rPr>
               <a:t>Về nhà: hoàn thành CRF và các dòng từ điển dữ liệu trong đề cương</a:t>
             </a:r>
@@ -27498,25 +27252,19 @@
               <a:spcBef>
                 <a:spcPts val="450"/>
               </a:spcBef>
-              <a:buNone/>
-            </a:pPr>
-            <a:r>
-              <a:rPr lang="en-US" sz="1650" b="1" dirty="0">
-                <a:solidFill>
-                  <a:srgbClr val="1F5C7A"/>
-                </a:solidFill>
-                <a:latin typeface="Segoe UI"/>
-                <a:cs typeface="Segoe UI"/>
-              </a:rPr>
-              <a:t>4.  </a:t>
-            </a:r>
+              <a:buClr>
+                <a:srgbClr val="1F5C7A"/>
+              </a:buClr>
+              <a:buFont typeface="Arial"/>
+              <a:buChar char="•"/>
+            </a:pPr>
             <a:r>
               <a:rPr lang="en-US" sz="1650" dirty="0">
                 <a:solidFill>
                   <a:srgbClr val="000000"/>
                 </a:solidFill>
-                <a:latin typeface="Segoe UI"/>
-                <a:cs typeface="Segoe UI"/>
+                <a:latin typeface="Arial"/>
+                <a:cs typeface="Arial"/>
               </a:rPr>
               <a:t>Đọc gói kết quả của nhóm (Bảng 1 và biểu đồ) trước Buổi 6</a:t>
             </a:r>
@@ -27560,8 +27308,8 @@
                 <a:solidFill>
                   <a:srgbClr val="1F5C7A"/>
                 </a:solidFill>
-                <a:latin typeface="Segoe UI"/>
-                <a:cs typeface="Segoe UI"/>
+                <a:latin typeface="Arial"/>
+                <a:cs typeface="Arial"/>
               </a:rPr>
               <a:t>Thứ Bảy tuần sau: Buổi 6</a:t>
             </a:r>
@@ -27582,8 +27330,8 @@
                 <a:solidFill>
                   <a:srgbClr val="000000"/>
                 </a:solidFill>
-                <a:latin typeface="Segoe UI"/>
-                <a:cs typeface="Segoe UI"/>
+                <a:latin typeface="Arial"/>
+                <a:cs typeface="Arial"/>
               </a:rPr>
               <a:t>Khoảng tin cậy, giá trị p</a:t>
             </a:r>
@@ -27604,8 +27352,8 @@
                 <a:solidFill>
                   <a:srgbClr val="000000"/>
                 </a:solidFill>
-                <a:latin typeface="Segoe UI"/>
-                <a:cs typeface="Segoe UI"/>
+                <a:latin typeface="Arial"/>
+                <a:cs typeface="Arial"/>
               </a:rPr>
               <a:t>Chọn kiểm định</a:t>
             </a:r>
@@ -27626,8 +27374,8 @@
                 <a:solidFill>
                   <a:srgbClr val="000000"/>
                 </a:solidFill>
-                <a:latin typeface="Segoe UI"/>
-                <a:cs typeface="Segoe UI"/>
+                <a:latin typeface="Arial"/>
+                <a:cs typeface="Arial"/>
               </a:rPr>
               <a:t>Hồi quy và sống còn</a:t>
             </a:r>
@@ -27648,8 +27396,8 @@
                 <a:solidFill>
                   <a:srgbClr val="000000"/>
                 </a:solidFill>
-                <a:latin typeface="Segoe UI"/>
-                <a:cs typeface="Segoe UI"/>
+                <a:latin typeface="Arial"/>
+                <a:cs typeface="Arial"/>
               </a:rPr>
               <a:t>Dữ liệu thiếu</a:t>
             </a:r>
@@ -27670,8 +27418,8 @@
                 <a:solidFill>
                   <a:srgbClr val="000000"/>
                 </a:solidFill>
-                <a:latin typeface="Segoe UI"/>
-                <a:cs typeface="Segoe UI"/>
+                <a:latin typeface="Arial"/>
+                <a:cs typeface="Arial"/>
               </a:rPr>
               <a:t>Kết quả bộ dữ liệu của nhóm</a:t>
             </a:r>
@@ -27717,8 +27465,8 @@
                 <a:solidFill>
                   <a:srgbClr val="1F5C7A"/>
                 </a:solidFill>
-                <a:latin typeface="Segoe UI"/>
-                <a:cs typeface="Segoe UI"/>
+                <a:latin typeface="Arial"/>
+                <a:cs typeface="Arial"/>
               </a:rPr>
               <a:t>SẢN PHẨM   </a:t>
             </a:r>
@@ -27727,8 +27475,8 @@
                 <a:solidFill>
                   <a:srgbClr val="000000"/>
                 </a:solidFill>
-                <a:latin typeface="Segoe UI"/>
-                <a:cs typeface="Segoe UI"/>
+                <a:latin typeface="Arial"/>
+                <a:cs typeface="Arial"/>
               </a:rPr>
               <a:t>Câu trả lời trên giấy nhớ</a:t>
             </a:r>
@@ -27765,7 +27513,7 @@
                     <a:lumMod val="50000"/>
                   </a:schemeClr>
                 </a:solidFill>
-                <a:latin typeface="Verdana"/>
+                <a:latin typeface="Arial"/>
               </a:rPr>
               <a:t>Neudata | #ClearDataClearImpact</a:t>
             </a:r>
@@ -27895,8 +27643,8 @@
                 <a:solidFill>
                   <a:srgbClr val="0D7377"/>
                 </a:solidFill>
-                <a:latin typeface="Segoe UI"/>
-                <a:cs typeface="Segoe UI"/>
+                <a:latin typeface="Arial"/>
+                <a:cs typeface="Arial"/>
               </a:rPr>
               <a:t>Trang bổ sung: Buổi 5</a:t>
             </a:r>
@@ -27965,8 +27713,8 @@
                 <a:solidFill>
                   <a:srgbClr val="0D7377"/>
                 </a:solidFill>
-                <a:latin typeface="Segoe UI"/>
-                <a:cs typeface="Segoe UI"/>
+                <a:latin typeface="Arial"/>
+                <a:cs typeface="Arial"/>
               </a:rPr>
               <a:t>Trang bổ sung: dùng nếu còn thời gian, hoặc để tự học.</a:t>
             </a:r>
@@ -27983,8 +27731,8 @@
                 <a:solidFill>
                   <a:srgbClr val="595959"/>
                 </a:solidFill>
-                <a:latin typeface="Segoe UI"/>
-                <a:cs typeface="Segoe UI"/>
+                <a:latin typeface="Arial"/>
+                <a:cs typeface="Arial"/>
               </a:rPr>
               <a:t>Không bắt buộc để theo Buổi 6</a:t>
             </a:r>
@@ -28021,7 +27769,7 @@
                     <a:lumMod val="50000"/>
                   </a:schemeClr>
                 </a:solidFill>
-                <a:latin typeface="Verdana"/>
+                <a:latin typeface="Arial"/>
               </a:rPr>
               <a:t>Neudata | #ClearDataClearImpact</a:t>
             </a:r>
@@ -28151,8 +27899,8 @@
                 <a:solidFill>
                   <a:srgbClr val="0D7377"/>
                 </a:solidFill>
-                <a:latin typeface="Segoe UI"/>
-                <a:cs typeface="Segoe UI"/>
+                <a:latin typeface="Arial"/>
+                <a:cs typeface="Arial"/>
               </a:rPr>
               <a:t>Bổ sung: Mã hóa, phiên bản, sao lưu và chia sẻ dữ liệu</a:t>
             </a:r>
@@ -28218,8 +27966,8 @@
                 <a:solidFill>
                   <a:srgbClr val="595959"/>
                 </a:solidFill>
-                <a:latin typeface="Segoe UI"/>
-                <a:cs typeface="Segoe UI"/>
+                <a:latin typeface="Arial"/>
+                <a:cs typeface="Arial"/>
               </a:rPr>
               <a:t>Bốn thói quen bảo vệ dữ liệu và bài báo tương lai của anh chị.</a:t>
             </a:r>
@@ -28261,8 +28009,8 @@
                 <a:solidFill>
                   <a:srgbClr val="FFFFFF"/>
                 </a:solidFill>
-                <a:latin typeface="Segoe UI"/>
-                <a:cs typeface="Segoe UI"/>
+                <a:latin typeface="Arial"/>
+                <a:cs typeface="Arial"/>
               </a:rPr>
               <a:t>Mã hóa</a:t>
             </a:r>
@@ -28310,8 +28058,8 @@
                 <a:solidFill>
                   <a:srgbClr val="000000"/>
                 </a:solidFill>
-                <a:latin typeface="Segoe UI"/>
-                <a:cs typeface="Segoe UI"/>
+                <a:latin typeface="Arial"/>
+                <a:cs typeface="Arial"/>
               </a:rPr>
               <a:t>Dùng mã, không văn bản tự do</a:t>
             </a:r>
@@ -28331,8 +28079,8 @@
                 <a:solidFill>
                   <a:srgbClr val="000000"/>
                 </a:solidFill>
-                <a:latin typeface="Segoe UI"/>
-                <a:cs typeface="Segoe UI"/>
+                <a:latin typeface="Arial"/>
+                <a:cs typeface="Arial"/>
               </a:rPr>
               <a:t>Mã nghiên cứu, không tên</a:t>
             </a:r>
@@ -28352,8 +28100,8 @@
                 <a:solidFill>
                   <a:srgbClr val="000000"/>
                 </a:solidFill>
-                <a:latin typeface="Segoe UI"/>
-                <a:cs typeface="Segoe UI"/>
+                <a:latin typeface="Arial"/>
+                <a:cs typeface="Arial"/>
               </a:rPr>
               <a:t>Mã có trong từ điển</a:t>
             </a:r>
@@ -28395,8 +28143,8 @@
                 <a:solidFill>
                   <a:srgbClr val="FFFFFF"/>
                 </a:solidFill>
-                <a:latin typeface="Segoe UI"/>
-                <a:cs typeface="Segoe UI"/>
+                <a:latin typeface="Arial"/>
+                <a:cs typeface="Arial"/>
               </a:rPr>
               <a:t>Phiên bản</a:t>
             </a:r>
@@ -28444,8 +28192,8 @@
                 <a:solidFill>
                   <a:srgbClr val="000000"/>
                 </a:solidFill>
-                <a:latin typeface="Segoe UI"/>
-                <a:cs typeface="Segoe UI"/>
+                <a:latin typeface="Arial"/>
+                <a:cs typeface="Arial"/>
               </a:rPr>
               <a:t>Tệp gốc: chỉ đọc</a:t>
             </a:r>
@@ -28465,8 +28213,8 @@
                 <a:solidFill>
                   <a:srgbClr val="000000"/>
                 </a:solidFill>
-                <a:latin typeface="Segoe UI"/>
-                <a:cs typeface="Segoe UI"/>
+                <a:latin typeface="Arial"/>
+                <a:cs typeface="Arial"/>
               </a:rPr>
               <a:t>Bản sao có ngày:</a:t>
             </a:r>
@@ -28486,8 +28234,8 @@
                 <a:solidFill>
                   <a:srgbClr val="000000"/>
                 </a:solidFill>
-                <a:latin typeface="Segoe UI"/>
-                <a:cs typeface="Segoe UI"/>
+                <a:latin typeface="Arial"/>
+                <a:cs typeface="Arial"/>
               </a:rPr>
               <a:t>data_2026-03-12_v2</a:t>
             </a:r>
@@ -28529,8 +28277,8 @@
                 <a:solidFill>
                   <a:srgbClr val="FFFFFF"/>
                 </a:solidFill>
-                <a:latin typeface="Segoe UI"/>
-                <a:cs typeface="Segoe UI"/>
+                <a:latin typeface="Arial"/>
+                <a:cs typeface="Arial"/>
               </a:rPr>
               <a:t>Sao lưu</a:t>
             </a:r>
@@ -28578,8 +28326,8 @@
                 <a:solidFill>
                   <a:srgbClr val="000000"/>
                 </a:solidFill>
-                <a:latin typeface="Segoe UI"/>
-                <a:cs typeface="Segoe UI"/>
+                <a:latin typeface="Arial"/>
+                <a:cs typeface="Arial"/>
               </a:rPr>
               <a:t>3 bản, 2 phương tiện,</a:t>
             </a:r>
@@ -28599,8 +28347,8 @@
                 <a:solidFill>
                   <a:srgbClr val="000000"/>
                 </a:solidFill>
-                <a:latin typeface="Segoe UI"/>
-                <a:cs typeface="Segoe UI"/>
+                <a:latin typeface="Arial"/>
+                <a:cs typeface="Arial"/>
               </a:rPr>
               <a:t>1 nơi khác (mã hóa)</a:t>
             </a:r>
@@ -28620,8 +28368,8 @@
                 <a:solidFill>
                   <a:srgbClr val="000000"/>
                 </a:solidFill>
-                <a:latin typeface="Segoe UI"/>
-                <a:cs typeface="Segoe UI"/>
+                <a:latin typeface="Arial"/>
+                <a:cs typeface="Arial"/>
               </a:rPr>
               <a:t>Thử khôi phục</a:t>
             </a:r>
@@ -28663,8 +28411,8 @@
                 <a:solidFill>
                   <a:srgbClr val="FFFFFF"/>
                 </a:solidFill>
-                <a:latin typeface="Segoe UI"/>
-                <a:cs typeface="Segoe UI"/>
+                <a:latin typeface="Arial"/>
+                <a:cs typeface="Arial"/>
               </a:rPr>
               <a:t>Chia sẻ dữ liệu</a:t>
             </a:r>
@@ -28712,8 +28460,8 @@
                 <a:solidFill>
                   <a:srgbClr val="000000"/>
                 </a:solidFill>
-                <a:latin typeface="Segoe UI"/>
-                <a:cs typeface="Segoe UI"/>
+                <a:latin typeface="Arial"/>
+                <a:cs typeface="Arial"/>
               </a:rPr>
               <a:t>Tạp chí yêu cầu</a:t>
             </a:r>
@@ -28733,8 +28481,8 @@
                 <a:solidFill>
                   <a:srgbClr val="000000"/>
                 </a:solidFill>
-                <a:latin typeface="Segoe UI"/>
-                <a:cs typeface="Segoe UI"/>
+                <a:latin typeface="Arial"/>
+                <a:cs typeface="Arial"/>
               </a:rPr>
               <a:t>tuyên bố chia sẻ dữ liệu</a:t>
             </a:r>
@@ -28754,8 +28502,8 @@
                 <a:solidFill>
                   <a:srgbClr val="000000"/>
                 </a:solidFill>
-                <a:latin typeface="Segoe UI"/>
-                <a:cs typeface="Segoe UI"/>
+                <a:latin typeface="Arial"/>
+                <a:cs typeface="Arial"/>
               </a:rPr>
               <a:t>Lên kế hoạch từ đầu</a:t>
             </a:r>
@@ -28799,8 +28547,8 @@
                 <a:solidFill>
                   <a:srgbClr val="FFFFFF"/>
                 </a:solidFill>
-                <a:latin typeface="Segoe UI"/>
-                <a:cs typeface="Segoe UI"/>
+                <a:latin typeface="Arial"/>
+                <a:cs typeface="Arial"/>
               </a:rPr>
               <a:t>THÔNG ĐIỆP CHÍNH   </a:t>
             </a:r>
@@ -28809,8 +28557,8 @@
                 <a:solidFill>
                   <a:srgbClr val="FFFFFF"/>
                 </a:solidFill>
-                <a:latin typeface="Segoe UI"/>
-                <a:cs typeface="Segoe UI"/>
+                <a:latin typeface="Arial"/>
+                <a:cs typeface="Arial"/>
               </a:rPr>
               <a:t>Không bao giờ sửa tệp gốc: giữ, sao chép, ghi ngày, sao lưu.</a:t>
             </a:r>
@@ -28847,7 +28595,7 @@
                     <a:lumMod val="50000"/>
                   </a:schemeClr>
                 </a:solidFill>
-                <a:latin typeface="Verdana"/>
+                <a:latin typeface="Arial"/>
               </a:rPr>
               <a:t>Neudata | #ClearDataClearImpact</a:t>
             </a:r>
@@ -28977,8 +28725,8 @@
                 <a:solidFill>
                   <a:srgbClr val="0D7377"/>
                 </a:solidFill>
-                <a:latin typeface="Segoe UI"/>
-                <a:cs typeface="Segoe UI"/>
+                <a:latin typeface="Arial"/>
+                <a:cs typeface="Arial"/>
               </a:rPr>
               <a:t>Bổ sung: Ba lỗi biểu đồ nữa và cách sửa</a:t>
             </a:r>
@@ -29074,8 +28822,8 @@
                 <a:solidFill>
                   <a:srgbClr val="FFFFFF"/>
                 </a:solidFill>
-                <a:latin typeface="Segoe UI"/>
-                <a:cs typeface="Segoe UI"/>
+                <a:latin typeface="Arial"/>
+                <a:cs typeface="Arial"/>
               </a:rPr>
               <a:t>THÔNG ĐIỆP CHÍNH   </a:t>
             </a:r>
@@ -29084,8 +28832,8 @@
                 <a:solidFill>
                   <a:srgbClr val="FFFFFF"/>
                 </a:solidFill>
-                <a:latin typeface="Segoe UI"/>
-                <a:cs typeface="Segoe UI"/>
+                <a:latin typeface="Arial"/>
+                <a:cs typeface="Arial"/>
               </a:rPr>
               <a:t>Cột bắt đầu từ 0, mỗi biểu đồ một trục, và không dùng hiệu ứng 3-D.</a:t>
             </a:r>
@@ -29122,7 +28870,7 @@
                     <a:lumMod val="50000"/>
                   </a:schemeClr>
                 </a:solidFill>
-                <a:latin typeface="Verdana"/>
+                <a:latin typeface="Arial"/>
               </a:rPr>
               <a:t>Neudata | #ClearDataClearImpact</a:t>
             </a:r>
@@ -29276,8 +29024,8 @@
                 <a:solidFill>
                   <a:srgbClr val="4472C4"/>
                 </a:solidFill>
-                <a:latin typeface="Segoe UI"/>
-                <a:cs typeface="Segoe UI"/>
+                <a:latin typeface="Arial"/>
+                <a:cs typeface="Arial"/>
               </a:rPr>
               <a:t>Copyright © Neudata, 2026</a:t>
             </a:r>
@@ -29422,7 +29170,7 @@
                     <a:lumMod val="50000"/>
                   </a:schemeClr>
                 </a:solidFill>
-                <a:latin typeface="Verdana"/>
+                <a:latin typeface="Arial"/>
               </a:rPr>
               <a:t>Neudata | #ClearDataClearImpact</a:t>
             </a:r>
@@ -29528,8 +29276,8 @@
                 <a:solidFill>
                   <a:srgbClr val="0D7377"/>
                 </a:solidFill>
-                <a:latin typeface="Segoe UI"/>
-                <a:cs typeface="Segoe UI"/>
+                <a:latin typeface="Arial"/>
+                <a:cs typeface="Arial"/>
               </a:rPr>
               <a:t>Kiểm tra nhanh: biến số loại gì?</a:t>
             </a:r>
@@ -29599,8 +29347,8 @@
                 <a:solidFill>
                   <a:srgbClr val="FFFFFF"/>
                 </a:solidFill>
-                <a:latin typeface="Segoe UI"/>
-                <a:cs typeface="Segoe UI"/>
+                <a:latin typeface="Arial"/>
+                <a:cs typeface="Arial"/>
               </a:rPr>
               <a:t>CÂU HỎI NHANH   |   3 phút</a:t>
             </a:r>
@@ -29637,25 +29385,19 @@
               <a:spcBef>
                 <a:spcPts val="450"/>
               </a:spcBef>
-              <a:buNone/>
-            </a:pPr>
-            <a:r>
-              <a:rPr lang="en-US" sz="1650" b="1" dirty="0">
-                <a:solidFill>
-                  <a:srgbClr val="6C3483"/>
-                </a:solidFill>
-                <a:latin typeface="Segoe UI"/>
-                <a:cs typeface="Segoe UI"/>
-              </a:rPr>
-              <a:t>1.  </a:t>
-            </a:r>
+              <a:buClr>
+                <a:srgbClr val="6C3483"/>
+              </a:buClr>
+              <a:buFont typeface="Arial"/>
+              <a:buChar char="•"/>
+            </a:pPr>
             <a:r>
               <a:rPr lang="en-US" sz="1650" dirty="0">
                 <a:solidFill>
                   <a:srgbClr val="000000"/>
                 </a:solidFill>
-                <a:latin typeface="Segoe UI"/>
-                <a:cs typeface="Segoe UI"/>
+                <a:latin typeface="Arial"/>
+                <a:cs typeface="Arial"/>
               </a:rPr>
               <a:t>Nhịp tim (lần/phút)</a:t>
             </a:r>
@@ -29668,25 +29410,19 @@
               <a:spcBef>
                 <a:spcPts val="450"/>
               </a:spcBef>
-              <a:buNone/>
-            </a:pPr>
-            <a:r>
-              <a:rPr lang="en-US" sz="1650" b="1" dirty="0">
-                <a:solidFill>
-                  <a:srgbClr val="6C3483"/>
-                </a:solidFill>
-                <a:latin typeface="Segoe UI"/>
-                <a:cs typeface="Segoe UI"/>
-              </a:rPr>
-              <a:t>2.  </a:t>
-            </a:r>
+              <a:buClr>
+                <a:srgbClr val="6C3483"/>
+              </a:buClr>
+              <a:buFont typeface="Arial"/>
+              <a:buChar char="•"/>
+            </a:pPr>
             <a:r>
               <a:rPr lang="en-US" sz="1650" dirty="0">
                 <a:solidFill>
                   <a:srgbClr val="000000"/>
                 </a:solidFill>
-                <a:latin typeface="Segoe UI"/>
-                <a:cs typeface="Segoe UI"/>
+                <a:latin typeface="Arial"/>
+                <a:cs typeface="Arial"/>
               </a:rPr>
               <a:t>Thang điểm Glasgow (3-15)</a:t>
             </a:r>
@@ -29699,25 +29435,19 @@
               <a:spcBef>
                 <a:spcPts val="450"/>
               </a:spcBef>
-              <a:buNone/>
-            </a:pPr>
-            <a:r>
-              <a:rPr lang="en-US" sz="1650" b="1" dirty="0">
-                <a:solidFill>
-                  <a:srgbClr val="6C3483"/>
-                </a:solidFill>
-                <a:latin typeface="Segoe UI"/>
-                <a:cs typeface="Segoe UI"/>
-              </a:rPr>
-              <a:t>3.  </a:t>
-            </a:r>
+              <a:buClr>
+                <a:srgbClr val="6C3483"/>
+              </a:buClr>
+              <a:buFont typeface="Arial"/>
+              <a:buChar char="•"/>
+            </a:pPr>
             <a:r>
               <a:rPr lang="en-US" sz="1650" dirty="0">
                 <a:solidFill>
                   <a:srgbClr val="000000"/>
                 </a:solidFill>
-                <a:latin typeface="Segoe UI"/>
-                <a:cs typeface="Segoe UI"/>
+                <a:latin typeface="Arial"/>
+                <a:cs typeface="Arial"/>
               </a:rPr>
               <a:t>Nhóm máu (A, B, AB, O)</a:t>
             </a:r>
@@ -29730,25 +29460,19 @@
               <a:spcBef>
                 <a:spcPts val="450"/>
               </a:spcBef>
-              <a:buNone/>
-            </a:pPr>
-            <a:r>
-              <a:rPr lang="en-US" sz="1650" b="1" dirty="0">
-                <a:solidFill>
-                  <a:srgbClr val="6C3483"/>
-                </a:solidFill>
-                <a:latin typeface="Segoe UI"/>
-                <a:cs typeface="Segoe UI"/>
-              </a:rPr>
-              <a:t>4.  </a:t>
-            </a:r>
+              <a:buClr>
+                <a:srgbClr val="6C3483"/>
+              </a:buClr>
+              <a:buFont typeface="Arial"/>
+              <a:buChar char="•"/>
+            </a:pPr>
             <a:r>
               <a:rPr lang="en-US" sz="1650" dirty="0">
                 <a:solidFill>
                   <a:srgbClr val="000000"/>
                 </a:solidFill>
-                <a:latin typeface="Segoe UI"/>
-                <a:cs typeface="Segoe UI"/>
+                <a:latin typeface="Arial"/>
+                <a:cs typeface="Arial"/>
               </a:rPr>
               <a:t>Thở máy ngày 1 (có / không)</a:t>
             </a:r>
@@ -29761,25 +29485,19 @@
               <a:spcBef>
                 <a:spcPts val="450"/>
               </a:spcBef>
-              <a:buNone/>
-            </a:pPr>
-            <a:r>
-              <a:rPr lang="en-US" sz="1650" b="1" dirty="0">
-                <a:solidFill>
-                  <a:srgbClr val="6C3483"/>
-                </a:solidFill>
-                <a:latin typeface="Segoe UI"/>
-                <a:cs typeface="Segoe UI"/>
-              </a:rPr>
-              <a:t>5.  </a:t>
-            </a:r>
+              <a:buClr>
+                <a:srgbClr val="6C3483"/>
+              </a:buClr>
+              <a:buFont typeface="Arial"/>
+              <a:buChar char="•"/>
+            </a:pPr>
             <a:r>
               <a:rPr lang="en-US" sz="1650" dirty="0">
                 <a:solidFill>
                   <a:srgbClr val="000000"/>
                 </a:solidFill>
-                <a:latin typeface="Segoe UI"/>
-                <a:cs typeface="Segoe UI"/>
+                <a:latin typeface="Arial"/>
+                <a:cs typeface="Arial"/>
               </a:rPr>
               <a:t>Thời gian từ khi vào ICU đến khi rút ống</a:t>
             </a:r>
@@ -29823,8 +29541,8 @@
                 <a:solidFill>
                   <a:srgbClr val="6C3483"/>
                 </a:solidFill>
-                <a:latin typeface="Segoe UI"/>
-                <a:cs typeface="Segoe UI"/>
+                <a:latin typeface="Arial"/>
+                <a:cs typeface="Arial"/>
               </a:rPr>
               <a:t>Đáp án</a:t>
             </a:r>
@@ -29845,8 +29563,8 @@
                 <a:solidFill>
                   <a:srgbClr val="000000"/>
                 </a:solidFill>
-                <a:latin typeface="Segoe UI"/>
-                <a:cs typeface="Segoe UI"/>
+                <a:latin typeface="Arial"/>
+                <a:cs typeface="Arial"/>
               </a:rPr>
               <a:t>Liên tục</a:t>
             </a:r>
@@ -29867,8 +29585,8 @@
                 <a:solidFill>
                   <a:srgbClr val="000000"/>
                 </a:solidFill>
-                <a:latin typeface="Segoe UI"/>
-                <a:cs typeface="Segoe UI"/>
+                <a:latin typeface="Arial"/>
+                <a:cs typeface="Arial"/>
               </a:rPr>
               <a:t>Thứ bậc (thường phân tích như số)</a:t>
             </a:r>
@@ -29889,8 +29607,8 @@
                 <a:solidFill>
                   <a:srgbClr val="000000"/>
                 </a:solidFill>
-                <a:latin typeface="Segoe UI"/>
-                <a:cs typeface="Segoe UI"/>
+                <a:latin typeface="Arial"/>
+                <a:cs typeface="Arial"/>
               </a:rPr>
               <a:t>Danh định</a:t>
             </a:r>
@@ -29911,8 +29629,8 @@
                 <a:solidFill>
                   <a:srgbClr val="000000"/>
                 </a:solidFill>
-                <a:latin typeface="Segoe UI"/>
-                <a:cs typeface="Segoe UI"/>
+                <a:latin typeface="Arial"/>
+                <a:cs typeface="Arial"/>
               </a:rPr>
               <a:t>Nhị phân</a:t>
             </a:r>
@@ -29933,8 +29651,8 @@
                 <a:solidFill>
                   <a:srgbClr val="000000"/>
                 </a:solidFill>
-                <a:latin typeface="Segoe UI"/>
-                <a:cs typeface="Segoe UI"/>
+                <a:latin typeface="Arial"/>
+                <a:cs typeface="Arial"/>
               </a:rPr>
               <a:t>Thời gian đến sự kiện (có người không rút ống)</a:t>
             </a:r>
@@ -29980,8 +29698,8 @@
                 <a:solidFill>
                   <a:srgbClr val="6C3483"/>
                 </a:solidFill>
-                <a:latin typeface="Segoe UI"/>
-                <a:cs typeface="Segoe UI"/>
+                <a:latin typeface="Arial"/>
+                <a:cs typeface="Arial"/>
               </a:rPr>
               <a:t>SẢN PHẨM   </a:t>
             </a:r>
@@ -29990,8 +29708,8 @@
                 <a:solidFill>
                   <a:srgbClr val="000000"/>
                 </a:solidFill>
-                <a:latin typeface="Segoe UI"/>
-                <a:cs typeface="Segoe UI"/>
+                <a:latin typeface="Arial"/>
+                <a:cs typeface="Arial"/>
               </a:rPr>
               <a:t>Mọi người gọi tên được năm loại biến số</a:t>
             </a:r>
@@ -30028,7 +29746,7 @@
                     <a:lumMod val="50000"/>
                   </a:schemeClr>
                 </a:solidFill>
-                <a:latin typeface="Verdana"/>
+                <a:latin typeface="Arial"/>
               </a:rPr>
               <a:t>Neudata | #ClearDataClearImpact</a:t>
             </a:r>
@@ -30158,8 +29876,8 @@
                 <a:solidFill>
                   <a:srgbClr val="0D7377"/>
                 </a:solidFill>
-                <a:latin typeface="Segoe UI"/>
-                <a:cs typeface="Segoe UI"/>
+                <a:latin typeface="Arial"/>
+                <a:cs typeface="Arial"/>
               </a:rPr>
               <a:t>Mục CRF tốt và chưa tốt</a:t>
             </a:r>
@@ -30225,8 +29943,8 @@
                 <a:solidFill>
                   <a:srgbClr val="595959"/>
                 </a:solidFill>
-                <a:latin typeface="Segoe UI"/>
-                <a:cs typeface="Segoe UI"/>
+                <a:latin typeface="Arial"/>
+                <a:cs typeface="Arial"/>
               </a:rPr>
               <a:t>Một câu hỏi trong phiếu thu thập dữ liệu (CRF) chỉ được phép có một cách hiểu.</a:t>
             </a:r>
@@ -30288,8 +30006,8 @@
                 <a:solidFill>
                   <a:srgbClr val="595959"/>
                 </a:solidFill>
-                <a:latin typeface="Segoe UI"/>
-                <a:cs typeface="Segoe UI"/>
+                <a:latin typeface="Arial"/>
+                <a:cs typeface="Arial"/>
               </a:rPr>
               <a:t>Mơ hồ: hai điều dưỡng sẽ ghi hai thứ khác nhau</a:t>
             </a:r>
@@ -30351,8 +30069,8 @@
                 <a:solidFill>
                   <a:srgbClr val="595959"/>
                 </a:solidFill>
-                <a:latin typeface="Segoe UI"/>
-                <a:cs typeface="Segoe UI"/>
+                <a:latin typeface="Arial"/>
+                <a:cs typeface="Arial"/>
               </a:rPr>
               <a:t>Rõ ràng: đơn vị, mốc thời gian, một đáp án, 'không rõ'</a:t>
             </a:r>
@@ -30389,7 +30107,7 @@
                     <a:lumMod val="50000"/>
                   </a:schemeClr>
                 </a:solidFill>
-                <a:latin typeface="Verdana"/>
+                <a:latin typeface="Arial"/>
               </a:rPr>
               <a:t>Neudata | #ClearDataClearImpact</a:t>
             </a:r>
@@ -30519,8 +30237,8 @@
                 <a:solidFill>
                   <a:srgbClr val="0D7377"/>
                 </a:solidFill>
-                <a:latin typeface="Segoe UI"/>
-                <a:cs typeface="Segoe UI"/>
+                <a:latin typeface="Arial"/>
+                <a:cs typeface="Arial"/>
               </a:rPr>
               <a:t>Ví dụ minh họa: từ câu hỏi đến một mục CRF</a:t>
             </a:r>
@@ -30586,8 +30304,8 @@
                 <a:solidFill>
                   <a:srgbClr val="595959"/>
                 </a:solidFill>
-                <a:latin typeface="Segoe UI"/>
-                <a:cs typeface="Segoe UI"/>
+                <a:latin typeface="Arial"/>
+                <a:cs typeface="Arial"/>
               </a:rPr>
               <a:t>Biến 'cân bằng dịch tích lũy' qua năm quyết định.</a:t>
             </a:r>
@@ -30631,8 +30349,8 @@
                 <a:solidFill>
                   <a:srgbClr val="FFFFFF"/>
                 </a:solidFill>
-                <a:latin typeface="Segoe UI"/>
-                <a:cs typeface="Segoe UI"/>
+                <a:latin typeface="Arial"/>
+                <a:cs typeface="Arial"/>
               </a:rPr>
               <a:t>Cái gì?</a:t>
             </a:r>
@@ -30680,8 +30398,8 @@
                 <a:solidFill>
                   <a:srgbClr val="000000"/>
                 </a:solidFill>
-                <a:latin typeface="Segoe UI"/>
-                <a:cs typeface="Segoe UI"/>
+                <a:latin typeface="Arial"/>
+                <a:cs typeface="Arial"/>
               </a:rPr>
               <a:t>Dịch VÀO trừ dịch RA</a:t>
             </a:r>
@@ -30701,8 +30419,8 @@
                 <a:solidFill>
                   <a:srgbClr val="000000"/>
                 </a:solidFill>
-                <a:latin typeface="Segoe UI"/>
-                <a:cs typeface="Segoe UI"/>
+                <a:latin typeface="Arial"/>
+                <a:cs typeface="Arial"/>
               </a:rPr>
               <a:t>mọi đường, kể cả pha thuốc</a:t>
             </a:r>
@@ -30746,8 +30464,8 @@
                 <a:solidFill>
                   <a:srgbClr val="FFFFFF"/>
                 </a:solidFill>
-                <a:latin typeface="Segoe UI"/>
-                <a:cs typeface="Segoe UI"/>
+                <a:latin typeface="Arial"/>
+                <a:cs typeface="Arial"/>
               </a:rPr>
               <a:t>Khi nào?</a:t>
             </a:r>
@@ -30795,8 +30513,8 @@
                 <a:solidFill>
                   <a:srgbClr val="000000"/>
                 </a:solidFill>
-                <a:latin typeface="Segoe UI"/>
-                <a:cs typeface="Segoe UI"/>
+                <a:latin typeface="Arial"/>
+                <a:cs typeface="Arial"/>
               </a:rPr>
               <a:t>Từ lúc vào ICU</a:t>
             </a:r>
@@ -30816,8 +30534,8 @@
                 <a:solidFill>
                   <a:srgbClr val="000000"/>
                 </a:solidFill>
-                <a:latin typeface="Segoe UI"/>
-                <a:cs typeface="Segoe UI"/>
+                <a:latin typeface="Arial"/>
+                <a:cs typeface="Arial"/>
               </a:rPr>
               <a:t>đến hết ngày 3</a:t>
             </a:r>
@@ -30861,8 +30579,8 @@
                 <a:solidFill>
                   <a:srgbClr val="FFFFFF"/>
                 </a:solidFill>
-                <a:latin typeface="Segoe UI"/>
-                <a:cs typeface="Segoe UI"/>
+                <a:latin typeface="Arial"/>
+                <a:cs typeface="Arial"/>
               </a:rPr>
               <a:t>Đơn vị?</a:t>
             </a:r>
@@ -30910,8 +30628,8 @@
                 <a:solidFill>
                   <a:srgbClr val="000000"/>
                 </a:solidFill>
-                <a:latin typeface="Segoe UI"/>
-                <a:cs typeface="Segoe UI"/>
+                <a:latin typeface="Arial"/>
+                <a:cs typeface="Arial"/>
               </a:rPr>
               <a:t>ml trên kg</a:t>
             </a:r>
@@ -30931,8 +30649,8 @@
                 <a:solidFill>
                   <a:srgbClr val="000000"/>
                 </a:solidFill>
-                <a:latin typeface="Segoe UI"/>
-                <a:cs typeface="Segoe UI"/>
+                <a:latin typeface="Arial"/>
+                <a:cs typeface="Arial"/>
               </a:rPr>
               <a:t>cân nặng lúc vào</a:t>
             </a:r>
@@ -30976,8 +30694,8 @@
                 <a:solidFill>
                   <a:srgbClr val="FFFFFF"/>
                 </a:solidFill>
-                <a:latin typeface="Segoe UI"/>
-                <a:cs typeface="Segoe UI"/>
+                <a:latin typeface="Arial"/>
+                <a:cs typeface="Arial"/>
               </a:rPr>
               <a:t>Định dạng?</a:t>
             </a:r>
@@ -31025,8 +30743,8 @@
                 <a:solidFill>
                   <a:srgbClr val="000000"/>
                 </a:solidFill>
-                <a:latin typeface="Segoe UI"/>
-                <a:cs typeface="Segoe UI"/>
+                <a:latin typeface="Arial"/>
+                <a:cs typeface="Arial"/>
               </a:rPr>
               <a:t>Số có dấu +/-</a:t>
             </a:r>
@@ -31046,8 +30764,8 @@
                 <a:solidFill>
                   <a:srgbClr val="000000"/>
                 </a:solidFill>
-                <a:latin typeface="Segoe UI"/>
-                <a:cs typeface="Segoe UI"/>
+                <a:latin typeface="Arial"/>
+                <a:cs typeface="Arial"/>
               </a:rPr>
               <a:t>ô cho từng chữ số</a:t>
             </a:r>
@@ -31091,8 +30809,8 @@
                 <a:solidFill>
                   <a:srgbClr val="FFFFFF"/>
                 </a:solidFill>
-                <a:latin typeface="Segoe UI"/>
-                <a:cs typeface="Segoe UI"/>
+                <a:latin typeface="Arial"/>
+                <a:cs typeface="Arial"/>
               </a:rPr>
               <a:t>Thiếu?</a:t>
             </a:r>
@@ -31140,8 +30858,8 @@
                 <a:solidFill>
                   <a:srgbClr val="000000"/>
                 </a:solidFill>
-                <a:latin typeface="Segoe UI"/>
-                <a:cs typeface="Segoe UI"/>
+                <a:latin typeface="Arial"/>
+                <a:cs typeface="Arial"/>
               </a:rPr>
               <a:t>Ô 'không ghi nhận'</a:t>
             </a:r>
@@ -31161,8 +30879,8 @@
                 <a:solidFill>
                   <a:srgbClr val="000000"/>
                 </a:solidFill>
-                <a:latin typeface="Segoe UI"/>
-                <a:cs typeface="Segoe UI"/>
+                <a:latin typeface="Arial"/>
+                <a:cs typeface="Arial"/>
               </a:rPr>
               <a:t>+ lý do</a:t>
             </a:r>
@@ -31206,8 +30924,8 @@
                 <a:solidFill>
                   <a:srgbClr val="FFFFFF"/>
                 </a:solidFill>
-                <a:latin typeface="Segoe UI"/>
-                <a:cs typeface="Segoe UI"/>
+                <a:latin typeface="Arial"/>
+                <a:cs typeface="Arial"/>
               </a:rPr>
               <a:t>THÔNG ĐIỆP CHÍNH   </a:t>
             </a:r>
@@ -31216,8 +30934,8 @@
                 <a:solidFill>
                   <a:srgbClr val="FFFFFF"/>
                 </a:solidFill>
-                <a:latin typeface="Segoe UI"/>
-                <a:cs typeface="Segoe UI"/>
+                <a:latin typeface="Arial"/>
+                <a:cs typeface="Arial"/>
               </a:rPr>
               <a:t>Trả lời cái gì, khi nào, đơn vị, định dạng và thiếu trước bệnh nhân đầu tiên.</a:t>
             </a:r>
@@ -31254,7 +30972,7 @@
                     <a:lumMod val="50000"/>
                   </a:schemeClr>
                 </a:solidFill>
-                <a:latin typeface="Verdana"/>
+                <a:latin typeface="Arial"/>
               </a:rPr>
               <a:t>Neudata | #ClearDataClearImpact</a:t>
             </a:r>
@@ -31384,8 +31102,8 @@
                 <a:solidFill>
                   <a:srgbClr val="0D7377"/>
                 </a:solidFill>
-                <a:latin typeface="Segoe UI"/>
-                <a:cs typeface="Segoe UI"/>
+                <a:latin typeface="Arial"/>
+                <a:cs typeface="Arial"/>
               </a:rPr>
               <a:t>Năm nguyên tắc cho một CRF tốt</a:t>
             </a:r>
@@ -31451,8 +31169,8 @@
                 <a:solidFill>
                   <a:srgbClr val="595959"/>
                 </a:solidFill>
-                <a:latin typeface="Segoe UI"/>
-                <a:cs typeface="Segoe UI"/>
+                <a:latin typeface="Arial"/>
+                <a:cs typeface="Arial"/>
               </a:rPr>
               <a:t>Viết phiếu trước bệnh nhân đầu tiên, rồi thử trên năm bệnh nhân.</a:t>
             </a:r>
@@ -31494,8 +31212,8 @@
                 <a:solidFill>
                   <a:srgbClr val="FFFFFF"/>
                 </a:solidFill>
-                <a:latin typeface="Segoe UI"/>
-                <a:cs typeface="Segoe UI"/>
+                <a:latin typeface="Arial"/>
+                <a:cs typeface="Arial"/>
               </a:rPr>
               <a:t>Chỉ thu thập cái cần</a:t>
             </a:r>
@@ -31543,8 +31261,8 @@
                 <a:solidFill>
                   <a:srgbClr val="000000"/>
                 </a:solidFill>
-                <a:latin typeface="Segoe UI"/>
-                <a:cs typeface="Segoe UI"/>
+                <a:latin typeface="Arial"/>
+                <a:cs typeface="Arial"/>
               </a:rPr>
               <a:t>Mỗi mục gắn với một mục tiêu</a:t>
             </a:r>
@@ -31564,8 +31282,8 @@
                 <a:solidFill>
                   <a:srgbClr val="000000"/>
                 </a:solidFill>
-                <a:latin typeface="Segoe UI"/>
-                <a:cs typeface="Segoe UI"/>
+                <a:latin typeface="Arial"/>
+                <a:cs typeface="Arial"/>
               </a:rPr>
               <a:t>Phiếu ngắn mới được điền đủ</a:t>
             </a:r>
@@ -31607,8 +31325,8 @@
                 <a:solidFill>
                   <a:srgbClr val="FFFFFF"/>
                 </a:solidFill>
-                <a:latin typeface="Segoe UI"/>
-                <a:cs typeface="Segoe UI"/>
+                <a:latin typeface="Arial"/>
+                <a:cs typeface="Arial"/>
               </a:rPr>
               <a:t>Một câu, một đáp án</a:t>
             </a:r>
@@ -31656,8 +31374,8 @@
                 <a:solidFill>
                   <a:srgbClr val="000000"/>
                 </a:solidFill>
-                <a:latin typeface="Segoe UI"/>
-                <a:cs typeface="Segoe UI"/>
+                <a:latin typeface="Arial"/>
+                <a:cs typeface="Arial"/>
               </a:rPr>
               <a:t>Không gộp hai câu hỏi</a:t>
             </a:r>
@@ -31677,8 +31395,8 @@
                 <a:solidFill>
                   <a:srgbClr val="000000"/>
                 </a:solidFill>
-                <a:latin typeface="Segoe UI"/>
-                <a:cs typeface="Segoe UI"/>
+                <a:latin typeface="Arial"/>
+                <a:cs typeface="Arial"/>
               </a:rPr>
               <a:t>Khách quan, không cảm tính</a:t>
             </a:r>
@@ -31720,8 +31438,8 @@
                 <a:solidFill>
                   <a:srgbClr val="FFFFFF"/>
                 </a:solidFill>
-                <a:latin typeface="Segoe UI"/>
-                <a:cs typeface="Segoe UI"/>
+                <a:latin typeface="Arial"/>
+                <a:cs typeface="Arial"/>
               </a:rPr>
               <a:t>Đơn vị và thời điểm</a:t>
             </a:r>
@@ -31769,8 +31487,8 @@
                 <a:solidFill>
                   <a:srgbClr val="000000"/>
                 </a:solidFill>
-                <a:latin typeface="Segoe UI"/>
-                <a:cs typeface="Segoe UI"/>
+                <a:latin typeface="Arial"/>
+                <a:cs typeface="Arial"/>
               </a:rPr>
               <a:t>ml/kg, mmol/L</a:t>
             </a:r>
@@ -31790,8 +31508,8 @@
                 <a:solidFill>
                   <a:srgbClr val="000000"/>
                 </a:solidFill>
-                <a:latin typeface="Segoe UI"/>
-                <a:cs typeface="Segoe UI"/>
+                <a:latin typeface="Arial"/>
+                <a:cs typeface="Arial"/>
               </a:rPr>
               <a:t>'lúc vào ICU', 'ngày 5'</a:t>
             </a:r>
@@ -31833,8 +31551,8 @@
                 <a:solidFill>
                   <a:srgbClr val="FFFFFF"/>
                 </a:solidFill>
-                <a:latin typeface="Segoe UI"/>
-                <a:cs typeface="Segoe UI"/>
+                <a:latin typeface="Arial"/>
+                <a:cs typeface="Arial"/>
               </a:rPr>
               <a:t>Câu trả lời đóng</a:t>
             </a:r>
@@ -31882,8 +31600,8 @@
                 <a:solidFill>
                   <a:srgbClr val="000000"/>
                 </a:solidFill>
-                <a:latin typeface="Segoe UI"/>
-                <a:cs typeface="Segoe UI"/>
+                <a:latin typeface="Arial"/>
+                <a:cs typeface="Arial"/>
               </a:rPr>
               <a:t>Ô đánh dấu</a:t>
             </a:r>
@@ -31903,8 +31621,8 @@
                 <a:solidFill>
                   <a:srgbClr val="000000"/>
                 </a:solidFill>
-                <a:latin typeface="Segoe UI"/>
-                <a:cs typeface="Segoe UI"/>
+                <a:latin typeface="Arial"/>
+                <a:cs typeface="Arial"/>
               </a:rPr>
               <a:t>Có 'khác' và 'không rõ'</a:t>
             </a:r>
@@ -31946,8 +31664,8 @@
                 <a:solidFill>
                   <a:srgbClr val="FFFFFF"/>
                 </a:solidFill>
-                <a:latin typeface="Segoe UI"/>
-                <a:cs typeface="Segoe UI"/>
+                <a:latin typeface="Arial"/>
+                <a:cs typeface="Arial"/>
               </a:rPr>
               <a:t>Thử nghiệm trước</a:t>
             </a:r>
@@ -31995,8 +31713,8 @@
                 <a:solidFill>
                   <a:srgbClr val="000000"/>
                 </a:solidFill>
-                <a:latin typeface="Segoe UI"/>
-                <a:cs typeface="Segoe UI"/>
+                <a:latin typeface="Arial"/>
+                <a:cs typeface="Arial"/>
               </a:rPr>
               <a:t>Hai người, cùng bệnh nhân</a:t>
             </a:r>
@@ -32016,8 +31734,8 @@
                 <a:solidFill>
                   <a:srgbClr val="000000"/>
                 </a:solidFill>
-                <a:latin typeface="Segoe UI"/>
-                <a:cs typeface="Segoe UI"/>
+                <a:latin typeface="Arial"/>
+                <a:cs typeface="Arial"/>
               </a:rPr>
               <a:t>Có khớp nhau không?</a:t>
             </a:r>
@@ -32061,8 +31779,8 @@
                 <a:solidFill>
                   <a:srgbClr val="FFFFFF"/>
                 </a:solidFill>
-                <a:latin typeface="Segoe UI"/>
-                <a:cs typeface="Segoe UI"/>
+                <a:latin typeface="Arial"/>
+                <a:cs typeface="Arial"/>
               </a:rPr>
               <a:t>THÔNG ĐIỆP CHÍNH   </a:t>
             </a:r>
@@ -32071,8 +31789,8 @@
                 <a:solidFill>
                   <a:srgbClr val="FFFFFF"/>
                 </a:solidFill>
-                <a:latin typeface="Segoe UI"/>
-                <a:cs typeface="Segoe UI"/>
+                <a:latin typeface="Arial"/>
+                <a:cs typeface="Arial"/>
               </a:rPr>
               <a:t>Nếu hai đồng nghiệp có thể điền khác nhau, hãy viết lại mục đó.</a:t>
             </a:r>
@@ -32109,7 +31827,7 @@
                     <a:lumMod val="50000"/>
                   </a:schemeClr>
                 </a:solidFill>
-                <a:latin typeface="Verdana"/>
+                <a:latin typeface="Arial"/>
               </a:rPr>
               <a:t>Neudata | #ClearDataClearImpact</a:t>
             </a:r>
@@ -32239,8 +31957,8 @@
                 <a:solidFill>
                   <a:srgbClr val="0D7377"/>
                 </a:solidFill>
-                <a:latin typeface="Segoe UI"/>
-                <a:cs typeface="Segoe UI"/>
+                <a:latin typeface="Arial"/>
+                <a:cs typeface="Arial"/>
               </a:rPr>
               <a:t>Từ điển dữ liệu: mỗi biến số một dòng</a:t>
             </a:r>
@@ -32330,8 +32048,8 @@
                 <a:solidFill>
                   <a:srgbClr val="595959"/>
                 </a:solidFill>
-                <a:latin typeface="Segoe UI"/>
-                <a:cs typeface="Segoe UI"/>
+                <a:latin typeface="Arial"/>
+                <a:cs typeface="Arial"/>
               </a:rPr>
               <a:t>Các dòng ví dụ cho nghiên cứu dịch truyền trong sốc nhiễm khuẩn</a:t>
             </a:r>
@@ -32375,8 +32093,8 @@
                 <a:solidFill>
                   <a:srgbClr val="FFFFFF"/>
                 </a:solidFill>
-                <a:latin typeface="Segoe UI"/>
-                <a:cs typeface="Segoe UI"/>
+                <a:latin typeface="Arial"/>
+                <a:cs typeface="Arial"/>
               </a:rPr>
               <a:t>THÔNG ĐIỆP CHÍNH   </a:t>
             </a:r>
@@ -32385,8 +32103,8 @@
                 <a:solidFill>
                   <a:srgbClr val="FFFFFF"/>
                 </a:solidFill>
-                <a:latin typeface="Segoe UI"/>
-                <a:cs typeface="Segoe UI"/>
+                <a:latin typeface="Arial"/>
+                <a:cs typeface="Arial"/>
               </a:rPr>
               <a:t>Từ điển dữ liệu là sách hướng dẫn sử dụng bộ dữ liệu của anh chị.</a:t>
             </a:r>
@@ -32423,7 +32141,7 @@
                     <a:lumMod val="50000"/>
                   </a:schemeClr>
                 </a:solidFill>
-                <a:latin typeface="Verdana"/>
+                <a:latin typeface="Arial"/>
               </a:rPr>
               <a:t>Neudata | #ClearDataClearImpact</a:t>
             </a:r>
@@ -32540,7 +32258,7 @@
     </a:clrScheme>
     <a:fontScheme name="Office">
       <a:majorFont>
-        <a:latin typeface="Calibri"/>
+        <a:latin typeface="Arial"/>
         <a:ea typeface=""/>
         <a:cs typeface=""/>
         <a:font script="Jpan" typeface="ＭＳ Ｐゴシック"/>
@@ -32575,7 +32293,7 @@
         <a:font script="Geor" typeface="Sylfaen"/>
       </a:majorFont>
       <a:minorFont>
-        <a:latin typeface="Calibri"/>
+        <a:latin typeface="Arial"/>
         <a:ea typeface=""/>
         <a:cs typeface=""/>
         <a:font script="Jpan" typeface="ＭＳ Ｐゴシック"/>
@@ -32860,7 +32578,7 @@
     </a:clrScheme>
     <a:fontScheme name="Office">
       <a:majorFont>
-        <a:latin typeface="Calibri Light" panose="020F0302020204030204"/>
+        <a:latin typeface="Arial" panose="020F0302020204030204"/>
         <a:ea typeface=""/>
         <a:cs typeface=""/>
         <a:font script="Jpan" typeface="游ゴシック Light"/>
@@ -32895,7 +32613,7 @@
         <a:font script="Geor" typeface="Sylfaen"/>
       </a:majorFont>
       <a:minorFont>
-        <a:latin typeface="Calibri" panose="020F0502020204030204"/>
+        <a:latin typeface="Arial" panose="020F0502020204030204"/>
         <a:ea typeface=""/>
         <a:cs typeface=""/>
         <a:font script="Jpan" typeface="游ゴシック"/>
@@ -33121,7 +32839,7 @@
     </a:clrScheme>
     <a:fontScheme name="Office">
       <a:majorFont>
-        <a:latin typeface="Calibri Light" panose="020F0302020204030204"/>
+        <a:latin typeface="Arial" panose="020F0302020204030204"/>
         <a:ea typeface=""/>
         <a:cs typeface=""/>
         <a:font script="Jpan" typeface="游ゴシック Light"/>
@@ -33156,7 +32874,7 @@
         <a:font script="Geor" typeface="Sylfaen"/>
       </a:majorFont>
       <a:minorFont>
-        <a:latin typeface="Calibri" panose="020F0502020204030204"/>
+        <a:latin typeface="Arial" panose="020F0502020204030204"/>
         <a:ea typeface=""/>
         <a:cs typeface=""/>
         <a:font script="Jpan" typeface="游ゴシック"/>

--- a/vi/files/slides/Session_5_VN.pptx
+++ b/vi/files/slides/Session_5_VN.pptx
@@ -737,7 +737,7 @@
           <a:p>
             <a:r>
               <a:rPr lang="en-US" sz="1400" b="0" dirty="0"/>
-              <a:t>Chào mừng anh chị đến Tuần 5. Chúng ta học trực tuyến từ 19:30 đến 22:30, có 15 phút giải lao. Buổi 1-4 đã đặt câu hỏi, tìm bằng chứng và chọn thiết kế. Trong hai thứ Bảy này chúng ta đo lường và phân tích: hôm nay (Buổi 5) là dữ liệu, thứ Bảy tuần sau (Buổi 6) là phân tích.</a:t>
+              <a:t>Chào mừng anh chị đến Tuần 5. Lớp học trực tuyến từ 19:30 đến 22:30, có 15 phút giải lao. Buổi 1-4 đã đặt câu hỏi, tìm bằng chứng và chọn thiết kế. Hai thứ Bảy này dành cho đo lường và phân tích: hôm nay (Buổi 5) là dữ liệu, thứ Bảy tuần sau (Buổi 6) là phân tích.</a:t>
             </a:r>
           </a:p>
           <a:p>
@@ -755,7 +755,7 @@
           <a:p>
             <a:r>
               <a:rPr lang="en-US" sz="1400" b="0" dirty="0"/>
-              <a:t>Ví dụ xuyên suốt: dịch truyền trong sốc nhiễm khuẩn. Biến 'cân bằng dịch tích lũy (ml/kg)' đi cùng chúng ta suốt buổi tối: trên phiếu, trong từ điển dữ liệu, trong bộ dữ liệu đã làm sạch, trong Bảng 1.</a:t>
+              <a:t>Ví dụ xuyên suốt: dịch truyền trong sốc nhiễm khuẩn. Biến 'cân bằng dịch tích lũy (ml/kg)' xuất hiện suốt buổi tối: trên phiếu, trong từ điển dữ liệu, trong bộ dữ liệu đã làm sạch, trong Bảng 1.</a:t>
             </a:r>
           </a:p>
           <a:p>
@@ -1112,7 +1112,7 @@
           <a:p>
             <a:r>
               <a:rPr lang="en-US" sz="1400" b="0" dirty="0"/>
-              <a:t>Đi qua hình: 100 người bệnh, thực tế có 30 người tử vong. Nhưng 15 ca tử vong có ô kết cục bị bỏ trống (chuyển viện, tử vong ban đêm, phiếu không được hoàn thành). Trong 85 người bệnh có ghi nhận, ta thấy 15 ca tử vong: 18%. Sự thật là 30%.</a:t>
+              <a:t>Đi qua hình: 100 người bệnh, thực tế có 30 người tử vong. Nhưng 15 ca tử vong có ô kết cục bị bỏ trống (chuyển viện, tử vong ban đêm, phiếu không được hoàn thành). Trong 85 người bệnh có ghi nhận, chỉ thấy 15 ca tử vong: 18%. Sự thật là 30%.</a:t>
             </a:r>
           </a:p>
           <a:p>
@@ -1124,13 +1124,13 @@
           <a:p>
             <a:r>
               <a:rPr lang="en-US" sz="1400" b="0" dirty="0"/>
-              <a:t>Quan niệm sai: 'chỉ mất 15%, không sao'. Số lượng ít quan trọng hơn việc AI bị thiếu.</a:t>
+              <a:t>Quan niệm sai: 'chỉ mất 15%, không sao'. Ai bị thiếu quan trọng hơn bao nhiêu người bị thiếu.</a:t>
             </a:r>
           </a:p>
           <a:p>
             <a:r>
               <a:rPr lang="en-US" sz="1400" b="0" dirty="0"/>
-              <a:t>Thứ Bảy tuần sau (Buổi 6, phần 6.4) chúng ta sẽ gọi tên các cơ chế (MCAR, MAR, MNAR) và xem ý tưởng quy gán đa bội. Nhưng cách xử lý thống kê luôn kém hơn phòng ngừa.</a:t>
+              <a:t>Thứ Bảy tuần sau (Buổi 6, phần 6.4) sẽ gọi tên các cơ chế (MCAR, MAR, MNAR) và xem ý tưởng quy gán đa bội (multiple imputation). Nhưng cách xử lý thống kê luôn kém hơn phòng ngừa.</a:t>
             </a:r>
           </a:p>
           <a:p>
@@ -1457,7 +1457,7 @@
           <a:p>
             <a:r>
               <a:rPr lang="en-US" sz="1400" b="0" dirty="0"/>
-              <a:t>Mở đầu phần 5.2 (25 phút, 20:15 đến 20:40: nghiên cứu, dòng chảy người bệnh, dữ liệu thô và sạch, 8 phút trình diễn làm sạch bằng R, nhật ký làm sạch dữ liệu, năm câu hỏi, rồi cả lớp cùng viết Câu hỏi 1 thành một câu PECO).</a:t>
+              <a:t>Mở đầu phần 5.2 (25 phút, 20:15 đến 20:40: nghiên cứu, luồng người bệnh, dữ liệu thô và sạch, 8 phút trình diễn làm sạch bằng R, nhật ký làm sạch dữ liệu, năm câu hỏi, rồi cả lớp cùng viết Câu hỏi 1 thành một câu PECO).</a:t>
             </a:r>
           </a:p>
           <a:p>
@@ -1475,7 +1475,7 @@
           <a:p>
             <a:r>
               <a:rPr lang="en-US" sz="1400" b="0" dirty="0"/>
-              <a:t>Nối với ví dụ xuyên suốt: Buổi 1-4 đặt câu hỏi can thiệp (hạn chế dịch: một RCT, Bài báo 1, Boulet 2024, thử nghiệm pilot so sánh hạn chế dịch với truyền dịch thường quy trong sốc nhiễm khuẩn, trong Course/Papers). FLUID-ICU đặt câu hỏi ở dạng quan sát: cân bằng dịch dương có liên quan với tử vong không? Đó là câu hỏi thuần tập, giống Bài báo 2 (Hyun 2023). Hỏi (mời hai ba người trả lời, bật micro): thuần tập kết luận được gì mà RCT không làm được, và ngược lại? Dự kiến: liên quan, không phải nhân quả. Nhưng người bệnh thực tế và đông hơn.</a:t>
+              <a:t>Nối với ví dụ xuyên suốt: Buổi 1-4 đặt câu hỏi can thiệp (hạn chế dịch: một RCT, Bài báo 1, Boulet 2024, thử nghiệm thí điểm (pilot) so sánh hạn chế dịch với truyền dịch thường quy trong sốc nhiễm khuẩn, trong Course/Papers). FLUID-ICU đặt câu hỏi ở dạng quan sát: cân bằng dịch dương có liên quan với tử vong không? Đó là câu hỏi thuần tập, giống Bài báo 2 (Hyun 2023). Hỏi (mời hai ba người trả lời, bật micro): thuần tập kết luận được gì mà RCT không làm được, và ngược lại? Dự kiến: liên quan, không phải nhân quả. Nhưng người bệnh thực tế và đông hơn.</a:t>
             </a:r>
           </a:p>
         </p:txBody>
@@ -1673,7 +1673,7 @@
           <a:p>
             <a:r>
               <a:rPr lang="en-US" sz="1400" b="0" dirty="0"/>
-              <a:t>Ý chính: dòng chảy người bệnh (sơ đồ STROBE trong bản thảo, STROBE là hướng dẫn báo cáo cho nghiên cứu quan sát, Buổi 7).</a:t>
+              <a:t>Ý chính: luồng người bệnh (sơ đồ STROBE trong bản thảo, STROBE là hướng dẫn báo cáo cho nghiên cứu quan sát, Buổi 7).</a:t>
             </a:r>
           </a:p>
           <a:p>
@@ -1703,7 +1703,7 @@
           <a:p>
             <a:r>
               <a:rPr lang="en-US" sz="1400" b="0" dirty="0"/>
-              <a:t>Hỏi (mời hai ba người trả lời, bật micro): dòng chảy này nằm ở phần nào của bản thảo? Dự kiến: đoạn đầu phần Kết quả (đối tượng nghiên cứu), là Hình 1.</a:t>
+              <a:t>Hỏi (mời hai ba người trả lời, bật micro): luồng này nằm ở phần nào của bản thảo? Dự kiến: đoạn đầu phần Kết quả (đối tượng nghiên cứu), là Hình 1.</a:t>
             </a:r>
           </a:p>
           <a:p>
@@ -1802,7 +1802,7 @@
           <a:p>
             <a:r>
               <a:rPr lang="en-US" sz="1400" b="0" dirty="0"/>
-              <a:t>Mỗi vấn đề làm hỏng phân tích một cách lặng lẽ: lactat 999 làm trung bình tăng vọt. 'Y' và 'Yes' thành hai nhóm. Giá trị mg/dL làm ICU C trông như một thảm họa lactat.</a:t>
+              <a:t>Mỗi vấn đề làm hỏng phân tích một cách lặng lẽ: lactat 999 làm trung bình tăng vọt. 'Y' và 'Yes' thành hai nhóm. Giá trị mg/dL làm lactat ở ICU C trông cao bất thường.</a:t>
             </a:r>
           </a:p>
           <a:p>
@@ -2018,7 +2018,7 @@
           <a:p>
             <a:r>
               <a:rPr lang="en-US" sz="1400" b="0" dirty="0"/>
-              <a:t>Cách làm: mở một bình chọn cho mỗi câu (poll của Zoom/Teams hoặc một biểu mẫu), mỗi câu 1 phút, cho xem kết quả rồi công bố đáp án. Che khung bên phải cho đến lúc công bố (hoặc đọc đáp án từ ghi chú này).</a:t>
+              <a:t>Cách làm: mở một bình chọn cho mỗi câu (poll của Zoom/Teams), mỗi câu 1 phút, cho xem kết quả rồi công bố đáp án. Che khung bên phải cho đến lúc công bố (hoặc đọc đáp án từ ghi chú này).</a:t>
             </a:r>
           </a:p>
           <a:p>
@@ -2252,7 +2252,7 @@
           <a:p>
             <a:r>
               <a:rPr lang="en-US" sz="1400" b="0" dirty="0"/>
-              <a:t>Câu hỏi 1 (Q1): cân bằng dịch dương đến ngày 3 và tử vong 28 ngày: hồi quy logistic cùng Kaplan-Meier và Cox. Câu hỏi chính. Chúng ta làm Q1 đầy đủ ở Buổi 5 và 6.</a:t>
+              <a:t>Câu hỏi 1 (Q1): cân bằng dịch dương đến ngày 3 và tử vong 28 ngày: hồi quy logistic cùng Kaplan-Meier và Cox. Câu hỏi chính. Cả lớp làm Q1 đầy đủ ở Buổi 5 và 6.</a:t>
             </a:r>
           </a:p>
           <a:p>
@@ -2474,7 +2474,7 @@
           <a:p>
             <a:r>
               <a:rPr lang="en-US" sz="1400" b="0" dirty="0"/>
-              <a:t>Slide chỉ có hình, có chủ ý. Trước giờ giải lao, nói: ta bắt đầu lại lúc 20:55 với phần 5.3 (trung bình hay trung vị, SD hay IQR, biểu đồ nào, biểu đồ tốt và chưa tốt, Bảng 1). Tùy chọn: xem Bảng 1 trong gói kết quả Q1.</a:t>
+              <a:t>Slide chỉ có hình, có chủ ý. Trước giờ giải lao, nói: lớp bắt đầu lại lúc 20:55 với phần 5.3 (trung bình hay trung vị, SD hay IQR, biểu đồ nào, biểu đồ tốt và chưa tốt, Bảng 1). Tùy chọn: xem Bảng 1 trong gói kết quả Q1.</a:t>
             </a:r>
           </a:p>
           <a:p>
@@ -3269,7 +3269,7 @@
           <a:p>
             <a:r>
               <a:rPr lang="en-US" sz="1400" b="0" dirty="0"/>
-              <a:t>Rác vào, rác ra: chất lượng câu trả lời bị giới hạn bởi chất lượng phiếu thu thập.</a:t>
+              <a:t>Dữ liệu vào kém thì kết quả ra kém: chất lượng câu trả lời bị giới hạn bởi chất lượng phiếu thu thập.</a:t>
             </a:r>
           </a:p>
           <a:p>
@@ -3281,7 +3281,7 @@
           <a:p>
             <a:r>
               <a:rPr lang="en-US" sz="1400" b="0" dirty="0"/>
-              <a:t>Chuyển ý: chúng ta bắt đầu từ quyết định cơ bản nhất: anh chị đang thu thập loại biến số nào? Điều đó quyết định cách viết câu hỏi trong CRF, cách tóm tắt và kiểm định cần dùng.</a:t>
+              <a:t>Chuyển ý: bắt đầu từ quyết định cơ bản nhất: anh chị đang thu thập loại biến số nào? Điều đó quyết định cách viết câu hỏi trong CRF, cách tóm tắt và kiểm định cần dùng.</a:t>
             </a:r>
           </a:p>
         </p:txBody>
@@ -3485,7 +3485,7 @@
           <a:p>
             <a:r>
               <a:rPr lang="en-US" sz="1400" b="0" dirty="0"/>
-              <a:t>Bên trái: các cột gợi ý nhóm thường quy có cân bằng dịch cao hơn nhiều. Bên phải: cùng dữ liệu mô phỏng thể hiện bằng các chấm kèm biểu đồ hộp. Giờ ta thấy một người bệnh cực đoan (160 ml/kg) kéo trung bình nhóm thường quy lên, dữ liệu bị lệch, và hai nhóm chồng lấp nhiều.</a:t>
+              <a:t>Bên trái: các cột gợi ý nhóm thường quy có cân bằng dịch cao hơn nhiều. Bên phải: cùng dữ liệu mô phỏng thể hiện bằng các chấm kèm biểu đồ hộp. Giờ thấy rõ một người bệnh cực đoan (160 ml/kg) kéo trung bình nhóm thường quy lên, dữ liệu bị lệch, và hai nhóm chồng lấp nhiều.</a:t>
             </a:r>
           </a:p>
           <a:p>
@@ -3719,7 +3719,7 @@
           <a:p>
             <a:r>
               <a:rPr lang="en-US" sz="1400" b="0" dirty="0"/>
-              <a:t>Ý chính: một bảng trong bài báo phải tự đứng được. So sánh hai phiên bản theo từng dòng. (Hai bảng này cố ý giữ dạng ảnh: bảng chưa tốt cho thấy lỗi định dạng, như kẻ ô dày đặc, mà bảng gốc trên trang chiếu sẽ không thể hiện được.)</a:t>
+              <a:t>Ý chính: một bảng trong bài báo phải tự giải thích được, không cần đọc phần chữ. So sánh hai phiên bản theo từng dòng. (Hai bảng này cố ý giữ dạng ảnh: bảng chưa tốt cho thấy lỗi định dạng, như kẻ ô dày đặc, mà bảng gốc trên trang chiếu sẽ không thể hiện được.)</a:t>
             </a:r>
           </a:p>
           <a:p>
@@ -4466,7 +4466,7 @@
           <a:p>
             <a:r>
               <a:rPr lang="en-US" sz="1400" b="0" dirty="0"/>
-              <a:t>Thời gian đến sự kiện (ở dòng giới thiệu) là loại đặc biệt: kết hợp bao lâu (thời gian đến tử vong) và có xảy ra không (tử vong, hoặc bị kiểm duyệt (censoring) ở ngày 28 nếu còn sống). Chỉ cần nhắc qua. Chúng ta gặp lại nó với đường cong Kaplan-Meier và mô hình Cox ở Buổi 6 (6.3).</a:t>
+              <a:t>Thời gian đến sự kiện (time-to-event, ở dòng giới thiệu) là loại đặc biệt: kết hợp bao lâu (thời gian đến tử vong) và có xảy ra không (tử vong, hoặc bị kiểm duyệt (censoring) ở ngày 28 nếu còn sống). Chỉ cần nhắc qua. Sẽ gặp lại nó với đường cong Kaplan-Meier và mô hình Cox ở Buổi 6 (6.3).</a:t>
             </a:r>
           </a:p>
           <a:p>
@@ -5150,7 +5150,7 @@
           <a:p>
             <a:r>
               <a:rPr lang="en-US" sz="1400" b="0" dirty="0"/>
-              <a:t>Câu hỏi cuối buổi trong khung chat (hoặc biểu mẫu một câu hỏi): nêu một lỗi chất lượng dữ liệu tìm thấy trong dữ liệu thô FLUID-ICU và cách làm sạch đã sửa nó. Mục đích: kiểm tra học viên đã hiểu ý chính hôm nay (làm sạch bằng script và nhật ký, không bao giờ bằng tay). Giảng viên đọc các câu trả lời trước Buổi 6 và mở đầu Buổi 6 bằng hai ba câu trong số đó.</a:t>
+              <a:t>Câu hỏi cuối buổi trong khung chat: nêu một lỗi chất lượng dữ liệu tìm thấy trong dữ liệu thô FLUID-ICU và cách làm sạch đã sửa nó. Mục đích: kiểm tra học viên đã hiểu ý chính hôm nay (làm sạch bằng script và nhật ký, không bao giờ bằng tay). Giảng viên đọc các câu trả lời trước Buổi 6 và mở đầu Buổi 6 bằng hai ba câu trong số đó.</a:t>
             </a:r>
           </a:p>
           <a:p>
@@ -5162,7 +5162,7 @@
           <a:p>
             <a:r>
               <a:rPr lang="en-US" sz="1400" b="0" dirty="0"/>
-              <a:t>Cảm ơn cả lớp: hôm nay có nhiều từ mới. Thứ Bảy tuần sau xây dựng trực tiếp trên đó.</a:t>
+              <a:t>Cảm ơn cả lớp: hôm nay có nhiều từ mới. Buổi 6 sẽ dựa trực tiếp trên nền này.</a:t>
             </a:r>
           </a:p>
         </p:txBody>
@@ -9747,12 +9747,12 @@
           </a:ln>
         </p:spPr>
         <p:txBody>
-          <a:bodyPr wrap="square" lIns="137160" tIns="91440" rIns="137160" bIns="91440" rtlCol="0" anchor="t">
+          <a:bodyPr wrap="square" lIns="137160" tIns="91440" rIns="137160" bIns="91440" rtlCol="0" anchor="ctr">
             <a:normAutofit/>
           </a:bodyPr>
           <a:lstStyle/>
           <a:p>
-            <a:pPr marL="0" indent="0" algn="l">
+            <a:pPr marL="0" indent="0" algn="ctr">
               <a:lnSpc>
                 <a:spcPct val="104000"/>
               </a:lnSpc>
@@ -9773,7 +9773,7 @@
             </a:r>
           </a:p>
           <a:p>
-            <a:pPr marL="0" indent="0" algn="l">
+            <a:pPr marL="0" indent="0" algn="ctr">
               <a:lnSpc>
                 <a:spcPct val="104000"/>
               </a:lnSpc>
@@ -9860,12 +9860,12 @@
           </a:ln>
         </p:spPr>
         <p:txBody>
-          <a:bodyPr wrap="square" lIns="137160" tIns="91440" rIns="137160" bIns="91440" rtlCol="0" anchor="t">
+          <a:bodyPr wrap="square" lIns="137160" tIns="91440" rIns="137160" bIns="91440" rtlCol="0" anchor="ctr">
             <a:normAutofit/>
           </a:bodyPr>
           <a:lstStyle/>
           <a:p>
-            <a:pPr marL="0" indent="0" algn="l">
+            <a:pPr marL="0" indent="0" algn="ctr">
               <a:lnSpc>
                 <a:spcPct val="104000"/>
               </a:lnSpc>
@@ -9886,7 +9886,7 @@
             </a:r>
           </a:p>
           <a:p>
-            <a:pPr marL="0" indent="0" algn="l">
+            <a:pPr marL="0" indent="0" algn="ctr">
               <a:lnSpc>
                 <a:spcPct val="104000"/>
               </a:lnSpc>
@@ -9973,12 +9973,12 @@
           </a:ln>
         </p:spPr>
         <p:txBody>
-          <a:bodyPr wrap="square" lIns="137160" tIns="91440" rIns="137160" bIns="91440" rtlCol="0" anchor="t">
+          <a:bodyPr wrap="square" lIns="137160" tIns="91440" rIns="137160" bIns="91440" rtlCol="0" anchor="ctr">
             <a:normAutofit/>
           </a:bodyPr>
           <a:lstStyle/>
           <a:p>
-            <a:pPr marL="0" indent="0" algn="l">
+            <a:pPr marL="0" indent="0" algn="ctr">
               <a:lnSpc>
                 <a:spcPct val="104000"/>
               </a:lnSpc>
@@ -9999,7 +9999,7 @@
             </a:r>
           </a:p>
           <a:p>
-            <a:pPr marL="0" indent="0" algn="l">
+            <a:pPr marL="0" indent="0" algn="ctr">
               <a:lnSpc>
                 <a:spcPct val="104000"/>
               </a:lnSpc>
@@ -10086,12 +10086,12 @@
           </a:ln>
         </p:spPr>
         <p:txBody>
-          <a:bodyPr wrap="square" lIns="137160" tIns="91440" rIns="137160" bIns="91440" rtlCol="0" anchor="t">
+          <a:bodyPr wrap="square" lIns="137160" tIns="91440" rIns="137160" bIns="91440" rtlCol="0" anchor="ctr">
             <a:normAutofit/>
           </a:bodyPr>
           <a:lstStyle/>
           <a:p>
-            <a:pPr marL="0" indent="0" algn="l">
+            <a:pPr marL="0" indent="0" algn="ctr">
               <a:lnSpc>
                 <a:spcPct val="104000"/>
               </a:lnSpc>
@@ -10112,7 +10112,7 @@
             </a:r>
           </a:p>
           <a:p>
-            <a:pPr marL="0" indent="0" algn="l">
+            <a:pPr marL="0" indent="0" algn="ctr">
               <a:lnSpc>
                 <a:spcPct val="104000"/>
               </a:lnSpc>
@@ -10489,12 +10489,12 @@
           </a:ln>
         </p:spPr>
         <p:txBody>
-          <a:bodyPr wrap="square" lIns="137160" tIns="91440" rIns="137160" bIns="91440" rtlCol="0" anchor="t">
+          <a:bodyPr wrap="square" lIns="137160" tIns="91440" rIns="137160" bIns="91440" rtlCol="0" anchor="ctr">
             <a:normAutofit/>
           </a:bodyPr>
           <a:lstStyle/>
           <a:p>
-            <a:pPr marL="0" indent="0" algn="l">
+            <a:pPr marL="0" indent="0" algn="ctr">
               <a:lnSpc>
                 <a:spcPct val="104000"/>
               </a:lnSpc>
@@ -10515,7 +10515,7 @@
             </a:r>
           </a:p>
           <a:p>
-            <a:pPr marL="0" indent="0" algn="l">
+            <a:pPr marL="0" indent="0" algn="ctr">
               <a:lnSpc>
                 <a:spcPct val="104000"/>
               </a:lnSpc>
@@ -10536,7 +10536,7 @@
             </a:r>
           </a:p>
           <a:p>
-            <a:pPr marL="0" indent="0" algn="l">
+            <a:pPr marL="0" indent="0" algn="ctr">
               <a:lnSpc>
                 <a:spcPct val="104000"/>
               </a:lnSpc>
@@ -10623,12 +10623,12 @@
           </a:ln>
         </p:spPr>
         <p:txBody>
-          <a:bodyPr wrap="square" lIns="137160" tIns="91440" rIns="137160" bIns="91440" rtlCol="0" anchor="t">
+          <a:bodyPr wrap="square" lIns="137160" tIns="91440" rIns="137160" bIns="91440" rtlCol="0" anchor="ctr">
             <a:normAutofit/>
           </a:bodyPr>
           <a:lstStyle/>
           <a:p>
-            <a:pPr marL="0" indent="0" algn="l">
+            <a:pPr marL="0" indent="0" algn="ctr">
               <a:lnSpc>
                 <a:spcPct val="104000"/>
               </a:lnSpc>
@@ -10649,7 +10649,7 @@
             </a:r>
           </a:p>
           <a:p>
-            <a:pPr marL="0" indent="0" algn="l">
+            <a:pPr marL="0" indent="0" algn="ctr">
               <a:lnSpc>
                 <a:spcPct val="104000"/>
               </a:lnSpc>
@@ -10670,7 +10670,7 @@
             </a:r>
           </a:p>
           <a:p>
-            <a:pPr marL="0" indent="0" algn="l">
+            <a:pPr marL="0" indent="0" algn="ctr">
               <a:lnSpc>
                 <a:spcPct val="104000"/>
               </a:lnSpc>
@@ -10757,12 +10757,12 @@
           </a:ln>
         </p:spPr>
         <p:txBody>
-          <a:bodyPr wrap="square" lIns="137160" tIns="91440" rIns="137160" bIns="91440" rtlCol="0" anchor="t">
+          <a:bodyPr wrap="square" lIns="137160" tIns="91440" rIns="137160" bIns="91440" rtlCol="0" anchor="ctr">
             <a:normAutofit/>
           </a:bodyPr>
           <a:lstStyle/>
           <a:p>
-            <a:pPr marL="0" indent="0" algn="l">
+            <a:pPr marL="0" indent="0" algn="ctr">
               <a:lnSpc>
                 <a:spcPct val="104000"/>
               </a:lnSpc>
@@ -10783,7 +10783,7 @@
             </a:r>
           </a:p>
           <a:p>
-            <a:pPr marL="0" indent="0" algn="l">
+            <a:pPr marL="0" indent="0" algn="ctr">
               <a:lnSpc>
                 <a:spcPct val="104000"/>
               </a:lnSpc>
@@ -10804,7 +10804,7 @@
             </a:r>
           </a:p>
           <a:p>
-            <a:pPr marL="0" indent="0" algn="l">
+            <a:pPr marL="0" indent="0" algn="ctr">
               <a:lnSpc>
                 <a:spcPct val="104000"/>
               </a:lnSpc>
@@ -11458,12 +11458,12 @@
           </a:ln>
         </p:spPr>
         <p:txBody>
-          <a:bodyPr wrap="square" lIns="110000" tIns="91440" rIns="110000" bIns="91440" rtlCol="0" anchor="t">
+          <a:bodyPr wrap="square" lIns="110000" tIns="91440" rIns="110000" bIns="91440" rtlCol="0" anchor="ctr">
             <a:normAutofit/>
           </a:bodyPr>
           <a:lstStyle/>
           <a:p>
-            <a:pPr marL="0" indent="0" algn="l">
+            <a:pPr marL="0" indent="0" algn="ctr">
               <a:lnSpc>
                 <a:spcPct val="104000"/>
               </a:lnSpc>
@@ -11484,7 +11484,7 @@
             </a:r>
           </a:p>
           <a:p>
-            <a:pPr marL="0" indent="0" algn="l">
+            <a:pPr marL="0" indent="0" algn="ctr">
               <a:lnSpc>
                 <a:spcPct val="104000"/>
               </a:lnSpc>
@@ -11573,12 +11573,12 @@
           </a:ln>
         </p:spPr>
         <p:txBody>
-          <a:bodyPr wrap="square" lIns="110000" tIns="91440" rIns="110000" bIns="91440" rtlCol="0" anchor="t">
+          <a:bodyPr wrap="square" lIns="110000" tIns="91440" rIns="110000" bIns="91440" rtlCol="0" anchor="ctr">
             <a:normAutofit/>
           </a:bodyPr>
           <a:lstStyle/>
           <a:p>
-            <a:pPr marL="0" indent="0" algn="l">
+            <a:pPr marL="0" indent="0" algn="ctr">
               <a:lnSpc>
                 <a:spcPct val="104000"/>
               </a:lnSpc>
@@ -11599,7 +11599,7 @@
             </a:r>
           </a:p>
           <a:p>
-            <a:pPr marL="0" indent="0" algn="l">
+            <a:pPr marL="0" indent="0" algn="ctr">
               <a:lnSpc>
                 <a:spcPct val="104000"/>
               </a:lnSpc>
@@ -11688,12 +11688,12 @@
           </a:ln>
         </p:spPr>
         <p:txBody>
-          <a:bodyPr wrap="square" lIns="110000" tIns="91440" rIns="110000" bIns="91440" rtlCol="0" anchor="t">
+          <a:bodyPr wrap="square" lIns="110000" tIns="91440" rIns="110000" bIns="91440" rtlCol="0" anchor="ctr">
             <a:normAutofit/>
           </a:bodyPr>
           <a:lstStyle/>
           <a:p>
-            <a:pPr marL="0" indent="0" algn="l">
+            <a:pPr marL="0" indent="0" algn="ctr">
               <a:lnSpc>
                 <a:spcPct val="104000"/>
               </a:lnSpc>
@@ -11714,7 +11714,7 @@
             </a:r>
           </a:p>
           <a:p>
-            <a:pPr marL="0" indent="0" algn="l">
+            <a:pPr marL="0" indent="0" algn="ctr">
               <a:lnSpc>
                 <a:spcPct val="104000"/>
               </a:lnSpc>
@@ -11803,12 +11803,12 @@
           </a:ln>
         </p:spPr>
         <p:txBody>
-          <a:bodyPr wrap="square" lIns="110000" tIns="91440" rIns="110000" bIns="91440" rtlCol="0" anchor="t">
+          <a:bodyPr wrap="square" lIns="110000" tIns="91440" rIns="110000" bIns="91440" rtlCol="0" anchor="ctr">
             <a:normAutofit/>
           </a:bodyPr>
           <a:lstStyle/>
           <a:p>
-            <a:pPr marL="0" indent="0" algn="l">
+            <a:pPr marL="0" indent="0" algn="ctr">
               <a:lnSpc>
                 <a:spcPct val="104000"/>
               </a:lnSpc>
@@ -11829,7 +11829,7 @@
             </a:r>
           </a:p>
           <a:p>
-            <a:pPr marL="0" indent="0" algn="l">
+            <a:pPr marL="0" indent="0" algn="ctr">
               <a:lnSpc>
                 <a:spcPct val="104000"/>
               </a:lnSpc>
@@ -11918,12 +11918,12 @@
           </a:ln>
         </p:spPr>
         <p:txBody>
-          <a:bodyPr wrap="square" lIns="110000" tIns="91440" rIns="110000" bIns="91440" rtlCol="0" anchor="t">
+          <a:bodyPr wrap="square" lIns="110000" tIns="91440" rIns="110000" bIns="91440" rtlCol="0" anchor="ctr">
             <a:normAutofit/>
           </a:bodyPr>
           <a:lstStyle/>
           <a:p>
-            <a:pPr marL="0" indent="0" algn="l">
+            <a:pPr marL="0" indent="0" algn="ctr">
               <a:lnSpc>
                 <a:spcPct val="104000"/>
               </a:lnSpc>
@@ -11944,7 +11944,7 @@
             </a:r>
           </a:p>
           <a:p>
-            <a:pPr marL="0" indent="0" algn="l">
+            <a:pPr marL="0" indent="0" algn="ctr">
               <a:lnSpc>
                 <a:spcPct val="104000"/>
               </a:lnSpc>
@@ -12433,12 +12433,12 @@
           </a:ln>
         </p:spPr>
         <p:txBody>
-          <a:bodyPr wrap="square" lIns="137160" tIns="91440" rIns="137160" bIns="91440" rtlCol="0" anchor="t">
+          <a:bodyPr wrap="square" lIns="137160" tIns="91440" rIns="137160" bIns="91440" rtlCol="0" anchor="ctr">
             <a:normAutofit/>
           </a:bodyPr>
           <a:lstStyle/>
           <a:p>
-            <a:pPr marL="0" indent="0" algn="l">
+            <a:pPr marL="0" indent="0" algn="ctr">
               <a:buNone/>
             </a:pPr>
             <a:r>
@@ -12453,15 +12453,14 @@
             </a:r>
           </a:p>
           <a:p>
-            <a:pPr marL="274320" indent="-274320" algn="l">
+            <a:pPr marL="0" indent="0" algn="ctr">
               <a:lnSpc>
                 <a:spcPct val="104000"/>
               </a:lnSpc>
               <a:spcBef>
                 <a:spcPts val="300"/>
               </a:spcBef>
-              <a:buFont typeface="Arial"/>
-              <a:buChar char="•"/>
+              <a:buNone/>
             </a:pPr>
             <a:r>
               <a:rPr lang="en-US" sz="1500" dirty="0">
@@ -12475,15 +12474,14 @@
             </a:r>
           </a:p>
           <a:p>
-            <a:pPr marL="274320" indent="-274320" algn="l">
+            <a:pPr marL="0" indent="0" algn="ctr">
               <a:lnSpc>
                 <a:spcPct val="104000"/>
               </a:lnSpc>
               <a:spcBef>
                 <a:spcPts val="300"/>
               </a:spcBef>
-              <a:buFont typeface="Arial"/>
-              <a:buChar char="•"/>
+              <a:buNone/>
             </a:pPr>
             <a:r>
               <a:rPr lang="en-US" sz="1500" dirty="0">
@@ -12497,15 +12495,14 @@
             </a:r>
           </a:p>
           <a:p>
-            <a:pPr marL="274320" indent="-274320" algn="l">
+            <a:pPr marL="0" indent="0" algn="ctr">
               <a:lnSpc>
                 <a:spcPct val="104000"/>
               </a:lnSpc>
               <a:spcBef>
                 <a:spcPts val="300"/>
               </a:spcBef>
-              <a:buFont typeface="Arial"/>
-              <a:buChar char="•"/>
+              <a:buNone/>
             </a:pPr>
             <a:r>
               <a:rPr lang="en-US" sz="1500" dirty="0">
@@ -12519,15 +12516,14 @@
             </a:r>
           </a:p>
           <a:p>
-            <a:pPr marL="274320" indent="-274320" algn="l">
+            <a:pPr marL="0" indent="0" algn="ctr">
               <a:lnSpc>
                 <a:spcPct val="104000"/>
               </a:lnSpc>
               <a:spcBef>
                 <a:spcPts val="300"/>
               </a:spcBef>
-              <a:buFont typeface="Arial"/>
-              <a:buChar char="•"/>
+              <a:buNone/>
             </a:pPr>
             <a:r>
               <a:rPr lang="en-US" sz="1500" dirty="0">
@@ -13155,12 +13151,12 @@
           </a:ln>
         </p:spPr>
         <p:txBody>
-          <a:bodyPr wrap="square" lIns="137160" tIns="91440" rIns="137160" bIns="91440" rtlCol="0" anchor="t">
+          <a:bodyPr wrap="square" lIns="137160" tIns="91440" rIns="137160" bIns="91440" rtlCol="0" anchor="ctr">
             <a:normAutofit/>
           </a:bodyPr>
           <a:lstStyle/>
           <a:p>
-            <a:pPr marL="0" indent="0" algn="l">
+            <a:pPr marL="0" indent="0" algn="ctr">
               <a:lnSpc>
                 <a:spcPct val="104000"/>
               </a:lnSpc>
@@ -13181,7 +13177,7 @@
             </a:r>
           </a:p>
           <a:p>
-            <a:pPr marL="0" indent="0" algn="l">
+            <a:pPr marL="0" indent="0" algn="ctr">
               <a:lnSpc>
                 <a:spcPct val="104000"/>
               </a:lnSpc>
@@ -13268,12 +13264,12 @@
           </a:ln>
         </p:spPr>
         <p:txBody>
-          <a:bodyPr wrap="square" lIns="137160" tIns="91440" rIns="137160" bIns="91440" rtlCol="0" anchor="t">
+          <a:bodyPr wrap="square" lIns="137160" tIns="91440" rIns="137160" bIns="91440" rtlCol="0" anchor="ctr">
             <a:normAutofit/>
           </a:bodyPr>
           <a:lstStyle/>
           <a:p>
-            <a:pPr marL="0" indent="0" algn="l">
+            <a:pPr marL="0" indent="0" algn="ctr">
               <a:lnSpc>
                 <a:spcPct val="104000"/>
               </a:lnSpc>
@@ -13294,7 +13290,7 @@
             </a:r>
           </a:p>
           <a:p>
-            <a:pPr marL="0" indent="0" algn="l">
+            <a:pPr marL="0" indent="0" algn="ctr">
               <a:lnSpc>
                 <a:spcPct val="104000"/>
               </a:lnSpc>
@@ -13381,12 +13377,12 @@
           </a:ln>
         </p:spPr>
         <p:txBody>
-          <a:bodyPr wrap="square" lIns="137160" tIns="91440" rIns="137160" bIns="91440" rtlCol="0" anchor="t">
+          <a:bodyPr wrap="square" lIns="137160" tIns="91440" rIns="137160" bIns="91440" rtlCol="0" anchor="ctr">
             <a:normAutofit/>
           </a:bodyPr>
           <a:lstStyle/>
           <a:p>
-            <a:pPr marL="0" indent="0" algn="l">
+            <a:pPr marL="0" indent="0" algn="ctr">
               <a:lnSpc>
                 <a:spcPct val="104000"/>
               </a:lnSpc>
@@ -13407,7 +13403,7 @@
             </a:r>
           </a:p>
           <a:p>
-            <a:pPr marL="0" indent="0" algn="l">
+            <a:pPr marL="0" indent="0" algn="ctr">
               <a:lnSpc>
                 <a:spcPct val="104000"/>
               </a:lnSpc>
@@ -13494,12 +13490,12 @@
           </a:ln>
         </p:spPr>
         <p:txBody>
-          <a:bodyPr wrap="square" lIns="137160" tIns="91440" rIns="137160" bIns="91440" rtlCol="0" anchor="t">
+          <a:bodyPr wrap="square" lIns="137160" tIns="91440" rIns="137160" bIns="91440" rtlCol="0" anchor="ctr">
             <a:normAutofit/>
           </a:bodyPr>
           <a:lstStyle/>
           <a:p>
-            <a:pPr marL="0" indent="0" algn="l">
+            <a:pPr marL="0" indent="0" algn="ctr">
               <a:lnSpc>
                 <a:spcPct val="104000"/>
               </a:lnSpc>
@@ -13520,7 +13516,7 @@
             </a:r>
           </a:p>
           <a:p>
-            <a:pPr marL="0" indent="0" algn="l">
+            <a:pPr marL="0" indent="0" algn="ctr">
               <a:lnSpc>
                 <a:spcPct val="104000"/>
               </a:lnSpc>
@@ -13541,7 +13537,7 @@
             </a:r>
           </a:p>
           <a:p>
-            <a:pPr marL="0" indent="0" algn="l">
+            <a:pPr marL="0" indent="0" algn="ctr">
               <a:lnSpc>
                 <a:spcPct val="104000"/>
               </a:lnSpc>
@@ -13562,7 +13558,7 @@
             </a:r>
           </a:p>
           <a:p>
-            <a:pPr marL="0" indent="0" algn="l">
+            <a:pPr marL="0" indent="0" algn="ctr">
               <a:lnSpc>
                 <a:spcPct val="104000"/>
               </a:lnSpc>
@@ -13941,12 +13937,12 @@
           </a:ln>
         </p:spPr>
         <p:txBody>
-          <a:bodyPr wrap="square" lIns="110000" tIns="91440" rIns="110000" bIns="91440" rtlCol="0" anchor="t">
+          <a:bodyPr wrap="square" lIns="110000" tIns="91440" rIns="110000" bIns="91440" rtlCol="0" anchor="ctr">
             <a:normAutofit/>
           </a:bodyPr>
           <a:lstStyle/>
           <a:p>
-            <a:pPr marL="0" indent="0" algn="l">
+            <a:pPr marL="0" indent="0" algn="ctr">
               <a:lnSpc>
                 <a:spcPct val="104000"/>
               </a:lnSpc>
@@ -13967,7 +13963,7 @@
             </a:r>
           </a:p>
           <a:p>
-            <a:pPr marL="0" indent="0" algn="l">
+            <a:pPr marL="0" indent="0" algn="ctr">
               <a:lnSpc>
                 <a:spcPct val="104000"/>
               </a:lnSpc>
@@ -14056,12 +14052,12 @@
           </a:ln>
         </p:spPr>
         <p:txBody>
-          <a:bodyPr wrap="square" lIns="110000" tIns="91440" rIns="110000" bIns="91440" rtlCol="0" anchor="t">
+          <a:bodyPr wrap="square" lIns="110000" tIns="91440" rIns="110000" bIns="91440" rtlCol="0" anchor="ctr">
             <a:normAutofit/>
           </a:bodyPr>
           <a:lstStyle/>
           <a:p>
-            <a:pPr marL="0" indent="0" algn="l">
+            <a:pPr marL="0" indent="0" algn="ctr">
               <a:lnSpc>
                 <a:spcPct val="104000"/>
               </a:lnSpc>
@@ -14082,7 +14078,7 @@
             </a:r>
           </a:p>
           <a:p>
-            <a:pPr marL="0" indent="0" algn="l">
+            <a:pPr marL="0" indent="0" algn="ctr">
               <a:lnSpc>
                 <a:spcPct val="104000"/>
               </a:lnSpc>
@@ -14171,12 +14167,12 @@
           </a:ln>
         </p:spPr>
         <p:txBody>
-          <a:bodyPr wrap="square" lIns="110000" tIns="91440" rIns="110000" bIns="91440" rtlCol="0" anchor="t">
+          <a:bodyPr wrap="square" lIns="110000" tIns="91440" rIns="110000" bIns="91440" rtlCol="0" anchor="ctr">
             <a:normAutofit/>
           </a:bodyPr>
           <a:lstStyle/>
           <a:p>
-            <a:pPr marL="0" indent="0" algn="l">
+            <a:pPr marL="0" indent="0" algn="ctr">
               <a:lnSpc>
                 <a:spcPct val="104000"/>
               </a:lnSpc>
@@ -14197,7 +14193,7 @@
             </a:r>
           </a:p>
           <a:p>
-            <a:pPr marL="0" indent="0" algn="l">
+            <a:pPr marL="0" indent="0" algn="ctr">
               <a:lnSpc>
                 <a:spcPct val="104000"/>
               </a:lnSpc>
@@ -14286,12 +14282,12 @@
           </a:ln>
         </p:spPr>
         <p:txBody>
-          <a:bodyPr wrap="square" lIns="110000" tIns="91440" rIns="110000" bIns="91440" rtlCol="0" anchor="t">
+          <a:bodyPr wrap="square" lIns="110000" tIns="91440" rIns="110000" bIns="91440" rtlCol="0" anchor="ctr">
             <a:normAutofit/>
           </a:bodyPr>
           <a:lstStyle/>
           <a:p>
-            <a:pPr marL="0" indent="0" algn="l">
+            <a:pPr marL="0" indent="0" algn="ctr">
               <a:lnSpc>
                 <a:spcPct val="104000"/>
               </a:lnSpc>
@@ -14312,7 +14308,7 @@
             </a:r>
           </a:p>
           <a:p>
-            <a:pPr marL="0" indent="0" algn="l">
+            <a:pPr marL="0" indent="0" algn="ctr">
               <a:lnSpc>
                 <a:spcPct val="104000"/>
               </a:lnSpc>
@@ -14384,7 +14380,7 @@
                 <a:latin typeface="Arial"/>
                 <a:cs typeface="Arial"/>
               </a:rPr>
-              <a:t>Mọi bài báo đều báo cáo dòng chảy này: ai được đưa vào ở mỗi bước, và vì sao không.</a:t>
+              <a:t>Mọi bài báo đều báo cáo luồng này: ai được đưa vào ở mỗi bước, và vì sao không.</a:t>
             </a:r>
           </a:p>
         </p:txBody>
@@ -15669,12 +15665,12 @@
           </a:ln>
         </p:spPr>
         <p:txBody>
-          <a:bodyPr wrap="square" lIns="137160" tIns="91440" rIns="137160" bIns="91440" rtlCol="0" anchor="t">
+          <a:bodyPr wrap="square" lIns="137160" tIns="91440" rIns="137160" bIns="91440" rtlCol="0" anchor="ctr">
             <a:normAutofit/>
           </a:bodyPr>
           <a:lstStyle/>
           <a:p>
-            <a:pPr marL="0" indent="0" algn="l">
+            <a:pPr marL="0" indent="0" algn="ctr">
               <a:buNone/>
             </a:pPr>
             <a:r>
@@ -15689,15 +15685,14 @@
             </a:r>
           </a:p>
           <a:p>
-            <a:pPr marL="274320" indent="-274320" algn="l">
+            <a:pPr marL="0" indent="0" algn="ctr">
               <a:lnSpc>
                 <a:spcPct val="104000"/>
               </a:lnSpc>
               <a:spcBef>
                 <a:spcPts val="300"/>
               </a:spcBef>
-              <a:buFont typeface="Arial"/>
-              <a:buChar char="•"/>
+              <a:buNone/>
             </a:pPr>
             <a:r>
               <a:rPr lang="en-US" sz="1500" dirty="0">
@@ -15711,15 +15706,14 @@
             </a:r>
           </a:p>
           <a:p>
-            <a:pPr marL="274320" indent="-274320" algn="l">
+            <a:pPr marL="0" indent="0" algn="ctr">
               <a:lnSpc>
                 <a:spcPct val="104000"/>
               </a:lnSpc>
               <a:spcBef>
                 <a:spcPts val="300"/>
               </a:spcBef>
-              <a:buFont typeface="Arial"/>
-              <a:buChar char="•"/>
+              <a:buNone/>
             </a:pPr>
             <a:r>
               <a:rPr lang="en-US" sz="1500" dirty="0">
@@ -15733,15 +15727,14 @@
             </a:r>
           </a:p>
           <a:p>
-            <a:pPr marL="274320" indent="-274320" algn="l">
+            <a:pPr marL="0" indent="0" algn="ctr">
               <a:lnSpc>
                 <a:spcPct val="104000"/>
               </a:lnSpc>
               <a:spcBef>
                 <a:spcPts val="300"/>
               </a:spcBef>
-              <a:buFont typeface="Arial"/>
-              <a:buChar char="•"/>
+              <a:buNone/>
             </a:pPr>
             <a:r>
               <a:rPr lang="en-US" sz="1500" dirty="0">
@@ -15755,15 +15748,14 @@
             </a:r>
           </a:p>
           <a:p>
-            <a:pPr marL="274320" indent="-274320" algn="l">
+            <a:pPr marL="0" indent="0" algn="ctr">
               <a:lnSpc>
                 <a:spcPct val="104000"/>
               </a:lnSpc>
               <a:spcBef>
                 <a:spcPts val="300"/>
               </a:spcBef>
-              <a:buFont typeface="Arial"/>
-              <a:buChar char="•"/>
+              <a:buNone/>
             </a:pPr>
             <a:r>
               <a:rPr lang="en-US" sz="1500" dirty="0">
@@ -16222,12 +16214,12 @@
           </a:ln>
         </p:spPr>
         <p:txBody>
-          <a:bodyPr wrap="square" lIns="137160" tIns="91440" rIns="137160" bIns="91440" rtlCol="0" anchor="t">
+          <a:bodyPr wrap="square" lIns="137160" tIns="91440" rIns="137160" bIns="91440" rtlCol="0" anchor="ctr">
             <a:normAutofit/>
           </a:bodyPr>
           <a:lstStyle/>
           <a:p>
-            <a:pPr marL="0" indent="0" algn="l">
+            <a:pPr marL="0" indent="0" algn="ctr">
               <a:buNone/>
             </a:pPr>
             <a:r>
@@ -16242,15 +16234,14 @@
             </a:r>
           </a:p>
           <a:p>
-            <a:pPr marL="274320" indent="-274320" algn="l">
+            <a:pPr marL="0" indent="0" algn="ctr">
               <a:lnSpc>
                 <a:spcPct val="104000"/>
               </a:lnSpc>
               <a:spcBef>
                 <a:spcPts val="300"/>
               </a:spcBef>
-              <a:buFont typeface="Arial"/>
-              <a:buChar char="•"/>
+              <a:buNone/>
             </a:pPr>
             <a:r>
               <a:rPr lang="en-US" sz="1500" dirty="0">
@@ -16264,15 +16255,14 @@
             </a:r>
           </a:p>
           <a:p>
-            <a:pPr marL="274320" indent="-274320" algn="l">
+            <a:pPr marL="0" indent="0" algn="ctr">
               <a:lnSpc>
                 <a:spcPct val="104000"/>
               </a:lnSpc>
               <a:spcBef>
                 <a:spcPts val="300"/>
               </a:spcBef>
-              <a:buFont typeface="Arial"/>
-              <a:buChar char="•"/>
+              <a:buNone/>
             </a:pPr>
             <a:r>
               <a:rPr lang="en-US" sz="1500" dirty="0">
@@ -16286,15 +16276,14 @@
             </a:r>
           </a:p>
           <a:p>
-            <a:pPr marL="274320" indent="-274320" algn="l">
+            <a:pPr marL="0" indent="0" algn="ctr">
               <a:lnSpc>
                 <a:spcPct val="104000"/>
               </a:lnSpc>
               <a:spcBef>
                 <a:spcPts val="300"/>
               </a:spcBef>
-              <a:buFont typeface="Arial"/>
-              <a:buChar char="•"/>
+              <a:buNone/>
             </a:pPr>
             <a:r>
               <a:rPr lang="en-US" sz="1500" dirty="0">
@@ -16666,12 +16655,12 @@
           </a:ln>
         </p:spPr>
         <p:txBody>
-          <a:bodyPr wrap="square" lIns="137160" tIns="91440" rIns="137160" bIns="91440" rtlCol="0" anchor="t">
+          <a:bodyPr wrap="square" lIns="137160" tIns="91440" rIns="137160" bIns="91440" rtlCol="0" anchor="ctr">
             <a:normAutofit/>
           </a:bodyPr>
           <a:lstStyle/>
           <a:p>
-            <a:pPr marL="0" indent="0" algn="l">
+            <a:pPr marL="0" indent="0" algn="ctr">
               <a:lnSpc>
                 <a:spcPct val="104000"/>
               </a:lnSpc>
@@ -16692,7 +16681,7 @@
             </a:r>
           </a:p>
           <a:p>
-            <a:pPr marL="0" indent="0" algn="l">
+            <a:pPr marL="0" indent="0" algn="ctr">
               <a:lnSpc>
                 <a:spcPct val="104000"/>
               </a:lnSpc>
@@ -16779,12 +16768,12 @@
           </a:ln>
         </p:spPr>
         <p:txBody>
-          <a:bodyPr wrap="square" lIns="137160" tIns="91440" rIns="137160" bIns="91440" rtlCol="0" anchor="t">
+          <a:bodyPr wrap="square" lIns="137160" tIns="91440" rIns="137160" bIns="91440" rtlCol="0" anchor="ctr">
             <a:normAutofit/>
           </a:bodyPr>
           <a:lstStyle/>
           <a:p>
-            <a:pPr marL="0" indent="0" algn="l">
+            <a:pPr marL="0" indent="0" algn="ctr">
               <a:lnSpc>
                 <a:spcPct val="104000"/>
               </a:lnSpc>
@@ -16805,7 +16794,7 @@
             </a:r>
           </a:p>
           <a:p>
-            <a:pPr marL="0" indent="0" algn="l">
+            <a:pPr marL="0" indent="0" algn="ctr">
               <a:lnSpc>
                 <a:spcPct val="104000"/>
               </a:lnSpc>
@@ -16826,7 +16815,7 @@
             </a:r>
           </a:p>
           <a:p>
-            <a:pPr marL="0" indent="0" algn="l">
+            <a:pPr marL="0" indent="0" algn="ctr">
               <a:lnSpc>
                 <a:spcPct val="104000"/>
               </a:lnSpc>
@@ -16913,12 +16902,12 @@
           </a:ln>
         </p:spPr>
         <p:txBody>
-          <a:bodyPr wrap="square" lIns="137160" tIns="91440" rIns="137160" bIns="91440" rtlCol="0" anchor="t">
+          <a:bodyPr wrap="square" lIns="137160" tIns="91440" rIns="137160" bIns="91440" rtlCol="0" anchor="ctr">
             <a:normAutofit/>
           </a:bodyPr>
           <a:lstStyle/>
           <a:p>
-            <a:pPr marL="0" indent="0" algn="l">
+            <a:pPr marL="0" indent="0" algn="ctr">
               <a:lnSpc>
                 <a:spcPct val="104000"/>
               </a:lnSpc>
@@ -16939,7 +16928,7 @@
             </a:r>
           </a:p>
           <a:p>
-            <a:pPr marL="0" indent="0" algn="l">
+            <a:pPr marL="0" indent="0" algn="ctr">
               <a:lnSpc>
                 <a:spcPct val="104000"/>
               </a:lnSpc>
@@ -16960,7 +16949,7 @@
             </a:r>
           </a:p>
           <a:p>
-            <a:pPr marL="0" indent="0" algn="l">
+            <a:pPr marL="0" indent="0" algn="ctr">
               <a:lnSpc>
                 <a:spcPct val="104000"/>
               </a:lnSpc>
@@ -17047,12 +17036,12 @@
           </a:ln>
         </p:spPr>
         <p:txBody>
-          <a:bodyPr wrap="square" lIns="137160" tIns="91440" rIns="137160" bIns="91440" rtlCol="0" anchor="t">
+          <a:bodyPr wrap="square" lIns="137160" tIns="91440" rIns="137160" bIns="91440" rtlCol="0" anchor="ctr">
             <a:normAutofit/>
           </a:bodyPr>
           <a:lstStyle/>
           <a:p>
-            <a:pPr marL="0" indent="0" algn="l">
+            <a:pPr marL="0" indent="0" algn="ctr">
               <a:lnSpc>
                 <a:spcPct val="104000"/>
               </a:lnSpc>
@@ -17073,7 +17062,7 @@
             </a:r>
           </a:p>
           <a:p>
-            <a:pPr marL="0" indent="0" algn="l">
+            <a:pPr marL="0" indent="0" algn="ctr">
               <a:lnSpc>
                 <a:spcPct val="104000"/>
               </a:lnSpc>
@@ -17094,7 +17083,7 @@
             </a:r>
           </a:p>
           <a:p>
-            <a:pPr marL="0" indent="0" algn="l">
+            <a:pPr marL="0" indent="0" algn="ctr">
               <a:lnSpc>
                 <a:spcPct val="104000"/>
               </a:lnSpc>
@@ -17401,7 +17390,7 @@
                 <a:latin typeface="Arial"/>
                 <a:cs typeface="Arial"/>
               </a:rPr>
-              <a:t>Trên lớp, chúng ta cùng đi qua cả năm câu. Với bản thảo, mỗi anh chị chọn một câu.</a:t>
+              <a:t>Trên lớp, cả lớp cùng đi qua năm câu. Với bản thảo, mỗi anh chị chọn một câu.</a:t>
             </a:r>
           </a:p>
         </p:txBody>
@@ -17471,12 +17460,12 @@
           </a:ln>
         </p:spPr>
         <p:txBody>
-          <a:bodyPr wrap="square" lIns="137160" tIns="91440" rIns="137160" bIns="91440" rtlCol="0" anchor="t">
+          <a:bodyPr wrap="square" lIns="137160" tIns="91440" rIns="137160" bIns="91440" rtlCol="0" anchor="ctr">
             <a:normAutofit/>
           </a:bodyPr>
           <a:lstStyle/>
           <a:p>
-            <a:pPr marL="0" indent="0" algn="l">
+            <a:pPr marL="0" indent="0" algn="ctr">
               <a:lnSpc>
                 <a:spcPct val="104000"/>
               </a:lnSpc>
@@ -17497,7 +17486,7 @@
             </a:r>
           </a:p>
           <a:p>
-            <a:pPr marL="0" indent="0" algn="l">
+            <a:pPr marL="0" indent="0" algn="ctr">
               <a:lnSpc>
                 <a:spcPct val="104000"/>
               </a:lnSpc>
@@ -17518,7 +17507,7 @@
             </a:r>
           </a:p>
           <a:p>
-            <a:pPr marL="0" indent="0" algn="l">
+            <a:pPr marL="0" indent="0" algn="ctr">
               <a:lnSpc>
                 <a:spcPct val="104000"/>
               </a:lnSpc>
@@ -17605,12 +17594,12 @@
           </a:ln>
         </p:spPr>
         <p:txBody>
-          <a:bodyPr wrap="square" lIns="137160" tIns="91440" rIns="137160" bIns="91440" rtlCol="0" anchor="t">
+          <a:bodyPr wrap="square" lIns="137160" tIns="91440" rIns="137160" bIns="91440" rtlCol="0" anchor="ctr">
             <a:normAutofit/>
           </a:bodyPr>
           <a:lstStyle/>
           <a:p>
-            <a:pPr marL="0" indent="0" algn="l">
+            <a:pPr marL="0" indent="0" algn="ctr">
               <a:lnSpc>
                 <a:spcPct val="104000"/>
               </a:lnSpc>
@@ -17631,7 +17620,7 @@
             </a:r>
           </a:p>
           <a:p>
-            <a:pPr marL="0" indent="0" algn="l">
+            <a:pPr marL="0" indent="0" algn="ctr">
               <a:lnSpc>
                 <a:spcPct val="104000"/>
               </a:lnSpc>
@@ -17718,12 +17707,12 @@
           </a:ln>
         </p:spPr>
         <p:txBody>
-          <a:bodyPr wrap="square" lIns="137160" tIns="91440" rIns="137160" bIns="91440" rtlCol="0" anchor="t">
+          <a:bodyPr wrap="square" lIns="137160" tIns="91440" rIns="137160" bIns="91440" rtlCol="0" anchor="ctr">
             <a:normAutofit/>
           </a:bodyPr>
           <a:lstStyle/>
           <a:p>
-            <a:pPr marL="0" indent="0" algn="l">
+            <a:pPr marL="0" indent="0" algn="ctr">
               <a:lnSpc>
                 <a:spcPct val="104000"/>
               </a:lnSpc>
@@ -17744,7 +17733,7 @@
             </a:r>
           </a:p>
           <a:p>
-            <a:pPr marL="0" indent="0" algn="l">
+            <a:pPr marL="0" indent="0" algn="ctr">
               <a:lnSpc>
                 <a:spcPct val="104000"/>
               </a:lnSpc>
@@ -17831,12 +17820,12 @@
           </a:ln>
         </p:spPr>
         <p:txBody>
-          <a:bodyPr wrap="square" lIns="137160" tIns="91440" rIns="137160" bIns="91440" rtlCol="0" anchor="t">
+          <a:bodyPr wrap="square" lIns="137160" tIns="91440" rIns="137160" bIns="91440" rtlCol="0" anchor="ctr">
             <a:normAutofit/>
           </a:bodyPr>
           <a:lstStyle/>
           <a:p>
-            <a:pPr marL="0" indent="0" algn="l">
+            <a:pPr marL="0" indent="0" algn="ctr">
               <a:lnSpc>
                 <a:spcPct val="104000"/>
               </a:lnSpc>
@@ -17857,7 +17846,7 @@
             </a:r>
           </a:p>
           <a:p>
-            <a:pPr marL="0" indent="0" algn="l">
+            <a:pPr marL="0" indent="0" algn="ctr">
               <a:lnSpc>
                 <a:spcPct val="104000"/>
               </a:lnSpc>
@@ -17944,12 +17933,12 @@
           </a:ln>
         </p:spPr>
         <p:txBody>
-          <a:bodyPr wrap="square" lIns="137160" tIns="91440" rIns="137160" bIns="91440" rtlCol="0" anchor="t">
+          <a:bodyPr wrap="square" lIns="137160" tIns="91440" rIns="137160" bIns="91440" rtlCol="0" anchor="ctr">
             <a:normAutofit/>
           </a:bodyPr>
           <a:lstStyle/>
           <a:p>
-            <a:pPr marL="0" indent="0" algn="l">
+            <a:pPr marL="0" indent="0" algn="ctr">
               <a:lnSpc>
                 <a:spcPct val="104000"/>
               </a:lnSpc>
@@ -17970,7 +17959,7 @@
             </a:r>
           </a:p>
           <a:p>
-            <a:pPr marL="0" indent="0" algn="l">
+            <a:pPr marL="0" indent="0" algn="ctr">
               <a:lnSpc>
                 <a:spcPct val="104000"/>
               </a:lnSpc>
@@ -18459,12 +18448,12 @@
           </a:ln>
         </p:spPr>
         <p:txBody>
-          <a:bodyPr wrap="square" lIns="137160" tIns="91440" rIns="137160" bIns="91440" rtlCol="0" anchor="t">
+          <a:bodyPr wrap="square" lIns="137160" tIns="91440" rIns="137160" bIns="91440" rtlCol="0" anchor="ctr">
             <a:normAutofit/>
           </a:bodyPr>
           <a:lstStyle/>
           <a:p>
-            <a:pPr marL="0" indent="0" algn="l">
+            <a:pPr marL="0" indent="0" algn="ctr">
               <a:buNone/>
             </a:pPr>
             <a:r>
@@ -18479,15 +18468,14 @@
             </a:r>
           </a:p>
           <a:p>
-            <a:pPr marL="274320" indent="-274320" algn="l">
+            <a:pPr marL="0" indent="0" algn="ctr">
               <a:lnSpc>
                 <a:spcPct val="104000"/>
               </a:lnSpc>
               <a:spcBef>
                 <a:spcPts val="300"/>
               </a:spcBef>
-              <a:buFont typeface="Arial"/>
-              <a:buChar char="•"/>
+              <a:buNone/>
             </a:pPr>
             <a:r>
               <a:rPr lang="en-US" sz="1500" dirty="0">
@@ -18501,15 +18489,14 @@
             </a:r>
           </a:p>
           <a:p>
-            <a:pPr marL="274320" indent="-274320" algn="l">
+            <a:pPr marL="0" indent="0" algn="ctr">
               <a:lnSpc>
                 <a:spcPct val="104000"/>
               </a:lnSpc>
               <a:spcBef>
                 <a:spcPts val="300"/>
               </a:spcBef>
-              <a:buFont typeface="Arial"/>
-              <a:buChar char="•"/>
+              <a:buNone/>
             </a:pPr>
             <a:r>
               <a:rPr lang="en-US" sz="1500" dirty="0">
@@ -18523,15 +18510,14 @@
             </a:r>
           </a:p>
           <a:p>
-            <a:pPr marL="274320" indent="-274320" algn="l">
+            <a:pPr marL="0" indent="0" algn="ctr">
               <a:lnSpc>
                 <a:spcPct val="104000"/>
               </a:lnSpc>
               <a:spcBef>
                 <a:spcPts val="300"/>
               </a:spcBef>
-              <a:buFont typeface="Arial"/>
-              <a:buChar char="•"/>
+              <a:buNone/>
             </a:pPr>
             <a:r>
               <a:rPr lang="en-US" sz="1500" dirty="0">
@@ -18545,15 +18531,14 @@
             </a:r>
           </a:p>
           <a:p>
-            <a:pPr marL="274320" indent="-274320" algn="l">
+            <a:pPr marL="0" indent="0" algn="ctr">
               <a:lnSpc>
                 <a:spcPct val="104000"/>
               </a:lnSpc>
               <a:spcBef>
                 <a:spcPts val="300"/>
               </a:spcBef>
-              <a:buFont typeface="Arial"/>
-              <a:buChar char="•"/>
+              <a:buNone/>
             </a:pPr>
             <a:r>
               <a:rPr lang="en-US" sz="1500" dirty="0">
@@ -19653,12 +19638,12 @@
           </a:ln>
         </p:spPr>
         <p:txBody>
-          <a:bodyPr wrap="square" lIns="110000" tIns="91440" rIns="110000" bIns="91440" rtlCol="0" anchor="t">
+          <a:bodyPr wrap="square" lIns="110000" tIns="91440" rIns="110000" bIns="91440" rtlCol="0" anchor="ctr">
             <a:normAutofit/>
           </a:bodyPr>
           <a:lstStyle/>
           <a:p>
-            <a:pPr marL="0" indent="0" algn="l">
+            <a:pPr marL="0" indent="0" algn="ctr">
               <a:lnSpc>
                 <a:spcPct val="104000"/>
               </a:lnSpc>
@@ -19747,12 +19732,12 @@
           </a:ln>
         </p:spPr>
         <p:txBody>
-          <a:bodyPr wrap="square" lIns="110000" tIns="91440" rIns="110000" bIns="91440" rtlCol="0" anchor="t">
+          <a:bodyPr wrap="square" lIns="110000" tIns="91440" rIns="110000" bIns="91440" rtlCol="0" anchor="ctr">
             <a:normAutofit/>
           </a:bodyPr>
           <a:lstStyle/>
           <a:p>
-            <a:pPr marL="0" indent="0" algn="l">
+            <a:pPr marL="0" indent="0" algn="ctr">
               <a:lnSpc>
                 <a:spcPct val="104000"/>
               </a:lnSpc>
@@ -19841,12 +19826,12 @@
           </a:ln>
         </p:spPr>
         <p:txBody>
-          <a:bodyPr wrap="square" lIns="110000" tIns="91440" rIns="110000" bIns="91440" rtlCol="0" anchor="t">
+          <a:bodyPr wrap="square" lIns="110000" tIns="91440" rIns="110000" bIns="91440" rtlCol="0" anchor="ctr">
             <a:normAutofit/>
           </a:bodyPr>
           <a:lstStyle/>
           <a:p>
-            <a:pPr marL="0" indent="0" algn="l">
+            <a:pPr marL="0" indent="0" algn="ctr">
               <a:lnSpc>
                 <a:spcPct val="104000"/>
               </a:lnSpc>
@@ -19935,12 +19920,12 @@
           </a:ln>
         </p:spPr>
         <p:txBody>
-          <a:bodyPr wrap="square" lIns="110000" tIns="91440" rIns="110000" bIns="91440" rtlCol="0" anchor="t">
+          <a:bodyPr wrap="square" lIns="110000" tIns="91440" rIns="110000" bIns="91440" rtlCol="0" anchor="ctr">
             <a:normAutofit/>
           </a:bodyPr>
           <a:lstStyle/>
           <a:p>
-            <a:pPr marL="0" indent="0" algn="l">
+            <a:pPr marL="0" indent="0" algn="ctr">
               <a:lnSpc>
                 <a:spcPct val="104000"/>
               </a:lnSpc>
@@ -21229,12 +21214,12 @@
           </a:ln>
         </p:spPr>
         <p:txBody>
-          <a:bodyPr wrap="square" lIns="137160" tIns="91440" rIns="137160" bIns="91440" rtlCol="0" anchor="t">
+          <a:bodyPr wrap="square" lIns="137160" tIns="91440" rIns="137160" bIns="91440" rtlCol="0" anchor="ctr">
             <a:normAutofit/>
           </a:bodyPr>
           <a:lstStyle/>
           <a:p>
-            <a:pPr marL="0" indent="0" algn="l">
+            <a:pPr marL="0" indent="0" algn="ctr">
               <a:buNone/>
             </a:pPr>
             <a:r>
@@ -21249,15 +21234,14 @@
             </a:r>
           </a:p>
           <a:p>
-            <a:pPr marL="274320" indent="-274320" algn="l">
+            <a:pPr marL="0" indent="0" algn="ctr">
               <a:lnSpc>
                 <a:spcPct val="104000"/>
               </a:lnSpc>
               <a:spcBef>
                 <a:spcPts val="300"/>
               </a:spcBef>
-              <a:buFont typeface="Arial"/>
-              <a:buChar char="•"/>
+              <a:buNone/>
             </a:pPr>
             <a:r>
               <a:rPr lang="en-US" sz="1500" dirty="0">
@@ -21271,15 +21255,14 @@
             </a:r>
           </a:p>
           <a:p>
-            <a:pPr marL="274320" indent="-274320" algn="l">
+            <a:pPr marL="0" indent="0" algn="ctr">
               <a:lnSpc>
                 <a:spcPct val="104000"/>
               </a:lnSpc>
               <a:spcBef>
                 <a:spcPts val="300"/>
               </a:spcBef>
-              <a:buFont typeface="Arial"/>
-              <a:buChar char="•"/>
+              <a:buNone/>
             </a:pPr>
             <a:r>
               <a:rPr lang="en-US" sz="1500" dirty="0">
@@ -21293,15 +21276,14 @@
             </a:r>
           </a:p>
           <a:p>
-            <a:pPr marL="274320" indent="-274320" algn="l">
+            <a:pPr marL="0" indent="0" algn="ctr">
               <a:lnSpc>
                 <a:spcPct val="104000"/>
               </a:lnSpc>
               <a:spcBef>
                 <a:spcPts val="300"/>
               </a:spcBef>
-              <a:buFont typeface="Arial"/>
-              <a:buChar char="•"/>
+              <a:buNone/>
             </a:pPr>
             <a:r>
               <a:rPr lang="en-US" sz="1500" dirty="0">
@@ -21315,15 +21297,14 @@
             </a:r>
           </a:p>
           <a:p>
-            <a:pPr marL="274320" indent="-274320" algn="l">
+            <a:pPr marL="0" indent="0" algn="ctr">
               <a:lnSpc>
                 <a:spcPct val="104000"/>
               </a:lnSpc>
               <a:spcBef>
                 <a:spcPts val="300"/>
               </a:spcBef>
-              <a:buFont typeface="Arial"/>
-              <a:buChar char="•"/>
+              <a:buNone/>
             </a:pPr>
             <a:r>
               <a:rPr lang="en-US" sz="1500" dirty="0">
@@ -22082,14 +22063,14 @@
               <a:buNone/>
             </a:pPr>
             <a:r>
-              <a:rPr lang="en-US" sz="2800" b="1" dirty="0">
+              <a:rPr lang="en-US" sz="2400" b="1" dirty="0">
                 <a:solidFill>
                   <a:srgbClr val="0D7377"/>
                 </a:solidFill>
                 <a:latin typeface="Arial"/>
                 <a:cs typeface="Arial"/>
               </a:rPr>
-              <a:t>Hãy cho thấy dữ liệu: biểu đồ 'thuốc nổ' và chấm + hộp</a:t>
+              <a:t>Cho thấy dữ liệu: biểu đồ 'thuốc nổ' (dynamite plot) và chấm + hộp</a:t>
             </a:r>
           </a:p>
         </p:txBody>
@@ -22450,7 +22431,7 @@
                 <a:latin typeface="Arial"/>
                 <a:cs typeface="Arial"/>
               </a:rPr>
-              <a:t>'Bảng 1' cho ta biết điều gì</a:t>
+              <a:t>'Bảng 1' cho biết điều gì</a:t>
             </a:r>
           </a:p>
         </p:txBody>
@@ -24020,12 +24001,12 @@
           </a:ln>
         </p:spPr>
         <p:txBody>
-          <a:bodyPr wrap="square" lIns="137160" tIns="91440" rIns="137160" bIns="91440" rtlCol="0" anchor="t">
+          <a:bodyPr wrap="square" lIns="137160" tIns="91440" rIns="137160" bIns="91440" rtlCol="0" anchor="ctr">
             <a:normAutofit/>
           </a:bodyPr>
           <a:lstStyle/>
           <a:p>
-            <a:pPr marL="0" indent="0" algn="l">
+            <a:pPr marL="0" indent="0" algn="ctr">
               <a:buNone/>
             </a:pPr>
             <a:r>
@@ -24040,15 +24021,14 @@
             </a:r>
           </a:p>
           <a:p>
-            <a:pPr marL="274320" indent="-274320" algn="l">
+            <a:pPr marL="0" indent="0" algn="ctr">
               <a:lnSpc>
                 <a:spcPct val="104000"/>
               </a:lnSpc>
               <a:spcBef>
                 <a:spcPts val="300"/>
               </a:spcBef>
-              <a:buFont typeface="Arial"/>
-              <a:buChar char="•"/>
+              <a:buNone/>
             </a:pPr>
             <a:r>
               <a:rPr lang="en-US" sz="1500" dirty="0">
@@ -24062,15 +24042,14 @@
             </a:r>
           </a:p>
           <a:p>
-            <a:pPr marL="274320" indent="-274320" algn="l">
+            <a:pPr marL="0" indent="0" algn="ctr">
               <a:lnSpc>
                 <a:spcPct val="104000"/>
               </a:lnSpc>
               <a:spcBef>
                 <a:spcPts val="300"/>
               </a:spcBef>
-              <a:buFont typeface="Arial"/>
-              <a:buChar char="•"/>
+              <a:buNone/>
             </a:pPr>
             <a:r>
               <a:rPr lang="en-US" sz="1500" dirty="0">
@@ -24084,15 +24063,14 @@
             </a:r>
           </a:p>
           <a:p>
-            <a:pPr marL="274320" indent="-274320" algn="l">
+            <a:pPr marL="0" indent="0" algn="ctr">
               <a:lnSpc>
                 <a:spcPct val="104000"/>
               </a:lnSpc>
               <a:spcBef>
                 <a:spcPts val="300"/>
               </a:spcBef>
-              <a:buFont typeface="Arial"/>
-              <a:buChar char="•"/>
+              <a:buNone/>
             </a:pPr>
             <a:r>
               <a:rPr lang="en-US" sz="1500" dirty="0">
@@ -24106,15 +24084,14 @@
             </a:r>
           </a:p>
           <a:p>
-            <a:pPr marL="274320" indent="-274320" algn="l">
+            <a:pPr marL="0" indent="0" algn="ctr">
               <a:lnSpc>
                 <a:spcPct val="104000"/>
               </a:lnSpc>
               <a:spcBef>
                 <a:spcPts val="300"/>
               </a:spcBef>
-              <a:buFont typeface="Arial"/>
-              <a:buChar char="•"/>
+              <a:buNone/>
             </a:pPr>
             <a:r>
               <a:rPr lang="en-US" sz="1500" dirty="0">
@@ -26526,12 +26503,12 @@
           </a:ln>
         </p:spPr>
         <p:txBody>
-          <a:bodyPr wrap="square" lIns="137160" tIns="91440" rIns="137160" bIns="91440" rtlCol="0" anchor="t">
+          <a:bodyPr wrap="square" lIns="137160" tIns="91440" rIns="137160" bIns="91440" rtlCol="0" anchor="ctr">
             <a:normAutofit/>
           </a:bodyPr>
           <a:lstStyle/>
           <a:p>
-            <a:pPr marL="0" indent="0" algn="l">
+            <a:pPr marL="0" indent="0" algn="ctr">
               <a:lnSpc>
                 <a:spcPct val="104000"/>
               </a:lnSpc>
@@ -26552,7 +26529,7 @@
             </a:r>
           </a:p>
           <a:p>
-            <a:pPr marL="0" indent="0" algn="l">
+            <a:pPr marL="0" indent="0" algn="ctr">
               <a:lnSpc>
                 <a:spcPct val="104000"/>
               </a:lnSpc>
@@ -26639,12 +26616,12 @@
           </a:ln>
         </p:spPr>
         <p:txBody>
-          <a:bodyPr wrap="square" lIns="137160" tIns="91440" rIns="137160" bIns="91440" rtlCol="0" anchor="t">
+          <a:bodyPr wrap="square" lIns="137160" tIns="91440" rIns="137160" bIns="91440" rtlCol="0" anchor="ctr">
             <a:normAutofit/>
           </a:bodyPr>
           <a:lstStyle/>
           <a:p>
-            <a:pPr marL="0" indent="0" algn="l">
+            <a:pPr marL="0" indent="0" algn="ctr">
               <a:lnSpc>
                 <a:spcPct val="104000"/>
               </a:lnSpc>
@@ -26665,7 +26642,7 @@
             </a:r>
           </a:p>
           <a:p>
-            <a:pPr marL="0" indent="0" algn="l">
+            <a:pPr marL="0" indent="0" algn="ctr">
               <a:lnSpc>
                 <a:spcPct val="104000"/>
               </a:lnSpc>
@@ -26752,12 +26729,12 @@
           </a:ln>
         </p:spPr>
         <p:txBody>
-          <a:bodyPr wrap="square" lIns="137160" tIns="91440" rIns="137160" bIns="91440" rtlCol="0" anchor="t">
+          <a:bodyPr wrap="square" lIns="137160" tIns="91440" rIns="137160" bIns="91440" rtlCol="0" anchor="ctr">
             <a:normAutofit/>
           </a:bodyPr>
           <a:lstStyle/>
           <a:p>
-            <a:pPr marL="0" indent="0" algn="l">
+            <a:pPr marL="0" indent="0" algn="ctr">
               <a:lnSpc>
                 <a:spcPct val="104000"/>
               </a:lnSpc>
@@ -26778,7 +26755,7 @@
             </a:r>
           </a:p>
           <a:p>
-            <a:pPr marL="0" indent="0" algn="l">
+            <a:pPr marL="0" indent="0" algn="ctr">
               <a:lnSpc>
                 <a:spcPct val="104000"/>
               </a:lnSpc>
@@ -26865,12 +26842,12 @@
           </a:ln>
         </p:spPr>
         <p:txBody>
-          <a:bodyPr wrap="square" lIns="137160" tIns="91440" rIns="137160" bIns="91440" rtlCol="0" anchor="t">
+          <a:bodyPr wrap="square" lIns="137160" tIns="91440" rIns="137160" bIns="91440" rtlCol="0" anchor="ctr">
             <a:normAutofit/>
           </a:bodyPr>
           <a:lstStyle/>
           <a:p>
-            <a:pPr marL="0" indent="0" algn="l">
+            <a:pPr marL="0" indent="0" algn="ctr">
               <a:lnSpc>
                 <a:spcPct val="104000"/>
               </a:lnSpc>
@@ -26891,7 +26868,7 @@
             </a:r>
           </a:p>
           <a:p>
-            <a:pPr marL="0" indent="0" algn="l">
+            <a:pPr marL="0" indent="0" algn="ctr">
               <a:lnSpc>
                 <a:spcPct val="104000"/>
               </a:lnSpc>
@@ -26978,12 +26955,12 @@
           </a:ln>
         </p:spPr>
         <p:txBody>
-          <a:bodyPr wrap="square" lIns="137160" tIns="91440" rIns="137160" bIns="91440" rtlCol="0" anchor="t">
+          <a:bodyPr wrap="square" lIns="137160" tIns="91440" rIns="137160" bIns="91440" rtlCol="0" anchor="ctr">
             <a:normAutofit/>
           </a:bodyPr>
           <a:lstStyle/>
           <a:p>
-            <a:pPr marL="0" indent="0" algn="l">
+            <a:pPr marL="0" indent="0" algn="ctr">
               <a:lnSpc>
                 <a:spcPct val="104000"/>
               </a:lnSpc>
@@ -27004,7 +26981,7 @@
             </a:r>
           </a:p>
           <a:p>
-            <a:pPr marL="0" indent="0" algn="l">
+            <a:pPr marL="0" indent="0" algn="ctr">
               <a:lnSpc>
                 <a:spcPct val="104000"/>
               </a:lnSpc>
@@ -27493,12 +27470,12 @@
           </a:ln>
         </p:spPr>
         <p:txBody>
-          <a:bodyPr wrap="square" lIns="137160" tIns="91440" rIns="137160" bIns="91440" rtlCol="0" anchor="t">
+          <a:bodyPr wrap="square" lIns="137160" tIns="91440" rIns="137160" bIns="91440" rtlCol="0" anchor="ctr">
             <a:normAutofit/>
           </a:bodyPr>
           <a:lstStyle/>
           <a:p>
-            <a:pPr marL="0" indent="0" algn="l">
+            <a:pPr marL="0" indent="0" algn="ctr">
               <a:buNone/>
             </a:pPr>
             <a:r>
@@ -27513,15 +27490,14 @@
             </a:r>
           </a:p>
           <a:p>
-            <a:pPr marL="274320" indent="-274320" algn="l">
+            <a:pPr marL="0" indent="0" algn="ctr">
               <a:lnSpc>
                 <a:spcPct val="104000"/>
               </a:lnSpc>
               <a:spcBef>
                 <a:spcPts val="300"/>
               </a:spcBef>
-              <a:buFont typeface="Arial"/>
-              <a:buChar char="•"/>
+              <a:buNone/>
             </a:pPr>
             <a:r>
               <a:rPr lang="en-US" sz="1500" dirty="0">
@@ -27535,15 +27511,14 @@
             </a:r>
           </a:p>
           <a:p>
-            <a:pPr marL="274320" indent="-274320" algn="l">
+            <a:pPr marL="0" indent="0" algn="ctr">
               <a:lnSpc>
                 <a:spcPct val="104000"/>
               </a:lnSpc>
               <a:spcBef>
                 <a:spcPts val="300"/>
               </a:spcBef>
-              <a:buFont typeface="Arial"/>
-              <a:buChar char="•"/>
+              <a:buNone/>
             </a:pPr>
             <a:r>
               <a:rPr lang="en-US" sz="1500" dirty="0">
@@ -27557,15 +27532,14 @@
             </a:r>
           </a:p>
           <a:p>
-            <a:pPr marL="274320" indent="-274320" algn="l">
+            <a:pPr marL="0" indent="0" algn="ctr">
               <a:lnSpc>
                 <a:spcPct val="104000"/>
               </a:lnSpc>
               <a:spcBef>
                 <a:spcPts val="300"/>
               </a:spcBef>
-              <a:buFont typeface="Arial"/>
-              <a:buChar char="•"/>
+              <a:buNone/>
             </a:pPr>
             <a:r>
               <a:rPr lang="en-US" sz="1500" dirty="0">
@@ -27579,15 +27553,14 @@
             </a:r>
           </a:p>
           <a:p>
-            <a:pPr marL="274320" indent="-274320" algn="l">
+            <a:pPr marL="0" indent="0" algn="ctr">
               <a:lnSpc>
                 <a:spcPct val="104000"/>
               </a:lnSpc>
               <a:spcBef>
                 <a:spcPts val="300"/>
               </a:spcBef>
-              <a:buFont typeface="Arial"/>
-              <a:buChar char="•"/>
+              <a:buNone/>
             </a:pPr>
             <a:r>
               <a:rPr lang="en-US" sz="1500" dirty="0">
@@ -27959,12 +27932,12 @@
           </a:ln>
         </p:spPr>
         <p:txBody>
-          <a:bodyPr wrap="square" lIns="137160" tIns="91440" rIns="137160" bIns="91440" rtlCol="0" anchor="t">
+          <a:bodyPr wrap="square" lIns="137160" tIns="91440" rIns="137160" bIns="91440" rtlCol="0" anchor="ctr">
             <a:normAutofit/>
           </a:bodyPr>
           <a:lstStyle/>
           <a:p>
-            <a:pPr marL="0" indent="0" algn="l">
+            <a:pPr marL="0" indent="0" algn="ctr">
               <a:lnSpc>
                 <a:spcPct val="104000"/>
               </a:lnSpc>
@@ -27985,7 +27958,7 @@
             </a:r>
           </a:p>
           <a:p>
-            <a:pPr marL="0" indent="0" algn="l">
+            <a:pPr marL="0" indent="0" algn="ctr">
               <a:lnSpc>
                 <a:spcPct val="104000"/>
               </a:lnSpc>
@@ -28006,7 +27979,7 @@
             </a:r>
           </a:p>
           <a:p>
-            <a:pPr marL="0" indent="0" algn="l">
+            <a:pPr marL="0" indent="0" algn="ctr">
               <a:lnSpc>
                 <a:spcPct val="104000"/>
               </a:lnSpc>
@@ -28093,12 +28066,12 @@
           </a:ln>
         </p:spPr>
         <p:txBody>
-          <a:bodyPr wrap="square" lIns="137160" tIns="91440" rIns="137160" bIns="91440" rtlCol="0" anchor="t">
+          <a:bodyPr wrap="square" lIns="137160" tIns="91440" rIns="137160" bIns="91440" rtlCol="0" anchor="ctr">
             <a:normAutofit/>
           </a:bodyPr>
           <a:lstStyle/>
           <a:p>
-            <a:pPr marL="0" indent="0" algn="l">
+            <a:pPr marL="0" indent="0" algn="ctr">
               <a:lnSpc>
                 <a:spcPct val="104000"/>
               </a:lnSpc>
@@ -28119,7 +28092,7 @@
             </a:r>
           </a:p>
           <a:p>
-            <a:pPr marL="0" indent="0" algn="l">
+            <a:pPr marL="0" indent="0" algn="ctr">
               <a:lnSpc>
                 <a:spcPct val="104000"/>
               </a:lnSpc>
@@ -28140,7 +28113,7 @@
             </a:r>
           </a:p>
           <a:p>
-            <a:pPr marL="0" indent="0" algn="l">
+            <a:pPr marL="0" indent="0" algn="ctr">
               <a:lnSpc>
                 <a:spcPct val="104000"/>
               </a:lnSpc>
@@ -28227,12 +28200,12 @@
           </a:ln>
         </p:spPr>
         <p:txBody>
-          <a:bodyPr wrap="square" lIns="137160" tIns="91440" rIns="137160" bIns="91440" rtlCol="0" anchor="t">
+          <a:bodyPr wrap="square" lIns="137160" tIns="91440" rIns="137160" bIns="91440" rtlCol="0" anchor="ctr">
             <a:normAutofit/>
           </a:bodyPr>
           <a:lstStyle/>
           <a:p>
-            <a:pPr marL="0" indent="0" algn="l">
+            <a:pPr marL="0" indent="0" algn="ctr">
               <a:lnSpc>
                 <a:spcPct val="104000"/>
               </a:lnSpc>
@@ -28253,7 +28226,7 @@
             </a:r>
           </a:p>
           <a:p>
-            <a:pPr marL="0" indent="0" algn="l">
+            <a:pPr marL="0" indent="0" algn="ctr">
               <a:lnSpc>
                 <a:spcPct val="104000"/>
               </a:lnSpc>
@@ -28274,7 +28247,7 @@
             </a:r>
           </a:p>
           <a:p>
-            <a:pPr marL="0" indent="0" algn="l">
+            <a:pPr marL="0" indent="0" algn="ctr">
               <a:lnSpc>
                 <a:spcPct val="104000"/>
               </a:lnSpc>
@@ -28361,12 +28334,12 @@
           </a:ln>
         </p:spPr>
         <p:txBody>
-          <a:bodyPr wrap="square" lIns="137160" tIns="91440" rIns="137160" bIns="91440" rtlCol="0" anchor="t">
+          <a:bodyPr wrap="square" lIns="137160" tIns="91440" rIns="137160" bIns="91440" rtlCol="0" anchor="ctr">
             <a:normAutofit/>
           </a:bodyPr>
           <a:lstStyle/>
           <a:p>
-            <a:pPr marL="0" indent="0" algn="l">
+            <a:pPr marL="0" indent="0" algn="ctr">
               <a:lnSpc>
                 <a:spcPct val="104000"/>
               </a:lnSpc>
@@ -28387,7 +28360,7 @@
             </a:r>
           </a:p>
           <a:p>
-            <a:pPr marL="0" indent="0" algn="l">
+            <a:pPr marL="0" indent="0" algn="ctr">
               <a:lnSpc>
                 <a:spcPct val="104000"/>
               </a:lnSpc>
@@ -28408,7 +28381,7 @@
             </a:r>
           </a:p>
           <a:p>
-            <a:pPr marL="0" indent="0" algn="l">
+            <a:pPr marL="0" indent="0" algn="ctr">
               <a:lnSpc>
                 <a:spcPct val="104000"/>
               </a:lnSpc>
@@ -28872,12 +28845,12 @@
           </a:ln>
         </p:spPr>
         <p:txBody>
-          <a:bodyPr wrap="square" lIns="137160" tIns="91440" rIns="137160" bIns="91440" rtlCol="0" anchor="t">
+          <a:bodyPr wrap="square" lIns="137160" tIns="91440" rIns="137160" bIns="91440" rtlCol="0" anchor="ctr">
             <a:normAutofit/>
           </a:bodyPr>
           <a:lstStyle/>
           <a:p>
-            <a:pPr marL="0" indent="0" algn="l">
+            <a:pPr marL="0" indent="0" algn="ctr">
               <a:buNone/>
             </a:pPr>
             <a:r>
@@ -28892,15 +28865,14 @@
             </a:r>
           </a:p>
           <a:p>
-            <a:pPr marL="274320" indent="-274320" algn="l">
+            <a:pPr marL="0" indent="0" algn="ctr">
               <a:lnSpc>
                 <a:spcPct val="104000"/>
               </a:lnSpc>
               <a:spcBef>
                 <a:spcPts val="300"/>
               </a:spcBef>
-              <a:buFont typeface="Arial"/>
-              <a:buChar char="•"/>
+              <a:buNone/>
             </a:pPr>
             <a:r>
               <a:rPr lang="en-US" sz="1500" dirty="0">
@@ -28914,15 +28886,14 @@
             </a:r>
           </a:p>
           <a:p>
-            <a:pPr marL="274320" indent="-274320" algn="l">
+            <a:pPr marL="0" indent="0" algn="ctr">
               <a:lnSpc>
                 <a:spcPct val="104000"/>
               </a:lnSpc>
               <a:spcBef>
                 <a:spcPts val="300"/>
               </a:spcBef>
-              <a:buFont typeface="Arial"/>
-              <a:buChar char="•"/>
+              <a:buNone/>
             </a:pPr>
             <a:r>
               <a:rPr lang="en-US" sz="1500" dirty="0">
@@ -28936,15 +28907,14 @@
             </a:r>
           </a:p>
           <a:p>
-            <a:pPr marL="274320" indent="-274320" algn="l">
+            <a:pPr marL="0" indent="0" algn="ctr">
               <a:lnSpc>
                 <a:spcPct val="104000"/>
               </a:lnSpc>
               <a:spcBef>
                 <a:spcPts val="300"/>
               </a:spcBef>
-              <a:buFont typeface="Arial"/>
-              <a:buChar char="•"/>
+              <a:buNone/>
             </a:pPr>
             <a:r>
               <a:rPr lang="en-US" sz="1500" dirty="0">
@@ -28958,15 +28928,14 @@
             </a:r>
           </a:p>
           <a:p>
-            <a:pPr marL="274320" indent="-274320" algn="l">
+            <a:pPr marL="0" indent="0" algn="ctr">
               <a:lnSpc>
                 <a:spcPct val="104000"/>
               </a:lnSpc>
               <a:spcBef>
                 <a:spcPts val="300"/>
               </a:spcBef>
-              <a:buFont typeface="Arial"/>
-              <a:buChar char="•"/>
+              <a:buNone/>
             </a:pPr>
             <a:r>
               <a:rPr lang="en-US" sz="1500" dirty="0">
@@ -29338,12 +29307,12 @@
           </a:ln>
         </p:spPr>
         <p:txBody>
-          <a:bodyPr wrap="square" lIns="137160" tIns="91440" rIns="137160" bIns="91440" rtlCol="0" anchor="t">
+          <a:bodyPr wrap="square" lIns="137160" tIns="91440" rIns="137160" bIns="91440" rtlCol="0" anchor="ctr">
             <a:normAutofit/>
           </a:bodyPr>
           <a:lstStyle/>
           <a:p>
-            <a:pPr marL="0" indent="0" algn="l">
+            <a:pPr marL="0" indent="0" algn="ctr">
               <a:lnSpc>
                 <a:spcPct val="104000"/>
               </a:lnSpc>
@@ -29364,7 +29333,7 @@
             </a:r>
           </a:p>
           <a:p>
-            <a:pPr marL="0" indent="0" algn="l">
+            <a:pPr marL="0" indent="0" algn="ctr">
               <a:lnSpc>
                 <a:spcPct val="104000"/>
               </a:lnSpc>
@@ -29385,7 +29354,7 @@
             </a:r>
           </a:p>
           <a:p>
-            <a:pPr marL="0" indent="0" algn="l">
+            <a:pPr marL="0" indent="0" algn="ctr">
               <a:lnSpc>
                 <a:spcPct val="104000"/>
               </a:lnSpc>
@@ -29472,12 +29441,12 @@
           </a:ln>
         </p:spPr>
         <p:txBody>
-          <a:bodyPr wrap="square" lIns="137160" tIns="91440" rIns="137160" bIns="91440" rtlCol="0" anchor="t">
+          <a:bodyPr wrap="square" lIns="137160" tIns="91440" rIns="137160" bIns="91440" rtlCol="0" anchor="ctr">
             <a:normAutofit/>
           </a:bodyPr>
           <a:lstStyle/>
           <a:p>
-            <a:pPr marL="0" indent="0" algn="l">
+            <a:pPr marL="0" indent="0" algn="ctr">
               <a:lnSpc>
                 <a:spcPct val="104000"/>
               </a:lnSpc>
@@ -29498,7 +29467,7 @@
             </a:r>
           </a:p>
           <a:p>
-            <a:pPr marL="0" indent="0" algn="l">
+            <a:pPr marL="0" indent="0" algn="ctr">
               <a:lnSpc>
                 <a:spcPct val="104000"/>
               </a:lnSpc>
@@ -29519,7 +29488,7 @@
             </a:r>
           </a:p>
           <a:p>
-            <a:pPr marL="0" indent="0" algn="l">
+            <a:pPr marL="0" indent="0" algn="ctr">
               <a:lnSpc>
                 <a:spcPct val="104000"/>
               </a:lnSpc>
@@ -29606,12 +29575,12 @@
           </a:ln>
         </p:spPr>
         <p:txBody>
-          <a:bodyPr wrap="square" lIns="137160" tIns="91440" rIns="137160" bIns="91440" rtlCol="0" anchor="t">
+          <a:bodyPr wrap="square" lIns="137160" tIns="91440" rIns="137160" bIns="91440" rtlCol="0" anchor="ctr">
             <a:normAutofit/>
           </a:bodyPr>
           <a:lstStyle/>
           <a:p>
-            <a:pPr marL="0" indent="0" algn="l">
+            <a:pPr marL="0" indent="0" algn="ctr">
               <a:lnSpc>
                 <a:spcPct val="104000"/>
               </a:lnSpc>
@@ -29632,7 +29601,7 @@
             </a:r>
           </a:p>
           <a:p>
-            <a:pPr marL="0" indent="0" algn="l">
+            <a:pPr marL="0" indent="0" algn="ctr">
               <a:lnSpc>
                 <a:spcPct val="104000"/>
               </a:lnSpc>
@@ -29653,7 +29622,7 @@
             </a:r>
           </a:p>
           <a:p>
-            <a:pPr marL="0" indent="0" algn="l">
+            <a:pPr marL="0" indent="0" algn="ctr">
               <a:lnSpc>
                 <a:spcPct val="104000"/>
               </a:lnSpc>
@@ -29740,12 +29709,12 @@
           </a:ln>
         </p:spPr>
         <p:txBody>
-          <a:bodyPr wrap="square" lIns="137160" tIns="91440" rIns="137160" bIns="91440" rtlCol="0" anchor="t">
+          <a:bodyPr wrap="square" lIns="137160" tIns="91440" rIns="137160" bIns="91440" rtlCol="0" anchor="ctr">
             <a:normAutofit/>
           </a:bodyPr>
           <a:lstStyle/>
           <a:p>
-            <a:pPr marL="0" indent="0" algn="l">
+            <a:pPr marL="0" indent="0" algn="ctr">
               <a:lnSpc>
                 <a:spcPct val="104000"/>
               </a:lnSpc>
@@ -29766,7 +29735,7 @@
             </a:r>
           </a:p>
           <a:p>
-            <a:pPr marL="0" indent="0" algn="l">
+            <a:pPr marL="0" indent="0" algn="ctr">
               <a:lnSpc>
                 <a:spcPct val="104000"/>
               </a:lnSpc>
@@ -29787,7 +29756,7 @@
             </a:r>
           </a:p>
           <a:p>
-            <a:pPr marL="0" indent="0" algn="l">
+            <a:pPr marL="0" indent="0" algn="ctr">
               <a:lnSpc>
                 <a:spcPct val="104000"/>
               </a:lnSpc>
@@ -30164,12 +30133,12 @@
           </a:ln>
         </p:spPr>
         <p:txBody>
-          <a:bodyPr wrap="square" lIns="137160" tIns="91440" rIns="137160" bIns="91440" rtlCol="0" anchor="t">
+          <a:bodyPr wrap="square" lIns="137160" tIns="91440" rIns="137160" bIns="91440" rtlCol="0" anchor="ctr">
             <a:normAutofit/>
           </a:bodyPr>
           <a:lstStyle/>
           <a:p>
-            <a:pPr marL="0" indent="0" algn="l">
+            <a:pPr marL="0" indent="0" algn="ctr">
               <a:lnSpc>
                 <a:spcPct val="104000"/>
               </a:lnSpc>
@@ -30190,7 +30159,7 @@
             </a:r>
           </a:p>
           <a:p>
-            <a:pPr marL="0" indent="0" algn="l">
+            <a:pPr marL="0" indent="0" algn="ctr">
               <a:lnSpc>
                 <a:spcPct val="104000"/>
               </a:lnSpc>
@@ -30211,7 +30180,7 @@
             </a:r>
           </a:p>
           <a:p>
-            <a:pPr marL="0" indent="0" algn="l">
+            <a:pPr marL="0" indent="0" algn="ctr">
               <a:lnSpc>
                 <a:spcPct val="104000"/>
               </a:lnSpc>
@@ -30298,12 +30267,12 @@
           </a:ln>
         </p:spPr>
         <p:txBody>
-          <a:bodyPr wrap="square" lIns="137160" tIns="91440" rIns="137160" bIns="91440" rtlCol="0" anchor="t">
+          <a:bodyPr wrap="square" lIns="137160" tIns="91440" rIns="137160" bIns="91440" rtlCol="0" anchor="ctr">
             <a:normAutofit/>
           </a:bodyPr>
           <a:lstStyle/>
           <a:p>
-            <a:pPr marL="0" indent="0" algn="l">
+            <a:pPr marL="0" indent="0" algn="ctr">
               <a:lnSpc>
                 <a:spcPct val="104000"/>
               </a:lnSpc>
@@ -30324,7 +30293,7 @@
             </a:r>
           </a:p>
           <a:p>
-            <a:pPr marL="0" indent="0" algn="l">
+            <a:pPr marL="0" indent="0" algn="ctr">
               <a:lnSpc>
                 <a:spcPct val="104000"/>
               </a:lnSpc>
@@ -30345,7 +30314,7 @@
             </a:r>
           </a:p>
           <a:p>
-            <a:pPr marL="0" indent="0" algn="l">
+            <a:pPr marL="0" indent="0" algn="ctr">
               <a:lnSpc>
                 <a:spcPct val="104000"/>
               </a:lnSpc>
@@ -30432,12 +30401,12 @@
           </a:ln>
         </p:spPr>
         <p:txBody>
-          <a:bodyPr wrap="square" lIns="137160" tIns="91440" rIns="137160" bIns="91440" rtlCol="0" anchor="t">
+          <a:bodyPr wrap="square" lIns="137160" tIns="91440" rIns="137160" bIns="91440" rtlCol="0" anchor="ctr">
             <a:normAutofit/>
           </a:bodyPr>
           <a:lstStyle/>
           <a:p>
-            <a:pPr marL="0" indent="0" algn="l">
+            <a:pPr marL="0" indent="0" algn="ctr">
               <a:lnSpc>
                 <a:spcPct val="104000"/>
               </a:lnSpc>
@@ -30458,7 +30427,7 @@
             </a:r>
           </a:p>
           <a:p>
-            <a:pPr marL="0" indent="0" algn="l">
+            <a:pPr marL="0" indent="0" algn="ctr">
               <a:lnSpc>
                 <a:spcPct val="104000"/>
               </a:lnSpc>
@@ -30479,7 +30448,7 @@
             </a:r>
           </a:p>
           <a:p>
-            <a:pPr marL="0" indent="0" algn="l">
+            <a:pPr marL="0" indent="0" algn="ctr">
               <a:lnSpc>
                 <a:spcPct val="104000"/>
               </a:lnSpc>
@@ -30496,7 +30465,7 @@
                 <a:latin typeface="Arial"/>
                 <a:cs typeface="Arial"/>
               </a:rPr>
-              <a:t>Bảng 1 tự đứng được</a:t>
+              <a:t>Bảng 1 tự giải thích được</a:t>
             </a:r>
           </a:p>
         </p:txBody>
@@ -30943,12 +30912,12 @@
           </a:ln>
         </p:spPr>
         <p:txBody>
-          <a:bodyPr wrap="square" lIns="137160" tIns="91440" rIns="137160" bIns="91440" rtlCol="0" anchor="t">
+          <a:bodyPr wrap="square" lIns="137160" tIns="91440" rIns="137160" bIns="91440" rtlCol="0" anchor="ctr">
             <a:normAutofit/>
           </a:bodyPr>
           <a:lstStyle/>
           <a:p>
-            <a:pPr marL="0" indent="0" algn="l">
+            <a:pPr marL="0" indent="0" algn="ctr">
               <a:buNone/>
             </a:pPr>
             <a:r>
@@ -30963,15 +30932,14 @@
             </a:r>
           </a:p>
           <a:p>
-            <a:pPr marL="274320" indent="-274320" algn="l">
+            <a:pPr marL="0" indent="0" algn="ctr">
               <a:lnSpc>
                 <a:spcPct val="104000"/>
               </a:lnSpc>
               <a:spcBef>
                 <a:spcPts val="300"/>
               </a:spcBef>
-              <a:buFont typeface="Arial"/>
-              <a:buChar char="•"/>
+              <a:buNone/>
             </a:pPr>
             <a:r>
               <a:rPr lang="en-US" sz="1500" dirty="0">
@@ -30985,15 +30953,14 @@
             </a:r>
           </a:p>
           <a:p>
-            <a:pPr marL="274320" indent="-274320" algn="l">
+            <a:pPr marL="0" indent="0" algn="ctr">
               <a:lnSpc>
                 <a:spcPct val="104000"/>
               </a:lnSpc>
               <a:spcBef>
                 <a:spcPts val="300"/>
               </a:spcBef>
-              <a:buFont typeface="Arial"/>
-              <a:buChar char="•"/>
+              <a:buNone/>
             </a:pPr>
             <a:r>
               <a:rPr lang="en-US" sz="1500" dirty="0">
@@ -31007,15 +30974,14 @@
             </a:r>
           </a:p>
           <a:p>
-            <a:pPr marL="274320" indent="-274320" algn="l">
+            <a:pPr marL="0" indent="0" algn="ctr">
               <a:lnSpc>
                 <a:spcPct val="104000"/>
               </a:lnSpc>
               <a:spcBef>
                 <a:spcPts val="300"/>
               </a:spcBef>
-              <a:buFont typeface="Arial"/>
-              <a:buChar char="•"/>
+              <a:buNone/>
             </a:pPr>
             <a:r>
               <a:rPr lang="en-US" sz="1500" dirty="0">
@@ -31029,15 +30995,14 @@
             </a:r>
           </a:p>
           <a:p>
-            <a:pPr marL="274320" indent="-274320" algn="l">
+            <a:pPr marL="0" indent="0" algn="ctr">
               <a:lnSpc>
                 <a:spcPct val="104000"/>
               </a:lnSpc>
               <a:spcBef>
                 <a:spcPts val="300"/>
               </a:spcBef>
-              <a:buFont typeface="Arial"/>
-              <a:buChar char="•"/>
+              <a:buNone/>
             </a:pPr>
             <a:r>
               <a:rPr lang="en-US" sz="1500" dirty="0">
@@ -31051,15 +31016,14 @@
             </a:r>
           </a:p>
           <a:p>
-            <a:pPr marL="274320" indent="-274320" algn="l">
+            <a:pPr marL="0" indent="0" algn="ctr">
               <a:lnSpc>
                 <a:spcPct val="104000"/>
               </a:lnSpc>
               <a:spcBef>
                 <a:spcPts val="300"/>
               </a:spcBef>
-              <a:buFont typeface="Arial"/>
-              <a:buChar char="•"/>
+              <a:buNone/>
             </a:pPr>
             <a:r>
               <a:rPr lang="en-US" sz="1500" dirty="0">
@@ -31126,7 +31090,7 @@
                 <a:latin typeface="Arial"/>
                 <a:cs typeface="Arial"/>
               </a:rPr>
-              <a:t>Câu trả lời trong khung chat (hoặc biểu mẫu một câu hỏi)</a:t>
+              <a:t>Câu trả lời trong khung chat</a:t>
             </a:r>
           </a:p>
         </p:txBody>
@@ -31687,12 +31651,12 @@
           </a:ln>
         </p:spPr>
         <p:txBody>
-          <a:bodyPr wrap="square" lIns="137160" tIns="91440" rIns="137160" bIns="91440" rtlCol="0" anchor="t">
+          <a:bodyPr wrap="square" lIns="137160" tIns="91440" rIns="137160" bIns="91440" rtlCol="0" anchor="ctr">
             <a:normAutofit/>
           </a:bodyPr>
           <a:lstStyle/>
           <a:p>
-            <a:pPr marL="0" indent="0" algn="l">
+            <a:pPr marL="0" indent="0" algn="ctr">
               <a:lnSpc>
                 <a:spcPct val="104000"/>
               </a:lnSpc>
@@ -31713,7 +31677,7 @@
             </a:r>
           </a:p>
           <a:p>
-            <a:pPr marL="0" indent="0" algn="l">
+            <a:pPr marL="0" indent="0" algn="ctr">
               <a:lnSpc>
                 <a:spcPct val="104000"/>
               </a:lnSpc>
@@ -31734,7 +31698,7 @@
             </a:r>
           </a:p>
           <a:p>
-            <a:pPr marL="0" indent="0" algn="l">
+            <a:pPr marL="0" indent="0" algn="ctr">
               <a:lnSpc>
                 <a:spcPct val="104000"/>
               </a:lnSpc>
@@ -31821,12 +31785,12 @@
           </a:ln>
         </p:spPr>
         <p:txBody>
-          <a:bodyPr wrap="square" lIns="137160" tIns="91440" rIns="137160" bIns="91440" rtlCol="0" anchor="t">
+          <a:bodyPr wrap="square" lIns="137160" tIns="91440" rIns="137160" bIns="91440" rtlCol="0" anchor="ctr">
             <a:normAutofit/>
           </a:bodyPr>
           <a:lstStyle/>
           <a:p>
-            <a:pPr marL="0" indent="0" algn="l">
+            <a:pPr marL="0" indent="0" algn="ctr">
               <a:lnSpc>
                 <a:spcPct val="104000"/>
               </a:lnSpc>
@@ -31847,7 +31811,7 @@
             </a:r>
           </a:p>
           <a:p>
-            <a:pPr marL="0" indent="0" algn="l">
+            <a:pPr marL="0" indent="0" algn="ctr">
               <a:lnSpc>
                 <a:spcPct val="104000"/>
               </a:lnSpc>
@@ -31934,12 +31898,12 @@
           </a:ln>
         </p:spPr>
         <p:txBody>
-          <a:bodyPr wrap="square" lIns="137160" tIns="91440" rIns="137160" bIns="91440" rtlCol="0" anchor="t">
+          <a:bodyPr wrap="square" lIns="137160" tIns="91440" rIns="137160" bIns="91440" rtlCol="0" anchor="ctr">
             <a:normAutofit/>
           </a:bodyPr>
           <a:lstStyle/>
           <a:p>
-            <a:pPr marL="0" indent="0" algn="l">
+            <a:pPr marL="0" indent="0" algn="ctr">
               <a:lnSpc>
                 <a:spcPct val="104000"/>
               </a:lnSpc>
@@ -31960,7 +31924,7 @@
             </a:r>
           </a:p>
           <a:p>
-            <a:pPr marL="0" indent="0" algn="l">
+            <a:pPr marL="0" indent="0" algn="ctr">
               <a:lnSpc>
                 <a:spcPct val="104000"/>
               </a:lnSpc>
@@ -31981,7 +31945,7 @@
             </a:r>
           </a:p>
           <a:p>
-            <a:pPr marL="0" indent="0" algn="l">
+            <a:pPr marL="0" indent="0" algn="ctr">
               <a:lnSpc>
                 <a:spcPct val="104000"/>
               </a:lnSpc>
@@ -32068,12 +32032,12 @@
           </a:ln>
         </p:spPr>
         <p:txBody>
-          <a:bodyPr wrap="square" lIns="137160" tIns="91440" rIns="137160" bIns="91440" rtlCol="0" anchor="t">
+          <a:bodyPr wrap="square" lIns="137160" tIns="91440" rIns="137160" bIns="91440" rtlCol="0" anchor="ctr">
             <a:normAutofit/>
           </a:bodyPr>
           <a:lstStyle/>
           <a:p>
-            <a:pPr marL="0" indent="0" algn="l">
+            <a:pPr marL="0" indent="0" algn="ctr">
               <a:lnSpc>
                 <a:spcPct val="104000"/>
               </a:lnSpc>
@@ -32094,7 +32058,7 @@
             </a:r>
           </a:p>
           <a:p>
-            <a:pPr marL="0" indent="0" algn="l">
+            <a:pPr marL="0" indent="0" algn="ctr">
               <a:lnSpc>
                 <a:spcPct val="104000"/>
               </a:lnSpc>
@@ -33134,12 +33098,12 @@
           </a:ln>
         </p:spPr>
         <p:txBody>
-          <a:bodyPr wrap="square" lIns="137160" tIns="91440" rIns="137160" bIns="91440" rtlCol="0" anchor="t">
+          <a:bodyPr wrap="square" lIns="137160" tIns="91440" rIns="137160" bIns="91440" rtlCol="0" anchor="ctr">
             <a:normAutofit/>
           </a:bodyPr>
           <a:lstStyle/>
           <a:p>
-            <a:pPr marL="0" indent="0" algn="l">
+            <a:pPr marL="0" indent="0" algn="ctr">
               <a:buNone/>
             </a:pPr>
             <a:r>
@@ -33154,15 +33118,14 @@
             </a:r>
           </a:p>
           <a:p>
-            <a:pPr marL="274320" indent="-274320" algn="l">
+            <a:pPr marL="0" indent="0" algn="ctr">
               <a:lnSpc>
                 <a:spcPct val="104000"/>
               </a:lnSpc>
               <a:spcBef>
                 <a:spcPts val="300"/>
               </a:spcBef>
-              <a:buFont typeface="Arial"/>
-              <a:buChar char="•"/>
+              <a:buNone/>
             </a:pPr>
             <a:r>
               <a:rPr lang="en-US" sz="1500" dirty="0">
@@ -33176,15 +33139,14 @@
             </a:r>
           </a:p>
           <a:p>
-            <a:pPr marL="274320" indent="-274320" algn="l">
+            <a:pPr marL="0" indent="0" algn="ctr">
               <a:lnSpc>
                 <a:spcPct val="104000"/>
               </a:lnSpc>
               <a:spcBef>
                 <a:spcPts val="300"/>
               </a:spcBef>
-              <a:buFont typeface="Arial"/>
-              <a:buChar char="•"/>
+              <a:buNone/>
             </a:pPr>
             <a:r>
               <a:rPr lang="en-US" sz="1500" dirty="0">
@@ -33198,15 +33160,14 @@
             </a:r>
           </a:p>
           <a:p>
-            <a:pPr marL="274320" indent="-274320" algn="l">
+            <a:pPr marL="0" indent="0" algn="ctr">
               <a:lnSpc>
                 <a:spcPct val="104000"/>
               </a:lnSpc>
               <a:spcBef>
                 <a:spcPts val="300"/>
               </a:spcBef>
-              <a:buFont typeface="Arial"/>
-              <a:buChar char="•"/>
+              <a:buNone/>
             </a:pPr>
             <a:r>
               <a:rPr lang="en-US" sz="1500" dirty="0">
@@ -33220,15 +33181,14 @@
             </a:r>
           </a:p>
           <a:p>
-            <a:pPr marL="274320" indent="-274320" algn="l">
+            <a:pPr marL="0" indent="0" algn="ctr">
               <a:lnSpc>
                 <a:spcPct val="104000"/>
               </a:lnSpc>
               <a:spcBef>
                 <a:spcPts val="300"/>
               </a:spcBef>
-              <a:buFont typeface="Arial"/>
-              <a:buChar char="•"/>
+              <a:buNone/>
             </a:pPr>
             <a:r>
               <a:rPr lang="en-US" sz="1500" dirty="0">
@@ -33242,15 +33202,14 @@
             </a:r>
           </a:p>
           <a:p>
-            <a:pPr marL="274320" indent="-274320" algn="l">
+            <a:pPr marL="0" indent="0" algn="ctr">
               <a:lnSpc>
                 <a:spcPct val="104000"/>
               </a:lnSpc>
               <a:spcBef>
                 <a:spcPts val="300"/>
               </a:spcBef>
-              <a:buFont typeface="Arial"/>
-              <a:buChar char="•"/>
+              <a:buNone/>
             </a:pPr>
             <a:r>
               <a:rPr lang="en-US" sz="1500" dirty="0">
@@ -33985,12 +33944,12 @@
           </a:ln>
         </p:spPr>
         <p:txBody>
-          <a:bodyPr wrap="square" lIns="110000" tIns="91440" rIns="110000" bIns="91440" rtlCol="0" anchor="t">
+          <a:bodyPr wrap="square" lIns="110000" tIns="91440" rIns="110000" bIns="91440" rtlCol="0" anchor="ctr">
             <a:normAutofit/>
           </a:bodyPr>
           <a:lstStyle/>
           <a:p>
-            <a:pPr marL="0" indent="0" algn="l">
+            <a:pPr marL="0" indent="0" algn="ctr">
               <a:lnSpc>
                 <a:spcPct val="104000"/>
               </a:lnSpc>
@@ -34011,7 +33970,7 @@
             </a:r>
           </a:p>
           <a:p>
-            <a:pPr marL="0" indent="0" algn="l">
+            <a:pPr marL="0" indent="0" algn="ctr">
               <a:lnSpc>
                 <a:spcPct val="104000"/>
               </a:lnSpc>
@@ -34100,12 +34059,12 @@
           </a:ln>
         </p:spPr>
         <p:txBody>
-          <a:bodyPr wrap="square" lIns="110000" tIns="91440" rIns="110000" bIns="91440" rtlCol="0" anchor="t">
+          <a:bodyPr wrap="square" lIns="110000" tIns="91440" rIns="110000" bIns="91440" rtlCol="0" anchor="ctr">
             <a:normAutofit/>
           </a:bodyPr>
           <a:lstStyle/>
           <a:p>
-            <a:pPr marL="0" indent="0" algn="l">
+            <a:pPr marL="0" indent="0" algn="ctr">
               <a:lnSpc>
                 <a:spcPct val="104000"/>
               </a:lnSpc>
@@ -34194,12 +34153,12 @@
           </a:ln>
         </p:spPr>
         <p:txBody>
-          <a:bodyPr wrap="square" lIns="110000" tIns="91440" rIns="110000" bIns="91440" rtlCol="0" anchor="t">
+          <a:bodyPr wrap="square" lIns="110000" tIns="91440" rIns="110000" bIns="91440" rtlCol="0" anchor="ctr">
             <a:normAutofit/>
           </a:bodyPr>
           <a:lstStyle/>
           <a:p>
-            <a:pPr marL="0" indent="0" algn="l">
+            <a:pPr marL="0" indent="0" algn="ctr">
               <a:lnSpc>
                 <a:spcPct val="104000"/>
               </a:lnSpc>
@@ -34288,12 +34247,12 @@
           </a:ln>
         </p:spPr>
         <p:txBody>
-          <a:bodyPr wrap="square" lIns="110000" tIns="91440" rIns="110000" bIns="91440" rtlCol="0" anchor="t">
+          <a:bodyPr wrap="square" lIns="110000" tIns="91440" rIns="110000" bIns="91440" rtlCol="0" anchor="ctr">
             <a:normAutofit/>
           </a:bodyPr>
           <a:lstStyle/>
           <a:p>
-            <a:pPr marL="0" indent="0" algn="l">
+            <a:pPr marL="0" indent="0" algn="ctr">
               <a:lnSpc>
                 <a:spcPct val="104000"/>
               </a:lnSpc>
@@ -34314,7 +34273,7 @@
             </a:r>
           </a:p>
           <a:p>
-            <a:pPr marL="0" indent="0" algn="l">
+            <a:pPr marL="0" indent="0" algn="ctr">
               <a:lnSpc>
                 <a:spcPct val="104000"/>
               </a:lnSpc>
@@ -34403,12 +34362,12 @@
           </a:ln>
         </p:spPr>
         <p:txBody>
-          <a:bodyPr wrap="square" lIns="110000" tIns="91440" rIns="110000" bIns="91440" rtlCol="0" anchor="t">
+          <a:bodyPr wrap="square" lIns="110000" tIns="91440" rIns="110000" bIns="91440" rtlCol="0" anchor="ctr">
             <a:normAutofit/>
           </a:bodyPr>
           <a:lstStyle/>
           <a:p>
-            <a:pPr marL="0" indent="0" algn="l">
+            <a:pPr marL="0" indent="0" algn="ctr">
               <a:lnSpc>
                 <a:spcPct val="104000"/>
               </a:lnSpc>
@@ -34429,7 +34388,7 @@
             </a:r>
           </a:p>
           <a:p>
-            <a:pPr marL="0" indent="0" algn="l">
+            <a:pPr marL="0" indent="0" algn="ctr">
               <a:lnSpc>
                 <a:spcPct val="104000"/>
               </a:lnSpc>
@@ -34806,12 +34765,12 @@
           </a:ln>
         </p:spPr>
         <p:txBody>
-          <a:bodyPr wrap="square" lIns="137160" tIns="91440" rIns="137160" bIns="91440" rtlCol="0" anchor="t">
+          <a:bodyPr wrap="square" lIns="137160" tIns="91440" rIns="137160" bIns="91440" rtlCol="0" anchor="ctr">
             <a:normAutofit/>
           </a:bodyPr>
           <a:lstStyle/>
           <a:p>
-            <a:pPr marL="0" indent="0" algn="l">
+            <a:pPr marL="0" indent="0" algn="ctr">
               <a:lnSpc>
                 <a:spcPct val="104000"/>
               </a:lnSpc>
@@ -34832,7 +34791,7 @@
             </a:r>
           </a:p>
           <a:p>
-            <a:pPr marL="0" indent="0" algn="l">
+            <a:pPr marL="0" indent="0" algn="ctr">
               <a:lnSpc>
                 <a:spcPct val="104000"/>
               </a:lnSpc>
@@ -34919,12 +34878,12 @@
           </a:ln>
         </p:spPr>
         <p:txBody>
-          <a:bodyPr wrap="square" lIns="137160" tIns="91440" rIns="137160" bIns="91440" rtlCol="0" anchor="t">
+          <a:bodyPr wrap="square" lIns="137160" tIns="91440" rIns="137160" bIns="91440" rtlCol="0" anchor="ctr">
             <a:normAutofit/>
           </a:bodyPr>
           <a:lstStyle/>
           <a:p>
-            <a:pPr marL="0" indent="0" algn="l">
+            <a:pPr marL="0" indent="0" algn="ctr">
               <a:lnSpc>
                 <a:spcPct val="104000"/>
               </a:lnSpc>
@@ -34945,7 +34904,7 @@
             </a:r>
           </a:p>
           <a:p>
-            <a:pPr marL="0" indent="0" algn="l">
+            <a:pPr marL="0" indent="0" algn="ctr">
               <a:lnSpc>
                 <a:spcPct val="104000"/>
               </a:lnSpc>
@@ -35032,12 +34991,12 @@
           </a:ln>
         </p:spPr>
         <p:txBody>
-          <a:bodyPr wrap="square" lIns="137160" tIns="91440" rIns="137160" bIns="91440" rtlCol="0" anchor="t">
+          <a:bodyPr wrap="square" lIns="137160" tIns="91440" rIns="137160" bIns="91440" rtlCol="0" anchor="ctr">
             <a:normAutofit/>
           </a:bodyPr>
           <a:lstStyle/>
           <a:p>
-            <a:pPr marL="0" indent="0" algn="l">
+            <a:pPr marL="0" indent="0" algn="ctr">
               <a:lnSpc>
                 <a:spcPct val="104000"/>
               </a:lnSpc>
@@ -35058,7 +35017,7 @@
             </a:r>
           </a:p>
           <a:p>
-            <a:pPr marL="0" indent="0" algn="l">
+            <a:pPr marL="0" indent="0" algn="ctr">
               <a:lnSpc>
                 <a:spcPct val="104000"/>
               </a:lnSpc>
@@ -35145,12 +35104,12 @@
           </a:ln>
         </p:spPr>
         <p:txBody>
-          <a:bodyPr wrap="square" lIns="137160" tIns="91440" rIns="137160" bIns="91440" rtlCol="0" anchor="t">
+          <a:bodyPr wrap="square" lIns="137160" tIns="91440" rIns="137160" bIns="91440" rtlCol="0" anchor="ctr">
             <a:normAutofit/>
           </a:bodyPr>
           <a:lstStyle/>
           <a:p>
-            <a:pPr marL="0" indent="0" algn="l">
+            <a:pPr marL="0" indent="0" algn="ctr">
               <a:lnSpc>
                 <a:spcPct val="104000"/>
               </a:lnSpc>
@@ -35171,7 +35130,7 @@
             </a:r>
           </a:p>
           <a:p>
-            <a:pPr marL="0" indent="0" algn="l">
+            <a:pPr marL="0" indent="0" algn="ctr">
               <a:lnSpc>
                 <a:spcPct val="104000"/>
               </a:lnSpc>
@@ -35258,12 +35217,12 @@
           </a:ln>
         </p:spPr>
         <p:txBody>
-          <a:bodyPr wrap="square" lIns="137160" tIns="91440" rIns="137160" bIns="91440" rtlCol="0" anchor="t">
+          <a:bodyPr wrap="square" lIns="137160" tIns="91440" rIns="137160" bIns="91440" rtlCol="0" anchor="ctr">
             <a:normAutofit/>
           </a:bodyPr>
           <a:lstStyle/>
           <a:p>
-            <a:pPr marL="0" indent="0" algn="l">
+            <a:pPr marL="0" indent="0" algn="ctr">
               <a:lnSpc>
                 <a:spcPct val="104000"/>
               </a:lnSpc>
@@ -35284,7 +35243,7 @@
             </a:r>
           </a:p>
           <a:p>
-            <a:pPr marL="0" indent="0" algn="l">
+            <a:pPr marL="0" indent="0" algn="ctr">
               <a:lnSpc>
                 <a:spcPct val="104000"/>
               </a:lnSpc>

--- a/vi/files/slides/Session_5_VN.pptx
+++ b/vi/files/slides/Session_5_VN.pptx
@@ -737,43 +737,19 @@
           <a:p>
             <a:r>
               <a:rPr lang="en-US" sz="1400" b="0" dirty="0"/>
-              <a:t>Chào mừng anh chị đến Tuần 5. Lớp học trực tuyến từ 19:30 đến 22:30, có 15 phút giải lao. Buổi 1-4 đã đặt câu hỏi, tìm bằng chứng và chọn thiết kế. Hai thứ Bảy này dành cho đo lường và phân tích: hôm nay (Buổi 5) là dữ liệu, thứ Bảy tuần sau (Buổi 6) là phân tích.</a:t>
+              <a:t>Buổi 5 (19:30-22:30, giải lao 20:40-20:55). Hôm nay là dữ liệu, thứ Bảy tuần sau là phân tích.</a:t>
             </a:r>
           </a:p>
           <a:p>
             <a:r>
               <a:rPr lang="en-US" sz="1400" b="0" dirty="0"/>
-              <a:t>Lời hứa: không có công thức. Mỗi ý tưởng đi theo thứ tự: hình ảnh, ví dụ minh họa, rồi một phút kiểm tra nhanh: bình chọn (poll), hoặc mời hai ba người trả lời, bật micro. Việc của anh chị là diễn giải, không phải tính toán.</a:t>
+              <a:t>Mới: bộ dữ liệu mô phỏng của khóa học FLUID-ICU (620 người lớn nhiễm khuẩn huyết) và năm câu hỏi, Q1 đến Q5. Cuối Buổi 6, mỗi học viên chọn một câu và viết phần Kết quả cho câu đó.</a:t>
             </a:r>
           </a:p>
           <a:p>
             <a:r>
               <a:rPr lang="en-US" sz="1400" b="0" dirty="0"/>
-              <a:t>Mới trong Tuần 5-6: bộ dữ liệu khóa học FLUID-ICU, một thuần tập thực tế (mô phỏng) gồm 620 người lớn bị nhiễm khuẩn huyết. Anh chị sẽ thấy dữ liệu được làm sạch và mô tả trực tiếp bằng R trên màn hình chia sẻ. Bộ dữ liệu đi kèm năm câu hỏi nghiên cứu (Q1 đến Q5), mỗi câu có một gói kết quả phân tích. Trên lớp, cả lớp cùng đi qua các câu hỏi. Sau đó, mỗi anh chị chọn một câu hỏi và tự viết bản thảo bài báo từ gói kết quả của câu đó ở Tuần 7-8: chúng tôi đưa kết quả, anh chị viết bài.</a:t>
-            </a:r>
-          </a:p>
-          <a:p>
-            <a:r>
-              <a:rPr lang="en-US" sz="1400" b="0" dirty="0"/>
-              <a:t>Ví dụ xuyên suốt: dịch truyền trong sốc nhiễm khuẩn. Biến 'cân bằng dịch tích lũy (ml/kg)' xuất hiện suốt buổi tối: trên phiếu, trong từ điển dữ liệu, trong bộ dữ liệu đã làm sạch, trong Bảng 1.</a:t>
-            </a:r>
-          </a:p>
-          <a:p>
-            <a:r>
-              <a:rPr lang="en-US" sz="1400" b="0" dirty="0"/>
-              <a:t>Hỏi cả lớp (mời hai ba người trả lời, bật micro): ai từng điền một phiếu thu thập dữ liệu và tự hỏi 'ô này thực ra muốn gì?' Dự kiến: nhiều người trả lời. Đó chính là phần 5.1.</a:t>
-            </a:r>
-          </a:p>
-          <a:p>
-            <a:r>
-              <a:rPr lang="en-US" sz="1400" b="0" dirty="0"/>
-              <a:t>Thời lượng: ôn tập 19:30, 5.1 lúc 19:40, 5.2 lúc 20:15, giải lao 20:40, 5.3 lúc 20:55, 5.4 lúc 21:30, xây dựng đề cương 21:55, tổng kết 22:25.</a:t>
-            </a:r>
-          </a:p>
-          <a:p>
-            <a:r>
-              <a:rPr lang="en-US" sz="1400" b="0" dirty="0"/>
-              <a:t>Nhịp độ: chậm. Học trực tuyến buổi tối thì khó tập trung hơn. Nếu lớp cần thêm thời gian, bỏ các trang bổ sung ở cuối. Không bao giờ bỏ các phần kiểm tra.</a:t>
+              <a:t>Không có công thức: hình, ví dụ minh họa, câu kiểm tra. Không bao giờ bỏ câu kiểm tra.</a:t>
             </a:r>
           </a:p>
         </p:txBody>
@@ -854,55 +830,25 @@
           <a:p>
             <a:r>
               <a:rPr lang="en-US" sz="1400" b="0" dirty="0"/>
-              <a:t>Ý chính: bốn loại kiểm tra đơn giản bắt được phần lớn lỗi nhập liệu.</a:t>
+              <a:t>Bốn phép kiểm tra bắt được phần lớn lỗi nhập liệu: khoảng giá trị, nhất quán, logic, đầy đủ. Khoảng giá trị lấy từ từ điển dữ liệu.</a:t>
             </a:r>
           </a:p>
           <a:p>
             <a:r>
               <a:rPr lang="en-US" sz="1400" b="0" dirty="0"/>
-              <a:t>Kiểm tra khoảng giá trị: giá trị nằm ngoài khoảng cho phép (tuổi 230 có lẽ là 23 hoặc 30). Khoảng này lấy trực tiếp từ từ điển dữ liệu.</a:t>
+              <a:t>Tìm lỗi khi bệnh án còn ở khoa.</a:t>
             </a:r>
           </a:p>
           <a:p>
             <a:r>
               <a:rPr lang="en-US" sz="1400" b="0" dirty="0"/>
-              <a:t>Kiểm tra nhất quán: hai giá trị không thể cùng đúng (ra viện trước ngày vào viện).</a:t>
+              <a:t>Hỏi: anh chị từng thấy giá trị vô lý nào? Kỳ vọng: 700 kg, ngày trong tương lai.</a:t>
             </a:r>
           </a:p>
           <a:p>
             <a:r>
               <a:rPr lang="en-US" sz="1400" b="0" dirty="0"/>
-              <a:t>Kiểm tra logic: kết hợp câu trả lời không thể có (nam và có thai).</a:t>
-            </a:r>
-          </a:p>
-          <a:p>
-            <a:r>
-              <a:rPr lang="en-US" sz="1400" b="0" dirty="0"/>
-              <a:t>Kiểm tra đầy đủ: trường bắt buộc bị trống. Bổ sung ngay khi hồ sơ còn ở khoa.</a:t>
-            </a:r>
-          </a:p>
-          <a:p>
-            <a:r>
-              <a:rPr lang="en-US" sz="1400" b="0" dirty="0"/>
-              <a:t>Thực hành: phiếu điện tử có thể chặn giá trị vô lý ngay khi nhập (trang sau). Với phiếu giấy, điều phối viên kiểm tra hằng tuần cũng làm được việc này.</a:t>
-            </a:r>
-          </a:p>
-          <a:p>
-            <a:r>
-              <a:rPr lang="en-US" sz="1400" b="0" dirty="0"/>
-              <a:t>Ý lâm sàng: phát hiện lỗi càng sớm càng dễ sửa. Tuần sau hồ sơ còn ở khoa. Năm sau hồ sơ đã vào kho lưu trữ.</a:t>
-            </a:r>
-          </a:p>
-          <a:p>
-            <a:r>
-              <a:rPr lang="en-US" sz="1400" b="0" dirty="0"/>
-              <a:t>Hỏi (mời hai ba người trả lời, bật micro): anh chị đã thấy những giá trị vô lý nào trong dữ liệu bệnh viện? Dự kiến: cân nặng 700 kg, ngày trong tương lai, nhịp tim bằng 0 ở người bệnh còn sống.</a:t>
-            </a:r>
-          </a:p>
-          <a:p>
-            <a:r>
-              <a:rPr lang="en-US" sz="1400" b="0" dirty="0"/>
-              <a:t>Thời lượng: 2 phút. Sau đó là quản lý dữ liệu trong thực tế, rồi hai trang về dữ liệu bị thiếu.</a:t>
+              <a:t>Thời gian: 2 phút.</a:t>
             </a:r>
           </a:p>
         </p:txBody>
@@ -983,43 +929,25 @@
           <a:p>
             <a:r>
               <a:rPr lang="en-US" sz="1400" b="0" dirty="0"/>
-              <a:t>Ý chính: dữ liệu tốt cần một con đường an toàn từ người bệnh đến tệp phân tích. Có hai con đường.</a:t>
+              <a:t>Hai đường an toàn: phiếu giấy nhập liệu hai lần, hoặc thu thập dữ liệu điện tử (REDCap, KoBoToolbox) có kiểm tra ngay khi nhập.</a:t>
             </a:r>
           </a:p>
           <a:p>
             <a:r>
               <a:rPr lang="en-US" sz="1400" b="0" dirty="0"/>
-              <a:t>Đường giấy: CRF được nhập vào máy tính hai lần bởi hai người khác nhau (nhập liệu kép). Một phép so sánh đơn giản cho thấy mọi chỗ lệch, và mỗi chỗ được sửa bằng cách đối chiếu với phiếu giấy. Cách này bắt được phần lớn lỗi gõ (lactat 21 thay vì 2.1).</a:t>
+              <a:t>Cơ sở dữ liệu chỉ giữ mã nghiên cứu, không bao giờ có tên, và lưu vết mọi thay đổi.</a:t>
             </a:r>
           </a:p>
           <a:p>
             <a:r>
               <a:rPr lang="en-US" sz="1400" b="0" dirty="0"/>
-              <a:t>Thu thập dữ liệu điện tử (EDC): phiếu được điền trực tiếp trên máy tính bảng hoặc máy tính. Các ví dụ miễn phí, phổ biến là REDCap và KoBoToolbox. Các phép kiểm tra khoảng giá trị, logic và trường bắt buộc từ từ điển dữ liệu chạy ngay khi nhập, nên giá trị vô lý bị chặn trước khi được lưu.</a:t>
+              <a:t>Hỏi: ai từng thấy một tệp Excel có tên người bệnh và kết quả được gửi qua email?</a:t>
             </a:r>
           </a:p>
           <a:p>
             <a:r>
               <a:rPr lang="en-US" sz="1400" b="0" dirty="0"/>
-              <a:t>Nhật ký thay đổi dữ liệu (audit trail, thẻ thứ ba): một hệ thống tốt ghi lại ai đã đổi gì, khi nào và vì sao. Không bao giờ ghi đè lặng lẽ. Hội đồng đạo đức, giám sát viên và tạp chí có thể yêu cầu xem.</a:t>
-            </a:r>
-          </a:p>
-          <a:p>
-            <a:r>
-              <a:rPr lang="en-US" sz="1400" b="0" dirty="0"/>
-              <a:t>Cơ sở dữ liệu chỉ chứa mã số nghiên cứu, không có tên. Bảng liên kết mã số với tên được lưu riêng và khóa lại.</a:t>
-            </a:r>
-          </a:p>
-          <a:p>
-            <a:r>
-              <a:rPr lang="en-US" sz="1400" b="0" dirty="0"/>
-              <a:t>Hỏi (mời hai ba người trả lời, bật micro): ai đã từng thấy một tệp Excel có cả tên, số điện thoại và kết quả, được gửi qua email? Dự kiến: nhiều người. Đó chính là điều cần tránh.</a:t>
-            </a:r>
-          </a:p>
-          <a:p>
-            <a:r>
-              <a:rPr lang="en-US" sz="1400" b="0" dirty="0"/>
-              <a:t>Thời lượng: 2 phút.</a:t>
+              <a:t>Thời gian: 2 phút.</a:t>
             </a:r>
           </a:p>
         </p:txBody>
@@ -1100,43 +1028,19 @@
           <a:p>
             <a:r>
               <a:rPr lang="en-US" sz="1400" b="0" dirty="0"/>
-              <a:t>Dữ liệu bị thiếu, phần 1: vì sao quan trọng (tiếp theo là phòng ngừa, các cơ chế và cách xử lý thống kê ở Buổi 6, phần 6.4).</a:t>
+              <a:t>Dữ liệu thiếu, phần 1. Đi qua hình: 30% thực sự tử vong, nhưng 15 ca tử vong bị bỏ trống, nên ta chỉ thấy 18%.</a:t>
             </a:r>
           </a:p>
           <a:p>
             <a:r>
               <a:rPr lang="en-US" sz="1400" b="0" dirty="0"/>
-              <a:t>Ý chính: dữ liệu bị thiếu làm giảm số người bệnh, và còn có thể cho câu trả lời sai.</a:t>
+              <a:t>Dữ liệu thiếu gắn với chính kết cục: người nặng nhất bị thiếu trước. Ai bị thiếu quan trọng hơn thiếu bao nhiêu.</a:t>
             </a:r>
           </a:p>
           <a:p>
             <a:r>
               <a:rPr lang="en-US" sz="1400" b="0" dirty="0"/>
-              <a:t>Đi qua hình: 100 người bệnh, thực tế có 30 người tử vong. Nhưng 15 ca tử vong có ô kết cục bị bỏ trống (chuyển viện, tử vong ban đêm, phiếu không được hoàn thành). Trong 85 người bệnh có ghi nhận, chỉ thấy 15 ca tử vong: 18%. Sự thật là 30%.</a:t>
-            </a:r>
-          </a:p>
-          <a:p>
-            <a:r>
-              <a:rPr lang="en-US" sz="1400" b="0" dirty="0"/>
-              <a:t>Vì sao? Vì việc thiếu dữ liệu liên quan đến chính kết cục. Những người bệnh nặng nhất, diễn biến phức tạp nhất là những người có phiếu bị bỏ trống.</a:t>
-            </a:r>
-          </a:p>
-          <a:p>
-            <a:r>
-              <a:rPr lang="en-US" sz="1400" b="0" dirty="0"/>
-              <a:t>Quan niệm sai: 'chỉ mất 15%, không sao'. Ai bị thiếu quan trọng hơn bao nhiêu người bị thiếu.</a:t>
-            </a:r>
-          </a:p>
-          <a:p>
-            <a:r>
-              <a:rPr lang="en-US" sz="1400" b="0" dirty="0"/>
-              <a:t>Thứ Bảy tuần sau (Buổi 6, phần 6.4) sẽ gọi tên các cơ chế (MCAR, MAR, MNAR) và xem ý tưởng quy gán đa bội (multiple imputation). Nhưng cách xử lý thống kê luôn kém hơn phòng ngừa.</a:t>
-            </a:r>
-          </a:p>
-          <a:p>
-            <a:r>
-              <a:rPr lang="en-US" sz="1400" b="0" dirty="0"/>
-              <a:t>Hỏi (mời hai ba người trả lời, bật micro): ở khoa anh chị, người bệnh nào dễ có hồ sơ không đầy đủ nhất? Dự kiến: chuyển viện, tử vong, nhập viện ban đêm, nằm viện rất ngắn.</a:t>
+              <a:t>Cơ chế và quy gán sẽ học ở 6.4.</a:t>
             </a:r>
           </a:p>
         </p:txBody>
@@ -1217,55 +1121,19 @@
           <a:p>
             <a:r>
               <a:rPr lang="en-US" sz="1400" b="0" dirty="0"/>
-              <a:t>Dữ liệu bị thiếu, phần 2: phòng ngừa.</a:t>
+              <a:t>Dữ liệu thiếu, phần 2: năm thói quen ngăn được phần lớn dữ liệu thiếu.</a:t>
             </a:r>
           </a:p>
           <a:p>
             <a:r>
               <a:rPr lang="en-US" sz="1400" b="0" dirty="0"/>
-              <a:t>Ý chính: năm thói quen ngăn ngừa phần lớn dữ liệu bị thiếu.</a:t>
+              <a:t>Kết cục ngày 28 là biến hay bị thiếu nhất trong nghiên cứu ICU: lên kế hoạch ai kiểm tra cho người bệnh chuyển viện.</a:t>
             </a:r>
           </a:p>
           <a:p>
             <a:r>
               <a:rPr lang="en-US" sz="1400" b="0" dirty="0"/>
-              <a:t>Ít mục: mỗi mục thêm vào làm tăng khả năng có ô bị bỏ trống.</a:t>
-            </a:r>
-          </a:p>
-          <a:p>
-            <a:r>
-              <a:rPr lang="en-US" sz="1400" b="0" dirty="0"/>
-              <a:t>Phiếu rõ: đánh dấu trường bắt buộc. Có lựa chọn 'không làm' và 'không rõ' để ô trống luôn có nghĩa là 'quên'.</a:t>
-            </a:r>
-          </a:p>
-          <a:p>
-            <a:r>
-              <a:rPr lang="en-US" sz="1400" b="0" dirty="0"/>
-              <a:t>Tập huấn: 30 phút cho mọi điều dưỡng hoặc bác sĩ nội trú sẽ thu thập số liệu, có từ điển dữ liệu trong tay.</a:t>
-            </a:r>
-          </a:p>
-          <a:p>
-            <a:r>
-              <a:rPr lang="en-US" sz="1400" b="0" dirty="0"/>
-              <a:t>Kiểm tra hằng tuần: đếm đơn giản số ô trống theo từng biến và từng người bệnh. Nếu một mục luôn trống, chính mục đó có vấn đề.</a:t>
-            </a:r>
-          </a:p>
-          <a:p>
-            <a:r>
-              <a:rPr lang="en-US" sz="1400" b="0" dirty="0"/>
-              <a:t>Bổ sung sớm: kết cục ngày 28 là biến hay bị thiếu nhất trong các nghiên cứu ICU. Hãy phân công ai sẽ kiểm tra (gọi điện, tra hồ sơ) cho những người bệnh đã chuyển đi.</a:t>
-            </a:r>
-          </a:p>
-          <a:p>
-            <a:r>
-              <a:rPr lang="en-US" sz="1400" b="0" dirty="0"/>
-              <a:t>Nhắc: viết các bước này vào đề cương như 'kế hoạch bảo đảm chất lượng dữ liệu' (Phần 3).</a:t>
-            </a:r>
-          </a:p>
-          <a:p>
-            <a:r>
-              <a:rPr lang="en-US" sz="1400" b="0" dirty="0"/>
-              <a:t>Chuyển ý: giờ cả lớp cùng sửa vài mục CRF chưa tốt.</a:t>
+              <a:t>Các bước này đưa vào kế hoạch chất lượng dữ liệu của Phần 3 đề cương.</a:t>
             </a:r>
           </a:p>
         </p:txBody>
@@ -1346,37 +1214,19 @@
           <a:p>
             <a:r>
               <a:rPr lang="en-US" sz="1400" b="0" dirty="0"/>
-              <a:t>Bài tập cả lớp kết thúc phần 5.1 (7 phút, 20:08 đến 20:15). Bài 1 và 2 nằm trong phiếu bài tập Buổi 5 (Course/Practicals/s5_exercises.md, gửi dạng PDF trước buổi học). Đáp án trong Course/Solutions/s5_solutions.md.</a:t>
+              <a:t>Cả lớp, 7 phút (20:08-20:15). Bài 2 của phiếu bài tập Buổi 5. Đáp án: s5_solutions_VN.md.</a:t>
             </a:r>
           </a:p>
           <a:p>
             <a:r>
               <a:rPr lang="en-US" sz="1400" b="0" dirty="0"/>
-              <a:t>Cách làm: chia sẻ phiếu bài tập trên màn hình. Với mỗi mục (bắt đầu bằng 'Dịch đã truyền: ____', rồi 'Lactat cao? C / K'), cho 1 phút, mời hai ba người đọc to phiên bản của mình, rồi gõ phiên bản chung vào tài liệu chia sẻ trong khi cả lớp áp dụng bốn câu kiểm tra ở khung bên phải. Làm kỹ hai mục tốt hơn làm vội bốn mục.</a:t>
+              <a:t>Mỗi lần một mục, 1 phút mỗi mục. Mời hai hoặc ba người đọc bài của mình và gõ phiên bản của lớp. Làm tốt hai mục hơn làm vội bốn mục.</a:t>
             </a:r>
           </a:p>
           <a:p>
             <a:r>
               <a:rPr lang="en-US" sz="1400" b="0" dirty="0"/>
-              <a:t>Câu mẫu cho (a): 'Tổng dịch truyền tĩnh mạch từ lúc vào ICU đến 24 giờ (ml), gồm dịch tinh thể, dịch keo và dịch pha thuốc: [ ][ ][ ][ ][ ] ml, hoặc đánh dấu: không ghi nhận.'</a:t>
-            </a:r>
-          </a:p>
-          <a:p>
-            <a:r>
-              <a:rPr lang="en-US" sz="1400" b="0" dirty="0"/>
-              <a:t>Câu mẫu cho (d): 'Lactat huyết thanh lúc vào ICU (mmol/L): [ ][ ].[ ], hoặc đánh dấu: không làm.' Thu thập con số tốt hơn câu trả lời có/không.</a:t>
-            </a:r>
-          </a:p>
-          <a:p>
-            <a:r>
-              <a:rPr lang="en-US" sz="1400" b="0" dirty="0"/>
-              <a:t>Bài 1 (phân loại 10 biến) đã được ôn qua câu hỏi nhanh. Giữ làm bài về nhà để tự kiểm tra.</a:t>
-            </a:r>
-          </a:p>
-          <a:p>
-            <a:r>
-              <a:rPr lang="en-US" sz="1400" b="0" dirty="0"/>
-              <a:t>Nếu lớp làm nhanh: mời cả lớp gợi ý một dòng từ điển dữ liệu cho mục dịch truyền vừa viết lại.</a:t>
+              <a:t>Bài 1 làm ở nhà.</a:t>
             </a:r>
           </a:p>
         </p:txBody>
@@ -1457,25 +1307,25 @@
           <a:p>
             <a:r>
               <a:rPr lang="en-US" sz="1400" b="0" dirty="0"/>
-              <a:t>Mở đầu phần 5.2 (25 phút, 20:15 đến 20:40: nghiên cứu, luồng người bệnh, dữ liệu thô và sạch, 8 phút trình diễn làm sạch bằng R, nhật ký làm sạch dữ liệu, năm câu hỏi, rồi cả lớp cùng viết Câu hỏi 1 thành một câu PECO).</a:t>
+              <a:t>Phần 5.2 (20:15-20:40).</a:t>
             </a:r>
           </a:p>
           <a:p>
             <a:r>
               <a:rPr lang="en-US" sz="1400" b="0" dirty="0"/>
-              <a:t>Thông điệp chính: từ giờ, ngoài việc đọc nghiên cứu của người khác, anh chị sẽ phân tích và viết bài từ một nghiên cứu thực tế. FLUID-ICU là dữ liệu mô phỏng: do máy tính tạo ra, không có người bệnh, bệnh viện hay quốc gia thật. Nhưng nó vận hành như dữ liệu ICU thật, kể cả các vấn đề của nó.</a:t>
+              <a:t>FLUID-ICU là dữ liệu mô phỏng: không có người bệnh, bệnh viện hay quốc gia thật, nhưng hành xử giống dữ liệu ICU thật.</a:t>
             </a:r>
           </a:p>
           <a:p>
             <a:r>
               <a:rPr lang="en-US" sz="1400" b="0" dirty="0"/>
-              <a:t>Không ai cần chạy R. Giảng viên chạy trực tiếp trên màn hình chia sẻ. Anh chị đọc và diễn giải. Ai đã học khóa 'Clinical Data Analysis in R' của Neudata có thể tái lập mọi thứ bằng các script trong Course/Data/R.</a:t>
+              <a:t>Không ai phải chạy R. Giảng viên chạy trên màn hình.</a:t>
             </a:r>
           </a:p>
           <a:p>
             <a:r>
               <a:rPr lang="en-US" sz="1400" b="0" dirty="0"/>
-              <a:t>Nối với ví dụ xuyên suốt: Buổi 1-4 đặt câu hỏi can thiệp (hạn chế dịch: một RCT, Bài báo 1, Boulet 2024, thử nghiệm thí điểm (pilot) so sánh hạn chế dịch với truyền dịch thường quy trong sốc nhiễm khuẩn, trong Course/Papers). FLUID-ICU đặt câu hỏi ở dạng quan sát: cân bằng dịch dương có liên quan với tử vong không? Đó là câu hỏi thuần tập, giống Bài báo 2 (Hyun 2023). Hỏi (mời hai ba người trả lời, bật micro): thuần tập kết luận được gì mà RCT không làm được, và ngược lại? Dự kiến: liên quan, không phải nhân quả. Nhưng người bệnh thực tế và đông hơn.</a:t>
+              <a:t>Hỏi: thuần tập kết luận được điều gì mà thử nghiệm thì không? Kỳ vọng: mối liên quan, không phải quan hệ nhân quả.</a:t>
             </a:r>
           </a:p>
         </p:txBody>
@@ -1556,43 +1406,19 @@
           <a:p>
             <a:r>
               <a:rPr lang="en-US" sz="1400" b="0" dirty="0"/>
-              <a:t>Ý chính: trước mọi phân tích, phải hiểu nghiên cứu: ai, phơi nhiễm, kết cục, đo thêm những gì.</a:t>
+              <a:t>Hiểu nghiên cứu trước khi phân tích.</a:t>
             </a:r>
           </a:p>
           <a:p>
             <a:r>
               <a:rPr lang="en-US" sz="1400" b="0" dirty="0"/>
-              <a:t>Đối tượng: 620 người lớn nhiễm khuẩn huyết ở 4 ICU (ICU A 191, ICU B 164, ICU C 147, ICU D 118), tuyển từ 01/2023 đến 12/2024. Dữ liệu mô phỏng.</a:t>
+              <a:t>620 người lớn nhiễm khuẩn huyết, 4 ICU, 2023-2024. Phơi nhiễm: cân bằng dịch tích lũy đến ngày 3, dương ở 373 trên 618 (60.4%). Kết cục chính: tử vong đến ngày 28, 179 trên 620 (28.9%).</a:t>
             </a:r>
           </a:p>
           <a:p>
             <a:r>
               <a:rPr lang="en-US" sz="1400" b="0" dirty="0"/>
-              <a:t>Phơi nhiễm: cân bằng dịch tích lũy đến ngày 3, (tổng dịch vào trừ tổng dịch ra trong ngày 1-3) chia cho cân nặng lúc vào, đơn vị ml/kg. Cân bằng dương ở 373 trong 618 người bệnh tính được cân bằng (60.4%), trung vị 8.8 ml/kg (IQR -10.3 đến 26.2).</a:t>
-            </a:r>
-          </a:p>
-          <a:p>
-            <a:r>
-              <a:rPr lang="en-US" sz="1400" b="0" dirty="0"/>
-              <a:t>Kết cục chính: tử vong đến ngày 28: 179 trong 620 (28.9%). Thời gian đến tử vong cũng được ghi (người sống được kiểm duyệt ở ngày 28).</a:t>
-            </a:r>
-          </a:p>
-          <a:p>
-            <a:r>
-              <a:rPr lang="en-US" sz="1400" b="0" dirty="0"/>
-              <a:t>Các biến khác: nhân khẩu học, bệnh kèm, nguồn nhiễm khuẩn, điểm mức độ nặng (SOFA = đánh giá suy đa cơ quan tuần tự, APACHE II = thang điểm sinh lý cấp tính và bệnh mạn tính II), lactat, vận mạch, thở máy, AKI, lọc máu, số ngày không thở máy, thời gian nằm ICU.</a:t>
-            </a:r>
-          </a:p>
-          <a:p>
-            <a:r>
-              <a:rPr lang="en-US" sz="1400" b="0" dirty="0"/>
-              <a:t>Từ điển dữ liệu đầy đủ ở Course/Data/data_dictionary.md (cũng được gửi dạng PDF): cùng cấu trúc với từ điển anh chị thấy ở phần 5.1.</a:t>
-            </a:r>
-          </a:p>
-          <a:p>
-            <a:r>
-              <a:rPr lang="en-US" sz="1400" b="0" dirty="0"/>
-              <a:t>Hỏi (mời hai ba người trả lời, bật micro): từ những gì đã học ở Buổi 4 và Bài báo 2, anh chị đoán người bệnh nào có cân bằng dương? Dự kiến: những người nặng nhất. Hãy nhớ điều này cho Bảng 1 và Buổi 6.</a:t>
+              <a:t>Hỏi: ai sẽ có cân bằng dương? Kỳ vọng: người nặng nhất. Nhớ điều này khi xem Bảng 1.</a:t>
             </a:r>
           </a:p>
         </p:txBody>
@@ -1673,43 +1499,13 @@
           <a:p>
             <a:r>
               <a:rPr lang="en-US" sz="1400" b="0" dirty="0"/>
-              <a:t>Ý chính: luồng người bệnh (sơ đồ STROBE trong bản thảo, STROBE là hướng dẫn báo cáo cho nghiên cứu quan sát, Buổi 7).</a:t>
+              <a:t>Lưu đồ người bệnh: 623 dòng, bỏ 3 bản ghi trùng, còn 620. 2 người không có cân bằng ngày 3: phân tích 618. 91 người thiếu lactat hoặc tuổi: 527 người trong mô hình hiệu chỉnh.</a:t>
             </a:r>
           </a:p>
           <a:p>
             <a:r>
               <a:rPr lang="en-US" sz="1400" b="0" dirty="0"/>
-              <a:t>Tệp thô: 623 dòng. Ba người bệnh bị nhập hai lần: sau khi loại bản trùng còn 620 người bệnh tham gia.</a:t>
-            </a:r>
-          </a:p>
-          <a:p>
-            <a:r>
-              <a:rPr lang="en-US" sz="1400" b="0" dirty="0"/>
-              <a:t>Hai người bệnh không có cân bằng dịch ngày 3 (cân nặng hoặc một lượng dịch ra vô lý và được đặt là thiếu khi làm sạch): 618 người trong quần thể phơi nhiễm, dùng cho Bảng 1 và các so sánh.</a:t>
-            </a:r>
-          </a:p>
-          <a:p>
-            <a:r>
-              <a:rPr lang="en-US" sz="1400" b="0" dirty="0"/>
-              <a:t>Thêm 91 người không có lactat (hoặc tuổi): 527 trường hợp đầy đủ cho mô hình hiệu chỉnh ở Buổi 6.</a:t>
-            </a:r>
-          </a:p>
-          <a:p>
-            <a:r>
-              <a:rPr lang="en-US" sz="1400" b="0" dirty="0"/>
-              <a:t>Vì sao quan trọng: 527 trên 620 là 85%. 91 người bệnh thiếu lactat có khác biệt không? Buổi 6 (6.4) trả lời: họ nhẹ hơn.</a:t>
-            </a:r>
-          </a:p>
-          <a:p>
-            <a:r>
-              <a:rPr lang="en-US" sz="1400" b="0" dirty="0"/>
-              <a:t>Hỏi (mời hai ba người trả lời, bật micro): luồng này nằm ở phần nào của bản thảo? Dự kiến: đoạn đầu phần Kết quả (đối tượng nghiên cứu), là Hình 1.</a:t>
-            </a:r>
-          </a:p>
-          <a:p>
-            <a:r>
-              <a:rPr lang="en-US" sz="1400" b="0" dirty="0"/>
-              <a:t>Trang này giờ được dựng bằng các hình chỉnh sửa được (trước đây là ảnh). Các con số không đổi.</a:t>
+              <a:t>Hỏi: lưu đồ này nằm ở đâu trong bài báo? Kỳ vọng: đoạn đầu của phần Kết quả. Mọi phần Kết quả đều bắt đầu từ đây.</a:t>
             </a:r>
           </a:p>
         </p:txBody>
@@ -1790,37 +1586,19 @@
           <a:p>
             <a:r>
               <a:rPr lang="en-US" sz="1400" b="0" dirty="0"/>
-              <a:t>Ý chính: đây là các vấn đề chất lượng dữ liệu tìm thấy trong tệp thô, và cách sửa từng vấn đề. Mời từng người đoán vấn đề ở mỗi dòng trước khi cho xem cột dữ liệu sạch.</a:t>
+              <a:t>Mời học viên đoán lỗi của từng dòng trước khi mở cột dữ liệu sạch.</a:t>
             </a:r>
           </a:p>
           <a:p>
             <a:r>
               <a:rPr lang="en-US" sz="1400" b="0" dirty="0"/>
-              <a:t>Giới tính và các biến có/không được viết nhiều kiểu. Ba định dạng ngày (03/04 là tháng Ba hay tháng Tư?). ICU C gửi lactat bằng mg/dL thay vì mmol/L (phát hiện nhờ so sánh trung vị theo ICU), 999 và -99 dùng làm mã thiếu. Giá trị vô lý (tuổi 210, cân nặng 7 kg, lượng dịch ra âm). Bản ghi trùng (623 dòng cho 620 người bệnh).</a:t>
+              <a:t>Mỗi lỗi làm hỏng phân tích một cách âm thầm: 999 kéo trung bình lên, 'Y' và 'Yes' thành hai nhóm, mg/dL làm ICU C trông như thảm họa.</a:t>
             </a:r>
           </a:p>
           <a:p>
             <a:r>
               <a:rPr lang="en-US" sz="1400" b="0" dirty="0"/>
-              <a:t>Mỗi vấn đề làm hỏng phân tích một cách lặng lẽ: lactat 999 làm trung bình tăng vọt. 'Y' và 'Yes' thành hai nhóm. Giá trị mg/dL làm lactat ở ICU C trông cao bất thường.</a:t>
-            </a:r>
-          </a:p>
-          <a:p>
-            <a:r>
-              <a:rPr lang="en-US" sz="1400" b="0" dirty="0"/>
-              <a:t>Giá trị vô lý được đặt là thiếu và gửi câu hỏi đến cơ sở. Người bệnh vẫn ở trong nghiên cứu. Không bao giờ đoán.</a:t>
-            </a:r>
-          </a:p>
-          <a:p>
-            <a:r>
-              <a:rPr lang="en-US" sz="1400" b="0" dirty="0"/>
-              <a:t>Nối với 5.1: mọi vấn đề này đều có thể được ngăn bằng CRF điện tử có quy tắc kiểm tra và từ điển dữ liệu.</a:t>
-            </a:r>
-          </a:p>
-          <a:p>
-            <a:r>
-              <a:rPr lang="en-US" sz="1400" b="0" dirty="0"/>
-              <a:t>Hỏi (mời hai ba người trả lời, bật micro): vấn đề nào anh chị sẽ không bao giờ phát hiện nếu không có biểu đồ hoặc tóm tắt theo ICU? Dự kiến: đơn vị lactat.</a:t>
+              <a:t>Giá trị vô lý được chuyển thành thiếu và gửi câu hỏi về cơ sở. Không bao giờ đoán.</a:t>
             </a:r>
           </a:p>
         </p:txBody>
@@ -1901,37 +1679,25 @@
           <a:p>
             <a:r>
               <a:rPr lang="en-US" sz="1400" b="0" dirty="0"/>
-              <a:t>Trình diễn trực tiếp trên màn hình chia sẻ, 8 phút. Kịch bản đầy đủ với kết quả dự kiến và ảnh chụp dự phòng: Course/Demos/s5_demo.md (Phần A).</a:t>
+              <a:t>Trình diễn trực tiếp, 8 phút. Kịch bản và ảnh dự phòng: s5_demo_VN.md, Phần A.</a:t>
             </a:r>
           </a:p>
           <a:p>
             <a:r>
               <a:rPr lang="en-US" sz="1400" b="0" dirty="0"/>
-              <a:t>Giảng viên chạy R. Học viên quan sát. Chạy từng khối bằng Ctrl+Enter và nói to mỗi khối sửa gì. Trước mỗi khối, mời cả lớp dự đoán (bình chọn, hoặc mời hai ba người trả lời).</a:t>
+              <a:t>Chạy từng khối và nói khối đó sửa gì. Cho lớp đoán trước.</a:t>
             </a:r>
           </a:p>
           <a:p>
             <a:r>
               <a:rPr lang="en-US" sz="1400" b="0" dirty="0"/>
-              <a:t>Cho thấy: dữ liệu thô đọc dưới dạng văn bản, 623 dòng giảm còn 620 sau khi loại 3 bản trùng. Bảng các cách viết giới tính trước và sau. Ba định dạng ngày. Trung vị lactat theo ICU (ICU C cao gấp khoảng 9 lần) và phép đổi đơn vị. Giá trị vô lý đặt là thiếu. Bước kiểm tra cuối cùng cho thấy tệp đã làm sạch giống hệt tệp tham chiếu.</a:t>
+              <a:t>Ba ý: tệp thô không bao giờ bị sửa, mỗi lỗi một khối, script cho cùng một kết quả mỗi lần chạy.</a:t>
             </a:r>
           </a:p>
           <a:p>
             <a:r>
               <a:rPr lang="en-US" sz="1400" b="0" dirty="0"/>
-              <a:t>Ý chính: (1) tệp thô không bao giờ bị sửa. (2) một vấn đề, một khối, một dòng nhật ký. (3) vì là script, ai cũng có thể chạy lại và được đúng dữ liệu sạch đó: tính tái lập.</a:t>
-            </a:r>
-          </a:p>
-          <a:p>
-            <a:r>
-              <a:rPr lang="en-US" sz="1400" b="0" dirty="0"/>
-              <a:t>Nếu R lỗi: chiếu lại trang dữ liệu thô và sạch và ảnh chụp trong kịch bản trình diễn. Ý chính vẫn như vậy.</a:t>
-            </a:r>
-          </a:p>
-          <a:p>
-            <a:r>
-              <a:rPr lang="en-US" sz="1400" b="0" dirty="0"/>
-              <a:t>Không để trình diễn quá giờ: dừng sau 8 phút, kể cả khi phải bỏ một khối.</a:t>
+              <a:t>Dừng ở phút thứ 8.</a:t>
             </a:r>
           </a:p>
         </p:txBody>
@@ -2012,43 +1778,19 @@
           <a:p>
             <a:r>
               <a:rPr lang="en-US" sz="1400" b="0" dirty="0"/>
-              <a:t>Mục đích: khơi lại kiến thức Buổi 4 và giúp những ai vắng mặt bắt kịp. Giữ không khí nhẹ nhàng: không chấm điểm.</a:t>
+              <a:t>Ôn tập (19:30-19:40). Mỗi câu một cuộc thăm dò, 1 phút mỗi câu, rồi mở đáp án.</a:t>
             </a:r>
           </a:p>
           <a:p>
             <a:r>
               <a:rPr lang="en-US" sz="1400" b="0" dirty="0"/>
-              <a:t>Cách làm: mở một bình chọn cho mỗi câu (poll của Zoom/Teams), mỗi câu 1 phút, cho xem kết quả rồi công bố đáp án. Che khung bên phải cho đến lúc công bố (hoặc đọc đáp án từ ghi chú này).</a:t>
+              <a:t>Q1: thuần tập tiến cứu (bệnh-chứng bắt đầu từ kết cục). Q2: nhiễu do chỉ định, lý do Bài báo 2 dùng ghép cặp theo điểm xu hướng. Q3: RR 0.67, RD 10%, NNT 10.</a:t>
             </a:r>
           </a:p>
           <a:p>
             <a:r>
               <a:rPr lang="en-US" sz="1400" b="0" dirty="0"/>
-              <a:t>Đáp án C1: thuần tập tiến cứu. Phơi nhiễm (hút thuốc) được đo trước, sau đó chờ kết cục xảy ra. Đáp án sai thường gặp: bệnh–chứng. Nhấn mạnh rằng nghiên cứu bệnh–chứng bắt đầu từ kết cục rồi nhìn ngược lại.</a:t>
-            </a:r>
-          </a:p>
-          <a:p>
-            <a:r>
-              <a:rPr lang="en-US" sz="1400" b="0" dirty="0"/>
-              <a:t>Đáp án C2: nhiễu do chỉ định. Mức độ nặng gây ra cả việc truyền nhiều dịch hơn và tử vong nhiều hơn. Đây chính là lý do Bài báo 2 (Hyun 2023, nghiên cứu thuần tập về cân bằng dịch và tử vong trong sốc nhiễm khuẩn, trong thư mục khóa học Course/Papers) dùng ghép cặp theo điểm xu hướng, và lý do Buổi 6 (6.3 và 6.4) nói về kết quả 'đã hiệu chỉnh'.</a:t>
-            </a:r>
-          </a:p>
-          <a:p>
-            <a:r>
-              <a:rPr lang="en-US" sz="1400" b="0" dirty="0"/>
-              <a:t>Đáp án C3: RR = 0.20 / 0.30 = 0.67 (giảm tương đối một phần ba). Hiệu số nguy cơ = 10 điểm phần trăm. NNT = 1 / 0.10 = 10 người bệnh cần điều trị để ngăn một ca tử vong.</a:t>
-            </a:r>
-          </a:p>
-          <a:p>
-            <a:r>
-              <a:rPr lang="en-US" sz="1400" b="0" dirty="0"/>
-              <a:t>Nếu hơn một phần ba lớp trả lời sai C3, dành thêm 2 phút vẽ lại bảng 2x2 trên màn hình chia sẻ (bảng trắng) trước khi chuyển tiếp.</a:t>
-            </a:r>
-          </a:p>
-          <a:p>
-            <a:r>
-              <a:rPr lang="en-US" sz="1400" b="0" dirty="0"/>
-              <a:t>Thời lượng: 10 phút kể cả công bố đáp án (19:30 đến 19:40).</a:t>
+              <a:t>Nếu một phần ba lớp sai Q3, vẽ bảng 2x2 trên màn hình.</a:t>
             </a:r>
           </a:p>
         </p:txBody>
@@ -2129,43 +1871,25 @@
           <a:p>
             <a:r>
               <a:rPr lang="en-US" sz="1400" b="0" dirty="0"/>
-              <a:t>Ý chính: nhật ký làm sạch dữ liệu là dấu vết của mọi thay đổi trên bộ dữ liệu. Mở tệp thật trên màn hình chia sẻ (Course/Data/cleaning_log.md).</a:t>
+              <a:t>Nhật ký làm sạch (cleaning_log_VN.md): mỗi thay đổi một dòng, kèm lý do.</a:t>
             </a:r>
           </a:p>
           <a:p>
             <a:r>
               <a:rPr lang="en-US" sz="1400" b="0" dirty="0"/>
-              <a:t>Nguyên tắc: tệp thô không bao giờ bị sửa. Mọi thay đổi được thực hiện bằng script và ghi lại.</a:t>
+              <a:t>Giá trị vô lý được chuyển thành thiếu và gửi câu hỏi. Người bệnh vẫn ở lại trong nghiên cứu.</a:t>
             </a:r>
           </a:p>
           <a:p>
             <a:r>
               <a:rPr lang="en-US" sz="1400" b="0" dirty="0"/>
-              <a:t>Mỗi dòng: vấn đề phát hiện, số bản ghi, đã làm gì và vì sao (ví dụ: lactat ở ICU C tính bằng mg/dL, chia cho 9.01 để ra mmol/L, đã xác nhận với phòng xét nghiệm của cơ sở).</a:t>
+              <a:t>Phần còn lại là dữ liệu thiếu thật: lactat 93 trên 620 (15.0%).</a:t>
             </a:r>
           </a:p>
           <a:p>
             <a:r>
               <a:rPr lang="en-US" sz="1400" b="0" dirty="0"/>
-              <a:t>Câu hỏi gửi cơ sở: giá trị vô lý được đặt là thiếu và gửi câu hỏi đến cơ sở. Không xóa người bệnh (xóa sẽ làm sai lệch mẫu).</a:t>
-            </a:r>
-          </a:p>
-          <a:p>
-            <a:r>
-              <a:rPr lang="en-US" sz="1400" b="0" dirty="0"/>
-              <a:t>Phần còn lại sau làm sạch là dữ liệu thiếu thật: lactat 93 trên 620 (15.0%), mọi biến khác 1% hoặc ít hơn. Các ô trống này là chủ đề của phần 6.4 thứ Bảy tuần sau.</a:t>
-            </a:r>
-          </a:p>
-          <a:p>
-            <a:r>
-              <a:rPr lang="en-US" sz="1400" b="0" dirty="0"/>
-              <a:t>Hỏi (mời hai ba người trả lời, bật micro): vì sao không xóa luôn người bệnh có tuổi 210? Dự kiến: phần còn lại của hồ sơ vẫn đúng. Xóa người bệnh vì lỗi gõ có thể làm sai lệch mẫu.</a:t>
-            </a:r>
-          </a:p>
-          <a:p>
-            <a:r>
-              <a:rPr lang="en-US" sz="1400" b="0" dirty="0"/>
-              <a:t>Phần Phương pháp trong bản thảo sẽ ghi: 'Dữ liệu được làm sạch bằng script. Mọi thay đổi được ghi trong nhật ký làm sạch dữ liệu.'</a:t>
+              <a:t>Hỏi: sao không xóa người bệnh 210 tuổi? Kỳ vọng: phần còn lại của hồ sơ vẫn đúng.</a:t>
             </a:r>
           </a:p>
         </p:txBody>
@@ -2246,49 +1970,25 @@
           <a:p>
             <a:r>
               <a:rPr lang="en-US" sz="1400" b="0" dirty="0"/>
-              <a:t>Ý chính: một bộ dữ liệu, năm câu hỏi nghiên cứu khác nhau, tương ứng các mục tiêu phụ trong kế hoạch phân tích thống kê (SAP) của FLUID-ICU (Course/Data/SAP_FLUID-ICU.md).</a:t>
+              <a:t>Một bộ dữ liệu, năm câu hỏi, đều lấy từ SAP của FLUID-ICU.</a:t>
             </a:r>
           </a:p>
           <a:p>
             <a:r>
               <a:rPr lang="en-US" sz="1400" b="0" dirty="0"/>
-              <a:t>Câu hỏi 1 (Q1): cân bằng dịch dương đến ngày 3 và tử vong 28 ngày: hồi quy logistic cùng Kaplan-Meier và Cox. Câu hỏi chính. Cả lớp làm Q1 đầy đủ ở Buổi 5 và 6.</a:t>
+              <a:t>Q1 (câu hỏi chính) làm đầy đủ ở Buổi 5 và 6. Q2 đến Q5 làm ngắn hơn.</a:t>
             </a:r>
           </a:p>
           <a:p>
             <a:r>
               <a:rPr lang="en-US" sz="1400" b="0" dirty="0"/>
-              <a:t>Câu hỏi 2 (Q2): cân bằng dịch tích lũy và tổn thương thận cấp: hồi quy logistic.</a:t>
+              <a:t>Mỗi câu hỏi có một gói kết quả (Results_Pack_Q1_VN đến Q5_VN, PDF, gửi qua email).</a:t>
             </a:r>
           </a:p>
           <a:p>
             <a:r>
               <a:rPr lang="en-US" sz="1400" b="0" dirty="0"/>
-              <a:t>Câu hỏi 3 (Q3): cân bằng dịch tích lũy và số ngày không thở máy: biến đếm từ 0 đến 28, dồn ở hai đầu: Mann-Whitney và hồi quy tuyến tính.</a:t>
-            </a:r>
-          </a:p>
-          <a:p>
-            <a:r>
-              <a:rPr lang="en-US" sz="1400" b="0" dirty="0"/>
-              <a:t>Câu hỏi 4 (Q4): lactat ban đầu và tử vong 28 ngày, và ảnh hưởng của lactat bị thiếu: phân tích các trường hợp đầy đủ so với quy gán đa bội.</a:t>
-            </a:r>
-          </a:p>
-          <a:p>
-            <a:r>
-              <a:rPr lang="en-US" sz="1400" b="0" dirty="0"/>
-              <a:t>Câu hỏi 5 (Q5): cân bằng dịch và thời gian nằm ICU ở người sống: kết cục lệch (trung vị, IQR, thang log).</a:t>
-            </a:r>
-          </a:p>
-          <a:p>
-            <a:r>
-              <a:rPr lang="en-US" sz="1400" b="0" dirty="0"/>
-              <a:t>Mỗi câu hỏi có một gói kết quả phân tích: Course/Data/results_packs/Results_Pack_Q1 đến Q5 (Bảng 1, biểu đồ, bảng hồi quy, ghi chú dễ hiểu), đã gửi cho mọi người dạng PDF trước buổi học. Trên lớp, cả năm câu được dùng làm ví dụ minh họa (Q1 đầy đủ, Q2 đến Q5 ngắn gọn hơn).</a:t>
-            </a:r>
-          </a:p>
-          <a:p>
-            <a:r>
-              <a:rPr lang="en-US" sz="1400" b="0" dirty="0"/>
-              <a:t>Với bản thảo (Tuần 7-8), mỗi học viên chọn một câu hỏi và viết bài từ gói kết quả của câu đó: chúng tôi đưa kết quả, anh chị viết bài. Đề nghị học viên báo lựa chọn (chat, email hoặc biểu mẫu của khóa học) trước Buổi 6.</a:t>
+              <a:t>Cuối Buổi 6, mỗi học viên chọn một câu hỏi và viết phần Kết quả từ gói kết quả đó.</a:t>
             </a:r>
           </a:p>
         </p:txBody>
@@ -2369,31 +2069,19 @@
           <a:p>
             <a:r>
               <a:rPr lang="en-US" sz="1400" b="0" dirty="0"/>
-              <a:t>Bài tập cả lớp, 4 phút (20:36 đến 20:40). Bài 7 trong phiếu bài tập Buổi 5 có cùng bảng. Học viên tự hoàn thành sau cho câu hỏi mình chọn.</a:t>
+              <a:t>Cả lớp, 4 phút (20:36-20:40). Bài 7 của phiếu bài tập.</a:t>
             </a:r>
           </a:p>
           <a:p>
             <a:r>
               <a:rPr lang="en-US" sz="1400" b="0" dirty="0"/>
-              <a:t>PECO: P = đối tượng, E = phơi nhiễm, C = so sánh, O = kết cục (dạng quan sát của PICO ở Buổi 1). Dùng các loại biến số ở phần 5.1.</a:t>
+              <a:t>Q1: mời học viên nêu loại kết cục (nhị phân, cũng là thời gian đến sự kiện) và loại phơi nhiễm (nhị phân). Gõ: 'Ở người lớn nhiễm khuẩn huyết tại ICU, cân bằng dịch dương đến ngày 3, so với cân bằng âm, có liên quan với tử vong 28 ngày cao hơn không?'</a:t>
             </a:r>
           </a:p>
           <a:p>
             <a:r>
               <a:rPr lang="en-US" sz="1400" b="0" dirty="0"/>
-              <a:t>Q1 đầy đủ: mời hai ba người trả lời về loại kết cục (nhị phân, và cũng là thời gian đến sự kiện) và loại phơi nhiễm (nhị phân: cân bằng dương so với âm). Rồi gõ câu: 'Ở người lớn nhiễm khuẩn huyết nằm ICU, cân bằng dịch tích lũy dương đến ngày 3, so với cân bằng âm, có liên quan với tử vong 28 ngày cao hơn không?'</a:t>
-            </a:r>
-          </a:p>
-          <a:p>
-            <a:r>
-              <a:rPr lang="en-US" sz="1400" b="0" dirty="0"/>
-              <a:t>Q2 đến Q5, mỗi câu một dòng: Q2 kết cục nhị phân (AKI), phơi nhiễm liên tục. Q3 kết cục đếm (0-28, lệch), phơi nhiễm liên tục. Q4 kết cục nhị phân, phơi nhiễm liên tục (lactat) có giá trị thiếu. Q5 kết cục liên tục lệch (chỉ người sống), phơi nhiễm nhị phân.</a:t>
-            </a:r>
-          </a:p>
-          <a:p>
-            <a:r>
-              <a:rPr lang="en-US" sz="1400" b="0" dirty="0"/>
-              <a:t>Sau đó giải lao.</a:t>
+              <a:t>Q2 đến Q5: mỗi câu một dòng. Sau đó giải lao.</a:t>
             </a:r>
           </a:p>
         </p:txBody>
@@ -2474,25 +2162,13 @@
           <a:p>
             <a:r>
               <a:rPr lang="en-US" sz="1400" b="0" dirty="0"/>
-              <a:t>Slide chỉ có hình, có chủ ý. Trước giờ giải lao, nói: lớp bắt đầu lại lúc 20:55 với phần 5.3 (trung bình hay trung vị, SD hay IQR, biểu đồ nào, biểu đồ tốt và chưa tốt, Bảng 1). Tùy chọn: xem Bảng 1 trong gói kết quả Q1.</a:t>
+              <a:t>Giải lao (20:40-20:55). Nói: 20:55 bắt đầu lại với phần 5.3.</a:t>
             </a:r>
           </a:p>
           <a:p>
             <a:r>
               <a:rPr lang="en-US" sz="1400" b="0" dirty="0"/>
-              <a:t>Giải lao: 15 phút (20:40 đến 20:55). Bắt đầu lại đúng giờ.</a:t>
-            </a:r>
-          </a:p>
-          <a:p>
-            <a:r>
-              <a:rPr lang="en-US" sz="1400" b="0" dirty="0"/>
-              <a:t>Trong giờ giải lao: kiểm tra dự án R cho 02_describe.R mở và chạy được, và các hình dự phòng cho phần 5.4 đã sẵn sàng để chia sẻ.</a:t>
-            </a:r>
-          </a:p>
-          <a:p>
-            <a:r>
-              <a:rPr lang="en-US" sz="1400" b="0" dirty="0"/>
-              <a:t>Đọc khung chat, hoặc hỏi hai ba người điều gì khó nhất đến giờ (thường là phần làm sạch bộ dữ liệu khóa học). Điều chỉnh tốc độ phần 5.3.</a:t>
+              <a:t>Kiểm tra 02_describe.R chạy được và các hình dự phòng cho 5.4 đã sẵn sàng.</a:t>
             </a:r>
           </a:p>
         </p:txBody>
@@ -2573,25 +2249,13 @@
           <a:p>
             <a:r>
               <a:rPr lang="en-US" sz="1400" b="0" dirty="0"/>
-              <a:t>Mở đầu phần 5.3 (35 phút, 20:55 đến 21:30: ví dụ tính tay, trung bình và trung vị, độ phân tán, hình dạng, kiểm tra nhanh, chọn biểu đồ, biểu đồ trung thực, Bảng 1 và bảng đạt chuẩn công bố).</a:t>
+              <a:t>Phần 5.3 (20:55-21:30).</a:t>
             </a:r>
           </a:p>
           <a:p>
             <a:r>
               <a:rPr lang="en-US" sz="1400" b="0" dirty="0"/>
-              <a:t>Thông điệp chính: mọi bài báo đều bắt đầu phần kết quả bằng việc mô tả người bệnh: họ là ai, nặng đến mức nào, bao nhiêu tuổi. Với một biến số, anh chị cần hai con số: giá trị trung tâm (người bệnh điển hình ở đâu?) và độ phân tán (các người bệnh khác nhau đến mức nào?).</a:t>
-            </a:r>
-          </a:p>
-          <a:p>
-            <a:r>
-              <a:rPr lang="en-US" sz="1400" b="0" dirty="0"/>
-              <a:t>Việc chọn giữa hai bộ (trung bình và SD, hay trung vị và IQR) phụ thuộc vào một điều: hình dạng của dữ liệu.</a:t>
-            </a:r>
-          </a:p>
-          <a:p>
-            <a:r>
-              <a:rPr lang="en-US" sz="1400" b="0" dirty="0"/>
-              <a:t>Chuyển ý: hãy nhìn vào biến số lệch nổi tiếng nhất trong y khoa bệnh viện: thời gian nằm viện.</a:t>
+              <a:t>Thông điệp: mỗi biến số cần một giá trị trung tâm và một độ phân tán. Hình dạng dữ liệu quyết định dùng cặp nào: trung bình (SD) hay trung vị (IQR).</a:t>
             </a:r>
           </a:p>
         </p:txBody>
@@ -2672,43 +2336,25 @@
           <a:p>
             <a:r>
               <a:rPr lang="en-US" sz="1400" b="0" dirty="0"/>
-              <a:t>Ví dụ minh họa (3 phút). Gõ bảy con số lên màn hình chia sẻ (bảng trắng hoặc một trang trống).</a:t>
+              <a:t>Ví dụ minh họa (3 phút). Gõ bảy số ngày nằm viện lên màn hình.</a:t>
             </a:r>
           </a:p>
           <a:p>
             <a:r>
               <a:rPr lang="en-US" sz="1400" b="0" dirty="0"/>
-              <a:t>Xếp hàng: đã được sắp xếp sẵn: 1, 2, 2, 3, 4, 6, 24.</a:t>
+              <a:t>Trung vị: người thứ 4, 3 ngày. Trung bình: 42 / 7 = 6 ngày. Một ca nằm lâu làm trung bình tăng gấp đôi.</a:t>
             </a:r>
           </a:p>
           <a:p>
             <a:r>
               <a:rPr lang="en-US" sz="1400" b="0" dirty="0"/>
-              <a:t>Trung vị: người ở giữa trong bảy người là người thứ 4: 3 ngày. Một nửa nằm ít hơn, một nửa nằm lâu hơn.</a:t>
+              <a:t>Hỏi: nếu người đó nằm 60 ngày? Kỳ vọng: trung vị vẫn là 3, trung bình khoảng 11.</a:t>
             </a:r>
           </a:p>
           <a:p>
             <a:r>
               <a:rPr lang="en-US" sz="1400" b="0" dirty="0"/>
-              <a:t>Trung bình: cộng lại: 1 + 2 + 2 + 3 + 4 + 6 + 24 = 42. Chia cho 7 = 6 ngày.</a:t>
-            </a:r>
-          </a:p>
-          <a:p>
-            <a:r>
-              <a:rPr lang="en-US" sz="1400" b="0" dirty="0"/>
-              <a:t>So sánh: sáu trong bảy người bệnh nằm 6 ngày hoặc ít hơn. Trung bình 6 bị kéo lên bởi một ca 24 ngày. Trung vị mô tả người bệnh điển hình.</a:t>
-            </a:r>
-          </a:p>
-          <a:p>
-            <a:r>
-              <a:rPr lang="en-US" sz="1400" b="0" dirty="0"/>
-              <a:t>Hỏi tiếp (mời hai ba người trả lời, bật micro): nếu ca nằm lâu nằm 60 ngày thay vì 24, điều gì xảy ra? Dự kiến: trung vị vẫn là 3, trung bình tăng lên khoảng 11 (78 / 7 = 11.1).</a:t>
-            </a:r>
-          </a:p>
-          <a:p>
-            <a:r>
-              <a:rPr lang="en-US" sz="1400" b="0" dirty="0"/>
-              <a:t>Đây là phép tính tay duy nhất hôm nay. Sau đó máy tính làm và anh chị diễn giải.</a:t>
+              <a:t>Đây là phép tính tay duy nhất hôm nay.</a:t>
             </a:r>
           </a:p>
         </p:txBody>
@@ -2789,43 +2435,19 @@
           <a:p>
             <a:r>
               <a:rPr lang="en-US" sz="1400" b="0" dirty="0"/>
-              <a:t>Ý chính: trung vị là người bệnh ở giữa khi xếp hàng tất cả mọi người. Trung bình là trung bình cộng.</a:t>
+              <a:t>Phần lớn người bệnh nằm 1 đến 5 ngày, vài người nằm hàng tuần: trung bình (3.9) bị kéo sang phải trung vị (2.8).</a:t>
             </a:r>
           </a:p>
           <a:p>
             <a:r>
               <a:rPr lang="en-US" sz="1400" b="0" dirty="0"/>
-              <a:t>Trong ICU mô phỏng này, phần lớn người bệnh nằm 1 đến 5 ngày, nhưng một số ít nằm 3 đến 6 tuần. Vài ca nằm lâu đó kéo trung bình sang phải (3.9 ngày) trong khi trung vị vẫn ở cạnh người bệnh điển hình (2.8 ngày).</a:t>
+              <a:t>Quy tắc nhanh: trung bình và trung vị cách xa nhau nghĩa là phân bố lệch, hãy báo cáo trung vị.</a:t>
             </a:r>
           </a:p>
           <a:p>
             <a:r>
               <a:rPr lang="en-US" sz="1400" b="0" dirty="0"/>
-              <a:t>Diễn giải lâm sàng: nếu lãnh đạo nói 'thời gian nằm ICU trung bình là 3.9 ngày', thì phần lớn người bệnh của anh chị thực ra rời ICU sớm hơn thế.</a:t>
-            </a:r>
-          </a:p>
-          <a:p>
-            <a:r>
-              <a:rPr lang="en-US" sz="1400" b="0" dirty="0"/>
-              <a:t>Quan niệm sai: 'trung bình luôn là con số đúng'. Với dữ liệu lệch, nó không mô tả người bệnh thật nào cả.</a:t>
-            </a:r>
-          </a:p>
-          <a:p>
-            <a:r>
-              <a:rPr lang="en-US" sz="1400" b="0" dirty="0"/>
-              <a:t>Quy tắc nhanh: nếu trung bình và trung vị cách xa nhau, dữ liệu bị lệch: hãy báo cáo trung vị.</a:t>
-            </a:r>
-          </a:p>
-          <a:p>
-            <a:r>
-              <a:rPr lang="en-US" sz="1400" b="0" dirty="0"/>
-              <a:t>Hỏi (mời hai ba người trả lời, bật micro): kể tên các biến lệch khác trong công việc của anh chị. Dự kiến: chi phí điều trị, CRP, troponin, thời gian đến khi dùng kháng sinh, số ngày thở máy.</a:t>
-            </a:r>
-          </a:p>
-          <a:p>
-            <a:r>
-              <a:rPr lang="en-US" sz="1400" b="0" dirty="0"/>
-              <a:t>Ví dụ xuyên suốt: Bài báo 1 (Boulet 2024) báo cáo cân bằng dịch tích lũy bằng trung vị (6.9 so với 35.0 ml/kg) chính vì lý do này.</a:t>
+              <a:t>Hỏi: biến nào khác trong công việc của anh chị bị lệch? Kỳ vọng: chi phí, CRP, số ngày thở máy.</a:t>
             </a:r>
           </a:p>
         </p:txBody>
@@ -2906,37 +2528,19 @@
           <a:p>
             <a:r>
               <a:rPr lang="en-US" sz="1400" b="0" dirty="0"/>
-              <a:t>Ý chính: độ phân tán cho biết các người bệnh khác nhau đến mức nào.</a:t>
+              <a:t>Dữ liệu đối xứng: trung bình (SD). Dữ liệu lệch: trung vị (IQR), tức nửa giữa của người bệnh.</a:t>
             </a:r>
           </a:p>
           <a:p>
             <a:r>
               <a:rPr lang="en-US" sz="1400" b="0" dirty="0"/>
-              <a:t>Bên trái: tuổi gần đối xứng. Độ lệch chuẩn (SD) là khoảng cách điển hình từ một người bệnh đến giá trị trung bình. Với dữ liệu hình chuông, khoảng hai phần ba người bệnh nằm trong phạm vi một SD quanh trung bình.</a:t>
+              <a:t>Đọc to 'trung vị 2.8 (IQR 1.5-4.7)' bằng lời đơn giản.</a:t>
             </a:r>
           </a:p>
           <a:p>
             <a:r>
               <a:rPr lang="en-US" sz="1400" b="0" dirty="0"/>
-              <a:t>Bên phải: thời gian nằm ICU bị lệch. Biểu đồ hộp thể hiện trung vị (vạch đậm), hộp từ bách phân vị 25 đến 75 (khoảng tứ phân vị, IQR: 50% người bệnh ở giữa), các râu và giá trị ngoại lai là các chấm.</a:t>
-            </a:r>
-          </a:p>
-          <a:p>
-            <a:r>
-              <a:rPr lang="en-US" sz="1400" b="0" dirty="0"/>
-              <a:t>Cách đọc 'trung vị 2.8 (IQR 1.5-4.7)': một nửa số người bệnh nằm dưới 2.8 ngày. Một nửa ở giữa nằm từ 1.5 đến 4.7 ngày.</a:t>
-            </a:r>
-          </a:p>
-          <a:p>
-            <a:r>
-              <a:rPr lang="en-US" sz="1400" b="0" dirty="0"/>
-              <a:t>Lỗi thường gặp: báo cáo trung bình kèm IQR, hoặc trung vị kèm SD. Và nhầm SD (độ phân tán của người bệnh) với sai số chuẩn hay khoảng tin cậy (độ chính xác của ước lượng), sẽ học ở phần 6.1.</a:t>
-            </a:r>
-          </a:p>
-          <a:p>
-            <a:r>
-              <a:rPr lang="en-US" sz="1400" b="0" dirty="0"/>
-              <a:t>Ví dụ Bài báo 1: cân bằng dịch nhóm chứng 'trung vị 35.0 (IQR -7.9, 40.2)'. Chỉ ra tứ phân vị dưới là số âm: một phần tư người bệnh có cân bằng dịch âm.</a:t>
+              <a:t>Lỗi thường gặp: trung bình đi với IQR, trung vị đi với SD, và nhầm SD (độ phân tán giữa người bệnh) với KTC (độ chính xác, 6.1).</a:t>
             </a:r>
           </a:p>
         </p:txBody>
@@ -3017,49 +2621,19 @@
           <a:p>
             <a:r>
               <a:rPr lang="en-US" sz="1400" b="0" dirty="0"/>
-              <a:t>Ý chính: hai hình dạng bao phủ phần lớn dữ liệu lâm sàng.</a:t>
+              <a:t>Hai hình dạng bao phủ phần lớn dữ liệu lâm sàng: đối xứng (sinh lý, kích thước cơ thể) và lệch phải (thời gian, số đếm, chi phí, xét nghiệm không thể dưới 0).</a:t>
             </a:r>
           </a:p>
           <a:p>
             <a:r>
               <a:rPr lang="en-US" sz="1400" b="0" dirty="0"/>
-              <a:t>Vì sao là hai hình dạng này (câu hỏi của người phản biện): hầu hết số đo lâm sàng hoặc tập trung quanh một giá trị điển hình (kích thước cơ thể, các chỉ số sinh lý được cơ thể điều hòa chặt: đối xứng), hoặc không thể nhỏ hơn 0 nhưng có thể rất cao (thời gian, số đếm, chi phí, dấu ấn viêm: lệch phải). Hai dạng này bao phủ phần lớn biến số trong một bộ dữ liệu lâm sàng và dẫn tới hai cách tóm tắt dữ liệu.</a:t>
+              <a:t>Hình dạng cũng quyết định kiểm định ở 6.1.</a:t>
             </a:r>
           </a:p>
           <a:p>
             <a:r>
               <a:rPr lang="en-US" sz="1400" b="0" dirty="0"/>
-              <a:t>Có những hình dạng khác nhưng hiếm hơn: lệch trái (có trần, ví dụ tuổi thai lúc sinh, độ bão hòa oxy), hai đỉnh (trộn hai nhóm, ví dụ tuổi ở một khoa nhận cả trẻ em và người lớn). Với mọi hình dạng không rõ ràng là đối xứng, hãy trình bày biểu đồ tần suất và báo cáo trung vị (IQR).</a:t>
-            </a:r>
-          </a:p>
-          <a:p>
-            <a:r>
-              <a:rPr lang="en-US" sz="1400" b="0" dirty="0"/>
-              <a:t>Đối xứng, hình chuông (thường gọi là 'phân phối chuẩn'): trung bình và trung vị trùng nhau. Ví dụ: tuổi ở người lớn, chiều cao, hemoglobin, huyết áp tâm thu. Báo cáo trung bình (SD).</a:t>
-            </a:r>
-          </a:p>
-          <a:p>
-            <a:r>
-              <a:rPr lang="en-US" sz="1400" b="0" dirty="0"/>
-              <a:t>Lệch phải: một đuôi dài các giá trị cao kéo trung bình sang phải trung vị. Ví dụ: thời gian nằm viện, chi phí, CRP, nhiều xét nghiệm không thể âm. Báo cáo trung vị (IQR).</a:t>
-            </a:r>
-          </a:p>
-          <a:p>
-            <a:r>
-              <a:rPr lang="en-US" sz="1400" b="0" dirty="0"/>
-              <a:t>Kiểm tra nhanh không cần phần mềm: nếu SD lớn hơn một nửa giá trị trung bình với một biến không thể âm, nhiều khả năng biến đó bị lệch.</a:t>
-            </a:r>
-          </a:p>
-          <a:p>
-            <a:r>
-              <a:rPr lang="en-US" sz="1400" b="0" dirty="0"/>
-              <a:t>Vì sao quan trọng về sau: hình dạng cũng quyết định kiểm định (kiểm định t cho dữ liệu đối xứng, Mann-Whitney cho dữ liệu lệch). Đó là bảng chọn kiểm định ở phần 6.1.</a:t>
-            </a:r>
-          </a:p>
-          <a:p>
-            <a:r>
-              <a:rPr lang="en-US" sz="1400" b="0" dirty="0"/>
-              <a:t>Hỏi (mời hai ba người trả lời, bật micro): 'số ngày dùng vận mạch' đối xứng hay lệch? Dự kiến: lệch (phần lớn người bệnh 1-3 ngày, một số vài tuần).</a:t>
+              <a:t>Hỏi: số ngày dùng vận mạch đối xứng hay lệch? Kỳ vọng: lệch.</a:t>
             </a:r>
           </a:p>
         </p:txBody>
@@ -3140,43 +2714,19 @@
           <a:p>
             <a:r>
               <a:rPr lang="en-US" sz="1400" b="0" dirty="0"/>
-              <a:t>Kiểm tra nhanh (3 phút), giữa phần 5.3. Làm dưới dạng bình chọn (mỗi câu một lượt).</a:t>
+              <a:t>Kiểm tra (3 phút), mỗi mục một cuộc thăm dò.</a:t>
             </a:r>
           </a:p>
           <a:p>
             <a:r>
               <a:rPr lang="en-US" sz="1400" b="0" dirty="0"/>
-              <a:t>C1: trung vị (IQR): thời gian nằm viện lệch phải.</a:t>
+              <a:t>Thời gian nằm viện: trung vị (IQR). Tuổi: trung bình (SD). Thở máy: n (%). Giai đoạn AKI: n (%) theo từng giai đoạn kèm biểu đồ cột, không bao giờ dùng 'giai đoạn trung bình'.</a:t>
             </a:r>
           </a:p>
           <a:p>
             <a:r>
               <a:rPr lang="en-US" sz="1400" b="0" dirty="0"/>
-              <a:t>C2: trung bình (SD): dữ liệu hình chuông.</a:t>
-            </a:r>
-          </a:p>
-          <a:p>
-            <a:r>
-              <a:rPr lang="en-US" sz="1400" b="0" dirty="0"/>
-              <a:t>C3: n (%): biến nhị phân không có trung bình hay SD. Báo cáo số lượng và phần trăm.</a:t>
-            </a:r>
-          </a:p>
-          <a:p>
-            <a:r>
-              <a:rPr lang="en-US" sz="1400" b="0" dirty="0"/>
-              <a:t>C4: n (%) cho từng giai đoạn, thể hiện bằng biểu đồ cột. Trung vị giai đoạn cũng chấp nhận được với biến thứ hạng. Không báo cáo 'giai đoạn trung bình 1.8'.</a:t>
-            </a:r>
-          </a:p>
-          <a:p>
-            <a:r>
-              <a:rPr lang="en-US" sz="1400" b="0" dirty="0"/>
-              <a:t>Nếu nhiều người sai C1, quay lại trang biểu đồ tần suất một phút.</a:t>
-            </a:r>
-          </a:p>
-          <a:p>
-            <a:r>
-              <a:rPr lang="en-US" sz="1400" b="0" dirty="0"/>
-              <a:t>Chuyển ý: giờ là cách trình bày các con số tóm tắt: biểu đồ, hình và bảng.</a:t>
+              <a:t>Nếu nhiều người sai mục 1, quay lại biểu đồ tần suất.</a:t>
             </a:r>
           </a:p>
         </p:txBody>
@@ -3257,31 +2807,19 @@
           <a:p>
             <a:r>
               <a:rPr lang="en-US" sz="1400" b="0" dirty="0"/>
-              <a:t>Mở đầu phần 5.1 (35 phút, 19:40 đến 20:15: loại biến số kèm kiểm tra nhanh, thiết kế CRF với ví dụ minh họa, từ điển dữ liệu, kiểm tra dữ liệu, quản lý dữ liệu, dữ liệu bị thiếu, rồi 7 phút cả lớp cùng sửa các mục CRF).</a:t>
+              <a:t>Phần 5.1 (19:40-20:15).</a:t>
             </a:r>
           </a:p>
           <a:p>
             <a:r>
               <a:rPr lang="en-US" sz="1400" b="0" dirty="0"/>
-              <a:t>Thông điệp chính: phần lớn vấn đề trong nghiên cứu lâm sàng nằm ở dữ liệu hơn là ở khâu phân tích. Sáu tháng sau, nhà thống kê không thể sửa một ô bị bỏ trống, một đơn vị bị thiếu hay một giá trị vô lý.</a:t>
+              <a:t>Thông điệp: phần lớn vấn đề nằm ở dữ liệu, không ở phân tích. Nhà thống kê không thể sửa một ô bị bỏ trống về sau.</a:t>
             </a:r>
           </a:p>
           <a:p>
             <a:r>
               <a:rPr lang="en-US" sz="1400" b="0" dirty="0"/>
-              <a:t>Dữ liệu vào kém thì kết quả ra kém: chất lượng câu trả lời bị giới hạn bởi chất lượng phiếu thu thập.</a:t>
-            </a:r>
-          </a:p>
-          <a:p>
-            <a:r>
-              <a:rPr lang="en-US" sz="1400" b="0" dirty="0"/>
-              <a:t>Hỏi cả lớp (mời hai ba người trả lời, bật micro): có ai từng được nhờ 'giúp xử lý số liệu' sau khi nghiên cứu kết thúc, rồi phát hiện một nửa số phiếu không đầy đủ? Mời một hai người bật micro kể lại trong một câu.</a:t>
-            </a:r>
-          </a:p>
-          <a:p>
-            <a:r>
-              <a:rPr lang="en-US" sz="1400" b="0" dirty="0"/>
-              <a:t>Chuyển ý: bắt đầu từ quyết định cơ bản nhất: anh chị đang thu thập loại biến số nào? Điều đó quyết định cách viết câu hỏi trong CRF, cách tóm tắt và kiểm định cần dùng.</a:t>
+              <a:t>Hỏi: ai từng được nhờ 'giúp phần số liệu' và thấy một nửa số phiếu bị thiếu?</a:t>
             </a:r>
           </a:p>
         </p:txBody>
@@ -3362,43 +2900,13 @@
           <a:p>
             <a:r>
               <a:rPr lang="en-US" sz="1400" b="0" dirty="0"/>
-              <a:t>Ý chính: bốn loại biểu đồ bao phủ phần lớn nhu cầu mô tả dữ liệu. Đường cong sống còn (Kaplan-Meier) được giới thiệu ở Buổi 6, khi phân tích kết cục thời gian đến sự kiện.</a:t>
+              <a:t>Bốn biểu đồ đủ cho phần lớn nhu cầu: biểu đồ cột (một biến phân nhóm), biểu đồ tần suất (một biến số), biểu đồ hộp (một biến số theo nhóm), biểu đồ phân tán (hai biến số).</a:t>
             </a:r>
           </a:p>
           <a:p>
             <a:r>
               <a:rPr lang="en-US" sz="1400" b="0" dirty="0"/>
-              <a:t>Một biến phân loại: biểu đồ cột với số lượng hoặc phần trăm (nguồn nhiễm khuẩn). Tránh biểu đồ tròn 3 chiều.</a:t>
-            </a:r>
-          </a:p>
-          <a:p>
-            <a:r>
-              <a:rPr lang="en-US" sz="1400" b="0" dirty="0"/>
-              <a:t>Một biến số: biểu đồ tần suất (histogram) để thấy hình dạng (thời gian nằm viện).</a:t>
-            </a:r>
-          </a:p>
-          <a:p>
-            <a:r>
-              <a:rPr lang="en-US" sz="1400" b="0" dirty="0"/>
-              <a:t>Một biến số so sánh giữa các nhóm: các biểu đồ hộp đặt cạnh nhau (cân bằng dịch ở nhóm hạn chế dịch so với thường quy).</a:t>
-            </a:r>
-          </a:p>
-          <a:p>
-            <a:r>
-              <a:rPr lang="en-US" sz="1400" b="0" dirty="0"/>
-              <a:t>Hai biến số: biểu đồ phân tán (cân bằng dịch theo lactat).</a:t>
-            </a:r>
-          </a:p>
-          <a:p>
-            <a:r>
-              <a:rPr lang="en-US" sz="1400" b="0" dirty="0"/>
-              <a:t>Lỗi thường gặp: biểu đồ cột thể hiện trung bình với thanh sai số nhỏ cho dữ liệu lệch. Nó che giấu hình dạng và các giá trị ngoại lai. Biểu đồ hộp cho thấy nhiều hơn hẳn.</a:t>
-            </a:r>
-          </a:p>
-          <a:p>
-            <a:r>
-              <a:rPr lang="en-US" sz="1400" b="0" dirty="0"/>
-              <a:t>Hỏi (mời hai ba người trả lời, bật micro): anh chị dùng biểu đồ nào để so sánh thời gian nằm ICU giữa hai nhóm dịch truyền? Dự kiến: các biểu đồ hộp đặt cạnh nhau (biến số lệch, theo nhóm).</a:t>
+              <a:t>Hỏi: biểu đồ nào so sánh thời gian nằm ICU giữa hai nhóm dịch? Kỳ vọng: các biểu đồ hộp đặt cạnh nhau.</a:t>
             </a:r>
           </a:p>
         </p:txBody>
@@ -3479,43 +2987,25 @@
           <a:p>
             <a:r>
               <a:rPr lang="en-US" sz="1400" b="0" dirty="0"/>
-              <a:t>Ý chính: 'biểu đồ thuốc nổ' (dynamite plot: cột trung bình kèm thanh sai số) là hình xấu phổ biến nhất trên các tạp chí lâm sàng. Nó chỉ cho thấy hai con số mỗi nhóm và che giấu phần còn lại.</a:t>
+              <a:t>Biểu đồ 'thuốc nổ' che mất hình dạng và giá trị ngoại lai. Các chấm cho thấy một người bệnh 160 ml/kg kéo trung bình lên và hai nhóm chồng lấn nhiều.</a:t>
             </a:r>
           </a:p>
           <a:p>
             <a:r>
               <a:rPr lang="en-US" sz="1400" b="0" dirty="0"/>
-              <a:t>Bên trái: các cột gợi ý nhóm thường quy có cân bằng dịch cao hơn nhiều. Bên phải: cùng dữ liệu mô phỏng thể hiện bằng các chấm kèm biểu đồ hộp. Giờ thấy rõ một người bệnh cực đoan (160 ml/kg) kéo trung bình nhóm thường quy lên, dữ liệu bị lệch, và hai nhóm chồng lấp nhiều.</a:t>
+              <a:t>Luôn ghi thanh sai số là SD, SE hay KTC 95%.</a:t>
             </a:r>
           </a:p>
           <a:p>
             <a:r>
               <a:rPr lang="en-US" sz="1400" b="0" dirty="0"/>
-              <a:t>Chú ý thêm: hình bên trái dùng sai số chuẩn (SE), không phải SD, làm độ phân tán trông nhỏ. Luôn ghi rõ thanh sai số là SD, SE hay KTC 95%.</a:t>
+              <a:t>Hỏi: chỉ nhìn hình bên trái, anh chị sẽ kết luận gì?</a:t>
             </a:r>
           </a:p>
           <a:p>
             <a:r>
               <a:rPr lang="en-US" sz="1400" b="0" dirty="0"/>
-              <a:t>Quy tắc: với ít hơn khoảng 100 người bệnh mỗi nhóm, hãy thể hiện từng điểm dữ liệu.</a:t>
-            </a:r>
-          </a:p>
-          <a:p>
-            <a:r>
-              <a:rPr lang="en-US" sz="1400" b="0" dirty="0"/>
-              <a:t>Nhiều tạp chí hiện nay khuyến cáo rõ không dùng biểu đồ cột cho dữ liệu liên tục.</a:t>
-            </a:r>
-          </a:p>
-          <a:p>
-            <a:r>
-              <a:rPr lang="en-US" sz="1400" b="0" dirty="0"/>
-              <a:t>Hỏi (mời hai ba người trả lời, bật micro): chỉ nhìn hình bên trái, anh chị sẽ kết luận gì? Dự kiến: 'nhóm thường quy rõ ràng cao hơn'. Đó chính là mối nguy.</a:t>
-            </a:r>
-          </a:p>
-          <a:p>
-            <a:r>
-              <a:rPr lang="en-US" sz="1400" b="0" dirty="0"/>
-              <a:t>Thời lượng: 2 phút.</a:t>
+              <a:t>Thời gian: 2 phút.</a:t>
             </a:r>
           </a:p>
         </p:txBody>
@@ -3596,49 +3086,25 @@
           <a:p>
             <a:r>
               <a:rPr lang="en-US" sz="1400" b="0" dirty="0"/>
-              <a:t>Ý chính: Bảng 1 (bảng đặc điểm nền) trong hầu hết các bài báo lâm sàng mô tả đặc điểm ban đầu của người bệnh theo từng nhóm.</a:t>
+              <a:t>Bảng 1 mô tả người bệnh lúc ban đầu, theo nhóm. Cách tóm tắt ghi ngay ở nhãn dòng.</a:t>
             </a:r>
           </a:p>
           <a:p>
             <a:r>
               <a:rPr lang="en-US" sz="1400" b="0" dirty="0"/>
-              <a:t>Đọc từng dòng: cách tóm tắt được ghi ngay trong nhãn dòng. Biến đối xứng dùng trung bình (SD), biến lệch dùng trung vị (IQR), biến phân loại dùng n (%).</a:t>
+              <a:t>Hai câu hỏi: những người bệnh này có giống người bệnh của tôi không, và các nhóm có giống nhau lúc ban đầu không?</a:t>
             </a:r>
           </a:p>
           <a:p>
             <a:r>
               <a:rPr lang="en-US" sz="1400" b="0" dirty="0"/>
-              <a:t>Hai câu hỏi cho mọi Bảng 1: (1) Những người bệnh này có giống người bệnh của tôi không? (khả năng khái quát hóa) (2) Các nhóm có giống nhau lúc ban đầu không? (so sánh công bằng).</a:t>
+              <a:t>Trong thử nghiệm, khác biệt là do ngẫu nhiên (không cần giá trị p). Trong thuần tập, khác biệt lớn là dấu hiệu nhiễu.</a:t>
             </a:r>
           </a:p>
           <a:p>
             <a:r>
               <a:rPr lang="en-US" sz="1400" b="0" dirty="0"/>
-              <a:t>Trong RCT, các nhóm sẽ giống nhau một cách ngẫu nhiên nhờ phân bổ ngẫu nhiên. Khác biệt nhỏ là bình thường. Nhiều hướng dẫn (CONSORT, hướng dẫn báo cáo thử nghiệm) khuyên không dùng giá trị p trong Bảng 1 của RCT, vì mọi khác biệt theo định nghĩa đều do ngẫu nhiên.</a:t>
-            </a:r>
-          </a:p>
-          <a:p>
-            <a:r>
-              <a:rPr lang="en-US" sz="1400" b="0" dirty="0"/>
-              <a:t>Trong nghiên cứu thuần tập (Bài báo 2), khác biệt lớn lúc ban đầu là dấu hiệu cảnh báo nhiễu. Đó là lý do Bài báo 2 ghép cặp người bệnh theo điểm xu hướng trước khi so sánh.</a:t>
-            </a:r>
-          </a:p>
-          <a:p>
-            <a:r>
-              <a:rPr lang="en-US" sz="1400" b="0" dirty="0"/>
-              <a:t>Số liệu trên trang là minh họa, không lấy từ Bài báo 1. Bảng 1 thật của Bài báo 1 có 24 người bệnh mỗi nhóm. Học viên có thể mở xem trong Course/Papers.</a:t>
-            </a:r>
-          </a:p>
-          <a:p>
-            <a:r>
-              <a:rPr lang="en-US" sz="1400" b="0" dirty="0"/>
-              <a:t>Hỏi (mời hai ba người trả lời, bật micro): anh chị lo ngại điều gì nếu nhóm hạn chế dịch có SOFA trung vị 6 còn nhóm thường quy là 11? Dự kiến: hai nhóm không so sánh được. Một nhánh có người bệnh nặng hơn.</a:t>
-            </a:r>
-          </a:p>
-          <a:p>
-            <a:r>
-              <a:rPr lang="en-US" sz="1400" b="0" dirty="0"/>
-              <a:t>Trang này giờ là bảng chỉnh sửa được (trước đây là ảnh). Thời lượng: 2 phút. Tiếp theo: một bảng được viết chưa tốt và tốt.</a:t>
+              <a:t>Số liệu chỉ để minh họa.</a:t>
             </a:r>
           </a:p>
         </p:txBody>
@@ -3719,61 +3185,19 @@
           <a:p>
             <a:r>
               <a:rPr lang="en-US" sz="1400" b="0" dirty="0"/>
-              <a:t>Ý chính: một bảng trong bài báo phải tự giải thích được, không cần đọc phần chữ. So sánh hai phiên bản theo từng dòng. (Hai bảng này cố ý giữ dạng ảnh: bảng chưa tốt cho thấy lỗi định dạng, như kẻ ô dày đặc, mà bảng gốc trên trang chiếu sẽ không thể hiện được.)</a:t>
+              <a:t>Bảng phải tự đọc hiểu được. So sánh từng dòng: tên nhóm và n ở tiêu đề cột, đơn vị và cách tóm tắt ở nhãn dòng, số thập phân hợp lý, chú thích chữ viết tắt.</a:t>
             </a:r>
           </a:p>
           <a:p>
             <a:r>
               <a:rPr lang="en-US" sz="1400" b="0" dirty="0"/>
-              <a:t>Tiêu đề cột: 'Nhóm A / Nhóm B' không cho người đọc biết gì. Hãy ghi tên nhóm và số người bệnh mỗi cột (n = 24).</a:t>
+              <a:t>Hỏi: tìm bốn lỗi trong bảng bên trái trong 30 giây.</a:t>
             </a:r>
           </a:p>
           <a:p>
             <a:r>
               <a:rPr lang="en-US" sz="1400" b="0" dirty="0"/>
-              <a:t>Nhãn dòng: ghi đơn vị và cách tóm tắt: 'Tuổi, năm, trung bình (SD)', 'Lactat, mmol/L, trung vị (IQR)'.</a:t>
-            </a:r>
-          </a:p>
-          <a:p>
-            <a:r>
-              <a:rPr lang="en-US" sz="1400" b="0" dirty="0"/>
-              <a:t>Con số: số thập phân hợp lý và nhất quán: tuổi là số năm nguyên, phần trăm không cần số thập phân với mẫu nhỏ, lactat một chữ số thập phân. 63.4567 gợi ý một độ chính xác không hề có.</a:t>
-            </a:r>
-          </a:p>
-          <a:p>
-            <a:r>
-              <a:rPr lang="en-US" sz="1400" b="0" dirty="0"/>
-              <a:t>Biến phân loại ghi n (%), không bao giờ ghi tỷ lệ như 0.375.</a:t>
-            </a:r>
-          </a:p>
-          <a:p>
-            <a:r>
-              <a:rPr lang="en-US" sz="1400" b="0" dirty="0"/>
-              <a:t>Chú thích giải thích mọi chữ viết tắt (SOFA, IQR) và, nếu có giá trị p, kiểm định đã dùng. Trong Bảng 1 của RCT, không đưa giá trị p (CONSORT).</a:t>
-            </a:r>
-          </a:p>
-          <a:p>
-            <a:r>
-              <a:rPr lang="en-US" sz="1400" b="0" dirty="0"/>
-              <a:t>Không kẻ dọc, ít kẻ ngang. Tạp chí sẽ dàn trang lại, nhưng người phản biện vẫn để ý bảng lộn xộn.</a:t>
-            </a:r>
-          </a:p>
-          <a:p>
-            <a:r>
-              <a:rPr lang="en-US" sz="1400" b="0" dirty="0"/>
-              <a:t>Mẫu đề cương và Buổi 7-8 (viết bài báo) dùng đúng các quy tắc này.</a:t>
-            </a:r>
-          </a:p>
-          <a:p>
-            <a:r>
-              <a:rPr lang="en-US" sz="1400" b="0" dirty="0"/>
-              <a:t>Hỏi (mời hai ba người trả lời, bật micro): tìm bốn lỗi trong bảng bên trái trong 30 giây. Dự kiến: không có n, không đơn vị, không %, quá nhiều số thập phân, SOFA không giải thích, giá trị p trong RCT.</a:t>
-            </a:r>
-          </a:p>
-          <a:p>
-            <a:r>
-              <a:rPr lang="en-US" sz="1400" b="0" dirty="0"/>
-              <a:t>Thời lượng: 2 phút.</a:t>
+              <a:t>Thời gian: 2 phút.</a:t>
             </a:r>
           </a:p>
         </p:txBody>
@@ -3854,13 +3278,7 @@
           <a:p>
             <a:r>
               <a:rPr lang="en-US" sz="1400" b="0" dirty="0"/>
-              <a:t>Mở đầu phần 5.4 (25 phút, 21:30 đến 21:55: trình diễn trực tiếp Bảng 1 và biểu đồ 6 phút, bốn trang kết quả FLUID-ICU, rồi 10 phút cả lớp cùng đọc Bảng 1).</a:t>
-            </a:r>
-          </a:p>
-          <a:p>
-            <a:r>
-              <a:rPr lang="en-US" sz="1400" b="0" dirty="0"/>
-              <a:t>Thông điệp chính: mọi điều ở phần 5.3 (hình dạng, trung bình hay trung vị, biểu đồ nào, Bảng 1) giờ áp dụng cho FLUID-ICU. Cùng quy tắc, con số thật (mô phỏng).</a:t>
+              <a:t>Phần 5.4 (21:30-21:55): áp dụng các quy tắc của 5.3 cho FLUID-ICU. Trình diễn, bốn trang kết quả, rồi 10 phút cả lớp cùng đọc Bảng 1.</a:t>
             </a:r>
           </a:p>
         </p:txBody>
@@ -3941,25 +3359,25 @@
           <a:p>
             <a:r>
               <a:rPr lang="en-US" sz="1400" b="0" dirty="0"/>
-              <a:t>Trình diễn trực tiếp trên màn hình chia sẻ, 6 phút. Kịch bản đầy đủ: Course/Demos/s5_demo.md (Phần B), dùng Course/Data/R/02_describe.R.</a:t>
+              <a:t>Trình diễn trực tiếp, 6 phút. Kịch bản: s5_demo_VN.md, Phần B (02_describe.R).</a:t>
             </a:r>
           </a:p>
           <a:p>
             <a:r>
               <a:rPr lang="en-US" sz="1400" b="0" dirty="0"/>
-              <a:t>Cho thấy: hình dạng của tuổi (gần đối xứng, nên dùng trung bình và SD) so với lactat và thời gian nằm ICU (lệch phải, nên dùng trung vị và IQR). Bảng 1 theo nhóm cân bằng dịch với các cột chung, âm (n = 245) và dương (n = 373) và số thiếu mỗi biến. Biểu đồ tần suất cân bằng dịch, biểu đồ hộp SOFA theo nhóm, biểu đồ cột nguồn nhiễm khuẩn đã sắp xếp.</a:t>
+              <a:t>Cho xem hình dạng trước, rồi Bảng 1 theo nhóm cân bằng dịch kèm số giá trị thiếu, rồi các hình.</a:t>
             </a:r>
           </a:p>
           <a:p>
             <a:r>
               <a:rPr lang="en-US" sz="1400" b="0" dirty="0"/>
-              <a:t>Nhấn mạnh: không có giá trị p trong Bảng 1 (bảng mô tả, không kiểm định), như đã ghi trong SAP của FLUID-ICU.</a:t>
+              <a:t>Không có giá trị p trong Bảng 1, đúng như SAP.</a:t>
             </a:r>
           </a:p>
           <a:p>
             <a:r>
               <a:rPr lang="en-US" sz="1400" b="0" dirty="0"/>
-              <a:t>Nếu R lỗi: chuyển ngay sang các trang sau. Chúng cho thấy cùng kết quả.</a:t>
+              <a:t>Nếu R lỗi, các trang sau có cùng kết quả.</a:t>
             </a:r>
           </a:p>
         </p:txBody>
@@ -4040,37 +3458,25 @@
           <a:p>
             <a:r>
               <a:rPr lang="en-US" sz="1400" b="0" dirty="0"/>
-              <a:t>Ý chính: đọc Bảng 1 với hai câu hỏi từ phần 5.3: người bệnh này có giống người bệnh của tôi không, và các nhóm có giống nhau lúc đầu không?</a:t>
+              <a:t>Đọc với hai câu hỏi của 5.3.</a:t>
             </a:r>
           </a:p>
           <a:p>
             <a:r>
               <a:rPr lang="en-US" sz="1400" b="0" dirty="0"/>
-              <a:t>Tuổi: trung bình 64.6 so với 61.4 năm (âm so với dương): tương tự.</a:t>
+              <a:t>Tuổi tương tự. Mức độ nặng thì không: SOFA 6 so với 8, vận mạch 24.9% so với 55.0%, thở máy 39.6% so với 57.9%. Suy tim theo chiều ngược lại (22.0% so với 11.5%).</a:t>
             </a:r>
           </a:p>
           <a:p>
             <a:r>
               <a:rPr lang="en-US" sz="1400" b="0" dirty="0"/>
-              <a:t>Mức độ nặng không tương tự: SOFA trung vị 6 (4 đến 8) so với 8 (6 đến 10). Vận mạch 61/245 (24.9%) so với 205/373 (55.0%). Thở máy 97/245 (39.6%) so với 216/373 (57.9%). Lactat trung vị 2.2 so với 2.9 mmol/L.</a:t>
+              <a:t>Người nặng hơn được truyền nhiều dịch hơn: nhiễu do chỉ định.</a:t>
             </a:r>
           </a:p>
           <a:p>
             <a:r>
               <a:rPr lang="en-US" sz="1400" b="0" dirty="0"/>
-              <a:t>Suy tim: 54/245 (22.0%) so với 43/373 (11.5%): bác sĩ truyền ít dịch hơn cho người bệnh suy tim.</a:t>
-            </a:r>
-          </a:p>
-          <a:p>
-            <a:r>
-              <a:rPr lang="en-US" sz="1400" b="0" dirty="0"/>
-              <a:t>Diễn giải: người bệnh có cân bằng dương đã nặng hơn trước khi được truyền dịch. Người bệnh nặng hơn được truyền nhiều dịch hơn và tử vong nhiều hơn: nhiễu do chỉ định (Buổi 4). Mọi so sánh thô về tử vong sẽ bị sai lệch. Buổi 6 sẽ hiệu chỉnh.</a:t>
-            </a:r>
-          </a:p>
-          <a:p>
-            <a:r>
-              <a:rPr lang="en-US" sz="1400" b="0" dirty="0"/>
-              <a:t>Hỏi (bình chọn, hoặc mời hai ba người trả lời): chỉ từ bảng này, anh chị dự đoán tỷ số chênh (OR) thô cho tử vong lớn hơn hay nhỏ hơn OR đã hiệu chỉnh? Dự kiến: lớn hơn (mức độ nặng làm nó phình lên).</a:t>
+              <a:t>Hỏi: OR thô lớn hơn hay nhỏ hơn OR đã hiệu chỉnh? Kỳ vọng: lớn hơn.</a:t>
             </a:r>
           </a:p>
         </p:txBody>
@@ -4151,25 +3557,13 @@
           <a:p>
             <a:r>
               <a:rPr lang="en-US" sz="1400" b="0" dirty="0"/>
-              <a:t>Ý chính: luôn nhìn phơi nhiễm trước khi sử dụng.</a:t>
+              <a:t>Xem biến phơi nhiễm trước khi dùng: trung vị 8.8 ml/kg (IQR -10.3 đến 26.2), dương ở 373 trên 618.</a:t>
             </a:r>
           </a:p>
           <a:p>
             <a:r>
               <a:rPr lang="en-US" sz="1400" b="0" dirty="0"/>
-              <a:t>Cân bằng dịch tích lũy ngày 3 dao động rộng. Trung vị 8.8 ml/kg (IQR -10.3 đến 26.2). 373 trong 618 người bệnh (60.4%) có cân bằng dương.</a:t>
-            </a:r>
-          </a:p>
-          <a:p>
-            <a:r>
-              <a:rPr lang="en-US" sz="1400" b="0" dirty="0"/>
-              <a:t>Phân tích chính (Q1) cắt biến liên tục tại 0 ml/kg thành hai nhóm. Q2 và Q3 giữ dạng liên tục (mỗi 10 ml/kg). Cắt làm mất thông tin nhưng dễ giải thích hơn. SAP đã cố định lựa chọn này từ trước.</a:t>
-            </a:r>
-          </a:p>
-          <a:p>
-            <a:r>
-              <a:rPr lang="en-US" sz="1400" b="0" dirty="0"/>
-              <a:t>Hỏi (mời hai ba người trả lời, bật micro): anh chị báo cáo biến này trong Bảng 1 bằng cách nào? Dự kiến: trung vị (IQR), như ở đây, vì có đuôi. Phần giữa gần đối xứng nên trung bình (SD) cũng chấp nhận được nếu nói rõ.</a:t>
+              <a:t>Q1 cắt tại 0 ml/kg. Q2 và Q3 giữ dạng liên tục (mỗi 10 ml/kg). SAP đã quyết định điều này từ trước.</a:t>
             </a:r>
           </a:p>
         </p:txBody>
@@ -4250,25 +3644,19 @@
           <a:p>
             <a:r>
               <a:rPr lang="en-US" sz="1400" b="0" dirty="0"/>
-              <a:t>Ý chính: biểu đồ 'chấm kèm hộp' từ phần 5.3, áp dụng cho FLUID-ICU.</a:t>
+              <a:t>Chấm cộng hộp cho FLUID-ICU: trung vị SOFA 6 so với 8, thấy được từng người bệnh.</a:t>
             </a:r>
           </a:p>
           <a:p>
             <a:r>
               <a:rPr lang="en-US" sz="1400" b="0" dirty="0"/>
-              <a:t>Điểm SOFA lúc vào: trung vị 6 (IQR 4 đến 8) ở nhóm cân bằng âm so với 8 (6 đến 10) ở nhóm cân bằng dương. Mỗi chấm là một người bệnh, nên người đọc thấy cả sự chồng lấp và sự dịch chuyển.</a:t>
+              <a:t>Hình này là bằng chứng trực quan của nhiễu do chỉ định.</a:t>
             </a:r>
           </a:p>
           <a:p>
             <a:r>
               <a:rPr lang="en-US" sz="1400" b="0" dirty="0"/>
-              <a:t>Riêng hình này là bằng chứng trực quan của nhiễu do chỉ định trong bộ dữ liệu.</a:t>
-            </a:r>
-          </a:p>
-          <a:p>
-            <a:r>
-              <a:rPr lang="en-US" sz="1400" b="0" dirty="0"/>
-              <a:t>Hỏi (mời hai ba người trả lời, bật micro): vì sao dùng biểu đồ hộp mà không dùng cột trung bình SOFA? Dự kiến: SOFA là điểm có phân phối lệch. Cột sẽ che độ phân tán và sự chồng lấp.</a:t>
+              <a:t>Hỏi: sao không dùng cột trung bình SOFA? Kỳ vọng: nó che mất độ phân tán và sự chồng lấn.</a:t>
             </a:r>
           </a:p>
         </p:txBody>
@@ -4349,25 +3737,19 @@
           <a:p>
             <a:r>
               <a:rPr lang="en-US" sz="1400" b="0" dirty="0"/>
-              <a:t>Ý chính: hình thời gian nằm viện ở phần 5.3 cũng đúng với FLUID-ICU.</a:t>
+              <a:t>Thời gian nằm ICU ở 439 người sống sót lệch phải: trung bình 7.5, trung vị 6.2 ngày.</a:t>
             </a:r>
           </a:p>
           <a:p>
             <a:r>
               <a:rPr lang="en-US" sz="1400" b="0" dirty="0"/>
-              <a:t>Thời gian nằm ICU ở 439 người sống bị lệch phải: vài ca nằm rất lâu kéo trung bình (7.5 ngày) lên trên trung vị (6.2 ngày). Ở tất cả người bệnh: trung bình 7.3, trung vị 6.0.</a:t>
+              <a:t>Q5 báo cáo trung vị (IQR), dùng Mann-Whitney và thang logarit trong mô hình.</a:t>
             </a:r>
           </a:p>
           <a:p>
             <a:r>
               <a:rPr lang="en-US" sz="1400" b="0" dirty="0"/>
-              <a:t>Câu hỏi 5 (Q5) là về kết cục này: báo cáo trung vị (IQR), so sánh bằng kiểm định Mann-Whitney và dùng thang log trong mô hình (Buổi 6).</a:t>
-            </a:r>
-          </a:p>
-          <a:p>
-            <a:r>
-              <a:rPr lang="en-US" sz="1400" b="0" dirty="0"/>
-              <a:t>Hỏi (mời hai ba người trả lời, bật micro): ai cần trang này nhất? Dự kiến: người chọn Q5 cho bản thảo, nhưng bản thảo nào cũng có ít nhất một biến lệch trong Bảng 1.</a:t>
+              <a:t>Bảng 1 nào cũng có ít nhất một biến lệch.</a:t>
             </a:r>
           </a:p>
         </p:txBody>
@@ -4448,49 +3830,25 @@
           <a:p>
             <a:r>
               <a:rPr lang="en-US" sz="1400" b="0" dirty="0"/>
-              <a:t>Ý chính: mọi biến số hoặc là một số đo được, hoặc là một phân loại được gán. Sau đó chia thêm một lần nữa.</a:t>
+              <a:t>Mỗi biến là một con số (liên tục, đếm) hoặc một nhóm (nhị phân, định danh, thứ bậc). Thời gian đến sự kiện: chỉ nhắc qua, sẽ quay lại ở Buổi 6.</a:t>
             </a:r>
           </a:p>
           <a:p>
             <a:r>
               <a:rPr lang="en-US" sz="1400" b="0" dirty="0"/>
-              <a:t>Số: liên tục (bất kỳ giá trị nào trên một thang đo: cân bằng dịch ml/kg, lactat, tuổi) hoặc đếm (số nguyên: số cơ quan bị suy).</a:t>
+              <a:t>Hiểu lầm: giới tính mã hóa 1/2 vẫn là biến phân nhóm.</a:t>
             </a:r>
           </a:p>
           <a:p>
             <a:r>
               <a:rPr lang="en-US" sz="1400" b="0" dirty="0"/>
-              <a:t>Phân loại: nhị phân (hai lựa chọn: tử vong có/không), định danh (nhiều nhóm không có thứ tự: nguồn nhiễm khuẩn) và thứ hạng (các nhóm có thứ tự: tổn thương thận cấp (AKI) giai đoạn 1 đến 3, đau nhẹ/vừa/nặng).</a:t>
+              <a:t>Mẹo: thu số liệu dạng số. Có thể chia nhóm tuổi sau, không thể làm ngược lại.</a:t>
             </a:r>
           </a:p>
           <a:p>
             <a:r>
               <a:rPr lang="en-US" sz="1400" b="0" dirty="0"/>
-              <a:t>Thời gian đến sự kiện (time-to-event, ở dòng giới thiệu) là loại đặc biệt: kết hợp bao lâu (thời gian đến tử vong) và có xảy ra không (tử vong, hoặc bị kiểm duyệt (censoring) ở ngày 28 nếu còn sống). Chỉ cần nhắc qua. Sẽ gặp lại nó với đường cong Kaplan-Meier và mô hình Cox ở Buổi 6 (6.3).</a:t>
-            </a:r>
-          </a:p>
-          <a:p>
-            <a:r>
-              <a:rPr lang="en-US" sz="1400" b="0" dirty="0"/>
-              <a:t>Quan niệm sai thường gặp: 'mã hóa bằng số thì là biến số'. Giới tính mã hóa 1/2 vẫn là biến phân loại. Giá trị trung bình 1.4 không có ý nghĩa gì.</a:t>
-            </a:r>
-          </a:p>
-          <a:p>
-            <a:r>
-              <a:rPr lang="en-US" sz="1400" b="0" dirty="0"/>
-              <a:t>Trò chơi phân loại nhanh: đọc tên một biến và mời một người nói loại của nó: thang điểm Glasgow (thứ hạng, dù hay được xử lý như số), nhịp tim (liên tục), thở máy có/không (nhị phân), nhóm máu (định danh), số ngày thở máy (đếm), thời gian đến khi rút ống (thời gian đến sự kiện).</a:t>
-            </a:r>
-          </a:p>
-          <a:p>
-            <a:r>
-              <a:rPr lang="en-US" sz="1400" b="0" dirty="0"/>
-              <a:t>Mẹo: hãy thu thập biến liên tục dưới dạng số bất cứ khi nào có thể. Có thể nhóm tuổi thành khoảng sau này, nhưng không bao giờ lấy lại được tuổi chính xác từ '60-69'.</a:t>
-            </a:r>
-          </a:p>
-          <a:p>
-            <a:r>
-              <a:rPr lang="en-US" sz="1400" b="0" dirty="0"/>
-              <a:t>Trang này thay hình sơ đồ cây trước đây bằng các thẻ chỉnh sửa được. Nội dung không đổi.</a:t>
+              <a:t>Thời gian: 3 phút.</a:t>
             </a:r>
           </a:p>
         </p:txBody>
@@ -4571,49 +3929,25 @@
           <a:p>
             <a:r>
               <a:rPr lang="en-US" sz="1400" b="0" dirty="0"/>
-              <a:t>Bài tập cả lớp, 10 phút (21:45 đến 21:55). Bài 6 trong phiếu bài tập Buổi 5. Đáp án mẫu trong Course/Solutions/s5_solutions.md.</a:t>
+              <a:t>Cả lớp, 10 phút (21:45-21:55). Bài 6. Đáp án: s5_solutions_VN.md.</a:t>
             </a:r>
           </a:p>
           <a:p>
             <a:r>
               <a:rPr lang="en-US" sz="1400" b="0" dirty="0"/>
-              <a:t>Chia sẻ Bảng 1 từ gói kết quả Q1 lên màn hình. Cả năm gói đều có cùng Bảng 1 theo nhóm cân bằng dịch (gói Q5 có thêm bảng cho người sống).</a:t>
+              <a:t>Thăm dò cách tóm tắt (tuổi: trung bình, SOFA: trung vị, vận mạch: n %). Hỏi khác biệt lớn nhất: mức độ nặng.</a:t>
             </a:r>
           </a:p>
           <a:p>
             <a:r>
               <a:rPr lang="en-US" sz="1400" b="0" dirty="0"/>
-              <a:t>Bình chọn (2 phút): tuổi = trung bình (SD), đối xứng. SOFA = trung vị (IQR), điểm lệch. Vận mạch = n (%), nhị phân.</a:t>
+              <a:t>Cùng viết hai câu, ví dụ 'Trong 620 người bệnh, 618 có cân bằng ngày 3 và 373 (60.4%) có cân bằng dương. Nhóm này nặng hơn (trung vị SOFA 8 so với 6, vận mạch 55.0% so với 24.9%).'</a:t>
             </a:r>
           </a:p>
           <a:p>
             <a:r>
               <a:rPr lang="en-US" sz="1400" b="0" dirty="0"/>
-              <a:t>Mời hai ba người trả lời (3 phút): khác biệt lớn nhất = mức độ nặng (SOFA, vận mạch, thở máy). Có người sẽ thấy suy tim đi theo chiều ngược lại: bác sĩ truyền ít dịch hơn cho người bệnh suy tim.</a:t>
-            </a:r>
-          </a:p>
-          <a:p>
-            <a:r>
-              <a:rPr lang="en-US" sz="1400" b="0" dirty="0"/>
-              <a:t>Cùng viết (4 phút), gõ vào tài liệu chia sẻ: 'Trong 620 người bệnh tham gia, 618 người tính được cân bằng dịch ngày 3, 373 (60.4%) có cân bằng dương. Người bệnh có cân bằng dương nặng hơn lúc vào (SOFA trung vị 8 so với 6, vận mạch 55.0% so với 24.9%, thở máy 57.9% so với 39.6%).'</a:t>
-            </a:r>
-          </a:p>
-          <a:p>
-            <a:r>
-              <a:rPr lang="en-US" sz="1400" b="0" dirty="0"/>
-              <a:t>Q2 đến Q5 (1 phút): cùng người bệnh nên cùng Bảng 1. Q5 thêm bảng chỉ cho người sống (n = 439).</a:t>
-            </a:r>
-          </a:p>
-          <a:p>
-            <a:r>
-              <a:rPr lang="en-US" sz="1400" b="0" dirty="0"/>
-              <a:t>Lắng nghe: cách tóm tắt đúng (trung bình hay trung vị), không diễn giải 'ý nghĩa thống kê' trong Bảng 1, và nhận ra mức độ nặng khác nhau giữa các nhóm.</a:t>
-            </a:r>
-          </a:p>
-          <a:p>
-            <a:r>
-              <a:rPr lang="en-US" sz="1400" b="0" dirty="0"/>
-              <a:t>Các câu này đưa thẳng vào phần Kết quả trong bản thảo của mỗi học viên (Buổi 7).</a:t>
+              <a:t>Hai câu này là phần mở đầu của một phần Kết quả.</a:t>
             </a:r>
           </a:p>
         </p:txBody>
@@ -4694,43 +4028,19 @@
           <a:p>
             <a:r>
               <a:rPr lang="en-US" sz="1400" b="0" dirty="0"/>
-              <a:t>Chiếu 1 phút trước khi giảng viên bắt đầu làm mẫu, để học viên thấy mức độ mong đợi.</a:t>
+              <a:t>Chiếu 1 phút trước khi làm mẫu để học viên thấy mức yêu cầu.</a:t>
             </a:r>
           </a:p>
           <a:p>
             <a:r>
               <a:rPr lang="en-US" sz="1400" b="0" dirty="0"/>
-              <a:t>Bảng biến số: kết cục chính, phơi nhiễm (hoặc can thiệp), 3-5 yếu tố gây nhiễu, mỗi biến kèm loại. Bảng này dẫn dắt mọi thứ khác.</a:t>
+              <a:t>Bảng biến số làm trước: nó quyết định CRF, từ điển dữ liệu và phân tích.</a:t>
             </a:r>
           </a:p>
           <a:p>
             <a:r>
               <a:rPr lang="en-US" sz="1400" b="0" dirty="0"/>
-              <a:t>CRF thu gọn: 6 đến 10 mục thu thập đúng các biến đó, có đơn vị, thời điểm và lựa chọn 'không rõ' (như ví dụ minh họa).</a:t>
-            </a:r>
-          </a:p>
-          <a:p>
-            <a:r>
-              <a:rPr lang="en-US" sz="1400" b="0" dirty="0"/>
-              <a:t>Từ điển dữ liệu: 3 đến 5 dòng với tên biến ngắn, nhãn, loại, đơn vị hoặc mã, và giá trị cho phép.</a:t>
-            </a:r>
-          </a:p>
-          <a:p>
-            <a:r>
-              <a:rPr lang="en-US" sz="1400" b="0" dirty="0"/>
-              <a:t>Kế hoạch quản lý dữ liệu: một hai câu: EDC (thu thập dữ liệu điện tử) hoặc phiếu giấy với nhập liệu kép, mã số nghiên cứu với sổ liên kết khóa riêng, nhật ký thay đổi, sao lưu, và tuyên bố chia sẻ dữ liệu trong phiếu đồng ý.</a:t>
-            </a:r>
-          </a:p>
-          <a:p>
-            <a:r>
-              <a:rPr lang="en-US" sz="1400" b="0" dirty="0"/>
-              <a:t>Mỗi học viên viết phần này cho câu hỏi nghiên cứu của chính mình (đề cương của mình), không phải cho FLUID-ICU.</a:t>
-            </a:r>
-          </a:p>
-          <a:p>
-            <a:r>
-              <a:rPr lang="en-US" sz="1400" b="0" dirty="0"/>
-              <a:t>Thứ Bảy tuần sau (Buổi 6) đề cương được bổ sung cỡ mẫu, kế hoạch phân tích và kế hoạch xử lý dữ liệu thiếu.</a:t>
+              <a:t>Mỗi học viên viết phần này cho đề cương của mình, không phải cho FLUID-ICU.</a:t>
             </a:r>
           </a:p>
         </p:txBody>
@@ -4811,43 +4121,19 @@
           <a:p>
             <a:r>
               <a:rPr lang="en-US" sz="1400" b="0" dirty="0"/>
-              <a:t>Xây dựng đề cương 5: 30 phút (21:55 đến 22:25). Mẫu: Course/Templates/Research_Proposal_Template.docx (đã gửi trước Buổi 1). Phiếu bài tập: Bài 8 trong phiếu bài tập Buổi 5, có cùng các tiêu đề.</a:t>
+              <a:t>Xây dựng đề cương 5, 30 phút (21:55-22:25). Mẫu: Research_Proposal_Template_VN.docx. Phiếu: Bài 8.</a:t>
             </a:r>
           </a:p>
           <a:p>
             <a:r>
               <a:rPr lang="en-US" sz="1400" b="0" dirty="0"/>
-              <a:t>Làm mẫu trực tiếp (18 phút) trên ví dụ xuyên suốt, gõ vào một bản sao của mẫu đề cương trên màn hình chia sẻ: bảng biến số (5 phút), CRF thu gọn (5 phút), các dòng từ điển dữ liệu kèm một quy tắc kiểm tra (4 phút), kế hoạch quản lý dữ liệu (4 phút). Mời từng người gợi ý trong lúc làm.</a:t>
+              <a:t>Làm mẫu trực tiếp (18 phút): bảng biến số, mini-CRF, các dòng từ điển dữ liệu, kế hoạch quản lý dữ liệu. Sau đó 10 phút học viên làm bảng biến số của mình, 2 phút hỏi đáp.</a:t>
             </a:r>
           </a:p>
           <a:p>
             <a:r>
               <a:rPr lang="en-US" sz="1400" b="0" dirty="0"/>
-              <a:t>Thời gian làm riêng (10 phút): mỗi người tự viết bảng biến số của mình (có thể tắt camera). Sau đó 2 phút hỏi đáp qua khung chat.</a:t>
-            </a:r>
-          </a:p>
-          <a:p>
-            <a:r>
-              <a:rPr lang="en-US" sz="1400" b="0" dirty="0"/>
-              <a:t>Dùng từ điển dữ liệu FLUID-ICU làm mẫu: học viên vừa thấy một từ điển thật trông như thế nào.</a:t>
-            </a:r>
-          </a:p>
-          <a:p>
-            <a:r>
-              <a:rPr lang="en-US" sz="1400" b="0" dirty="0"/>
-              <a:t>Vấn đề thường gặp cần nhắc khi làm mẫu: quá nhiều mục CRF (giữ tối đa 10). 'Yếu tố gây nhiễu' thực ra là kết cục. Tên và mã số trong cùng một tệp. Không có kế hoạch sao lưu.</a:t>
-            </a:r>
-          </a:p>
-          <a:p>
-            <a:r>
-              <a:rPr lang="en-US" sz="1400" b="0" dirty="0"/>
-              <a:t>Về nhà: hoàn thành CRF thu gọn, các dòng từ điển dữ liệu và kế hoạch quản lý dữ liệu trong mẫu của mình trước Buổi 6.</a:t>
-            </a:r>
-          </a:p>
-          <a:p>
-            <a:r>
-              <a:rPr lang="en-US" sz="1400" b="0" dirty="0"/>
-              <a:t>Đúng 22:25, dừng để tổng kết.</a:t>
+              <a:t>Chú ý: quá nhiều mục CRF, kết cục bị liệt kê như biến nhiễu, tên người bệnh trong tệp dữ liệu.</a:t>
             </a:r>
           </a:p>
         </p:txBody>
@@ -4928,37 +4214,13 @@
           <a:p>
             <a:r>
               <a:rPr lang="en-US" sz="1400" b="0" dirty="0"/>
-              <a:t>Từ khóa của buổi học (2 phút). Chỉ vào từng từ và mời một người định nghĩa trong một câu, bật micro. Sửa nhẹ nhàng.</a:t>
+              <a:t>Từ khóa (2 phút). Chỉ vào một từ, mời một người định nghĩa trong một dòng, sửa nhẹ nhàng.</a:t>
             </a:r>
           </a:p>
           <a:p>
             <a:r>
               <a:rPr lang="en-US" sz="1400" b="0" dirty="0"/>
-              <a:t>Loại biến số: số đo hay phân loại, và các loại con. CRF (phiếu thu thập dữ liệu): phiếu dùng để ghi dữ liệu. Từ điển dữ liệu: mỗi biến một dòng, có loại, đơn vị/mã và giá trị cho phép.</a:t>
-            </a:r>
-          </a:p>
-          <a:p>
-            <a:r>
-              <a:rPr lang="en-US" sz="1400" b="0" dirty="0"/>
-              <a:t>Quy tắc kiểm tra: quy tắc đánh dấu giá trị vô lý (khoảng giá trị, nhất quán, logic, đầy đủ). Nhật ký thay đổi dữ liệu (audit trail): ghi lại ai đổi gì, khi nào, vì sao. Nhật ký làm sạch dữ liệu: danh sách mọi chỉnh sửa trên dữ liệu thô (FLUID-ICU).</a:t>
-            </a:r>
-          </a:p>
-          <a:p>
-            <a:r>
-              <a:rPr lang="en-US" sz="1400" b="0" dirty="0"/>
-              <a:t>Trung vị (IQR) cho dữ liệu lệch, trung bình (SD) cho dữ liệu đối xứng. Phân phối lệch = có đuôi dài.</a:t>
-            </a:r>
-          </a:p>
-          <a:p>
-            <a:r>
-              <a:rPr lang="en-US" sz="1400" b="0" dirty="0"/>
-              <a:t>Bảng 1: đặc điểm nền theo nhóm. Chấm + hộp: cho thấy từng người bệnh, n (%): cách báo cáo biến phân loại.</a:t>
-            </a:r>
-          </a:p>
-          <a:p>
-            <a:r>
-              <a:rPr lang="en-US" sz="1400" b="0" dirty="0"/>
-              <a:t>Mọi thuật ngữ có trong bảng thuật ngữ Anh-Việt ở Course/References.</a:t>
+              <a:t>Mọi thuật ngữ đều có trong bảng thuật ngữ Anh-Việt.</a:t>
             </a:r>
           </a:p>
         </p:txBody>
@@ -5039,31 +4301,13 @@
           <a:p>
             <a:r>
               <a:rPr lang="en-US" sz="1400" b="0" dirty="0"/>
-              <a:t>Tóm tắt buổi học (2 phút). Mời ba người tình nguyện (nút giơ tay) cho một ví dụ hôm nay cho mỗi thẻ.</a:t>
+              <a:t>Tóm tắt (2 phút). Mời ba người tình nguyện nêu một ví dụ cho mỗi thẻ.</a:t>
             </a:r>
           </a:p>
           <a:p>
             <a:r>
               <a:rPr lang="en-US" sz="1400" b="0" dirty="0"/>
-              <a:t>Thiết kế dữ liệu: mục CRF minh họa, từ điển dữ liệu, các quy tắc kiểm tra.</a:t>
-            </a:r>
-          </a:p>
-          <a:p>
-            <a:r>
-              <a:rPr lang="en-US" sz="1400" b="0" dirty="0"/>
-              <a:t>Giữ dữ liệu sạch: FLUID-ICU cho thấy dữ liệu thật trông thế nào trước khi làm sạch và vì sao nhật ký làm sạch quan trọng.</a:t>
-            </a:r>
-          </a:p>
-          <a:p>
-            <a:r>
-              <a:rPr lang="en-US" sz="1400" b="0" dirty="0"/>
-              <a:t>Mô tả trung thực: trung vị hay trung bình, chấm thay cho biểu đồ thuốc nổ, Bảng 1 người đọc hiểu được mà không cần đọc phần chữ.</a:t>
-            </a:r>
-          </a:p>
-          <a:p>
-            <a:r>
-              <a:rPr lang="en-US" sz="1400" b="0" dirty="0"/>
-              <a:t>Thứ Bảy tuần sau (Buổi 6): từ mẫu đến câu trả lời: khoảng tin cậy, giá trị p, kiểm định, hồi quy, sống còn và dữ liệu thiếu, tất cả chạy trực tiếp trên FLUID-ICU.</a:t>
+              <a:t>Thứ Bảy tuần sau: khoảng tin cậy, giá trị p, kiểm định, hồi quy, sống còn và dữ liệu thiếu, chạy trực tiếp trên FLUID-ICU.</a:t>
             </a:r>
           </a:p>
         </p:txBody>
@@ -5144,25 +4388,19 @@
           <a:p>
             <a:r>
               <a:rPr lang="en-US" sz="1400" b="0" dirty="0"/>
-              <a:t>Tổng kết: 5 phút (22:25 đến 22:30), gồm cả trang từ khóa và tóm tắt.</a:t>
+              <a:t>Tổng kết (22:25-22:30).</a:t>
             </a:r>
           </a:p>
           <a:p>
             <a:r>
               <a:rPr lang="en-US" sz="1400" b="0" dirty="0"/>
-              <a:t>Câu hỏi cuối buổi trong khung chat: nêu một lỗi chất lượng dữ liệu tìm thấy trong dữ liệu thô FLUID-ICU và cách làm sạch đã sửa nó. Mục đích: kiểm tra học viên đã hiểu ý chính hôm nay (làm sạch bằng script và nhật ký, không bao giờ bằng tay). Giảng viên đọc các câu trả lời trước Buổi 6 và mở đầu Buổi 6 bằng hai ba câu trong số đó.</a:t>
+              <a:t>Câu hỏi cuối buổi: một lỗi chất lượng dữ liệu trong FLUID-ICU và cách sửa. Đọc câu trả lời và mở đầu Buổi 6 bằng hai hoặc ba câu.</a:t>
             </a:r>
           </a:p>
           <a:p>
             <a:r>
               <a:rPr lang="en-US" sz="1400" b="0" dirty="0"/>
-              <a:t>Về nhà: hoàn thành CRF thu gọn, các dòng từ điển dữ liệu và kế hoạch quản lý dữ liệu trong đề cương của mình (Phần 3, nửa đầu). Chọn một trong năm câu hỏi FLUID-ICU cho bản thảo, báo cho giảng viên, và đọc gói kết quả của câu đó (Bảng 1, biểu đồ). Tùy chọn: Bài 1, 3, 4 và 5 trong phiếu bài tập Buổi 5.</a:t>
-            </a:r>
-          </a:p>
-          <a:p>
-            <a:r>
-              <a:rPr lang="en-US" sz="1400" b="0" dirty="0"/>
-              <a:t>Cảm ơn cả lớp: hôm nay có nhiều từ mới. Buổi 6 sẽ dựa trực tiếp trên nền này.</a:t>
+              <a:t>Về nhà: mini-CRF, các dòng từ điển dữ liệu và kế hoạch quản lý dữ liệu cho đề cương của mình. Không bắt buộc: Bài 1, 3, 4 và 5.</a:t>
             </a:r>
           </a:p>
         </p:txBody>
@@ -5243,7 +4481,7 @@
           <a:p>
             <a:r>
               <a:rPr lang="en-US" sz="1400" b="0" dirty="0"/>
-              <a:t>Bổ sung: các trang sau đây là tùy chọn. Dùng nếu lớp đi nhanh hơn dự kiến, hoặc giới thiệu cho học viên tự học (có trong bộ tài liệu phát).</a:t>
+              <a:t>Trang bổ sung: không bắt buộc, dùng khi lớp đi nhanh hoặc để tự học.</a:t>
             </a:r>
           </a:p>
         </p:txBody>
@@ -5324,43 +4562,13 @@
           <a:p>
             <a:r>
               <a:rPr lang="en-US" sz="1400" b="0" dirty="0"/>
-              <a:t>Bổ sung: Ý chính: bốn thói quen tốn ít công nhưng cứu được nghiên cứu.</a:t>
+              <a:t>Bổ sung. Bốn thói quen ít tốn kém: dùng mã thay cho chữ tự do, tệp thô chỉ đọc kèm các bản sao có ngày, sao lưu 3-2-1, tuyên bố chia sẻ dữ liệu được lên kế hoạch ngay trong phiếu đồng ý.</a:t>
             </a:r>
           </a:p>
           <a:p>
             <a:r>
               <a:rPr lang="en-US" sz="1400" b="0" dirty="0"/>
-              <a:t>Mã hóa: lưu các biến phân loại bằng mã số được định nghĩa trong từ điển dữ liệu (1 = phổi, 2 = tiết niệu...). Mỗi người bệnh có một mã nghiên cứu. Tên và số hồ sơ nằm trong một sổ liên kết riêng, được khóa.</a:t>
-            </a:r>
-          </a:p>
-          <a:p>
-            <a:r>
-              <a:rPr lang="en-US" sz="1400" b="0" dirty="0"/>
-              <a:t>Phiên bản: tệp dữ liệu gốc không bao giờ bị sửa. Đặt chế độ chỉ đọc. Mỗi bước làm sạch tạo một bản sao mới có ghi ngày (data_2026-03-12_v2) và một ghi chú ngắn về thay đổi. Nhờ đó mọi kết quả đều truy ngược được.</a:t>
-            </a:r>
-          </a:p>
-          <a:p>
-            <a:r>
-              <a:rPr lang="en-US" sz="1400" b="0" dirty="0"/>
-              <a:t>Sao lưu: quy tắc 3-2-1: ba bản, trên hai loại phương tiện, một bản ở nơi khác, được mã hóa. Bản sao lưu chưa từng thử khôi phục chỉ là một hy vọng.</a:t>
-            </a:r>
-          </a:p>
-          <a:p>
-            <a:r>
-              <a:rPr lang="en-US" sz="1400" b="0" dirty="0"/>
-              <a:t>Tuyên bố chia sẻ dữ liệu: hầu hết tạp chí hiện nay yêu cầu (Buổi 7-8). Ví dụ: 'Dữ liệu đã khử định danh và từ điển dữ liệu sẽ được cung cấp bởi tác giả liên hệ khi có yêu cầu hợp lý sau khi công bố, với điều kiện được hội đồng đạo đức chấp thuận.' Hãy đưa nội dung này vào phiếu đồng ý và đề cương ngay bây giờ, nếu không sau này có thể không được phép chia sẻ.</a:t>
-            </a:r>
-          </a:p>
-          <a:p>
-            <a:r>
-              <a:rPr lang="en-US" sz="1400" b="0" dirty="0"/>
-              <a:t>Hỏi: nếu máy tính xách tay của anh chị bị mất tối nay, nghiên cứu có còn không? Dự kiến: một khoảng lặng khó chịu. Tốt.</a:t>
-            </a:r>
-          </a:p>
-          <a:p>
-            <a:r>
-              <a:rPr lang="en-US" sz="1400" b="0" dirty="0"/>
-              <a:t>Thời lượng: 2 phút.</a:t>
+              <a:t>Hỏi: nếu tối nay máy tính của anh chị bị mất, nghiên cứu có còn không?</a:t>
             </a:r>
           </a:p>
         </p:txBody>
@@ -5441,43 +4649,13 @@
           <a:p>
             <a:r>
               <a:rPr lang="en-US" sz="1400" b="0" dirty="0"/>
-              <a:t>Bổ sung: Ý chính: ba kiểu bóp méo anh chị sẽ gặp trên poster, báo cáo và bài báo. Hàng trên gây hiểu nhầm, hàng dưới đã sửa.</a:t>
+              <a:t>Bổ sung. Hàng trên gây hiểu lầm, hàng dưới đã sửa: biểu đồ tròn 3-D, trục bị cắt (chênh 2 điểm trông như gấp ba), hai trục tung. Cột phải bắt đầu từ 0.</a:t>
             </a:r>
           </a:p>
           <a:p>
             <a:r>
               <a:rPr lang="en-US" sz="1400" b="0" dirty="0"/>
-              <a:t>Biểu đồ tròn 3-D: độ nghiêng làm các lát phía trước trông to hơn. Mắt người so sánh góc rất kém. Hỏi: lát nào lớn hơn, tiết niệu hay ổ bụng? Sau đó cho xem biểu đồ cột đã sắp xếp: 25% so với 20%, rõ ngay lập tức.</a:t>
-            </a:r>
-          </a:p>
-          <a:p>
-            <a:r>
-              <a:rPr lang="en-US" sz="1400" b="0" dirty="0"/>
-              <a:t>Trục bị cắt: trục tung bắt đầu từ 28.5%, nên khác biệt 2 điểm phần trăm về tử vong (31% so với 29%) trông như gấp ba. Biểu đồ cột phải bắt đầu từ 0. (Biểu đồ đường có thể phóng to, nhưng phải nói rõ.)</a:t>
-            </a:r>
-          </a:p>
-          <a:p>
-            <a:r>
-              <a:rPr lang="en-US" sz="1400" b="0" dirty="0"/>
-              <a:t>Hai trục tung: hai trục khác nhau do tác giả tự chọn tỷ lệ có thể làm hai đường cắt nhau ở bất kỳ đâu tác giả muốn, gợi ý 'vệ sinh tay tăng nên nhiễm khuẩn giảm'. Tốt hơn: hai khung dùng chung trục thời gian, và nhớ rằng tương quan không phải nhân quả (6.3).</a:t>
-            </a:r>
-          </a:p>
-          <a:p>
-            <a:r>
-              <a:rPr lang="en-US" sz="1400" b="0" dirty="0"/>
-              <a:t>Mọi dữ liệu ở đây là mô phỏng.</a:t>
-            </a:r>
-          </a:p>
-          <a:p>
-            <a:r>
-              <a:rPr lang="en-US" sz="1400" b="0" dirty="0"/>
-              <a:t>Hỏi: gần đây anh chị thấy trục bị cắt ở đâu? Dự kiến: bảng điều khiển của bệnh viện, quảng cáo dược phẩm, tin tức.</a:t>
-            </a:r>
-          </a:p>
-          <a:p>
-            <a:r>
-              <a:rPr lang="en-US" sz="1400" b="0" dirty="0"/>
-              <a:t>Thời lượng: 2 phút.</a:t>
+              <a:t>Hỏi: gần đây anh chị thấy trục bị cắt ở đâu?</a:t>
             </a:r>
           </a:p>
         </p:txBody>
@@ -5558,7 +4736,7 @@
           <a:p>
             <a:r>
               <a:rPr lang="en-US" sz="1400" b="0" dirty="0"/>
-              <a:t>Slide bản quyền. Để trên màn hình khi học viên rời phòng họp.</a:t>
+              <a:t>Để trên màn hình khi học viên rời phòng họp.</a:t>
             </a:r>
           </a:p>
         </p:txBody>
@@ -5639,49 +4817,19 @@
           <a:p>
             <a:r>
               <a:rPr lang="en-US" sz="1400" b="0" dirty="0"/>
-              <a:t>Kiểm tra nhanh (3 phút). Mở bình chọn cho từng biến với sáu lựa chọn (liên tục, đếm, nhị phân, định danh, thứ hạng, thời gian đến sự kiện), hoặc mỗi biến mời một người trả lời. Chỉ công bố khung đáp án sau mỗi lần bình chọn.</a:t>
+              <a:t>Kiểm tra (3 phút). Mỗi biến một cuộc thăm dò, sáu lựa chọn. Mở đáp án sau mỗi lần bình chọn.</a:t>
             </a:r>
           </a:p>
           <a:p>
             <a:r>
               <a:rPr lang="en-US" sz="1400" b="0" dirty="0"/>
-              <a:t>Nhịp tim: liên tục.</a:t>
+              <a:t>GCS: thứ bậc, thường được phân tích như số. Thời gian đến khi rút ống: thời gian đến sự kiện, vì một số người bệnh không bao giờ được rút ống.</a:t>
             </a:r>
           </a:p>
           <a:p>
             <a:r>
               <a:rPr lang="en-US" sz="1400" b="0" dirty="0"/>
-              <a:t>GCS: thứ hạng. Điểm có thứ tự với khoảng cách không đều, thường được phân tích như số, chấp nhận được nếu nói rõ.</a:t>
-            </a:r>
-          </a:p>
-          <a:p>
-            <a:r>
-              <a:rPr lang="en-US" sz="1400" b="0" dirty="0"/>
-              <a:t>Nhóm máu: định danh. Không có thứ tự.</a:t>
-            </a:r>
-          </a:p>
-          <a:p>
-            <a:r>
-              <a:rPr lang="en-US" sz="1400" b="0" dirty="0"/>
-              <a:t>Thở máy có/không: nhị phân.</a:t>
-            </a:r>
-          </a:p>
-          <a:p>
-            <a:r>
-              <a:rPr lang="en-US" sz="1400" b="0" dirty="0"/>
-              <a:t>Thời gian đến khi rút ống: thời gian đến sự kiện, vì có người bệnh không bao giờ được rút ống (tử vong hoặc chuyển đi) và phải được kiểm duyệt.</a:t>
-            </a:r>
-          </a:p>
-          <a:p>
-            <a:r>
-              <a:rPr lang="en-US" sz="1400" b="0" dirty="0"/>
-              <a:t>Nếu hơn một phần ba lớp sai GCS hoặc thời gian rút ống, quay lại trang trước một phút.</a:t>
-            </a:r>
-          </a:p>
-          <a:p>
-            <a:r>
-              <a:rPr lang="en-US" sz="1400" b="0" dirty="0"/>
-              <a:t>Vì sao quan trọng: loại biến quyết định ô trong CRF, cách tóm tắt (5.3) và kiểm định (Buổi 6).</a:t>
+              <a:t>Nếu một phần ba lớp sai, quay lại trang trước.</a:t>
             </a:r>
           </a:p>
         </p:txBody>
@@ -5762,49 +4910,19 @@
           <a:p>
             <a:r>
               <a:rPr lang="en-US" sz="1400" b="0" dirty="0"/>
-              <a:t>Ý chính: một mục CRF là tốt khi hai người khác nhau, cùng điền cho một người bệnh, sẽ ghi cùng một câu trả lời.</a:t>
-            </a:r>
-          </a:p>
-          <a:p>
-            <a:r>
-              <a:rPr lang="en-US" sz="1400" b="1" dirty="0"/>
-              <a:t>Đi qua phía bên trái và mời từng người 'chẩn đoán' từng lỗi trước khi anh chị đọc dòng chữ đỏ:</a:t>
+              <a:t>Một mục CRF tốt: hai người điền cho cùng một người bệnh sẽ ghi cùng một câu trả lời.</a:t>
             </a:r>
           </a:p>
           <a:p>
             <a:r>
               <a:rPr lang="en-US" sz="1400" b="0" dirty="0"/>
-              <a:t>Cân bằng dịch: không có đơn vị (ml? lít? ml/kg?), không có mốc thời gian (hôm nay? tích lũy?). Trong ví dụ xuyên suốt, chỉ riêng ô này đã quyết định kết cục chính của cả nghiên cứu.</a:t>
+              <a:t>Cho lớp chỉ ra lỗi của từng mục bên trái trước khi mở đáp án: không có đơn vị hay mốc thời gian, tuổi không gắn ngày, thiếu lựa chọn, hai ý kiến trong một câu.</a:t>
             </a:r>
           </a:p>
           <a:p>
             <a:r>
               <a:rPr lang="en-US" sz="1400" b="0" dirty="0"/>
-              <a:t>Tuổi: năm hay tháng, tính tại ngày nào? Tốt hơn: thu thập ngày sinh và ngày nhập viện, để máy tính tự tính tuổi.</a:t>
-            </a:r>
-          </a:p>
-          <a:p>
-            <a:r>
-              <a:rPr lang="en-US" sz="1400" b="0" dirty="0"/>
-              <a:t>Nguồn nhiễm khuẩn: lựa chọn chưa đủ (không có 'khác', không có 'không rõ') và không rõ được chọn một hay nhiều.</a:t>
-            </a:r>
-          </a:p>
-          <a:p>
-            <a:r>
-              <a:rPr lang="en-US" sz="1400" b="0" dirty="0"/>
-              <a:t>Dịch truyền có hiệu quả và người bệnh cải thiện: hai câu hỏi trong một, và cả hai đều là ý kiến chủ quan. Thay bằng số đo khách quan (lactat, huyết áp động mạch trung bình, liều vận mạch).</a:t>
-            </a:r>
-          </a:p>
-          <a:p>
-            <a:r>
-              <a:rPr lang="en-US" sz="1400" b="0" dirty="0"/>
-              <a:t>Bên phải: đơn vị và mốc thời gian nằm ngay trong câu hỏi, các ô cho từng chữ số kèm ô dấu +/- (cân bằng dịch có thể âm), định dạng ngày cố định, chọn một, có lựa chọn 'khác' và 'không rõ', thể hiện chữ số thập phân cho lactat.</a:t>
-            </a:r>
-          </a:p>
-          <a:p>
-            <a:r>
-              <a:rPr lang="en-US" sz="1400" b="0" dirty="0"/>
-              <a:t>Hỏi: để trống một ô thì có vấn đề gì? Dự kiến: không phân biệt được 'không làm', 'quên ghi' hay 'bằng không'. Vì thế cần thêm lựa chọn 'không rõ / không làm'.</a:t>
+              <a:t>Hỏi: để trống một ô thì sao? Kỳ vọng: 'không làm', 'quên' và 'bằng 0' trông giống nhau.</a:t>
             </a:r>
           </a:p>
         </p:txBody>
@@ -5885,49 +5003,19 @@
           <a:p>
             <a:r>
               <a:rPr lang="en-US" sz="1400" b="0" dirty="0"/>
-              <a:t>Ví dụ minh họa (3 phút): cùng xây dựng một mục CRF, chính là phơi nhiễm chính của bộ dữ liệu khóa học.</a:t>
+              <a:t>Ví dụ minh họa (3 phút): biến phơi nhiễm của FLUID-ICU qua năm quyết định.</a:t>
             </a:r>
           </a:p>
           <a:p>
             <a:r>
               <a:rPr lang="en-US" sz="1400" b="0" dirty="0"/>
-              <a:t>Cái gì: cân bằng dịch tích lũy = tổng dịch vào (dịch tinh thể, dịch keo, máu, dịch pha thuốc, nuôi ăn qua ống) trừ tổng dịch ra (nước tiểu, dẫn lưu, mất dịch). Quyết định có tính mất nước không nhận biết hay không. Ghi vào từ điển dữ liệu.</a:t>
+              <a:t>Cái gì: tổng dịch vào trừ tổng dịch ra. Khi nào: từ lúc vào ICU đến hết ngày 3. Đơn vị: ml/kg cân nặng lúc vào. Dạng: số có dấu +/-. Thiếu: ô 'không ghi nhận'.</a:t>
             </a:r>
           </a:p>
           <a:p>
             <a:r>
               <a:rPr lang="en-US" sz="1400" b="0" dirty="0"/>
-              <a:t>Khi nào: từ lúc vào ICU đến hết ngày 3 (định nghĩa của FLUID-ICU). Mốc thời gian khác cho ra một biến khác.</a:t>
-            </a:r>
-          </a:p>
-          <a:p>
-            <a:r>
-              <a:rPr lang="en-US" sz="1400" b="0" dirty="0"/>
-              <a:t>Đơn vị: ml/kg cân nặng lúc vào, để so sánh được người bệnh có thể trạng khác nhau. Nghĩa là cân nặng cũng phải có trong CRF.</a:t>
-            </a:r>
-          </a:p>
-          <a:p>
-            <a:r>
-              <a:rPr lang="en-US" sz="1400" b="0" dirty="0"/>
-              <a:t>Định dạng: số có dấu với các ô chữ số. Cân bằng dịch có thể âm.</a:t>
-            </a:r>
-          </a:p>
-          <a:p>
-            <a:r>
-              <a:rPr lang="en-US" sz="1400" b="0" dirty="0"/>
-              <a:t>Thiếu: ô 'không ghi nhận' và lý do, để ô trống luôn có nghĩa là 'quên'.</a:t>
-            </a:r>
-          </a:p>
-          <a:p>
-            <a:r>
-              <a:rPr lang="en-US" sz="1400" b="0" dirty="0"/>
-              <a:t>Hỏi (mời hai ba người trả lời, bật micro): vì đơn vị này, CRF bắt buộc phải có thêm mục nào? Dự kiến: cân nặng lúc vào (và cách đo).</a:t>
-            </a:r>
-          </a:p>
-          <a:p>
-            <a:r>
-              <a:rPr lang="en-US" sz="1400" b="0" dirty="0"/>
-              <a:t>Ở phần xây dựng đề cương cuối buổi, giảng viên làm mẫu đúng các bước này cho ví dụ xuyên suốt, rồi anh chị làm cho biến số của mình.</a:t>
+              <a:t>Hỏi: CRF giờ phải có thêm mục nào? Kỳ vọng: cân nặng lúc vào ICU.</a:t>
             </a:r>
           </a:p>
         </p:txBody>
@@ -6008,49 +5096,19 @@
           <a:p>
             <a:r>
               <a:rPr lang="en-US" sz="1400" b="0" dirty="0"/>
-              <a:t>Ý chính: năm nguyên tắc giải quyết phần lớn vấn đề của CRF. Đọc tiêu đề từng thẻ, cho một ví dụ mỗi thẻ.</a:t>
+              <a:t>Đọc tên năm thẻ, mỗi thẻ một ví dụ.</a:t>
             </a:r>
           </a:p>
           <a:p>
             <a:r>
               <a:rPr lang="en-US" sz="1400" b="0" dirty="0"/>
-              <a:t>Chỉ thu thập cái cần: mỗi mục phải trả lời một mục tiêu, mô tả quần thể, hoặc dùng để hiệu chỉnh một yếu tố gây nhiễu. Các mục 'biết thì tốt' làm phiếu dài và bị bỏ sót.</a:t>
+              <a:t>Lỗi thường gặp: sửa phiếu khi đã bắt đầu thu thập dữ liệu sẽ tạo ra hai bộ dữ liệu khác nhau.</a:t>
             </a:r>
           </a:p>
           <a:p>
             <a:r>
               <a:rPr lang="en-US" sz="1400" b="0" dirty="0"/>
-              <a:t>Một câu, một đáp án: tránh câu hỏi kép. Ưu tiên giá trị đo được hơn ý kiến.</a:t>
-            </a:r>
-          </a:p>
-          <a:p>
-            <a:r>
-              <a:rPr lang="en-US" sz="1400" b="0" dirty="0"/>
-              <a:t>Đơn vị và thời điểm: viết đơn vị và mốc thời gian ngay trong câu hỏi.</a:t>
-            </a:r>
-          </a:p>
-          <a:p>
-            <a:r>
-              <a:rPr lang="en-US" sz="1400" b="0" dirty="0"/>
-              <a:t>Câu trả lời đóng: ô đánh dấu có mã hóa giúp điền và phân tích nhanh hơn văn bản tự do. Luôn có 'khác (ghi rõ)' và 'không rõ / không làm'.</a:t>
-            </a:r>
-          </a:p>
-          <a:p>
-            <a:r>
-              <a:rPr lang="en-US" sz="1400" b="0" dirty="0"/>
-              <a:t>Thử nghiệm trước: đưa phiếu cho hai đồng nghiệp điền cho cùng năm người bệnh rồi so sánh. Chỗ nào không khớp là chỗ cần viết lại.</a:t>
-            </a:r>
-          </a:p>
-          <a:p>
-            <a:r>
-              <a:rPr lang="en-US" sz="1400" b="0" dirty="0"/>
-              <a:t>Lỗi thường gặp: thiết kế phiếu sau khi đã bắt đầu thu thập. Đổi phiếu giữa chừng tạo ra hai bộ dữ liệu khác nhau.</a:t>
-            </a:r>
-          </a:p>
-          <a:p>
-            <a:r>
-              <a:rPr lang="en-US" sz="1400" b="0" dirty="0"/>
-              <a:t>Hỏi (mời hai ba người trả lời, bật micro): nguyên tắc nào hay bị vi phạm nhất trong các phiếu ở khoa anh chị? Dự kiến: quá dài, không có đơn vị, văn bản tự do khắp nơi.</a:t>
+              <a:t>Hỏi: quy tắc nào hay bị vi phạm nhất ở khoa anh chị? Kỳ vọng: phiếu quá dài, không có đơn vị, toàn chữ tự do.</a:t>
             </a:r>
           </a:p>
         </p:txBody>
@@ -6131,49 +5189,19 @@
           <a:p>
             <a:r>
               <a:rPr lang="en-US" sz="1400" b="0" dirty="0"/>
-              <a:t>Ý chính: từ điển dữ liệu (data dictionary, còn gọi là codebook) giải thích từng cột trong bộ dữ liệu: tên ngắn, ý nghĩa, loại biến, đơn vị hoặc mã, và giá trị cho phép.</a:t>
+              <a:t>Từ điển dữ liệu: mỗi biến một dòng, để ai cũng hiểu dữ liệu mà không cần gọi điện hỏi anh chị.</a:t>
             </a:r>
           </a:p>
           <a:p>
             <a:r>
               <a:rPr lang="en-US" sz="1400" b="0" dirty="0"/>
-              <a:t>Vì sao quan trọng: sáu tháng sau sẽ không ai nhớ giới tính 1 là nam hay nữ, hay fb_d5 tính bằng ml hay ml/kg. Nhà thống kê, đồng tác giả hay người phản biện phải hiểu được dữ liệu mà không cần gọi điện hỏi anh chị.</a:t>
+              <a:t>Đọc to dòng fb_d5. Khoảng giá trị cho phép trở thành phép kiểm tra khoảng ở trang sau. Lưu ý mã 9 là 'không rõ'.</a:t>
             </a:r>
           </a:p>
           <a:p>
             <a:r>
               <a:rPr lang="en-US" sz="1400" b="0" dirty="0"/>
-              <a:t>Đọc to một dòng: fb_d5 là cân bằng dịch tích lũy tại ngày 5, biến liên tục, đơn vị ml/kg, cho phép từ -100 đến 300. Khoảng cho phép này trở thành một phép kiểm tra khoảng giá trị tự động ở trang sau.</a:t>
-            </a:r>
-          </a:p>
-          <a:p>
-            <a:r>
-              <a:rPr lang="en-US" sz="1400" b="0" dirty="0"/>
-              <a:t>Chú ý mã 'không rõ' (9) cho nguồn nhiễm khuẩn. Thiếu và không rõ phải được ghi lại, không để trống.</a:t>
-            </a:r>
-          </a:p>
-          <a:p>
-            <a:r>
-              <a:rPr lang="en-US" sz="1400" b="0" dirty="0"/>
-              <a:t>Mẹo: tên biến ngắn, không dấu cách, không dấu tiếng Việt (fb_d5, không phải 'Cân bằng dịch ngày 5') dùng được trong mọi phần mềm.</a:t>
-            </a:r>
-          </a:p>
-          <a:p>
-            <a:r>
-              <a:rPr lang="en-US" sz="1400" b="0" dirty="0"/>
-              <a:t>Phần xây dựng đề cương hôm nay yêu cầu anh chị viết 3 đến 5 dòng như thế này cho nghiên cứu của chính mình (Bài 8 trong phiếu bài tập Buổi 5).</a:t>
-            </a:r>
-          </a:p>
-          <a:p>
-            <a:r>
-              <a:rPr lang="en-US" sz="1400" b="0" dirty="0"/>
-              <a:t>Hỏi (mời hai ba người trả lời, bật micro): ai có từ điển dữ liệu cho một cuộc đánh giá (audit) mình từng làm? Thường rất ít. Điều đó bình thường và dễ khắc phục.</a:t>
-            </a:r>
-          </a:p>
-          <a:p>
-            <a:r>
-              <a:rPr lang="en-US" sz="1400" b="0" dirty="0"/>
-              <a:t>Bảng này chỉnh sửa được: có thể sửa một dòng ngay trên lớp nếu học viên gợi ý cách viết tốt hơn.</a:t>
+              <a:t>Học viên viết 3 đến 5 dòng như vậy ở Phần xây dựng đề cương 5.</a:t>
             </a:r>
           </a:p>
         </p:txBody>
@@ -16585,7 +15613,7 @@
                 <a:latin typeface="Arial"/>
                 <a:cs typeface="Arial"/>
               </a:rPr>
-              <a:t>Course/Data/cleaning_log.md: mỗi thay đổi trên dữ liệu thô là một dòng.</a:t>
+              <a:t>cleaning_log.md: mỗi thay đổi trên dữ liệu thô là một dòng.</a:t>
             </a:r>
           </a:p>
         </p:txBody>
@@ -17390,7 +16418,7 @@
                 <a:latin typeface="Arial"/>
                 <a:cs typeface="Arial"/>
               </a:rPr>
-              <a:t>Trên lớp, cả lớp cùng đi qua năm câu. Với bản thảo, mỗi anh chị chọn một câu.</a:t>
+              <a:t>Trên lớp, cả lớp cùng đi qua năm câu. Cuối Buổi 6, mỗi anh chị chọn một câu.</a:t>
             </a:r>
           </a:p>
         </p:txBody>
@@ -18031,7 +17059,7 @@
                 <a:latin typeface="Arial"/>
                 <a:cs typeface="Arial"/>
               </a:rPr>
-              <a:t>Chúng tôi đưa kết quả. Anh chị viết bài về câu hỏi mình chọn.</a:t>
+              <a:t>Chúng tôi đưa kết quả. Anh chị viết phần Kết quả cho câu hỏi mình chọn.</a:t>
             </a:r>
           </a:p>
         </p:txBody>
@@ -18319,7 +17347,7 @@
                 <a:latin typeface="Arial"/>
                 <a:cs typeface="Arial"/>
               </a:rPr>
-              <a:t>Mở gói kết quả Q1 (tệp PDF gửi trước buổi học), trang 1</a:t>
+              <a:t>Mở gói kết quả Q1 (Results_Pack_Q1_VN.pdf, gửi qua email), trang 1</a:t>
             </a:r>
           </a:p>
           <a:p>
@@ -30883,7 +29911,7 @@
                 <a:latin typeface="Arial"/>
                 <a:cs typeface="Arial"/>
               </a:rPr>
-              <a:t>Chọn một câu hỏi (Q1 đến Q5) cho bản thảo và đọc gói kết quả của câu đó trước Buổi 6</a:t>
+              <a:t>Xem qua năm gói kết quả. Anh chị chọn câu hỏi vào cuối Buổi 6</a:t>
             </a:r>
           </a:p>
         </p:txBody>
